--- a/docs/ppt/Volcano_KubeCon_NA_2026.pptx
+++ b/docs/ppt/Volcano_KubeCon_NA_2026.pptx
@@ -22,6 +22,11 @@
     <p:sldId id="270" r:id="rId22"/>
     <p:sldId id="271" r:id="rId23"/>
     <p:sldId id="272" r:id="rId24"/>
+    <p:sldId id="273" r:id="rId25"/>
+    <p:sldId id="274" r:id="rId26"/>
+    <p:sldId id="275" r:id="rId27"/>
+    <p:sldId id="276" r:id="rId28"/>
+    <p:sldId id="277" r:id="rId29"/>
   </p:sldIdLst>
   <p:sldSz cx="12191999" cy="6858000" type="screen4x3"/>
   <p:notesSz cx="6858000" cy="9144000"/>
@@ -518,35 +523,7 @@
           <a:lstStyle/>
           <a:p>
             <a:r>
-              <a:t>讲者备注</a:t>
-            </a:r>
-          </a:p>
-          <a:p>
-            <a:r>
-              <a:t>0:30。原标题保持不变。开场一句：今天先讲调度路径之间如何协调，再讲分布式工作负载内部如何成组和放置。姓名与单位由讲者最终确认。</a:t>
-            </a:r>
-          </a:p>
-          <a:p/>
-          <a:p>
-            <a:r>
-              <a:t>Sources (status checked 2026-10-28):</a:t>
-            </a:r>
-          </a:p>
-          <a:p/>
-          <a:p>
-            <a:r>
-              <a:t>讲者姓名采用官方议程顺序；暂不填写未确认的单位。</a:t>
-            </a:r>
-          </a:p>
-          <a:p/>
-          <a:p>
-            <a:r>
-              <a:t>Visual source: na2026/svg/cover-background.svg</a:t>
-            </a:r>
-          </a:p>
-          <a:p>
-            <a:r>
-              <a:t>Diagram geometry is frozen in PNG; edit SVG and re-export to refine.</a:t>
+              <a:t>0:20。标题保持不变。Agentic AI 作为基础设施背景，不把每次 agent 调用等同于一个 Pod。讲者姓名以用户指示为准。</a:t>
             </a:r>
           </a:p>
         </p:txBody>
@@ -616,23 +593,13 @@
           <a:lstStyle/>
           <a:p>
             <a:r>
-              <a:t>讲者备注</a:t>
-            </a:r>
-          </a:p>
-          <a:p>
-            <a:r>
-              <a:t>2:00。Kthena 已有 gang/topology。KubeRay #5249 已合并，#5369 截至核查仍 open。Grove #516 最终实现包含 SubGroupPolicy，但显式拒绝 topology constraints。Kubeflow / LWS 不是从零集成，后续深化分组与拓扑。各条既有能力不都意味着同等支持两级 gang 或 topology。</a:t>
+              <a:t>2:00。PodGroup 是较大的实例边界，prefill 和 decode 的 locality 约束可以不同。两层约束都显式填写，不假设子组继承 PodGroup 的 topology。</a:t>
             </a:r>
           </a:p>
           <a:p/>
           <a:p>
             <a:r>
-              <a:t>Sources (status checked 2026-10-28):</a:t>
-            </a:r>
-          </a:p>
-          <a:p>
-            <a:r>
-              <a:t>https://github.com/volcano-sh/kthena/blob/main/docs/kthena/versioned_docs/version-v1.0.0/user-guide/gang-scheduling.md</a:t>
+              <a:t>技术来源：</a:t>
             </a:r>
           </a:p>
           <a:p>
@@ -640,40 +607,20 @@
               <a:t>https://github.com/volcano-sh/kthena/blob/main/docs/kthena/versioned_docs/version-v1.0.0/user-guide/network-topology.md</a:t>
             </a:r>
           </a:p>
-          <a:p>
-            <a:r>
-              <a:t>https://github.com/kuberay-project/kuberay/pull/5249</a:t>
-            </a:r>
-          </a:p>
-          <a:p>
-            <a:r>
-              <a:t>https://github.com/kuberay-project/kuberay/pull/5369</a:t>
-            </a:r>
-          </a:p>
-          <a:p>
-            <a:r>
-              <a:t>https://github.com/ai-dynamo/grove/pull/516</a:t>
-            </a:r>
-          </a:p>
-          <a:p>
-            <a:r>
-              <a:t>https://trainer.kubeflow.org/en/latest/operator-guides/job-scheduling/volcano.html</a:t>
-            </a:r>
-          </a:p>
-          <a:p>
-            <a:r>
-              <a:t>https://github.com/kubernetes-sigs/lws/pull/498</a:t>
-            </a:r>
-          </a:p>
           <a:p/>
           <a:p>
             <a:r>
-              <a:t>Visual source: na2026/svg/10-ecosystem-matrix.svg</a:t>
-            </a:r>
-          </a:p>
-          <a:p>
-            <a:r>
-              <a:t>Diagram geometry is frozen in PNG; edit SVG and re-export to refine.</a:t>
+              <a:t>本页新版素材与说明：EU 2026 slide 16 / China 2026 slide 17; PodGroup API. Selector and Decode fragment below are explanatory excerpts.</a:t>
+            </a:r>
+          </a:p>
+          <a:p>
+            <a:r>
+              <a:t>图例使用两个固定角色组，各4 Pods。spec 片段省略 labelSelector；实际使用时给两个 policy 配置匹配各自角色的 Pod selector。不是可直接 apply 的完整 manifest。</a:t>
+            </a:r>
+          </a:p>
+          <a:p>
+            <a:r>
+              <a:t>Visual: na2026/svg/10-multilevel-placement.svg。PNG 固定几何；复用的旧图原本为位图，新增 YAML 和注释为 SVG 文本。</a:t>
             </a:r>
           </a:p>
         </p:txBody>
@@ -743,39 +690,39 @@
           <a:lstStyle/>
           <a:p>
             <a:r>
-              <a:t>讲者备注</a:t>
-            </a:r>
-          </a:p>
-          <a:p>
-            <a:r>
-              <a:t>1:00。仅讨论一个 worker group，忽略 head 等其他需求。minReplicas=2,numOfHosts=2，需要两套完整 replica identity，每套两个 Pods。三个来自 replica 0、一个来自 replica 1 并不满足。一个 WorkerGroup / subgroup policy 能生成多个实际 SubGroups。</a:t>
+              <a:t>1:40。先让每个实例聚拢，再用 PodGroup anti-affinity 将两个实例分开。required 和 preferred 的差别是没有理想域时是否允许回退。</a:t>
             </a:r>
           </a:p>
           <a:p/>
           <a:p>
             <a:r>
-              <a:t>Sources (status checked 2026-10-28):</a:t>
-            </a:r>
-          </a:p>
-          <a:p>
-            <a:r>
-              <a:t>https://github.com/kuberay-project/kuberay/pull/5249</a:t>
-            </a:r>
-          </a:p>
-          <a:p>
-            <a:r>
-              <a:t>https://github.com/kuberay-project/kuberay/pull/5369</a:t>
+              <a:t>技术来源：</a:t>
+            </a:r>
+          </a:p>
+          <a:p>
+            <a:r>
+              <a:t>https://github.com/volcano-sh/volcano/blob/v1.16.0/docs/user-guide/how_to_use_podgroup_anti_affinity.md</a:t>
+            </a:r>
+          </a:p>
+          <a:p>
+            <a:r>
+              <a:t>https://github.com/volcano-sh/volcano/pull/5349</a:t>
             </a:r>
           </a:p>
           <a:p/>
           <a:p>
             <a:r>
-              <a:t>Visual source: na2026/svg/11-kuberay-replicas.svg</a:t>
-            </a:r>
-          </a:p>
-          <a:p>
-            <a:r>
-              <a:t>Diagram geometry is frozen in PNG; edit SVG and re-export to refine.</a:t>
+              <a:t>本页新版素材与说明：docs/user-guide/how_to_use_podgroup_anti_affinity.md; group-topology-affinity plugin, v1.16.</a:t>
+            </a:r>
+          </a:p>
+          <a:p>
+            <a:r>
+              <a:t>启用 group-topology-affinity 与 network-topology-aware；每个 PodGroup 配置相同分离规则。selector 匹配 PodGroup 标签，默认同 namespace。</a:t>
+            </a:r>
+          </a:p>
+          <a:p>
+            <a:r>
+              <a:t>Visual: na2026/svg/11-instance-isolation.svg。PNG 固定几何；复用的旧图原本为位图，新增 YAML 和注释为 SVG 文本。</a:t>
             </a:r>
           </a:p>
         </p:txBody>
@@ -845,44 +792,7 @@
           <a:lstStyle/>
           <a:p>
             <a:r>
-              <a:t>讲者备注</a:t>
-            </a:r>
-          </a:p>
-          <a:p>
-            <a:r>
-              <a:t>1:30。第三章同时交代已有采用与扩展方向。HyperNode standalone 已发布；API 独立可用不等于所有 scheduler adapter 已交付。未来 SubGroup affinity/anti-affinity 位于同一 PodGroup 内，不与已发布的 PodGroup anti-affinity 混淆。转场：控制器与工作负载不断增加，下一步要用可重复的 benchmark 验证规模、延迟和调度开销。</a:t>
-            </a:r>
-          </a:p>
-          <a:p/>
-          <a:p>
-            <a:r>
-              <a:t>Sources (status checked 2026-10-28):</a:t>
-            </a:r>
-          </a:p>
-          <a:p>
-            <a:r>
-              <a:t>https://github.com/volcano-sh/volcano/releases/tag/v1.16.0</a:t>
-            </a:r>
-          </a:p>
-          <a:p>
-            <a:r>
-              <a:t>https://github.com/volcano-sh/volcano/issues/6166</a:t>
-            </a:r>
-          </a:p>
-          <a:p>
-            <a:r>
-              <a:t>https://github.com/volcano-sh/volcano/blob/v1.16.0/docs/design/group-topology-affinity.md</a:t>
-            </a:r>
-          </a:p>
-          <a:p/>
-          <a:p>
-            <a:r>
-              <a:t>Visual source: na2026/svg/12-ecosystem-next.svg</a:t>
-            </a:r>
-          </a:p>
-          <a:p>
-            <a:r>
-              <a:t>Diagram geometry is frozen in PNG; edit SVG and re-export to refine.</a:t>
+              <a:t>0:10。转场：这些分组和拓扑语义，最终要由用户真正使用的 controller 传进来。</a:t>
             </a:r>
           </a:p>
         </p:txBody>
@@ -952,39 +862,59 @@
           <a:lstStyle/>
           <a:p>
             <a:r>
-              <a:t>讲者备注</a:t>
-            </a:r>
-          </a:p>
-          <a:p>
-            <a:r>
-              <a:t>1:30。已核对 benchmark/README.md、testcases 与 scripts。框架提供部署、负载配置和指标收集，既支持 Kind/KWOK 也支持已有集群。按配置可创建 HyperNode。KWOK 测试不能证明真实训练、推理或网络吞吐。此处是调度 benchmark，不是应用 benchmark。</a:t>
+              <a:t>1:15。依次区分已有接入和仍在扩展的能力。Grove 的 SubGroup backend 已合入，不表示支持所有 topology 约束。Kubeflow/LWS 已有接入，下一步深入分组与拓扑。</a:t>
             </a:r>
           </a:p>
           <a:p/>
           <a:p>
             <a:r>
-              <a:t>Sources (status checked 2026-10-28):</a:t>
-            </a:r>
-          </a:p>
-          <a:p>
-            <a:r>
-              <a:t>https://github.com/volcano-sh/volcano/blob/a3d50b503/benchmark/README.md</a:t>
-            </a:r>
-          </a:p>
-          <a:p>
-            <a:r>
-              <a:t>https://github.com/volcano-sh/volcano/blob/a3d50b503/benchmark/scripts/README.md</a:t>
+              <a:t>技术来源：</a:t>
+            </a:r>
+          </a:p>
+          <a:p>
+            <a:r>
+              <a:t>https://github.com/volcano-sh/kthena/blob/main/docs/kthena/versioned_docs/version-v1.0.0/user-guide/gang-scheduling.md</a:t>
+            </a:r>
+          </a:p>
+          <a:p>
+            <a:r>
+              <a:t>https://github.com/volcano-sh/kthena/blob/main/docs/kthena/versioned_docs/version-v1.0.0/user-guide/network-topology.md</a:t>
+            </a:r>
+          </a:p>
+          <a:p>
+            <a:r>
+              <a:t>https://github.com/kuberay-project/kuberay/pull/5249</a:t>
+            </a:r>
+          </a:p>
+          <a:p>
+            <a:r>
+              <a:t>https://github.com/kuberay-project/kuberay/pull/5369</a:t>
+            </a:r>
+          </a:p>
+          <a:p>
+            <a:r>
+              <a:t>https://github.com/ai-dynamo/grove/pull/516</a:t>
+            </a:r>
+          </a:p>
+          <a:p>
+            <a:r>
+              <a:t>https://trainer.kubeflow.org/en/latest/operator-guides/job-scheduling/volcano.html</a:t>
+            </a:r>
+          </a:p>
+          <a:p>
+            <a:r>
+              <a:t>https://github.com/kubernetes-sigs/lws/pull/498</a:t>
             </a:r>
           </a:p>
           <a:p/>
           <a:p>
             <a:r>
-              <a:t>Visual source: na2026/svg/13-benchmark-framework.svg</a:t>
-            </a:r>
-          </a:p>
-          <a:p>
-            <a:r>
-              <a:t>Diagram geometry is frozen in PNG; edit SVG and re-export to refine.</a:t>
+              <a:t>本页新版素材与说明：Kthena docs; KubeRay #5249 / #5369; Grove #516; Kubeflow Trainer Volcano plugin; LWS #498.</a:t>
+            </a:r>
+          </a:p>
+          <a:p>
+            <a:r>
+              <a:t>Visual: na2026/svg/13-ecosystem.svg。PNG 固定几何；复用的旧图原本为位图，新增 YAML 和注释为 SVG 文本。</a:t>
             </a:r>
           </a:p>
         </p:txBody>
@@ -1054,44 +984,34 @@
           <a:lstStyle/>
           <a:p>
             <a:r>
-              <a:t>讲者备注</a:t>
-            </a:r>
-          </a:p>
-          <a:p>
-            <a:r>
-              <a:t>1:30。用户确认 benchmark 持续推进与测试；具体测试重点仍待选择，右栏为建议。左侧仅描述代码已有能力。collect-report 包含 Pod created→scheduled 延迟直方图分位数与成功 binding 事件吞吐计算；本地 audit 文件不可用时吞吐可能缺失。不同来源和时间窗口的指标不能混用。后续可选一项有证据的优化讲进展，不展开 Unschedulable Job Cache。</a:t>
+              <a:t>1:40。沿用 China Kthena 图及关键 YAML，按 ServingGroup→PodGroup、role replica→SubGroup 的顺序讲。一个 Entry 加一个 Worker 组成两 Pod 副本。</a:t>
             </a:r>
           </a:p>
           <a:p/>
           <a:p>
             <a:r>
-              <a:t>Sources (status checked 2026-10-28):</a:t>
-            </a:r>
-          </a:p>
-          <a:p>
-            <a:r>
-              <a:t>https://github.com/volcano-sh/volcano/blob/a3d50b503/benchmark/scripts/collect-report.sh</a:t>
-            </a:r>
-          </a:p>
-          <a:p>
-            <a:r>
-              <a:t>https://github.com/volcano-sh/volcano/blob/a3d50b503/benchmark/manifests/monitoring/grafana-dashboard.json</a:t>
-            </a:r>
-          </a:p>
-          <a:p>
-            <a:r>
-              <a:t>https://github.com/volcano-sh/volcano/issues/6166</a:t>
+              <a:t>技术来源：</a:t>
+            </a:r>
+          </a:p>
+          <a:p>
+            <a:r>
+              <a:t>https://github.com/volcano-sh/kthena/blob/main/docs/kthena/versioned_docs/version-v1.0.0/user-guide/gang-scheduling.md</a:t>
             </a:r>
           </a:p>
           <a:p/>
           <a:p>
             <a:r>
-              <a:t>Visual source: na2026/svg/14-benchmark-progress.svg</a:t>
-            </a:r>
-          </a:p>
-          <a:p>
-            <a:r>
-              <a:t>Diagram geometry is frozen in PNG; edit SVG and re-export to refine.</a:t>
+              <a:t>本页新版素材与说明：China 2026 slide 22; Kthena ModelServing gang scheduling guide.</a:t>
+            </a:r>
+          </a:p>
+          <a:p>
+            <a:r>
+              <a:t>图中每个 role replica 有一个 Entry 和一个 Worker Pod；YAML 保留 gangPolicy、role 副本数与 workerReplicas，省略 entryTemplate、workerTemplate 与 networkTopology。Gang 不表示所有 Pod 原子绑定或同时启动。</a:t>
+            </a:r>
+          </a:p>
+          <a:p>
+            <a:r>
+              <a:t>Visual: na2026/svg/14-kthena-mapping.svg。PNG 固定几何；复用的旧图原本为位图，新增 YAML 和注释为 SVG 文本。</a:t>
             </a:r>
           </a:p>
         </p:txBody>
@@ -1161,44 +1081,34 @@
           <a:lstStyle/>
           <a:p>
             <a:r>
-              <a:t>讲者备注</a:t>
-            </a:r>
-          </a:p>
-          <a:p>
-            <a:r>
-              <a:t>1:30。正式视觉版此页先讲测量口径，不展示待选的性能结果。优先选择一组能说明问题的曲线或对比，不把无上下文日志中的数字直接放上来。注明 scheduler build、Kubernetes、控制面资源、节点/Pod/Job规模、gang/topology规则、测量口径与重复次数。没有稳定数字时换成真实 profiling 发现及复测进展，不制造占位曲线，不把旧 scheduler 的优化结果归因于乐观并行架构。</a:t>
+              <a:t>1:30。两个 replica，每个两个 hosts；用 matchLabelKeys 保持副本身份。head 另有分组。本页不把尚在推进的 KubeRay topology PR 当作已合入能力。</a:t>
             </a:r>
           </a:p>
           <a:p/>
           <a:p>
             <a:r>
-              <a:t>Sources (status checked 2026-10-28):</a:t>
-            </a:r>
-          </a:p>
-          <a:p>
-            <a:r>
-              <a:t>https://github.com/volcano-sh/volcano/blob/a3d50b503/benchmark/README.md</a:t>
-            </a:r>
-          </a:p>
-          <a:p>
-            <a:r>
-              <a:t>https://github.com/volcano-sh/volcano/blob/a3d50b503/benchmark/scripts/collect-report.sh</a:t>
-            </a:r>
-          </a:p>
-          <a:p>
-            <a:r>
-              <a:t>本页明确以测量方法代替结果占位。收到选定结果后再用一张图替换；目前没有对外宣称速度提升。</a:t>
+              <a:t>技术来源：</a:t>
+            </a:r>
+          </a:p>
+          <a:p>
+            <a:r>
+              <a:t>https://github.com/kuberay-project/kuberay/pull/5249</a:t>
+            </a:r>
+          </a:p>
+          <a:p>
+            <a:r>
+              <a:t>https://github.com/kuberay-project/kuberay/pull/5369</a:t>
             </a:r>
           </a:p>
           <a:p/>
           <a:p>
             <a:r>
-              <a:t>Visual source: na2026/svg/15-benchmark-measurement.svg</a:t>
-            </a:r>
-          </a:p>
-          <a:p>
-            <a:r>
-              <a:t>Diagram geometry is frozen in PNG; edit SVG and re-export to refine.</a:t>
+              <a:t>本页新版素材与说明：KubeRay #5249; #5369 open as of 2026-10-29. Volcano SubGroup API.</a:t>
+            </a:r>
+          </a:p>
+          <a:p>
+            <a:r>
+              <a:t>Visual: na2026/svg/15-ray-replicas.svg。PNG 固定几何；复用的旧图原本为位图，新增 YAML 和注释为 SVG 文本。</a:t>
             </a:r>
           </a:p>
         </p:txBody>
@@ -1268,18 +1178,18 @@
           <a:lstStyle/>
           <a:p>
             <a:r>
-              <a:t>讲者备注</a:t>
-            </a:r>
-          </a:p>
-          <a:p>
-            <a:r>
-              <a:t>1:30。回顾四章：统一调度框架、工作负载语义、生态、benchmark。明确性能工作还在持续测试和优化，邀请用户贡献真实场景、可复现 profile 和对比方法。Global/混部不另开章节。</a:t>
+              <a:t>1:10。说明后续在同一个 PodGroup 内表达 SubGroup affinity/anti-affinity 的方向。图是意图示例，不提供假装已可执行的未来 YAML。</a:t>
             </a:r>
           </a:p>
           <a:p/>
           <a:p>
             <a:r>
-              <a:t>Sources (status checked 2026-10-28):</a:t>
+              <a:t>技术来源：</a:t>
+            </a:r>
+          </a:p>
+          <a:p>
+            <a:r>
+              <a:t>https://github.com/volcano-sh/volcano/releases/tag/v1.16.0</a:t>
             </a:r>
           </a:p>
           <a:p>
@@ -1289,18 +1199,23 @@
           </a:p>
           <a:p>
             <a:r>
-              <a:t>https://github.com/volcano-sh/volcano/blob/a3d50b503/benchmark/README.md</a:t>
+              <a:t>https://github.com/volcano-sh/volcano/blob/v1.16.0/docs/design/group-topology-affinity.md</a:t>
             </a:r>
           </a:p>
           <a:p/>
           <a:p>
             <a:r>
-              <a:t>Visual source: na2026/svg/16-takeaways.svg</a:t>
-            </a:r>
-          </a:p>
-          <a:p>
-            <a:r>
-              <a:t>Diagram geometry is frozen in PNG; edit SVG and re-export to refine.</a:t>
+              <a:t>本页新版素材与说明：docs/design/group-topology-affinity.md (proposed SubGroup relationships); roadmap #6166.</a:t>
+            </a:r>
+          </a:p>
+          <a:p>
+            <a:r>
+              <a:t>本页为未来方向，不能当作已交付 API。示意同一 PodGroup 内将协作组放近、将副本分开；具体 selector 与亲和关系设计仍需社区讨论。</a:t>
+            </a:r>
+          </a:p>
+          <a:p>
+            <a:r>
+              <a:t>Visual: na2026/svg/16-subgroup-next.svg。PNG 固定几何；复用的旧图原本为位图，新增 YAML 和注释为 SVG 文本。</a:t>
             </a:r>
           </a:p>
         </p:txBody>
@@ -1370,28 +1285,190 @@
           <a:lstStyle/>
           <a:p>
             <a:r>
-              <a:t>讲者备注</a:t>
-            </a:r>
-          </a:p>
-          <a:p>
-            <a:r>
-              <a:t>5:00。问答准备：NodeShard 和 HyperNode 的区别；hard shard 切开拓扑域的取舍；Gang 不等于进程同时启动；PodGroup anti-affinity 的 allocate 范围；SubGroup 关系尚未发布；生态 PR 合并与发行版本的区别。</a:t>
+              <a:t>0:10。转场：接入的控制器和约束越多，就越需要可重复的 benchmark。</a:t>
+            </a:r>
+          </a:p>
+        </p:txBody>
+      </p:sp>
+      <p:sp>
+        <p:nvSpPr>
+          <p:cNvPr id="4" name="Slide Number Placeholder 3"/>
+          <p:cNvSpPr>
+            <a:spLocks noGrp="1"/>
+          </p:cNvSpPr>
+          <p:nvPr>
+            <p:ph type="sldNum" idx="5" sz="quarter"/>
+          </p:nvPr>
+        </p:nvSpPr>
+        <p:spPr/>
+      </p:sp>
+    </p:spTree>
+  </p:cSld>
+  <p:clrMapOvr>
+    <a:masterClrMapping/>
+  </p:clrMapOvr>
+</p:notes>
+</file>
+
+<file path=ppt/notesSlides/notesSlide18.xml><?xml version="1.0" encoding="utf-8"?>
+<p:notes xmlns:a="http://schemas.openxmlformats.org/drawingml/2006/main" xmlns:p="http://schemas.openxmlformats.org/presentationml/2006/main" xmlns:r="http://schemas.openxmlformats.org/officeDocument/2006/relationships">
+  <p:cSld>
+    <p:spTree>
+      <p:nvGrpSpPr>
+        <p:cNvPr id="1" name=""/>
+        <p:cNvGrpSpPr/>
+        <p:nvPr/>
+      </p:nvGrpSpPr>
+      <p:grpSpPr>
+        <a:xfrm>
+          <a:off x="0" y="0"/>
+          <a:ext cx="0" cy="0"/>
+          <a:chOff x="0" y="0"/>
+          <a:chExt cx="0" cy="0"/>
+        </a:xfrm>
+      </p:grpSpPr>
+      <p:sp>
+        <p:nvSpPr>
+          <p:cNvPr id="2" name="Slide Image Placeholder 1"/>
+          <p:cNvSpPr>
+            <a:spLocks noGrp="1"/>
+          </p:cNvSpPr>
+          <p:nvPr>
+            <p:ph type="sldImg" idx="2"/>
+          </p:nvPr>
+        </p:nvSpPr>
+        <p:spPr/>
+      </p:sp>
+      <p:sp>
+        <p:nvSpPr>
+          <p:cNvPr id="3" name="Notes Placeholder 2"/>
+          <p:cNvSpPr>
+            <a:spLocks noGrp="1"/>
+          </p:cNvSpPr>
+          <p:nvPr>
+            <p:ph type="body" idx="3" sz="quarter"/>
+          </p:nvPr>
+        </p:nvSpPr>
+        <p:spPr/>
+        <p:txBody>
+          <a:bodyPr/>
+          <a:lstStyle/>
+          <a:p>
+            <a:r>
+              <a:t>1:30。沿数据路径解释 benchmark：场景输入→API/调度器→audit-exporter 与 Prometheus→报告。KWOK 只验证调度行为，不代表真实 GPU 执行吞吐。</a:t>
             </a:r>
           </a:p>
           <a:p/>
           <a:p>
             <a:r>
-              <a:t>Sources (status checked 2026-10-28):</a:t>
-            </a:r>
-          </a:p>
-          <a:p>
-            <a:r>
-              <a:t>https://github.com/volcano-sh/volcano/blob/v1.16.0/docs/design/agent-scheduler.md</a:t>
-            </a:r>
-          </a:p>
-          <a:p>
-            <a:r>
-              <a:t>https://github.com/volcano-sh/volcano/blob/v1.16.0/docs/user-guide/how_to_use_podgroup_anti_affinity.md</a:t>
+              <a:t>技术来源：</a:t>
+            </a:r>
+          </a:p>
+          <a:p>
+            <a:r>
+              <a:t>https://github.com/volcano-sh/volcano/blob/a3d50b503/benchmark/README.md</a:t>
+            </a:r>
+          </a:p>
+          <a:p>
+            <a:r>
+              <a:t>https://github.com/volcano-sh/volcano/blob/a3d50b503/benchmark/scripts/README.md</a:t>
+            </a:r>
+          </a:p>
+          <a:p/>
+          <a:p>
+            <a:r>
+              <a:t>本页新版素材与说明：benchmark/README.md; benchmark/scripts; benchmark/config; benchmark/testcases.</a:t>
+            </a:r>
+          </a:p>
+          <a:p>
+            <a:r>
+              <a:t>Visual: na2026/svg/18-benchmark-architecture.svg。PNG 固定几何；复用的旧图原本为位图，新增 YAML 和注释为 SVG 文本。</a:t>
+            </a:r>
+          </a:p>
+        </p:txBody>
+      </p:sp>
+      <p:sp>
+        <p:nvSpPr>
+          <p:cNvPr id="4" name="Slide Number Placeholder 3"/>
+          <p:cNvSpPr>
+            <a:spLocks noGrp="1"/>
+          </p:cNvSpPr>
+          <p:nvPr>
+            <p:ph type="sldNum" idx="5" sz="quarter"/>
+          </p:nvPr>
+        </p:nvSpPr>
+        <p:spPr/>
+      </p:sp>
+    </p:spTree>
+  </p:cSld>
+  <p:clrMapOvr>
+    <a:masterClrMapping/>
+  </p:clrMapOvr>
+</p:notes>
+</file>
+
+<file path=ppt/notesSlides/notesSlide19.xml><?xml version="1.0" encoding="utf-8"?>
+<p:notes xmlns:a="http://schemas.openxmlformats.org/drawingml/2006/main" xmlns:p="http://schemas.openxmlformats.org/presentationml/2006/main" xmlns:r="http://schemas.openxmlformats.org/officeDocument/2006/relationships">
+  <p:cSld>
+    <p:spTree>
+      <p:nvGrpSpPr>
+        <p:cNvPr id="1" name=""/>
+        <p:cNvGrpSpPr/>
+        <p:nvPr/>
+      </p:nvGrpSpPr>
+      <p:grpSpPr>
+        <a:xfrm>
+          <a:off x="0" y="0"/>
+          <a:ext cx="0" cy="0"/>
+          <a:chOff x="0" y="0"/>
+          <a:chExt cx="0" cy="0"/>
+        </a:xfrm>
+      </p:grpSpPr>
+      <p:sp>
+        <p:nvSpPr>
+          <p:cNvPr id="2" name="Slide Image Placeholder 1"/>
+          <p:cNvSpPr>
+            <a:spLocks noGrp="1"/>
+          </p:cNvSpPr>
+          <p:nvPr>
+            <p:ph type="sldImg" idx="2"/>
+          </p:nvPr>
+        </p:nvSpPr>
+        <p:spPr/>
+      </p:sp>
+      <p:sp>
+        <p:nvSpPr>
+          <p:cNvPr id="3" name="Notes Placeholder 2"/>
+          <p:cNvSpPr>
+            <a:spLocks noGrp="1"/>
+          </p:cNvSpPr>
+          <p:nvPr>
+            <p:ph type="body" idx="3" sz="quarter"/>
+          </p:nvPr>
+        </p:nvSpPr>
+        <p:spPr/>
+        <p:txBody>
+          <a:bodyPr/>
+          <a:lstStyle/>
+          <a:p>
+            <a:r>
+              <a:t>1:20。已有框架、场景和观察能力是本章可以确定展示的进展。继续验证规模、约束和优化，不为了演讲单独制造漂亮结果。命令仅展示框架用法，本次没有运行集群测试。</a:t>
+            </a:r>
+          </a:p>
+          <a:p/>
+          <a:p>
+            <a:r>
+              <a:t>技术来源：</a:t>
+            </a:r>
+          </a:p>
+          <a:p>
+            <a:r>
+              <a:t>https://github.com/volcano-sh/volcano/blob/a3d50b503/benchmark/scripts/collect-report.sh</a:t>
+            </a:r>
+          </a:p>
+          <a:p>
+            <a:r>
+              <a:t>https://github.com/volcano-sh/volcano/blob/a3d50b503/benchmark/manifests/monitoring/grafana-dashboard.json</a:t>
             </a:r>
           </a:p>
           <a:p>
@@ -1402,12 +1479,12 @@
           <a:p/>
           <a:p>
             <a:r>
-              <a:t>Visual source: na2026/svg/17-questions.svg</a:t>
-            </a:r>
-          </a:p>
-          <a:p>
-            <a:r>
-              <a:t>Diagram geometry is frozen in PNG; edit SVG and re-export to refine.</a:t>
+              <a:t>本页新版素材与说明：benchmark/README.md; benchmark/Makefile; benchmark/scripts/collect-report.sh.</a:t>
+            </a:r>
+          </a:p>
+          <a:p>
+            <a:r>
+              <a:t>Visual: na2026/svg/19-benchmark-progress.svg。PNG 固定几何；复用的旧图原本为位图，新增 YAML 和注释为 SVG 文本。</a:t>
             </a:r>
           </a:p>
         </p:txBody>
@@ -1477,30 +1554,328 @@
           <a:lstStyle/>
           <a:p>
             <a:r>
-              <a:t>讲者备注</a:t>
-            </a:r>
-          </a:p>
-          <a:p>
-            <a:r>
-              <a:t>1:00。Agentic AI 是应用背景，Volcano 讨论底层 Kubernetes 工作负载。训练与 RL 是平台工作负载，不暗示每次 Agent 请求都会触发它们。Substrate / CubeSandbox 可在 worker 资源池上自行调度执行单元。</a:t>
+              <a:t>0:40。简介暂依据公开资料；Ricardo 当前公司和正式职务不确定，未填公司。收到讲者偏好后更新文字与头像。照片来自 Linux Foundation 公开讲者页。</a:t>
+            </a:r>
+          </a:p>
+          <a:p>
+            <a:r>
+              <a:t>https://events.linuxfoundation.org/archive/2026/open-source-summit-north-america/program/program-committee/</a:t>
+            </a:r>
+          </a:p>
+          <a:p>
+            <a:r>
+              <a:t>https://events.linuxfoundation.org/spinnaker-live/program/featured-speakers/</a:t>
+            </a:r>
+          </a:p>
+          <a:p>
+            <a:r>
+              <a:t>https://yunikorn.apache.org/community/people/</a:t>
+            </a:r>
+          </a:p>
+          <a:p>
+            <a:r>
+              <a:t>https://www.linkedin.com/in/rainie-li-71b2b146</a:t>
+            </a:r>
+          </a:p>
+        </p:txBody>
+      </p:sp>
+      <p:sp>
+        <p:nvSpPr>
+          <p:cNvPr id="4" name="Slide Number Placeholder 3"/>
+          <p:cNvSpPr>
+            <a:spLocks noGrp="1"/>
+          </p:cNvSpPr>
+          <p:nvPr>
+            <p:ph type="sldNum" idx="5" sz="quarter"/>
+          </p:nvPr>
+        </p:nvSpPr>
+        <p:spPr/>
+      </p:sp>
+    </p:spTree>
+  </p:cSld>
+  <p:clrMapOvr>
+    <a:masterClrMapping/>
+  </p:clrMapOvr>
+</p:notes>
+</file>
+
+<file path=ppt/notesSlides/notesSlide20.xml><?xml version="1.0" encoding="utf-8"?>
+<p:notes xmlns:a="http://schemas.openxmlformats.org/drawingml/2006/main" xmlns:p="http://schemas.openxmlformats.org/presentationml/2006/main" xmlns:r="http://schemas.openxmlformats.org/officeDocument/2006/relationships">
+  <p:cSld>
+    <p:spTree>
+      <p:nvGrpSpPr>
+        <p:cNvPr id="1" name=""/>
+        <p:cNvGrpSpPr/>
+        <p:nvPr/>
+      </p:nvGrpSpPr>
+      <p:grpSpPr>
+        <a:xfrm>
+          <a:off x="0" y="0"/>
+          <a:ext cx="0" cy="0"/>
+          <a:chOff x="0" y="0"/>
+          <a:chExt cx="0" cy="0"/>
+        </a:xfrm>
+      </p:grpSpPr>
+      <p:sp>
+        <p:nvSpPr>
+          <p:cNvPr id="2" name="Slide Image Placeholder 1"/>
+          <p:cNvSpPr>
+            <a:spLocks noGrp="1"/>
+          </p:cNvSpPr>
+          <p:nvPr>
+            <p:ph type="sldImg" idx="2"/>
+          </p:nvPr>
+        </p:nvSpPr>
+        <p:spPr/>
+      </p:sp>
+      <p:sp>
+        <p:nvSpPr>
+          <p:cNvPr id="3" name="Notes Placeholder 2"/>
+          <p:cNvSpPr>
+            <a:spLocks noGrp="1"/>
+          </p:cNvSpPr>
+          <p:nvPr>
+            <p:ph type="body" idx="3" sz="quarter"/>
+          </p:nvPr>
+        </p:nvSpPr>
+        <p:spPr/>
+        <p:txBody>
+          <a:bodyPr/>
+          <a:lstStyle/>
+          <a:p>
+            <a:r>
+              <a:t>1:20。讲清 created→scheduled 的统计口径、吞吐窗口和对照条件。仍待选定一项代表性结果，可以后续原位替换本页。</a:t>
             </a:r>
           </a:p>
           <a:p/>
           <a:p>
             <a:r>
-              <a:t>Sources (status checked 2026-10-28):</a:t>
+              <a:t>技术来源：</a:t>
+            </a:r>
+          </a:p>
+          <a:p>
+            <a:r>
+              <a:t>https://github.com/volcano-sh/volcano/blob/a3d50b503/benchmark/README.md</a:t>
+            </a:r>
+          </a:p>
+          <a:p>
+            <a:r>
+              <a:t>https://github.com/volcano-sh/volcano/blob/a3d50b503/benchmark/scripts/collect-report.sh</a:t>
             </a:r>
           </a:p>
           <a:p/>
+          <a:p>
+            <a:r>
+              <a:t>本页新版素材与说明：benchmark/scripts/collect-report.sh and audit-exporter event definitions. No performance results selected.</a:t>
+            </a:r>
+          </a:p>
+          <a:p>
+            <a:r>
+              <a:t>尚未选定代表性 benchmark 结果，本页只讲测量口径，不呈现虚构性能曲线或提升比例。</a:t>
+            </a:r>
+          </a:p>
+          <a:p>
+            <a:r>
+              <a:t>Visual: na2026/svg/20-benchmark-measurement.svg。PNG 固定几何；复用的旧图原本为位图，新增 YAML 和注释为 SVG 文本。</a:t>
+            </a:r>
+          </a:p>
+        </p:txBody>
+      </p:sp>
+      <p:sp>
+        <p:nvSpPr>
+          <p:cNvPr id="4" name="Slide Number Placeholder 3"/>
+          <p:cNvSpPr>
+            <a:spLocks noGrp="1"/>
+          </p:cNvSpPr>
+          <p:nvPr>
+            <p:ph type="sldNum" idx="5" sz="quarter"/>
+          </p:nvPr>
+        </p:nvSpPr>
+        <p:spPr/>
+      </p:sp>
+    </p:spTree>
+  </p:cSld>
+  <p:clrMapOvr>
+    <a:masterClrMapping/>
+  </p:clrMapOvr>
+</p:notes>
+</file>
+
+<file path=ppt/notesSlides/notesSlide21.xml><?xml version="1.0" encoding="utf-8"?>
+<p:notes xmlns:a="http://schemas.openxmlformats.org/drawingml/2006/main" xmlns:p="http://schemas.openxmlformats.org/presentationml/2006/main" xmlns:r="http://schemas.openxmlformats.org/officeDocument/2006/relationships">
+  <p:cSld>
+    <p:spTree>
+      <p:nvGrpSpPr>
+        <p:cNvPr id="1" name=""/>
+        <p:cNvGrpSpPr/>
+        <p:nvPr/>
+      </p:nvGrpSpPr>
+      <p:grpSpPr>
+        <a:xfrm>
+          <a:off x="0" y="0"/>
+          <a:ext cx="0" cy="0"/>
+          <a:chOff x="0" y="0"/>
+          <a:chExt cx="0" cy="0"/>
+        </a:xfrm>
+      </p:grpSpPr>
+      <p:sp>
+        <p:nvSpPr>
+          <p:cNvPr id="2" name="Slide Image Placeholder 1"/>
+          <p:cNvSpPr>
+            <a:spLocks noGrp="1"/>
+          </p:cNvSpPr>
+          <p:nvPr>
+            <p:ph type="sldImg" idx="2"/>
+          </p:nvPr>
+        </p:nvSpPr>
+        <p:spPr/>
+      </p:sp>
+      <p:sp>
+        <p:nvSpPr>
+          <p:cNvPr id="3" name="Notes Placeholder 2"/>
+          <p:cNvSpPr>
+            <a:spLocks noGrp="1"/>
+          </p:cNvSpPr>
+          <p:nvPr>
+            <p:ph type="body" idx="3" sz="quarter"/>
+          </p:nvPr>
+        </p:nvSpPr>
+        <p:spPr/>
+        <p:txBody>
+          <a:bodyPr/>
+          <a:lstStyle/>
+          <a:p>
+            <a:r>
+              <a:t>1:10。回扣四部分：路径协同、分组与拓扑、控制器映射、持续验证。邀请社区贡献具体 workload 与复现方式。</a:t>
+            </a:r>
+          </a:p>
           <a:p/>
           <a:p>
             <a:r>
-              <a:t>Visual source: na2026/svg/02-workloads.svg</a:t>
-            </a:r>
-          </a:p>
-          <a:p>
-            <a:r>
-              <a:t>Diagram geometry is frozen in PNG; edit SVG and re-export to refine.</a:t>
+              <a:t>技术来源：</a:t>
+            </a:r>
+          </a:p>
+          <a:p>
+            <a:r>
+              <a:t>https://github.com/volcano-sh/volcano/issues/6166</a:t>
+            </a:r>
+          </a:p>
+          <a:p>
+            <a:r>
+              <a:t>https://github.com/volcano-sh/volcano/blob/a3d50b503/benchmark/README.md</a:t>
+            </a:r>
+          </a:p>
+          <a:p/>
+          <a:p>
+            <a:r>
+              <a:t>本页新版素材与说明：</a:t>
+            </a:r>
+          </a:p>
+          <a:p>
+            <a:r>
+              <a:t>Visual: na2026/svg/21-takeaways.svg。PNG 固定几何；复用的旧图原本为位图，新增 YAML 和注释为 SVG 文本。</a:t>
+            </a:r>
+          </a:p>
+        </p:txBody>
+      </p:sp>
+      <p:sp>
+        <p:nvSpPr>
+          <p:cNvPr id="4" name="Slide Number Placeholder 3"/>
+          <p:cNvSpPr>
+            <a:spLocks noGrp="1"/>
+          </p:cNvSpPr>
+          <p:nvPr>
+            <p:ph type="sldNum" idx="5" sz="quarter"/>
+          </p:nvPr>
+        </p:nvSpPr>
+        <p:spPr/>
+      </p:sp>
+    </p:spTree>
+  </p:cSld>
+  <p:clrMapOvr>
+    <a:masterClrMapping/>
+  </p:clrMapOvr>
+</p:notes>
+</file>
+
+<file path=ppt/notesSlides/notesSlide22.xml><?xml version="1.0" encoding="utf-8"?>
+<p:notes xmlns:a="http://schemas.openxmlformats.org/drawingml/2006/main" xmlns:p="http://schemas.openxmlformats.org/presentationml/2006/main" xmlns:r="http://schemas.openxmlformats.org/officeDocument/2006/relationships">
+  <p:cSld>
+    <p:spTree>
+      <p:nvGrpSpPr>
+        <p:cNvPr id="1" name=""/>
+        <p:cNvGrpSpPr/>
+        <p:nvPr/>
+      </p:nvGrpSpPr>
+      <p:grpSpPr>
+        <a:xfrm>
+          <a:off x="0" y="0"/>
+          <a:ext cx="0" cy="0"/>
+          <a:chOff x="0" y="0"/>
+          <a:chExt cx="0" cy="0"/>
+        </a:xfrm>
+      </p:grpSpPr>
+      <p:sp>
+        <p:nvSpPr>
+          <p:cNvPr id="2" name="Slide Image Placeholder 1"/>
+          <p:cNvSpPr>
+            <a:spLocks noGrp="1"/>
+          </p:cNvSpPr>
+          <p:nvPr>
+            <p:ph type="sldImg" idx="2"/>
+          </p:nvPr>
+        </p:nvSpPr>
+        <p:spPr/>
+      </p:sp>
+      <p:sp>
+        <p:nvSpPr>
+          <p:cNvPr id="3" name="Notes Placeholder 2"/>
+          <p:cNvSpPr>
+            <a:spLocks noGrp="1"/>
+          </p:cNvSpPr>
+          <p:nvPr>
+            <p:ph type="body" idx="3" sz="quarter"/>
+          </p:nvPr>
+        </p:nvSpPr>
+        <p:spPr/>
+        <p:txBody>
+          <a:bodyPr/>
+          <a:lstStyle/>
+          <a:p>
+            <a:r>
+              <a:t>5:00。问答。优先收集工作负载如何分组、需要哪些拓扑关系，以及可重复的测试场景。</a:t>
+            </a:r>
+          </a:p>
+          <a:p/>
+          <a:p>
+            <a:r>
+              <a:t>技术来源：</a:t>
+            </a:r>
+          </a:p>
+          <a:p>
+            <a:r>
+              <a:t>https://github.com/volcano-sh/volcano/blob/v1.16.0/docs/design/agent-scheduler.md</a:t>
+            </a:r>
+          </a:p>
+          <a:p>
+            <a:r>
+              <a:t>https://github.com/volcano-sh/volcano/blob/v1.16.0/docs/user-guide/how_to_use_podgroup_anti_affinity.md</a:t>
+            </a:r>
+          </a:p>
+          <a:p>
+            <a:r>
+              <a:t>https://github.com/volcano-sh/volcano/issues/6166</a:t>
+            </a:r>
+          </a:p>
+          <a:p/>
+          <a:p>
+            <a:r>
+              <a:t>本页新版素材与说明：</a:t>
+            </a:r>
+          </a:p>
+          <a:p>
+            <a:r>
+              <a:t>Visual: na2026/svg/22-questions.svg。PNG 固定几何；复用的旧图原本为位图，新增 YAML 和注释为 SVG 文本。</a:t>
             </a:r>
           </a:p>
         </p:txBody>
@@ -1570,34 +1945,7 @@
           <a:lstStyle/>
           <a:p>
             <a:r>
-              <a:t>讲者备注</a:t>
-            </a:r>
-          </a:p>
-          <a:p>
-            <a:r>
-              <a:t>1:30。这张图是职责概览，不表示 Binder 是所有 scheduler 共享的全局事务协调器。Worker 使用自己的 snapshot；Binder 的冲突处理属于 Agent Scheduler 内部。统一框架不等于统一算法，也不代表全局资源记账已经强一致。</a:t>
-            </a:r>
-          </a:p>
-          <a:p/>
-          <a:p>
-            <a:r>
-              <a:t>Sources (status checked 2026-10-28):</a:t>
-            </a:r>
-          </a:p>
-          <a:p>
-            <a:r>
-              <a:t>https://github.com/volcano-sh/volcano/blob/v1.16.0/docs/design/agent-scheduler.md</a:t>
-            </a:r>
-          </a:p>
-          <a:p/>
-          <a:p>
-            <a:r>
-              <a:t>Visual source: na2026/svg/03-unified-framework.svg</a:t>
-            </a:r>
-          </a:p>
-          <a:p>
-            <a:r>
-              <a:t>Diagram geometry is frozen in PNG; edit SVG and re-export to refine.</a:t>
+              <a:t>0:10。从统一调度框架切入，后面落到工作负载、生态和验证。</a:t>
             </a:r>
           </a:p>
         </p:txBody>
@@ -1667,39 +2015,25 @@
           <a:lstStyle/>
           <a:p>
             <a:r>
-              <a:t>讲者备注</a:t>
-            </a:r>
-          </a:p>
-          <a:p>
-            <a:r>
-              <a:t>2:00。controller 分配候选节点范围；coordinator 协调当前周期正在使用的节点与期望节点。讲一次从 A 向 B 调整一个节点的例子，等相关周期完成再确认交接。none 不分片，soft 可回退到 shard 外，hard 限定范围。NodeShard 不迁移运行中的 Pods；soft 也不代表消除所有跨 scheduler 冲突。</a:t>
+              <a:t>1:00。先讲共同的基础设施需求：训练/RL 更强调协同计算，推理有角色与副本结构，agent 业务带来突发和延迟压力。并非每次 agent 调用都要创建一个 Pod。</a:t>
             </a:r>
           </a:p>
           <a:p/>
           <a:p>
             <a:r>
-              <a:t>Sources (status checked 2026-10-28):</a:t>
-            </a:r>
-          </a:p>
-          <a:p>
-            <a:r>
-              <a:t>https://github.com/volcano-sh/volcano/blob/v1.16.0/docs/design/agent-scheduler.md</a:t>
-            </a:r>
-          </a:p>
-          <a:p>
-            <a:r>
-              <a:t>图示是候选节点使用范围的交接，不表示 Pod 迁移。desired change 阶段 N2 仍在 A 的当前周期中使用；实际交接依赖 coordinator 状态同步。</a:t>
+              <a:t>技术来源：</a:t>
             </a:r>
           </a:p>
           <a:p/>
-          <a:p>
-            <a:r>
-              <a:t>Visual source: na2026/svg/04-nodeshard-handoff.svg</a:t>
-            </a:r>
-          </a:p>
-          <a:p>
-            <a:r>
-              <a:t>Diagram geometry is frozen in PNG; edit SVG and re-export to refine.</a:t>
+          <a:p/>
+          <a:p>
+            <a:r>
+              <a:t>本页新版素材与说明：</a:t>
+            </a:r>
+          </a:p>
+          <a:p>
+            <a:r>
+              <a:t>Visual: na2026/svg/04-workload-demands.svg。PNG 固定几何；复用的旧图原本为位图，新增 YAML 和注释为 SVG 文本。</a:t>
             </a:r>
           </a:p>
         </p:txBody>
@@ -1769,30 +2103,29 @@
           <a:lstStyle/>
           <a:p>
             <a:r>
-              <a:t>讲者备注</a:t>
-            </a:r>
-          </a:p>
-          <a:p>
-            <a:r>
-              <a:t>1:00。交接句：So far, we have discussed how scheduling paths coordinate their use of cluster nodes. But a set of available nodes is not enough for a distributed AI workload. We also need complete groups, the right topology, and placement relationships between groups. 不将 NodeShard、HyperNode、SubGroup 画成一棵包含树。</a:t>
+              <a:t>1:30。复用 China 架构图，从左右两条路径讲到中间 NodeShard。worker/Binder 的冲突检查是局部机制；不宣称并行一定带来性能提升。</a:t>
             </a:r>
           </a:p>
           <a:p/>
           <a:p>
             <a:r>
-              <a:t>Sources (status checked 2026-10-28):</a:t>
+              <a:t>技术来源：</a:t>
+            </a:r>
+          </a:p>
+          <a:p>
+            <a:r>
+              <a:t>https://github.com/volcano-sh/volcano/blob/v1.16.0/docs/design/agent-scheduler.md</a:t>
             </a:r>
           </a:p>
           <a:p/>
-          <a:p/>
-          <a:p>
-            <a:r>
-              <a:t>Visual source: na2026/svg/05-complete-groups.svg</a:t>
-            </a:r>
-          </a:p>
-          <a:p>
-            <a:r>
-              <a:t>Diagram geometry is frozen in PNG; edit SVG and re-export to refine.</a:t>
+          <a:p>
+            <a:r>
+              <a:t>本页新版素材与说明：China 2026 slide 7; same architecture family as EU 2026.</a:t>
+            </a:r>
+          </a:p>
+          <a:p>
+            <a:r>
+              <a:t>Visual: na2026/svg/05-unified-architecture.svg。PNG 固定几何；复用的旧图原本为位图，新增 YAML 和注释为 SVG 文本。</a:t>
             </a:r>
           </a:p>
         </p:txBody>
@@ -1862,34 +2195,29 @@
           <a:lstStyle/>
           <a:p>
             <a:r>
-              <a:t>讲者备注</a:t>
-            </a:r>
-          </a:p>
-          <a:p>
-            <a:r>
-              <a:t>2:30。先用一个总 minMember 满足但必需角色缺失的反例。随后解释两级 gang。一个 subGroupPolicy 能生成多个实际 SubGroups；图中各画一个示意副本，不代表整个 Role 只能有一个 gang。成组调度不等于所有进程同一时刻启动或跨 Pod 原子 bind。</a:t>
+              <a:t>1:40。重点对照 nodesDesired 和 nodesInUse。期望集合变化后需等待协调器交接，不迁移运行中的 Pod。旧图中的资源策略是架构扩展点，不表示所有策略都已完成。</a:t>
             </a:r>
           </a:p>
           <a:p/>
           <a:p>
             <a:r>
-              <a:t>Sources (status checked 2026-10-28):</a:t>
-            </a:r>
-          </a:p>
-          <a:p>
-            <a:r>
-              <a:t>https://github.com/volcano-sh/kthena/blob/main/docs/kthena/versioned_docs/version-v1.0.0/user-guide/gang-scheduling.md</a:t>
+              <a:t>技术来源：</a:t>
+            </a:r>
+          </a:p>
+          <a:p>
+            <a:r>
+              <a:t>https://github.com/volcano-sh/volcano/blob/v1.16.0/docs/design/agent-scheduler.md</a:t>
             </a:r>
           </a:p>
           <a:p/>
           <a:p>
             <a:r>
-              <a:t>Visual source: na2026/svg/06-podgroup-subgroup.svg</a:t>
-            </a:r>
-          </a:p>
-          <a:p>
-            <a:r>
-              <a:t>Diagram geometry is frozen in PNG; edit SVG and re-export to refine.</a:t>
+              <a:t>本页新版素材与说明：China 2026 slide 9; docs/design/agent-scheduler.md; shard API types.</a:t>
+            </a:r>
+          </a:p>
+          <a:p>
+            <a:r>
+              <a:t>Visual: na2026/svg/06-nodeshard.svg。PNG 固定几何；复用的旧图原本为位图，新增 YAML 和注释为 SVG 文本。</a:t>
             </a:r>
           </a:p>
         </p:txBody>
@@ -1959,39 +2287,7 @@
           <a:lstStyle/>
           <a:p>
             <a:r>
-              <a:t>讲者备注</a:t>
-            </a:r>
-          </a:p>
-          <a:p>
-            <a:r>
-              <a:t>2:00。HyperNode 表达拓扑域；图示层级不是所有集群必须采用的物理架构。讲清 hard/soft topology constraint。它与 scheduler sharding mode 的 hard/soft 不是同一个配置，也不代表节点所有权。</a:t>
-            </a:r>
-          </a:p>
-          <a:p/>
-          <a:p>
-            <a:r>
-              <a:t>Sources (status checked 2026-10-28):</a:t>
-            </a:r>
-          </a:p>
-          <a:p>
-            <a:r>
-              <a:t>https://github.com/volcano-sh/kthena/blob/main/docs/kthena/versioned_docs/version-v1.0.0/user-guide/network-topology.md</a:t>
-            </a:r>
-          </a:p>
-          <a:p>
-            <a:r>
-              <a:t>https://github.com/volcano-sh/volcano/releases/tag/v1.16.0</a:t>
-            </a:r>
-          </a:p>
-          <a:p/>
-          <a:p>
-            <a:r>
-              <a:t>Visual source: na2026/svg/07-hypernode-hierarchy.svg</a:t>
-            </a:r>
-          </a:p>
-          <a:p>
-            <a:r>
-              <a:t>Diagram geometry is frozen in PNG; edit SVG and re-export to refine.</a:t>
+              <a:t>0:15。转场：拿到可用节点之后，还要保留完整副本以及它们的通信局部性。</a:t>
             </a:r>
           </a:p>
         </p:txBody>
@@ -2061,34 +2357,29 @@
           <a:lstStyle/>
           <a:p>
             <a:r>
-              <a:t>讲者备注</a:t>
-            </a:r>
-          </a:p>
-          <a:p>
-            <a:r>
-              <a:t>2:00。整个实例限制在较大的 HyperNode 范围，实际 SubGroups 使用较小的范围。这里是放置示意，不是 NodeShard→HyperNode→PodGroup 的 API 包含关系。硬约束下局部域容量不足时，即使全集群资源充足也可能无法放置。</a:t>
+              <a:t>2:00。用左边训练和右边 serving 两种结构解释 PodGroup 与 SubGroup，先看完整计算组，再看下面的放置域。一个 policy 可以按 replica label 分出多个实际 SubGroup。</a:t>
             </a:r>
           </a:p>
           <a:p/>
           <a:p>
             <a:r>
-              <a:t>Sources (status checked 2026-10-28):</a:t>
-            </a:r>
-          </a:p>
-          <a:p>
-            <a:r>
-              <a:t>https://github.com/volcano-sh/kthena/blob/main/docs/kthena/versioned_docs/version-v1.0.0/user-guide/network-topology.md</a:t>
+              <a:t>技术来源：</a:t>
+            </a:r>
+          </a:p>
+          <a:p>
+            <a:r>
+              <a:t>https://github.com/volcano-sh/kthena/blob/main/docs/kthena/versioned_docs/version-v1.0.0/user-guide/gang-scheduling.md</a:t>
             </a:r>
           </a:p>
           <a:p/>
           <a:p>
             <a:r>
-              <a:t>Visual source: na2026/svg/08-multilevel-topology.svg</a:t>
-            </a:r>
-          </a:p>
-          <a:p>
-            <a:r>
-              <a:t>Diagram geometry is frozen in PNG; edit SVG and re-export to refine.</a:t>
+              <a:t>本页新版素材与说明：China 2026 slide 14. Figure reused unchanged.</a:t>
+            </a:r>
+          </a:p>
+          <a:p>
+            <a:r>
+              <a:t>Visual: na2026/svg/08-group-structure.svg。PNG 固定几何；复用的旧图原本为位图，新增 YAML 和注释为 SVG 文本。</a:t>
             </a:r>
           </a:p>
         </p:txBody>
@@ -2158,39 +2449,34 @@
           <a:lstStyle/>
           <a:p>
             <a:r>
-              <a:t>讲者备注</a:t>
-            </a:r>
-          </a:p>
-          <a:p>
-            <a:r>
-              <a:t>2:00。顺带说明 required 无合法域则 Pending、preferred 可退化；不再单独占一页。每个实例是一个 PodGroup，内部约束到同一个 supernode，两个 PodGroups 用 anti-affinity 分散。需要启用 plugin；规则选择 PodGroup labels / namespaces，相互分离时双方都应配置规则。主要通过 allocate 执行，不承诺 backfill 的 BestEffort Pods 同样受约束。拓扑分散本身不等于应用 failover。</a:t>
+              <a:t>1:30。从物理网络映射到 HyperNode：非叶节点的成员是 HyperNode，叶节点的成员是 Node。standalone HyperNode 已交付；其他调度器 adapter 是独立的集成工作。</a:t>
             </a:r>
           </a:p>
           <a:p/>
           <a:p>
             <a:r>
-              <a:t>Sources (status checked 2026-10-28):</a:t>
-            </a:r>
-          </a:p>
-          <a:p>
-            <a:r>
-              <a:t>https://github.com/volcano-sh/volcano/blob/v1.16.0/docs/user-guide/how_to_use_podgroup_anti_affinity.md</a:t>
-            </a:r>
-          </a:p>
-          <a:p>
-            <a:r>
-              <a:t>https://github.com/volcano-sh/volcano/pull/5349</a:t>
+              <a:t>技术来源：</a:t>
+            </a:r>
+          </a:p>
+          <a:p>
+            <a:r>
+              <a:t>https://github.com/volcano-sh/kthena/blob/main/docs/kthena/versioned_docs/version-v1.0.0/user-guide/network-topology.md</a:t>
+            </a:r>
+          </a:p>
+          <a:p>
+            <a:r>
+              <a:t>https://github.com/volcano-sh/volcano/releases/tag/v1.16.0</a:t>
             </a:r>
           </a:p>
           <a:p/>
           <a:p>
             <a:r>
-              <a:t>Visual source: na2026/svg/09-podgroup-anti-affinity.svg</a:t>
-            </a:r>
-          </a:p>
-          <a:p>
-            <a:r>
-              <a:t>Diagram geometry is frozen in PNG; edit SVG and re-export to refine.</a:t>
+              <a:t>本页新版素材与说明：China 2026 slide 16 (physical fabric); benchmark/scripts/create-hypernodes.sh.</a:t>
+            </a:r>
+          </a:p>
+          <a:p>
+            <a:r>
+              <a:t>Visual: na2026/svg/09-hypernode-api.svg。PNG 固定几何；复用的旧图原本为位图，新增 YAML 和注释为 SVG 文本。</a:t>
             </a:r>
           </a:p>
         </p:txBody>
@@ -5419,7 +5705,7 @@
               <a:spcAft>
                 <a:spcPts val="500"/>
               </a:spcAft>
-              <a:defRPr sz="2300" b="1">
+              <a:defRPr sz="2500" b="1">
                 <a:solidFill>
                   <a:srgbClr val="202D3C"/>
                 </a:solidFill>
@@ -5427,7 +5713,7 @@
               </a:defRPr>
             </a:pPr>
             <a:r>
-              <a:t>Kevin Wang  ·  Ricardo Aravena  ·  Chen Zicong</a:t>
+              <a:t>Ricardo Aravena  ·  Rainie Li</a:t>
             </a:r>
           </a:p>
         </p:txBody>
@@ -5560,7 +5846,7 @@
               </a:defRPr>
             </a:pPr>
             <a:r>
-              <a:t>01 / 17</a:t>
+              <a:t>01 / 22</a:t>
             </a:r>
           </a:p>
         </p:txBody>
@@ -5665,7 +5951,7 @@
               </a:defRPr>
             </a:pPr>
             <a:r>
-              <a:t>03  ECOSYSTEM</a:t>
+              <a:t>MULTI-LEVEL GANG &amp; NETWORK TOPOLOGY</a:t>
             </a:r>
           </a:p>
         </p:txBody>
@@ -5704,7 +5990,7 @@
               </a:defRPr>
             </a:pPr>
             <a:r>
-              <a:t>Controllers Bring Workload Structure to Scheduling</a:t>
+              <a:t>Place Groups at Different Topology Levels</a:t>
             </a:r>
           </a:p>
         </p:txBody>
@@ -5743,14 +6029,14 @@
               </a:defRPr>
             </a:pPr>
             <a:r>
-              <a:t>Adoption and integration depth are different questions.</a:t>
+              <a:t>An eight-Pod instance spans a larger domain; Prefill and Decode use different locality constraints.</a:t>
             </a:r>
           </a:p>
         </p:txBody>
       </p:sp>
       <p:pic>
         <p:nvPicPr>
-          <p:cNvPr id="7" name="Picture 6" descr="10-ecosystem-matrix.png"/>
+          <p:cNvPr id="7" name="Picture 6" descr="10-multilevel-placement.png"/>
           <p:cNvPicPr>
             <a:picLocks noChangeAspect="1"/>
           </p:cNvPicPr>
@@ -5845,7 +6131,7 @@
               </a:defRPr>
             </a:pPr>
             <a:r>
-              <a:t>10 / 17</a:t>
+              <a:t>10 / 22</a:t>
             </a:r>
           </a:p>
         </p:txBody>
@@ -5950,7 +6236,7 @@
               </a:defRPr>
             </a:pPr>
             <a:r>
-              <a:t>03  ECOSYSTEM</a:t>
+              <a:t>MULTI-LEVEL GANG &amp; NETWORK TOPOLOGY</a:t>
             </a:r>
           </a:p>
         </p:txBody>
@@ -5989,7 +6275,7 @@
               </a:defRPr>
             </a:pPr>
             <a:r>
-              <a:t>KubeRay: A Replica Can Span Multiple Pods</a:t>
+              <a:t>Keep Each Instance Together, Place Instances Apart</a:t>
             </a:r>
           </a:p>
         </p:txBody>
@@ -6028,14 +6314,14 @@
               </a:defRPr>
             </a:pPr>
             <a:r>
-              <a:t>Two complete two-Pod replicas are more specific than a count of four.</a:t>
+              <a:t>PodGroup anti-affinity separates service instances across HyperNode domains.</a:t>
             </a:r>
           </a:p>
         </p:txBody>
       </p:sp>
       <p:pic>
         <p:nvPicPr>
-          <p:cNvPr id="7" name="Picture 6" descr="11-kuberay-replicas.png"/>
+          <p:cNvPr id="7" name="Picture 6" descr="11-instance-isolation.png"/>
           <p:cNvPicPr>
             <a:picLocks noChangeAspect="1"/>
           </p:cNvPicPr>
@@ -6130,7 +6416,7 @@
               </a:defRPr>
             </a:pPr>
             <a:r>
-              <a:t>11 / 17</a:t>
+              <a:t>11 / 22</a:t>
             </a:r>
           </a:p>
         </p:txBody>
@@ -6155,7 +6441,7 @@
       <p:grpSpPr/>
       <p:pic>
         <p:nvPicPr>
-          <p:cNvPr id="2" name="Picture 1" descr="background.png"/>
+          <p:cNvPr id="2" name="Picture 1" descr="cover-background.png"/>
           <p:cNvPicPr>
             <a:picLocks noChangeAspect="1"/>
           </p:cNvPicPr>
@@ -6235,7 +6521,7 @@
               </a:defRPr>
             </a:pPr>
             <a:r>
-              <a:t>03  ECOSYSTEM</a:t>
+              <a:t>ECOSYSTEM</a:t>
             </a:r>
           </a:p>
         </p:txBody>
@@ -6248,8 +6534,8 @@
         </p:nvSpPr>
         <p:spPr>
           <a:xfrm>
-            <a:off x="457200" y="804672"/>
-            <a:ext cx="11247120" cy="640080"/>
+            <a:off x="594360" y="1298448"/>
+            <a:ext cx="1828800" cy="640080"/>
           </a:xfrm>
           <a:prstGeom prst="rect">
             <a:avLst/>
@@ -6266,7 +6552,46 @@
               <a:spcAft>
                 <a:spcPts val="500"/>
               </a:spcAft>
-              <a:defRPr sz="3100" b="1">
+              <a:defRPr sz="3800" b="1">
+                <a:solidFill>
+                  <a:srgbClr val="356696"/>
+                </a:solidFill>
+                <a:latin typeface="Liberation Sans"/>
+              </a:defRPr>
+            </a:pPr>
+            <a:r>
+              <a:t>03</a:t>
+            </a:r>
+          </a:p>
+        </p:txBody>
+      </p:sp>
+      <p:sp>
+        <p:nvSpPr>
+          <p:cNvPr id="6" name="TextBox 5"/>
+          <p:cNvSpPr txBox="1"/>
+          <p:nvPr/>
+        </p:nvSpPr>
+        <p:spPr>
+          <a:xfrm>
+            <a:off x="594360" y="2084831"/>
+            <a:ext cx="7863840" cy="1508760"/>
+          </a:xfrm>
+          <a:prstGeom prst="rect">
+            <a:avLst/>
+          </a:prstGeom>
+          <a:noFill/>
+        </p:spPr>
+        <p:txBody>
+          <a:bodyPr wrap="square" lIns="0" rIns="0" tIns="0" bIns="0">
+            <a:spAutoFit/>
+          </a:bodyPr>
+          <a:lstStyle/>
+          <a:p>
+            <a:pPr>
+              <a:spcAft>
+                <a:spcPts val="500"/>
+              </a:spcAft>
+              <a:defRPr sz="4100" b="1">
                 <a:solidFill>
                   <a:srgbClr val="202D3C"/>
                 </a:solidFill>
@@ -6274,21 +6599,21 @@
               </a:defRPr>
             </a:pPr>
             <a:r>
-              <a:t>Extending the Ecosystem and Placement Model</a:t>
-            </a:r>
-          </a:p>
-        </p:txBody>
-      </p:sp>
-      <p:sp>
-        <p:nvSpPr>
-          <p:cNvPr id="6" name="TextBox 5"/>
-          <p:cNvSpPr txBox="1"/>
-          <p:nvPr/>
-        </p:nvSpPr>
-        <p:spPr>
-          <a:xfrm>
-            <a:off x="475488" y="1435608"/>
-            <a:ext cx="11201400" cy="429768"/>
+              <a:t>Ecosystem</a:t>
+            </a:r>
+          </a:p>
+        </p:txBody>
+      </p:sp>
+      <p:sp>
+        <p:nvSpPr>
+          <p:cNvPr id="7" name="TextBox 6"/>
+          <p:cNvSpPr txBox="1"/>
+          <p:nvPr/>
+        </p:nvSpPr>
+        <p:spPr>
+          <a:xfrm>
+            <a:off x="621792" y="4041648"/>
+            <a:ext cx="9966960" cy="548640"/>
           </a:xfrm>
           <a:prstGeom prst="rect">
             <a:avLst/>
@@ -6305,7 +6630,46 @@
               <a:spcAft>
                 <a:spcPts val="500"/>
               </a:spcAft>
-              <a:defRPr sz="1700" b="0">
+              <a:defRPr sz="2400" b="0">
+                <a:solidFill>
+                  <a:srgbClr val="356696"/>
+                </a:solidFill>
+                <a:latin typeface="Liberation Sans"/>
+              </a:defRPr>
+            </a:pPr>
+            <a:r>
+              <a:t>Workload controllers carry scheduling intent.</a:t>
+            </a:r>
+          </a:p>
+        </p:txBody>
+      </p:sp>
+      <p:sp>
+        <p:nvSpPr>
+          <p:cNvPr id="8" name="TextBox 7"/>
+          <p:cNvSpPr txBox="1"/>
+          <p:nvPr/>
+        </p:nvSpPr>
+        <p:spPr>
+          <a:xfrm>
+            <a:off x="621792" y="4791456"/>
+            <a:ext cx="10607040" cy="594360"/>
+          </a:xfrm>
+          <a:prstGeom prst="rect">
+            <a:avLst/>
+          </a:prstGeom>
+          <a:noFill/>
+        </p:spPr>
+        <p:txBody>
+          <a:bodyPr wrap="square" lIns="0" rIns="0" tIns="0" bIns="0">
+            <a:spAutoFit/>
+          </a:bodyPr>
+          <a:lstStyle/>
+          <a:p>
+            <a:pPr>
+              <a:spcAft>
+                <a:spcPts val="500"/>
+              </a:spcAft>
+              <a:defRPr sz="2100" b="0">
                 <a:solidFill>
                   <a:srgbClr val="647282"/>
                 </a:solidFill>
@@ -6313,38 +6677,170 @@
               </a:defRPr>
             </a:pPr>
             <a:r>
-              <a:t>Reuse topology components and extend the workload semantics carried by controllers.</a:t>
-            </a:r>
-          </a:p>
-        </p:txBody>
-      </p:sp>
-      <p:pic>
-        <p:nvPicPr>
-          <p:cNvPr id="7" name="Picture 6" descr="12-ecosystem-next.png"/>
-          <p:cNvPicPr>
-            <a:picLocks noChangeAspect="1"/>
-          </p:cNvPicPr>
-          <p:nvPr/>
-        </p:nvPicPr>
-        <p:blipFill>
-          <a:blip r:embed="rId4"/>
-          <a:stretch>
-            <a:fillRect/>
-          </a:stretch>
-        </p:blipFill>
-        <p:spPr>
-          <a:xfrm>
-            <a:off x="457200" y="1938528"/>
-            <a:ext cx="11277599" cy="4267200"/>
-          </a:xfrm>
-          <a:prstGeom prst="rect">
-            <a:avLst/>
-          </a:prstGeom>
-        </p:spPr>
-      </p:pic>
-      <p:sp>
-        <p:nvSpPr>
-          <p:cNvPr id="8" name="TextBox 7"/>
+              <a:t>How do roles and replicas reach the scheduler?</a:t>
+            </a:r>
+          </a:p>
+        </p:txBody>
+      </p:sp>
+      <p:sp>
+        <p:nvSpPr>
+          <p:cNvPr id="9" name="TextBox 8"/>
+          <p:cNvSpPr txBox="1"/>
+          <p:nvPr/>
+        </p:nvSpPr>
+        <p:spPr>
+          <a:xfrm>
+            <a:off x="8503920" y="1554480"/>
+            <a:ext cx="3154680" cy="621792"/>
+          </a:xfrm>
+          <a:prstGeom prst="rect">
+            <a:avLst/>
+          </a:prstGeom>
+          <a:noFill/>
+        </p:spPr>
+        <p:txBody>
+          <a:bodyPr wrap="square" lIns="0" rIns="0" tIns="0" bIns="0">
+            <a:spAutoFit/>
+          </a:bodyPr>
+          <a:lstStyle/>
+          <a:p>
+            <a:pPr>
+              <a:spcAft>
+                <a:spcPts val="500"/>
+              </a:spcAft>
+              <a:defRPr sz="1500" b="0">
+                <a:solidFill>
+                  <a:srgbClr val="647282"/>
+                </a:solidFill>
+                <a:latin typeface="Liberation Sans"/>
+              </a:defRPr>
+            </a:pPr>
+            <a:r>
+              <a:t>01  Unified scheduling</a:t>
+            </a:r>
+          </a:p>
+        </p:txBody>
+      </p:sp>
+      <p:sp>
+        <p:nvSpPr>
+          <p:cNvPr id="10" name="TextBox 9"/>
+          <p:cNvSpPr txBox="1"/>
+          <p:nvPr/>
+        </p:nvSpPr>
+        <p:spPr>
+          <a:xfrm>
+            <a:off x="8503920" y="2249424"/>
+            <a:ext cx="3154680" cy="621792"/>
+          </a:xfrm>
+          <a:prstGeom prst="rect">
+            <a:avLst/>
+          </a:prstGeom>
+          <a:noFill/>
+        </p:spPr>
+        <p:txBody>
+          <a:bodyPr wrap="square" lIns="0" rIns="0" tIns="0" bIns="0">
+            <a:spAutoFit/>
+          </a:bodyPr>
+          <a:lstStyle/>
+          <a:p>
+            <a:pPr>
+              <a:spcAft>
+                <a:spcPts val="500"/>
+              </a:spcAft>
+              <a:defRPr sz="1500" b="0">
+                <a:solidFill>
+                  <a:srgbClr val="647282"/>
+                </a:solidFill>
+                <a:latin typeface="Liberation Sans"/>
+              </a:defRPr>
+            </a:pPr>
+            <a:r>
+              <a:t>02  Multi-level gang &amp; network topology</a:t>
+            </a:r>
+          </a:p>
+        </p:txBody>
+      </p:sp>
+      <p:sp>
+        <p:nvSpPr>
+          <p:cNvPr id="11" name="TextBox 10"/>
+          <p:cNvSpPr txBox="1"/>
+          <p:nvPr/>
+        </p:nvSpPr>
+        <p:spPr>
+          <a:xfrm>
+            <a:off x="8503920" y="2944368"/>
+            <a:ext cx="3154680" cy="621792"/>
+          </a:xfrm>
+          <a:prstGeom prst="rect">
+            <a:avLst/>
+          </a:prstGeom>
+          <a:noFill/>
+        </p:spPr>
+        <p:txBody>
+          <a:bodyPr wrap="square" lIns="0" rIns="0" tIns="0" bIns="0">
+            <a:spAutoFit/>
+          </a:bodyPr>
+          <a:lstStyle/>
+          <a:p>
+            <a:pPr>
+              <a:spcAft>
+                <a:spcPts val="500"/>
+              </a:spcAft>
+              <a:defRPr sz="1500" b="1">
+                <a:solidFill>
+                  <a:srgbClr val="356696"/>
+                </a:solidFill>
+                <a:latin typeface="Liberation Sans"/>
+              </a:defRPr>
+            </a:pPr>
+            <a:r>
+              <a:t>03  Ecosystem</a:t>
+            </a:r>
+          </a:p>
+        </p:txBody>
+      </p:sp>
+      <p:sp>
+        <p:nvSpPr>
+          <p:cNvPr id="12" name="TextBox 11"/>
+          <p:cNvSpPr txBox="1"/>
+          <p:nvPr/>
+        </p:nvSpPr>
+        <p:spPr>
+          <a:xfrm>
+            <a:off x="8503920" y="3639312"/>
+            <a:ext cx="3154680" cy="621792"/>
+          </a:xfrm>
+          <a:prstGeom prst="rect">
+            <a:avLst/>
+          </a:prstGeom>
+          <a:noFill/>
+        </p:spPr>
+        <p:txBody>
+          <a:bodyPr wrap="square" lIns="0" rIns="0" tIns="0" bIns="0">
+            <a:spAutoFit/>
+          </a:bodyPr>
+          <a:lstStyle/>
+          <a:p>
+            <a:pPr>
+              <a:spcAft>
+                <a:spcPts val="500"/>
+              </a:spcAft>
+              <a:defRPr sz="1500" b="0">
+                <a:solidFill>
+                  <a:srgbClr val="647282"/>
+                </a:solidFill>
+                <a:latin typeface="Liberation Sans"/>
+              </a:defRPr>
+            </a:pPr>
+            <a:r>
+              <a:t>04  Benchmark framework &amp; progress</a:t>
+            </a:r>
+          </a:p>
+        </p:txBody>
+      </p:sp>
+      <p:sp>
+        <p:nvSpPr>
+          <p:cNvPr id="13" name="TextBox 12"/>
           <p:cNvSpPr txBox="1"/>
           <p:nvPr/>
         </p:nvSpPr>
@@ -6383,7 +6879,7 @@
       </p:sp>
       <p:sp>
         <p:nvSpPr>
-          <p:cNvPr id="9" name="TextBox 8"/>
+          <p:cNvPr id="14" name="TextBox 13"/>
           <p:cNvSpPr txBox="1"/>
           <p:nvPr/>
         </p:nvSpPr>
@@ -6415,7 +6911,7 @@
               </a:defRPr>
             </a:pPr>
             <a:r>
-              <a:t>12 / 17</a:t>
+              <a:t>12 / 22</a:t>
             </a:r>
           </a:p>
         </p:txBody>
@@ -6520,7 +7016,7 @@
               </a:defRPr>
             </a:pPr>
             <a:r>
-              <a:t>04  BENCHMARK FRAMEWORK &amp; PROGRESS</a:t>
+              <a:t>ECOSYSTEM</a:t>
             </a:r>
           </a:p>
         </p:txBody>
@@ -6559,7 +7055,7 @@
               </a:defRPr>
             </a:pPr>
             <a:r>
-              <a:t>A Repeatable Scheduling Benchmark Framework</a:t>
+              <a:t>Controllers Bring Workload Structure to Scheduling</a:t>
             </a:r>
           </a:p>
         </p:txBody>
@@ -6598,14 +7094,14 @@
               </a:defRPr>
             </a:pPr>
             <a:r>
-              <a:t>A common workflow for scenario setup, execution, observation, and comparison.</a:t>
+              <a:t>Integration depth differs: group support and topology support are separate steps.</a:t>
             </a:r>
           </a:p>
         </p:txBody>
       </p:sp>
       <p:pic>
         <p:nvPicPr>
-          <p:cNvPr id="7" name="Picture 6" descr="13-benchmark-framework.png"/>
+          <p:cNvPr id="7" name="Picture 6" descr="13-ecosystem.png"/>
           <p:cNvPicPr>
             <a:picLocks noChangeAspect="1"/>
           </p:cNvPicPr>
@@ -6700,7 +7196,7 @@
               </a:defRPr>
             </a:pPr>
             <a:r>
-              <a:t>13 / 17</a:t>
+              <a:t>13 / 22</a:t>
             </a:r>
           </a:p>
         </p:txBody>
@@ -6805,7 +7301,7 @@
               </a:defRPr>
             </a:pPr>
             <a:r>
-              <a:t>04  BENCHMARK FRAMEWORK &amp; PROGRESS</a:t>
+              <a:t>ECOSYSTEM</a:t>
             </a:r>
           </a:p>
         </p:txBody>
@@ -6844,7 +7340,7 @@
               </a:defRPr>
             </a:pPr>
             <a:r>
-              <a:t>Benchmark Progress and Ongoing Validation</a:t>
+              <a:t>Kthena: From Serving Roles to Scheduling Groups</a:t>
             </a:r>
           </a:p>
         </p:txBody>
@@ -6883,14 +7379,14 @@
               </a:defRPr>
             </a:pPr>
             <a:r>
-              <a:t>The framework is available; scenario coverage and performance validation continue.</a:t>
+              <a:t>One ServingGroup maps to one PodGroup; each role replica forms a SubGroup.</a:t>
             </a:r>
           </a:p>
         </p:txBody>
       </p:sp>
       <p:pic>
         <p:nvPicPr>
-          <p:cNvPr id="7" name="Picture 6" descr="14-benchmark-progress.png"/>
+          <p:cNvPr id="7" name="Picture 6" descr="14-kthena-mapping.png"/>
           <p:cNvPicPr>
             <a:picLocks noChangeAspect="1"/>
           </p:cNvPicPr>
@@ -6985,7 +7481,7 @@
               </a:defRPr>
             </a:pPr>
             <a:r>
-              <a:t>14 / 17</a:t>
+              <a:t>14 / 22</a:t>
             </a:r>
           </a:p>
         </p:txBody>
@@ -7090,7 +7586,7 @@
               </a:defRPr>
             </a:pPr>
             <a:r>
-              <a:t>04  BENCHMARK FRAMEWORK &amp; PROGRESS</a:t>
+              <a:t>ECOSYSTEM</a:t>
             </a:r>
           </a:p>
         </p:txBody>
@@ -7129,7 +7625,7 @@
               </a:defRPr>
             </a:pPr>
             <a:r>
-              <a:t>From Measurements to Reliable Comparisons</a:t>
+              <a:t>KubeRay: A Replica Can Span Multiple Pods</a:t>
             </a:r>
           </a:p>
         </p:txBody>
@@ -7168,14 +7664,14 @@
               </a:defRPr>
             </a:pPr>
             <a:r>
-              <a:t>Keep scheduling metrics distinct from end-to-end application readiness.</a:t>
+              <a:t>The replica label separates complete groups inside one WorkerGroup.</a:t>
             </a:r>
           </a:p>
         </p:txBody>
       </p:sp>
       <p:pic>
         <p:nvPicPr>
-          <p:cNvPr id="7" name="Picture 6" descr="15-benchmark-measurement.png"/>
+          <p:cNvPr id="7" name="Picture 6" descr="15-ray-replicas.png"/>
           <p:cNvPicPr>
             <a:picLocks noChangeAspect="1"/>
           </p:cNvPicPr>
@@ -7270,7 +7766,7 @@
               </a:defRPr>
             </a:pPr>
             <a:r>
-              <a:t>15 / 17</a:t>
+              <a:t>15 / 22</a:t>
             </a:r>
           </a:p>
         </p:txBody>
@@ -7375,7 +7871,7 @@
               </a:defRPr>
             </a:pPr>
             <a:r>
-              <a:t>04  BENCHMARK FRAMEWORK &amp; PROGRESS</a:t>
+              <a:t>ECOSYSTEM</a:t>
             </a:r>
           </a:p>
         </p:txBody>
@@ -7414,7 +7910,7 @@
               </a:defRPr>
             </a:pPr>
             <a:r>
-              <a:t>Framework, Workloads, Ecosystem, Evidence</a:t>
+              <a:t>Next: Relationships Between SubGroups</a:t>
             </a:r>
           </a:p>
         </p:txBody>
@@ -7453,14 +7949,14 @@
               </a:defRPr>
             </a:pPr>
             <a:r>
-              <a:t>Coordinate placement, carry workload intent, and validate behavior.</a:t>
+              <a:t>Extend the placement model as controllers expose richer workload structure.</a:t>
             </a:r>
           </a:p>
         </p:txBody>
       </p:sp>
       <p:pic>
         <p:nvPicPr>
-          <p:cNvPr id="7" name="Picture 6" descr="16-takeaways.png"/>
+          <p:cNvPr id="7" name="Picture 6" descr="16-subgroup-next.png"/>
           <p:cNvPicPr>
             <a:picLocks noChangeAspect="1"/>
           </p:cNvPicPr>
@@ -7555,7 +8051,7 @@
               </a:defRPr>
             </a:pPr>
             <a:r>
-              <a:t>16 / 17</a:t>
+              <a:t>16 / 22</a:t>
             </a:r>
           </a:p>
         </p:txBody>
@@ -7580,7 +8076,7 @@
       <p:grpSpPr/>
       <p:pic>
         <p:nvPicPr>
-          <p:cNvPr id="2" name="Picture 1" descr="background.png"/>
+          <p:cNvPr id="2" name="Picture 1" descr="cover-background.png"/>
           <p:cNvPicPr>
             <a:picLocks noChangeAspect="1"/>
           </p:cNvPicPr>
@@ -7660,7 +8156,518 @@
               </a:defRPr>
             </a:pPr>
             <a:r>
-              <a:t>DISCUSSION</a:t>
+              <a:t>BENCHMARK FRAMEWORK &amp; PROGRESS</a:t>
+            </a:r>
+          </a:p>
+        </p:txBody>
+      </p:sp>
+      <p:sp>
+        <p:nvSpPr>
+          <p:cNvPr id="5" name="TextBox 4"/>
+          <p:cNvSpPr txBox="1"/>
+          <p:nvPr/>
+        </p:nvSpPr>
+        <p:spPr>
+          <a:xfrm>
+            <a:off x="594360" y="1298448"/>
+            <a:ext cx="1828800" cy="640080"/>
+          </a:xfrm>
+          <a:prstGeom prst="rect">
+            <a:avLst/>
+          </a:prstGeom>
+          <a:noFill/>
+        </p:spPr>
+        <p:txBody>
+          <a:bodyPr wrap="square" lIns="0" rIns="0" tIns="0" bIns="0">
+            <a:spAutoFit/>
+          </a:bodyPr>
+          <a:lstStyle/>
+          <a:p>
+            <a:pPr>
+              <a:spcAft>
+                <a:spcPts val="500"/>
+              </a:spcAft>
+              <a:defRPr sz="3800" b="1">
+                <a:solidFill>
+                  <a:srgbClr val="356696"/>
+                </a:solidFill>
+                <a:latin typeface="Liberation Sans"/>
+              </a:defRPr>
+            </a:pPr>
+            <a:r>
+              <a:t>04</a:t>
+            </a:r>
+          </a:p>
+        </p:txBody>
+      </p:sp>
+      <p:sp>
+        <p:nvSpPr>
+          <p:cNvPr id="6" name="TextBox 5"/>
+          <p:cNvSpPr txBox="1"/>
+          <p:nvPr/>
+        </p:nvSpPr>
+        <p:spPr>
+          <a:xfrm>
+            <a:off x="594360" y="2084831"/>
+            <a:ext cx="7863840" cy="1508760"/>
+          </a:xfrm>
+          <a:prstGeom prst="rect">
+            <a:avLst/>
+          </a:prstGeom>
+          <a:noFill/>
+        </p:spPr>
+        <p:txBody>
+          <a:bodyPr wrap="square" lIns="0" rIns="0" tIns="0" bIns="0">
+            <a:spAutoFit/>
+          </a:bodyPr>
+          <a:lstStyle/>
+          <a:p>
+            <a:pPr>
+              <a:spcAft>
+                <a:spcPts val="500"/>
+              </a:spcAft>
+              <a:defRPr sz="4100" b="1">
+                <a:solidFill>
+                  <a:srgbClr val="202D3C"/>
+                </a:solidFill>
+                <a:latin typeface="Liberation Sans"/>
+              </a:defRPr>
+            </a:pPr>
+            <a:r>
+              <a:t>Benchmark</a:t>
+            </a:r>
+          </a:p>
+          <a:p>
+            <a:pPr>
+              <a:spcAft>
+                <a:spcPts val="500"/>
+              </a:spcAft>
+              <a:defRPr sz="4100" b="1">
+                <a:solidFill>
+                  <a:srgbClr val="202D3C"/>
+                </a:solidFill>
+                <a:latin typeface="Liberation Sans"/>
+              </a:defRPr>
+            </a:pPr>
+            <a:r>
+              <a:t>framework &amp; progress</a:t>
+            </a:r>
+          </a:p>
+        </p:txBody>
+      </p:sp>
+      <p:sp>
+        <p:nvSpPr>
+          <p:cNvPr id="7" name="TextBox 6"/>
+          <p:cNvSpPr txBox="1"/>
+          <p:nvPr/>
+        </p:nvSpPr>
+        <p:spPr>
+          <a:xfrm>
+            <a:off x="621792" y="4041648"/>
+            <a:ext cx="9966960" cy="548640"/>
+          </a:xfrm>
+          <a:prstGeom prst="rect">
+            <a:avLst/>
+          </a:prstGeom>
+          <a:noFill/>
+        </p:spPr>
+        <p:txBody>
+          <a:bodyPr wrap="square" lIns="0" rIns="0" tIns="0" bIns="0">
+            <a:spAutoFit/>
+          </a:bodyPr>
+          <a:lstStyle/>
+          <a:p>
+            <a:pPr>
+              <a:spcAft>
+                <a:spcPts val="500"/>
+              </a:spcAft>
+              <a:defRPr sz="2400" b="0">
+                <a:solidFill>
+                  <a:srgbClr val="356696"/>
+                </a:solidFill>
+                <a:latin typeface="Liberation Sans"/>
+              </a:defRPr>
+            </a:pPr>
+            <a:r>
+              <a:t>Measure behavior across workload shapes.</a:t>
+            </a:r>
+          </a:p>
+        </p:txBody>
+      </p:sp>
+      <p:sp>
+        <p:nvSpPr>
+          <p:cNvPr id="8" name="TextBox 7"/>
+          <p:cNvSpPr txBox="1"/>
+          <p:nvPr/>
+        </p:nvSpPr>
+        <p:spPr>
+          <a:xfrm>
+            <a:off x="621792" y="4791456"/>
+            <a:ext cx="10607040" cy="594360"/>
+          </a:xfrm>
+          <a:prstGeom prst="rect">
+            <a:avLst/>
+          </a:prstGeom>
+          <a:noFill/>
+        </p:spPr>
+        <p:txBody>
+          <a:bodyPr wrap="square" lIns="0" rIns="0" tIns="0" bIns="0">
+            <a:spAutoFit/>
+          </a:bodyPr>
+          <a:lstStyle/>
+          <a:p>
+            <a:pPr>
+              <a:spcAft>
+                <a:spcPts val="500"/>
+              </a:spcAft>
+              <a:defRPr sz="2100" b="0">
+                <a:solidFill>
+                  <a:srgbClr val="647282"/>
+                </a:solidFill>
+                <a:latin typeface="Liberation Sans"/>
+              </a:defRPr>
+            </a:pPr>
+            <a:r>
+              <a:t>What can we reproduce, compare, and improve?</a:t>
+            </a:r>
+          </a:p>
+        </p:txBody>
+      </p:sp>
+      <p:sp>
+        <p:nvSpPr>
+          <p:cNvPr id="9" name="TextBox 8"/>
+          <p:cNvSpPr txBox="1"/>
+          <p:nvPr/>
+        </p:nvSpPr>
+        <p:spPr>
+          <a:xfrm>
+            <a:off x="8503920" y="1554480"/>
+            <a:ext cx="3154680" cy="621792"/>
+          </a:xfrm>
+          <a:prstGeom prst="rect">
+            <a:avLst/>
+          </a:prstGeom>
+          <a:noFill/>
+        </p:spPr>
+        <p:txBody>
+          <a:bodyPr wrap="square" lIns="0" rIns="0" tIns="0" bIns="0">
+            <a:spAutoFit/>
+          </a:bodyPr>
+          <a:lstStyle/>
+          <a:p>
+            <a:pPr>
+              <a:spcAft>
+                <a:spcPts val="500"/>
+              </a:spcAft>
+              <a:defRPr sz="1500" b="0">
+                <a:solidFill>
+                  <a:srgbClr val="647282"/>
+                </a:solidFill>
+                <a:latin typeface="Liberation Sans"/>
+              </a:defRPr>
+            </a:pPr>
+            <a:r>
+              <a:t>01  Unified scheduling</a:t>
+            </a:r>
+          </a:p>
+        </p:txBody>
+      </p:sp>
+      <p:sp>
+        <p:nvSpPr>
+          <p:cNvPr id="10" name="TextBox 9"/>
+          <p:cNvSpPr txBox="1"/>
+          <p:nvPr/>
+        </p:nvSpPr>
+        <p:spPr>
+          <a:xfrm>
+            <a:off x="8503920" y="2249424"/>
+            <a:ext cx="3154680" cy="621792"/>
+          </a:xfrm>
+          <a:prstGeom prst="rect">
+            <a:avLst/>
+          </a:prstGeom>
+          <a:noFill/>
+        </p:spPr>
+        <p:txBody>
+          <a:bodyPr wrap="square" lIns="0" rIns="0" tIns="0" bIns="0">
+            <a:spAutoFit/>
+          </a:bodyPr>
+          <a:lstStyle/>
+          <a:p>
+            <a:pPr>
+              <a:spcAft>
+                <a:spcPts val="500"/>
+              </a:spcAft>
+              <a:defRPr sz="1500" b="0">
+                <a:solidFill>
+                  <a:srgbClr val="647282"/>
+                </a:solidFill>
+                <a:latin typeface="Liberation Sans"/>
+              </a:defRPr>
+            </a:pPr>
+            <a:r>
+              <a:t>02  Multi-level gang &amp; network topology</a:t>
+            </a:r>
+          </a:p>
+        </p:txBody>
+      </p:sp>
+      <p:sp>
+        <p:nvSpPr>
+          <p:cNvPr id="11" name="TextBox 10"/>
+          <p:cNvSpPr txBox="1"/>
+          <p:nvPr/>
+        </p:nvSpPr>
+        <p:spPr>
+          <a:xfrm>
+            <a:off x="8503920" y="2944368"/>
+            <a:ext cx="3154680" cy="621792"/>
+          </a:xfrm>
+          <a:prstGeom prst="rect">
+            <a:avLst/>
+          </a:prstGeom>
+          <a:noFill/>
+        </p:spPr>
+        <p:txBody>
+          <a:bodyPr wrap="square" lIns="0" rIns="0" tIns="0" bIns="0">
+            <a:spAutoFit/>
+          </a:bodyPr>
+          <a:lstStyle/>
+          <a:p>
+            <a:pPr>
+              <a:spcAft>
+                <a:spcPts val="500"/>
+              </a:spcAft>
+              <a:defRPr sz="1500" b="0">
+                <a:solidFill>
+                  <a:srgbClr val="647282"/>
+                </a:solidFill>
+                <a:latin typeface="Liberation Sans"/>
+              </a:defRPr>
+            </a:pPr>
+            <a:r>
+              <a:t>03  Ecosystem</a:t>
+            </a:r>
+          </a:p>
+        </p:txBody>
+      </p:sp>
+      <p:sp>
+        <p:nvSpPr>
+          <p:cNvPr id="12" name="TextBox 11"/>
+          <p:cNvSpPr txBox="1"/>
+          <p:nvPr/>
+        </p:nvSpPr>
+        <p:spPr>
+          <a:xfrm>
+            <a:off x="8503920" y="3639312"/>
+            <a:ext cx="3154680" cy="621792"/>
+          </a:xfrm>
+          <a:prstGeom prst="rect">
+            <a:avLst/>
+          </a:prstGeom>
+          <a:noFill/>
+        </p:spPr>
+        <p:txBody>
+          <a:bodyPr wrap="square" lIns="0" rIns="0" tIns="0" bIns="0">
+            <a:spAutoFit/>
+          </a:bodyPr>
+          <a:lstStyle/>
+          <a:p>
+            <a:pPr>
+              <a:spcAft>
+                <a:spcPts val="500"/>
+              </a:spcAft>
+              <a:defRPr sz="1500" b="1">
+                <a:solidFill>
+                  <a:srgbClr val="356696"/>
+                </a:solidFill>
+                <a:latin typeface="Liberation Sans"/>
+              </a:defRPr>
+            </a:pPr>
+            <a:r>
+              <a:t>04  Benchmark framework &amp; progress</a:t>
+            </a:r>
+          </a:p>
+        </p:txBody>
+      </p:sp>
+      <p:sp>
+        <p:nvSpPr>
+          <p:cNvPr id="13" name="TextBox 12"/>
+          <p:cNvSpPr txBox="1"/>
+          <p:nvPr/>
+        </p:nvSpPr>
+        <p:spPr>
+          <a:xfrm>
+            <a:off x="475488" y="6519672"/>
+            <a:ext cx="10515600" cy="201168"/>
+          </a:xfrm>
+          <a:prstGeom prst="rect">
+            <a:avLst/>
+          </a:prstGeom>
+          <a:noFill/>
+        </p:spPr>
+        <p:txBody>
+          <a:bodyPr wrap="square" lIns="0" rIns="0" tIns="0" bIns="0">
+            <a:spAutoFit/>
+          </a:bodyPr>
+          <a:lstStyle/>
+          <a:p>
+            <a:pPr>
+              <a:spcAft>
+                <a:spcPts val="500"/>
+              </a:spcAft>
+              <a:defRPr sz="900" b="0">
+                <a:solidFill>
+                  <a:srgbClr val="647282"/>
+                </a:solidFill>
+                <a:latin typeface="Liberation Sans"/>
+              </a:defRPr>
+            </a:pPr>
+            <a:r>
+              <a:t>Volcano  |  KubeCon + CloudNativeCon North America 2026</a:t>
+            </a:r>
+          </a:p>
+        </p:txBody>
+      </p:sp>
+      <p:sp>
+        <p:nvSpPr>
+          <p:cNvPr id="14" name="TextBox 13"/>
+          <p:cNvSpPr txBox="1"/>
+          <p:nvPr/>
+        </p:nvSpPr>
+        <p:spPr>
+          <a:xfrm>
+            <a:off x="11018520" y="6483096"/>
+            <a:ext cx="685800" cy="256032"/>
+          </a:xfrm>
+          <a:prstGeom prst="rect">
+            <a:avLst/>
+          </a:prstGeom>
+          <a:noFill/>
+        </p:spPr>
+        <p:txBody>
+          <a:bodyPr wrap="square" lIns="0" rIns="0" tIns="0" bIns="0">
+            <a:spAutoFit/>
+          </a:bodyPr>
+          <a:lstStyle/>
+          <a:p>
+            <a:pPr algn="r">
+              <a:spcAft>
+                <a:spcPts val="500"/>
+              </a:spcAft>
+              <a:defRPr sz="1100" b="0">
+                <a:solidFill>
+                  <a:srgbClr val="647282"/>
+                </a:solidFill>
+                <a:latin typeface="Liberation Sans"/>
+              </a:defRPr>
+            </a:pPr>
+            <a:r>
+              <a:t>17 / 22</a:t>
+            </a:r>
+          </a:p>
+        </p:txBody>
+      </p:sp>
+    </p:spTree>
+  </p:cSld>
+  <p:clrMapOvr>
+    <a:masterClrMapping/>
+  </p:clrMapOvr>
+</p:sld>
+</file>
+
+<file path=ppt/slides/slide18.xml><?xml version="1.0" encoding="utf-8"?>
+<p:sld xmlns:a="http://schemas.openxmlformats.org/drawingml/2006/main" xmlns:p="http://schemas.openxmlformats.org/presentationml/2006/main" xmlns:r="http://schemas.openxmlformats.org/officeDocument/2006/relationships">
+  <p:cSld>
+    <p:spTree>
+      <p:nvGrpSpPr>
+        <p:cNvPr id="1" name=""/>
+        <p:cNvGrpSpPr/>
+        <p:nvPr/>
+      </p:nvGrpSpPr>
+      <p:grpSpPr/>
+      <p:pic>
+        <p:nvPicPr>
+          <p:cNvPr id="2" name="Picture 1" descr="background.png"/>
+          <p:cNvPicPr>
+            <a:picLocks noChangeAspect="1"/>
+          </p:cNvPicPr>
+          <p:nvPr/>
+        </p:nvPicPr>
+        <p:blipFill>
+          <a:blip r:embed="rId2"/>
+          <a:stretch>
+            <a:fillRect/>
+          </a:stretch>
+        </p:blipFill>
+        <p:spPr>
+          <a:xfrm>
+            <a:off x="0" y="0"/>
+            <a:ext cx="12191999" cy="6858000"/>
+          </a:xfrm>
+          <a:prstGeom prst="rect">
+            <a:avLst/>
+          </a:prstGeom>
+        </p:spPr>
+      </p:pic>
+      <p:pic>
+        <p:nvPicPr>
+          <p:cNvPr id="3" name="Picture 2" descr="volcano-logo.png"/>
+          <p:cNvPicPr>
+            <a:picLocks noChangeAspect="1"/>
+          </p:cNvPicPr>
+          <p:nvPr/>
+        </p:nvPicPr>
+        <p:blipFill>
+          <a:blip r:embed="rId3"/>
+          <a:stretch>
+            <a:fillRect/>
+          </a:stretch>
+        </p:blipFill>
+        <p:spPr>
+          <a:xfrm>
+            <a:off x="9921240" y="292608"/>
+            <a:ext cx="1737360" cy="289560"/>
+          </a:xfrm>
+          <a:prstGeom prst="rect">
+            <a:avLst/>
+          </a:prstGeom>
+        </p:spPr>
+      </p:pic>
+      <p:sp>
+        <p:nvSpPr>
+          <p:cNvPr id="4" name="TextBox 3"/>
+          <p:cNvSpPr txBox="1"/>
+          <p:nvPr/>
+        </p:nvSpPr>
+        <p:spPr>
+          <a:xfrm>
+            <a:off x="457200" y="292608"/>
+            <a:ext cx="9144000" cy="256032"/>
+          </a:xfrm>
+          <a:prstGeom prst="rect">
+            <a:avLst/>
+          </a:prstGeom>
+          <a:noFill/>
+        </p:spPr>
+        <p:txBody>
+          <a:bodyPr wrap="square" lIns="0" rIns="0" tIns="0" bIns="0">
+            <a:spAutoFit/>
+          </a:bodyPr>
+          <a:lstStyle/>
+          <a:p>
+            <a:pPr>
+              <a:spcAft>
+                <a:spcPts val="500"/>
+              </a:spcAft>
+              <a:defRPr sz="1100" b="1">
+                <a:solidFill>
+                  <a:srgbClr val="356696"/>
+                </a:solidFill>
+                <a:latin typeface="Liberation Sans"/>
+              </a:defRPr>
+            </a:pPr>
+            <a:r>
+              <a:t>BENCHMARK FRAMEWORK &amp; PROGRESS</a:t>
             </a:r>
           </a:p>
         </p:txBody>
@@ -7699,7 +8706,7 @@
               </a:defRPr>
             </a:pPr>
             <a:r>
-              <a:t>Questions &amp; Discussion</a:t>
+              <a:t>A Repeatable Scheduling Benchmark Framework</a:t>
             </a:r>
           </a:p>
         </p:txBody>
@@ -7738,14 +8745,14 @@
               </a:defRPr>
             </a:pPr>
             <a:r>
-              <a:t>Help shape the next set of scheduling and integration scenarios.</a:t>
+              <a:t>Generate scenarios, observe API events, and retain comparable measurements.</a:t>
             </a:r>
           </a:p>
         </p:txBody>
       </p:sp>
       <p:pic>
         <p:nvPicPr>
-          <p:cNvPr id="7" name="Picture 6" descr="17-questions.png"/>
+          <p:cNvPr id="7" name="Picture 6" descr="18-benchmark-architecture.png"/>
           <p:cNvPicPr>
             <a:picLocks noChangeAspect="1"/>
           </p:cNvPicPr>
@@ -7840,7 +8847,292 @@
               </a:defRPr>
             </a:pPr>
             <a:r>
-              <a:t>17 / 17</a:t>
+              <a:t>18 / 22</a:t>
+            </a:r>
+          </a:p>
+        </p:txBody>
+      </p:sp>
+    </p:spTree>
+  </p:cSld>
+  <p:clrMapOvr>
+    <a:masterClrMapping/>
+  </p:clrMapOvr>
+</p:sld>
+</file>
+
+<file path=ppt/slides/slide19.xml><?xml version="1.0" encoding="utf-8"?>
+<p:sld xmlns:a="http://schemas.openxmlformats.org/drawingml/2006/main" xmlns:p="http://schemas.openxmlformats.org/presentationml/2006/main" xmlns:r="http://schemas.openxmlformats.org/officeDocument/2006/relationships">
+  <p:cSld>
+    <p:spTree>
+      <p:nvGrpSpPr>
+        <p:cNvPr id="1" name=""/>
+        <p:cNvGrpSpPr/>
+        <p:nvPr/>
+      </p:nvGrpSpPr>
+      <p:grpSpPr/>
+      <p:pic>
+        <p:nvPicPr>
+          <p:cNvPr id="2" name="Picture 1" descr="background.png"/>
+          <p:cNvPicPr>
+            <a:picLocks noChangeAspect="1"/>
+          </p:cNvPicPr>
+          <p:nvPr/>
+        </p:nvPicPr>
+        <p:blipFill>
+          <a:blip r:embed="rId2"/>
+          <a:stretch>
+            <a:fillRect/>
+          </a:stretch>
+        </p:blipFill>
+        <p:spPr>
+          <a:xfrm>
+            <a:off x="0" y="0"/>
+            <a:ext cx="12191999" cy="6858000"/>
+          </a:xfrm>
+          <a:prstGeom prst="rect">
+            <a:avLst/>
+          </a:prstGeom>
+        </p:spPr>
+      </p:pic>
+      <p:pic>
+        <p:nvPicPr>
+          <p:cNvPr id="3" name="Picture 2" descr="volcano-logo.png"/>
+          <p:cNvPicPr>
+            <a:picLocks noChangeAspect="1"/>
+          </p:cNvPicPr>
+          <p:nvPr/>
+        </p:nvPicPr>
+        <p:blipFill>
+          <a:blip r:embed="rId3"/>
+          <a:stretch>
+            <a:fillRect/>
+          </a:stretch>
+        </p:blipFill>
+        <p:spPr>
+          <a:xfrm>
+            <a:off x="9921240" y="292608"/>
+            <a:ext cx="1737360" cy="289560"/>
+          </a:xfrm>
+          <a:prstGeom prst="rect">
+            <a:avLst/>
+          </a:prstGeom>
+        </p:spPr>
+      </p:pic>
+      <p:sp>
+        <p:nvSpPr>
+          <p:cNvPr id="4" name="TextBox 3"/>
+          <p:cNvSpPr txBox="1"/>
+          <p:nvPr/>
+        </p:nvSpPr>
+        <p:spPr>
+          <a:xfrm>
+            <a:off x="457200" y="292608"/>
+            <a:ext cx="9144000" cy="256032"/>
+          </a:xfrm>
+          <a:prstGeom prst="rect">
+            <a:avLst/>
+          </a:prstGeom>
+          <a:noFill/>
+        </p:spPr>
+        <p:txBody>
+          <a:bodyPr wrap="square" lIns="0" rIns="0" tIns="0" bIns="0">
+            <a:spAutoFit/>
+          </a:bodyPr>
+          <a:lstStyle/>
+          <a:p>
+            <a:pPr>
+              <a:spcAft>
+                <a:spcPts val="500"/>
+              </a:spcAft>
+              <a:defRPr sz="1100" b="1">
+                <a:solidFill>
+                  <a:srgbClr val="356696"/>
+                </a:solidFill>
+                <a:latin typeface="Liberation Sans"/>
+              </a:defRPr>
+            </a:pPr>
+            <a:r>
+              <a:t>BENCHMARK FRAMEWORK &amp; PROGRESS</a:t>
+            </a:r>
+          </a:p>
+        </p:txBody>
+      </p:sp>
+      <p:sp>
+        <p:nvSpPr>
+          <p:cNvPr id="5" name="TextBox 4"/>
+          <p:cNvSpPr txBox="1"/>
+          <p:nvPr/>
+        </p:nvSpPr>
+        <p:spPr>
+          <a:xfrm>
+            <a:off x="457200" y="804672"/>
+            <a:ext cx="11247120" cy="640080"/>
+          </a:xfrm>
+          <a:prstGeom prst="rect">
+            <a:avLst/>
+          </a:prstGeom>
+          <a:noFill/>
+        </p:spPr>
+        <p:txBody>
+          <a:bodyPr wrap="square" lIns="0" rIns="0" tIns="0" bIns="0">
+            <a:spAutoFit/>
+          </a:bodyPr>
+          <a:lstStyle/>
+          <a:p>
+            <a:pPr>
+              <a:spcAft>
+                <a:spcPts val="500"/>
+              </a:spcAft>
+              <a:defRPr sz="3100" b="1">
+                <a:solidFill>
+                  <a:srgbClr val="202D3C"/>
+                </a:solidFill>
+                <a:latin typeface="Liberation Sans"/>
+              </a:defRPr>
+            </a:pPr>
+            <a:r>
+              <a:t>Benchmark Progress and Ongoing Validation</a:t>
+            </a:r>
+          </a:p>
+        </p:txBody>
+      </p:sp>
+      <p:sp>
+        <p:nvSpPr>
+          <p:cNvPr id="6" name="TextBox 5"/>
+          <p:cNvSpPr txBox="1"/>
+          <p:nvPr/>
+        </p:nvSpPr>
+        <p:spPr>
+          <a:xfrm>
+            <a:off x="475488" y="1435608"/>
+            <a:ext cx="11201400" cy="429768"/>
+          </a:xfrm>
+          <a:prstGeom prst="rect">
+            <a:avLst/>
+          </a:prstGeom>
+          <a:noFill/>
+        </p:spPr>
+        <p:txBody>
+          <a:bodyPr wrap="square" lIns="0" rIns="0" tIns="0" bIns="0">
+            <a:spAutoFit/>
+          </a:bodyPr>
+          <a:lstStyle/>
+          <a:p>
+            <a:pPr>
+              <a:spcAft>
+                <a:spcPts val="500"/>
+              </a:spcAft>
+              <a:defRPr sz="1700" b="0">
+                <a:solidFill>
+                  <a:srgbClr val="647282"/>
+                </a:solidFill>
+                <a:latin typeface="Liberation Sans"/>
+              </a:defRPr>
+            </a:pPr>
+            <a:r>
+              <a:t>The harness is available; testing and optimization continue across workload scenarios.</a:t>
+            </a:r>
+          </a:p>
+        </p:txBody>
+      </p:sp>
+      <p:pic>
+        <p:nvPicPr>
+          <p:cNvPr id="7" name="Picture 6" descr="19-benchmark-progress.png"/>
+          <p:cNvPicPr>
+            <a:picLocks noChangeAspect="1"/>
+          </p:cNvPicPr>
+          <p:nvPr/>
+        </p:nvPicPr>
+        <p:blipFill>
+          <a:blip r:embed="rId4"/>
+          <a:stretch>
+            <a:fillRect/>
+          </a:stretch>
+        </p:blipFill>
+        <p:spPr>
+          <a:xfrm>
+            <a:off x="457200" y="1938528"/>
+            <a:ext cx="11277599" cy="4267200"/>
+          </a:xfrm>
+          <a:prstGeom prst="rect">
+            <a:avLst/>
+          </a:prstGeom>
+        </p:spPr>
+      </p:pic>
+      <p:sp>
+        <p:nvSpPr>
+          <p:cNvPr id="8" name="TextBox 7"/>
+          <p:cNvSpPr txBox="1"/>
+          <p:nvPr/>
+        </p:nvSpPr>
+        <p:spPr>
+          <a:xfrm>
+            <a:off x="475488" y="6519672"/>
+            <a:ext cx="10515600" cy="201168"/>
+          </a:xfrm>
+          <a:prstGeom prst="rect">
+            <a:avLst/>
+          </a:prstGeom>
+          <a:noFill/>
+        </p:spPr>
+        <p:txBody>
+          <a:bodyPr wrap="square" lIns="0" rIns="0" tIns="0" bIns="0">
+            <a:spAutoFit/>
+          </a:bodyPr>
+          <a:lstStyle/>
+          <a:p>
+            <a:pPr>
+              <a:spcAft>
+                <a:spcPts val="500"/>
+              </a:spcAft>
+              <a:defRPr sz="900" b="0">
+                <a:solidFill>
+                  <a:srgbClr val="647282"/>
+                </a:solidFill>
+                <a:latin typeface="Liberation Sans"/>
+              </a:defRPr>
+            </a:pPr>
+            <a:r>
+              <a:t>Volcano  |  KubeCon + CloudNativeCon North America 2026</a:t>
+            </a:r>
+          </a:p>
+        </p:txBody>
+      </p:sp>
+      <p:sp>
+        <p:nvSpPr>
+          <p:cNvPr id="9" name="TextBox 8"/>
+          <p:cNvSpPr txBox="1"/>
+          <p:nvPr/>
+        </p:nvSpPr>
+        <p:spPr>
+          <a:xfrm>
+            <a:off x="11018520" y="6483096"/>
+            <a:ext cx="685800" cy="256032"/>
+          </a:xfrm>
+          <a:prstGeom prst="rect">
+            <a:avLst/>
+          </a:prstGeom>
+          <a:noFill/>
+        </p:spPr>
+        <p:txBody>
+          <a:bodyPr wrap="square" lIns="0" rIns="0" tIns="0" bIns="0">
+            <a:spAutoFit/>
+          </a:bodyPr>
+          <a:lstStyle/>
+          <a:p>
+            <a:pPr algn="r">
+              <a:spcAft>
+                <a:spcPts val="500"/>
+              </a:spcAft>
+              <a:defRPr sz="1100" b="0">
+                <a:solidFill>
+                  <a:srgbClr val="647282"/>
+                </a:solidFill>
+                <a:latin typeface="Liberation Sans"/>
+              </a:defRPr>
+            </a:pPr>
+            <a:r>
+              <a:t>19 / 22</a:t>
             </a:r>
           </a:p>
         </p:txBody>
@@ -7945,7 +9237,7 @@
               </a:defRPr>
             </a:pPr>
             <a:r>
-              <a:t>01  UNIFIED SCHEDULING</a:t>
+              <a:t>MAINTAINER TRACK</a:t>
             </a:r>
           </a:p>
         </p:txBody>
@@ -7958,8 +9250,8 @@
         </p:nvSpPr>
         <p:spPr>
           <a:xfrm>
-            <a:off x="457200" y="804672"/>
-            <a:ext cx="11247120" cy="640080"/>
+            <a:off x="457200" y="868680"/>
+            <a:ext cx="10972800" cy="594360"/>
           </a:xfrm>
           <a:prstGeom prst="rect">
             <a:avLst/>
@@ -7976,7 +9268,7 @@
               <a:spcAft>
                 <a:spcPts val="500"/>
               </a:spcAft>
-              <a:defRPr sz="3100" b="1">
+              <a:defRPr sz="3300" b="1">
                 <a:solidFill>
                   <a:srgbClr val="202D3C"/>
                 </a:solidFill>
@@ -7984,53 +9276,14 @@
               </a:defRPr>
             </a:pPr>
             <a:r>
-              <a:t>Different Workloads, Shared Infrastructure</a:t>
-            </a:r>
-          </a:p>
-        </p:txBody>
-      </p:sp>
-      <p:sp>
-        <p:nvSpPr>
-          <p:cNvPr id="6" name="TextBox 5"/>
-          <p:cNvSpPr txBox="1"/>
-          <p:nvPr/>
-        </p:nvSpPr>
-        <p:spPr>
-          <a:xfrm>
-            <a:off x="475488" y="1435608"/>
-            <a:ext cx="11201400" cy="429768"/>
-          </a:xfrm>
-          <a:prstGeom prst="rect">
-            <a:avLst/>
-          </a:prstGeom>
-          <a:noFill/>
-        </p:spPr>
-        <p:txBody>
-          <a:bodyPr wrap="square" lIns="0" rIns="0" tIns="0" bIns="0">
-            <a:spAutoFit/>
-          </a:bodyPr>
-          <a:lstStyle/>
-          <a:p>
-            <a:pPr>
-              <a:spcAft>
-                <a:spcPts val="500"/>
-              </a:spcAft>
-              <a:defRPr sz="1700" b="0">
-                <a:solidFill>
-                  <a:srgbClr val="647282"/>
-                </a:solidFill>
-                <a:latin typeface="Liberation Sans"/>
-              </a:defRPr>
-            </a:pPr>
-            <a:r>
-              <a:t>The infrastructure must support different arrival patterns and coordination needs.</a:t>
+              <a:t>Speakers</a:t>
             </a:r>
           </a:p>
         </p:txBody>
       </p:sp>
       <p:pic>
         <p:nvPicPr>
-          <p:cNvPr id="7" name="Picture 6" descr="02-workloads.png"/>
+          <p:cNvPr id="6" name="Picture 5" descr="ricardo.jpeg"/>
           <p:cNvPicPr>
             <a:picLocks noChangeAspect="1"/>
           </p:cNvPicPr>
@@ -8044,6 +9297,659 @@
         </p:blipFill>
         <p:spPr>
           <a:xfrm>
+            <a:off x="731520" y="1828800"/>
+            <a:ext cx="1600200" cy="1600200"/>
+          </a:xfrm>
+          <a:prstGeom prst="rect">
+            <a:avLst/>
+          </a:prstGeom>
+        </p:spPr>
+      </p:pic>
+      <p:sp>
+        <p:nvSpPr>
+          <p:cNvPr id="7" name="TextBox 6"/>
+          <p:cNvSpPr txBox="1"/>
+          <p:nvPr/>
+        </p:nvSpPr>
+        <p:spPr>
+          <a:xfrm>
+            <a:off x="731520" y="3675887"/>
+            <a:ext cx="4937760" cy="457200"/>
+          </a:xfrm>
+          <a:prstGeom prst="rect">
+            <a:avLst/>
+          </a:prstGeom>
+          <a:noFill/>
+        </p:spPr>
+        <p:txBody>
+          <a:bodyPr wrap="square" lIns="0" rIns="0" tIns="0" bIns="0">
+            <a:spAutoFit/>
+          </a:bodyPr>
+          <a:lstStyle/>
+          <a:p>
+            <a:pPr>
+              <a:spcAft>
+                <a:spcPts val="500"/>
+              </a:spcAft>
+              <a:defRPr sz="3000" b="1">
+                <a:solidFill>
+                  <a:srgbClr val="202D3C"/>
+                </a:solidFill>
+                <a:latin typeface="Liberation Sans"/>
+              </a:defRPr>
+            </a:pPr>
+            <a:r>
+              <a:t>Ricardo Aravena</a:t>
+            </a:r>
+          </a:p>
+        </p:txBody>
+      </p:sp>
+      <p:sp>
+        <p:nvSpPr>
+          <p:cNvPr id="8" name="TextBox 7"/>
+          <p:cNvSpPr txBox="1"/>
+          <p:nvPr/>
+        </p:nvSpPr>
+        <p:spPr>
+          <a:xfrm>
+            <a:off x="731520" y="4279392"/>
+            <a:ext cx="4846320" cy="393192"/>
+          </a:xfrm>
+          <a:prstGeom prst="rect">
+            <a:avLst/>
+          </a:prstGeom>
+          <a:noFill/>
+        </p:spPr>
+        <p:txBody>
+          <a:bodyPr wrap="square" lIns="0" rIns="0" tIns="0" bIns="0">
+            <a:spAutoFit/>
+          </a:bodyPr>
+          <a:lstStyle/>
+          <a:p>
+            <a:pPr>
+              <a:spcAft>
+                <a:spcPts val="500"/>
+              </a:spcAft>
+              <a:defRPr sz="2200" b="0">
+                <a:solidFill>
+                  <a:srgbClr val="356696"/>
+                </a:solidFill>
+                <a:latin typeface="Liberation Sans"/>
+              </a:defRPr>
+            </a:pPr>
+            <a:r>
+              <a:t>Cloud Native &amp; AI Infrastructure</a:t>
+            </a:r>
+          </a:p>
+        </p:txBody>
+      </p:sp>
+      <p:sp>
+        <p:nvSpPr>
+          <p:cNvPr id="9" name="TextBox 8"/>
+          <p:cNvSpPr txBox="1"/>
+          <p:nvPr/>
+        </p:nvSpPr>
+        <p:spPr>
+          <a:xfrm>
+            <a:off x="731520" y="4818888"/>
+            <a:ext cx="4846320" cy="777240"/>
+          </a:xfrm>
+          <a:prstGeom prst="rect">
+            <a:avLst/>
+          </a:prstGeom>
+          <a:noFill/>
+        </p:spPr>
+        <p:txBody>
+          <a:bodyPr wrap="square" lIns="0" rIns="0" tIns="0" bIns="0">
+            <a:spAutoFit/>
+          </a:bodyPr>
+          <a:lstStyle/>
+          <a:p>
+            <a:pPr>
+              <a:spcAft>
+                <a:spcPts val="500"/>
+              </a:spcAft>
+              <a:defRPr sz="2000" b="0">
+                <a:solidFill>
+                  <a:srgbClr val="647282"/>
+                </a:solidFill>
+                <a:latin typeface="Liberation Sans"/>
+              </a:defRPr>
+            </a:pPr>
+            <a:r>
+              <a:t>Open-source infrastructure</a:t>
+            </a:r>
+          </a:p>
+          <a:p>
+            <a:pPr>
+              <a:spcAft>
+                <a:spcPts val="500"/>
+              </a:spcAft>
+              <a:defRPr sz="2000" b="0">
+                <a:solidFill>
+                  <a:srgbClr val="647282"/>
+                </a:solidFill>
+                <a:latin typeface="Liberation Sans"/>
+              </a:defRPr>
+            </a:pPr>
+            <a:r>
+              <a:t>Kubernetes and AI/ML platforms</a:t>
+            </a:r>
+          </a:p>
+        </p:txBody>
+      </p:sp>
+      <p:sp>
+        <p:nvSpPr>
+          <p:cNvPr id="10" name="TextBox 9"/>
+          <p:cNvSpPr txBox="1"/>
+          <p:nvPr/>
+        </p:nvSpPr>
+        <p:spPr>
+          <a:xfrm>
+            <a:off x="731520" y="5806440"/>
+            <a:ext cx="4846320" cy="274320"/>
+          </a:xfrm>
+          <a:prstGeom prst="rect">
+            <a:avLst/>
+          </a:prstGeom>
+          <a:noFill/>
+        </p:spPr>
+        <p:txBody>
+          <a:bodyPr wrap="square" lIns="0" rIns="0" tIns="0" bIns="0">
+            <a:spAutoFit/>
+          </a:bodyPr>
+          <a:lstStyle/>
+          <a:p>
+            <a:pPr>
+              <a:spcAft>
+                <a:spcPts val="500"/>
+              </a:spcAft>
+              <a:defRPr sz="1500" b="0">
+                <a:solidFill>
+                  <a:srgbClr val="356696"/>
+                </a:solidFill>
+                <a:latin typeface="Liberation Sans"/>
+              </a:defRPr>
+            </a:pPr>
+            <a:r>
+              <a:t>serverbooter.com</a:t>
+            </a:r>
+          </a:p>
+        </p:txBody>
+      </p:sp>
+      <p:pic>
+        <p:nvPicPr>
+          <p:cNvPr id="11" name="Picture 10" descr="rainie.jpeg"/>
+          <p:cNvPicPr>
+            <a:picLocks noChangeAspect="1"/>
+          </p:cNvPicPr>
+          <p:nvPr/>
+        </p:nvPicPr>
+        <p:blipFill>
+          <a:blip r:embed="rId5"/>
+          <a:stretch>
+            <a:fillRect/>
+          </a:stretch>
+        </p:blipFill>
+        <p:spPr>
+          <a:xfrm>
+            <a:off x="6446520" y="1828800"/>
+            <a:ext cx="1600200" cy="1600200"/>
+          </a:xfrm>
+          <a:prstGeom prst="rect">
+            <a:avLst/>
+          </a:prstGeom>
+        </p:spPr>
+      </p:pic>
+      <p:sp>
+        <p:nvSpPr>
+          <p:cNvPr id="12" name="TextBox 11"/>
+          <p:cNvSpPr txBox="1"/>
+          <p:nvPr/>
+        </p:nvSpPr>
+        <p:spPr>
+          <a:xfrm>
+            <a:off x="6446520" y="3675887"/>
+            <a:ext cx="4937760" cy="457200"/>
+          </a:xfrm>
+          <a:prstGeom prst="rect">
+            <a:avLst/>
+          </a:prstGeom>
+          <a:noFill/>
+        </p:spPr>
+        <p:txBody>
+          <a:bodyPr wrap="square" lIns="0" rIns="0" tIns="0" bIns="0">
+            <a:spAutoFit/>
+          </a:bodyPr>
+          <a:lstStyle/>
+          <a:p>
+            <a:pPr>
+              <a:spcAft>
+                <a:spcPts val="500"/>
+              </a:spcAft>
+              <a:defRPr sz="3000" b="1">
+                <a:solidFill>
+                  <a:srgbClr val="202D3C"/>
+                </a:solidFill>
+                <a:latin typeface="Liberation Sans"/>
+              </a:defRPr>
+            </a:pPr>
+            <a:r>
+              <a:t>Rainie Li</a:t>
+            </a:r>
+          </a:p>
+        </p:txBody>
+      </p:sp>
+      <p:sp>
+        <p:nvSpPr>
+          <p:cNvPr id="13" name="TextBox 12"/>
+          <p:cNvSpPr txBox="1"/>
+          <p:nvPr/>
+        </p:nvSpPr>
+        <p:spPr>
+          <a:xfrm>
+            <a:off x="6446520" y="4279392"/>
+            <a:ext cx="4846320" cy="393192"/>
+          </a:xfrm>
+          <a:prstGeom prst="rect">
+            <a:avLst/>
+          </a:prstGeom>
+          <a:noFill/>
+        </p:spPr>
+        <p:txBody>
+          <a:bodyPr wrap="square" lIns="0" rIns="0" tIns="0" bIns="0">
+            <a:spAutoFit/>
+          </a:bodyPr>
+          <a:lstStyle/>
+          <a:p>
+            <a:pPr>
+              <a:spcAft>
+                <a:spcPts val="500"/>
+              </a:spcAft>
+              <a:defRPr sz="2200" b="0">
+                <a:solidFill>
+                  <a:srgbClr val="356696"/>
+                </a:solidFill>
+                <a:latin typeface="Liberation Sans"/>
+              </a:defRPr>
+            </a:pPr>
+            <a:r>
+              <a:t>Pinterest</a:t>
+            </a:r>
+          </a:p>
+        </p:txBody>
+      </p:sp>
+      <p:sp>
+        <p:nvSpPr>
+          <p:cNvPr id="14" name="TextBox 13"/>
+          <p:cNvSpPr txBox="1"/>
+          <p:nvPr/>
+        </p:nvSpPr>
+        <p:spPr>
+          <a:xfrm>
+            <a:off x="6446520" y="4818888"/>
+            <a:ext cx="4846320" cy="777240"/>
+          </a:xfrm>
+          <a:prstGeom prst="rect">
+            <a:avLst/>
+          </a:prstGeom>
+          <a:noFill/>
+        </p:spPr>
+        <p:txBody>
+          <a:bodyPr wrap="square" lIns="0" rIns="0" tIns="0" bIns="0">
+            <a:spAutoFit/>
+          </a:bodyPr>
+          <a:lstStyle/>
+          <a:p>
+            <a:pPr>
+              <a:spcAft>
+                <a:spcPts val="500"/>
+              </a:spcAft>
+              <a:defRPr sz="2000" b="0">
+                <a:solidFill>
+                  <a:srgbClr val="647282"/>
+                </a:solidFill>
+                <a:latin typeface="Liberation Sans"/>
+              </a:defRPr>
+            </a:pPr>
+            <a:r>
+              <a:t>Data processing infrastructure</a:t>
+            </a:r>
+          </a:p>
+          <a:p>
+            <a:pPr>
+              <a:spcAft>
+                <a:spcPts val="500"/>
+              </a:spcAft>
+              <a:defRPr sz="2000" b="0">
+                <a:solidFill>
+                  <a:srgbClr val="647282"/>
+                </a:solidFill>
+                <a:latin typeface="Liberation Sans"/>
+              </a:defRPr>
+            </a:pPr>
+            <a:r>
+              <a:t>Apache YuniKorn PMC member</a:t>
+            </a:r>
+          </a:p>
+        </p:txBody>
+      </p:sp>
+      <p:sp>
+        <p:nvSpPr>
+          <p:cNvPr id="15" name="TextBox 14"/>
+          <p:cNvSpPr txBox="1"/>
+          <p:nvPr/>
+        </p:nvSpPr>
+        <p:spPr>
+          <a:xfrm>
+            <a:off x="6446520" y="5806440"/>
+            <a:ext cx="4846320" cy="274320"/>
+          </a:xfrm>
+          <a:prstGeom prst="rect">
+            <a:avLst/>
+          </a:prstGeom>
+          <a:noFill/>
+        </p:spPr>
+        <p:txBody>
+          <a:bodyPr wrap="square" lIns="0" rIns="0" tIns="0" bIns="0">
+            <a:spAutoFit/>
+          </a:bodyPr>
+          <a:lstStyle/>
+          <a:p>
+            <a:pPr>
+              <a:spcAft>
+                <a:spcPts val="500"/>
+              </a:spcAft>
+              <a:defRPr sz="1500" b="0">
+                <a:solidFill>
+                  <a:srgbClr val="356696"/>
+                </a:solidFill>
+                <a:latin typeface="Liberation Sans"/>
+              </a:defRPr>
+            </a:pPr>
+            <a:r>
+              <a:t>Apache YuniKorn · rainieli</a:t>
+            </a:r>
+          </a:p>
+        </p:txBody>
+      </p:sp>
+      <p:sp>
+        <p:nvSpPr>
+          <p:cNvPr id="16" name="TextBox 15"/>
+          <p:cNvSpPr txBox="1"/>
+          <p:nvPr/>
+        </p:nvSpPr>
+        <p:spPr>
+          <a:xfrm>
+            <a:off x="475488" y="6519672"/>
+            <a:ext cx="10515600" cy="201168"/>
+          </a:xfrm>
+          <a:prstGeom prst="rect">
+            <a:avLst/>
+          </a:prstGeom>
+          <a:noFill/>
+        </p:spPr>
+        <p:txBody>
+          <a:bodyPr wrap="square" lIns="0" rIns="0" tIns="0" bIns="0">
+            <a:spAutoFit/>
+          </a:bodyPr>
+          <a:lstStyle/>
+          <a:p>
+            <a:pPr>
+              <a:spcAft>
+                <a:spcPts val="500"/>
+              </a:spcAft>
+              <a:defRPr sz="900" b="0">
+                <a:solidFill>
+                  <a:srgbClr val="647282"/>
+                </a:solidFill>
+                <a:latin typeface="Liberation Sans"/>
+              </a:defRPr>
+            </a:pPr>
+            <a:r>
+              <a:t>Volcano  |  KubeCon + CloudNativeCon North America 2026</a:t>
+            </a:r>
+          </a:p>
+        </p:txBody>
+      </p:sp>
+      <p:sp>
+        <p:nvSpPr>
+          <p:cNvPr id="17" name="TextBox 16"/>
+          <p:cNvSpPr txBox="1"/>
+          <p:nvPr/>
+        </p:nvSpPr>
+        <p:spPr>
+          <a:xfrm>
+            <a:off x="11018520" y="6483096"/>
+            <a:ext cx="685800" cy="256032"/>
+          </a:xfrm>
+          <a:prstGeom prst="rect">
+            <a:avLst/>
+          </a:prstGeom>
+          <a:noFill/>
+        </p:spPr>
+        <p:txBody>
+          <a:bodyPr wrap="square" lIns="0" rIns="0" tIns="0" bIns="0">
+            <a:spAutoFit/>
+          </a:bodyPr>
+          <a:lstStyle/>
+          <a:p>
+            <a:pPr algn="r">
+              <a:spcAft>
+                <a:spcPts val="500"/>
+              </a:spcAft>
+              <a:defRPr sz="1100" b="0">
+                <a:solidFill>
+                  <a:srgbClr val="647282"/>
+                </a:solidFill>
+                <a:latin typeface="Liberation Sans"/>
+              </a:defRPr>
+            </a:pPr>
+            <a:r>
+              <a:t>02 / 22</a:t>
+            </a:r>
+          </a:p>
+        </p:txBody>
+      </p:sp>
+    </p:spTree>
+  </p:cSld>
+  <p:clrMapOvr>
+    <a:masterClrMapping/>
+  </p:clrMapOvr>
+</p:sld>
+</file>
+
+<file path=ppt/slides/slide20.xml><?xml version="1.0" encoding="utf-8"?>
+<p:sld xmlns:a="http://schemas.openxmlformats.org/drawingml/2006/main" xmlns:p="http://schemas.openxmlformats.org/presentationml/2006/main" xmlns:r="http://schemas.openxmlformats.org/officeDocument/2006/relationships">
+  <p:cSld>
+    <p:spTree>
+      <p:nvGrpSpPr>
+        <p:cNvPr id="1" name=""/>
+        <p:cNvGrpSpPr/>
+        <p:nvPr/>
+      </p:nvGrpSpPr>
+      <p:grpSpPr/>
+      <p:pic>
+        <p:nvPicPr>
+          <p:cNvPr id="2" name="Picture 1" descr="background.png"/>
+          <p:cNvPicPr>
+            <a:picLocks noChangeAspect="1"/>
+          </p:cNvPicPr>
+          <p:nvPr/>
+        </p:nvPicPr>
+        <p:blipFill>
+          <a:blip r:embed="rId2"/>
+          <a:stretch>
+            <a:fillRect/>
+          </a:stretch>
+        </p:blipFill>
+        <p:spPr>
+          <a:xfrm>
+            <a:off x="0" y="0"/>
+            <a:ext cx="12191999" cy="6858000"/>
+          </a:xfrm>
+          <a:prstGeom prst="rect">
+            <a:avLst/>
+          </a:prstGeom>
+        </p:spPr>
+      </p:pic>
+      <p:pic>
+        <p:nvPicPr>
+          <p:cNvPr id="3" name="Picture 2" descr="volcano-logo.png"/>
+          <p:cNvPicPr>
+            <a:picLocks noChangeAspect="1"/>
+          </p:cNvPicPr>
+          <p:nvPr/>
+        </p:nvPicPr>
+        <p:blipFill>
+          <a:blip r:embed="rId3"/>
+          <a:stretch>
+            <a:fillRect/>
+          </a:stretch>
+        </p:blipFill>
+        <p:spPr>
+          <a:xfrm>
+            <a:off x="9921240" y="292608"/>
+            <a:ext cx="1737360" cy="289560"/>
+          </a:xfrm>
+          <a:prstGeom prst="rect">
+            <a:avLst/>
+          </a:prstGeom>
+        </p:spPr>
+      </p:pic>
+      <p:sp>
+        <p:nvSpPr>
+          <p:cNvPr id="4" name="TextBox 3"/>
+          <p:cNvSpPr txBox="1"/>
+          <p:nvPr/>
+        </p:nvSpPr>
+        <p:spPr>
+          <a:xfrm>
+            <a:off x="457200" y="292608"/>
+            <a:ext cx="9144000" cy="256032"/>
+          </a:xfrm>
+          <a:prstGeom prst="rect">
+            <a:avLst/>
+          </a:prstGeom>
+          <a:noFill/>
+        </p:spPr>
+        <p:txBody>
+          <a:bodyPr wrap="square" lIns="0" rIns="0" tIns="0" bIns="0">
+            <a:spAutoFit/>
+          </a:bodyPr>
+          <a:lstStyle/>
+          <a:p>
+            <a:pPr>
+              <a:spcAft>
+                <a:spcPts val="500"/>
+              </a:spcAft>
+              <a:defRPr sz="1100" b="1">
+                <a:solidFill>
+                  <a:srgbClr val="356696"/>
+                </a:solidFill>
+                <a:latin typeface="Liberation Sans"/>
+              </a:defRPr>
+            </a:pPr>
+            <a:r>
+              <a:t>BENCHMARK FRAMEWORK &amp; PROGRESS</a:t>
+            </a:r>
+          </a:p>
+        </p:txBody>
+      </p:sp>
+      <p:sp>
+        <p:nvSpPr>
+          <p:cNvPr id="5" name="TextBox 4"/>
+          <p:cNvSpPr txBox="1"/>
+          <p:nvPr/>
+        </p:nvSpPr>
+        <p:spPr>
+          <a:xfrm>
+            <a:off x="457200" y="804672"/>
+            <a:ext cx="11247120" cy="640080"/>
+          </a:xfrm>
+          <a:prstGeom prst="rect">
+            <a:avLst/>
+          </a:prstGeom>
+          <a:noFill/>
+        </p:spPr>
+        <p:txBody>
+          <a:bodyPr wrap="square" lIns="0" rIns="0" tIns="0" bIns="0">
+            <a:spAutoFit/>
+          </a:bodyPr>
+          <a:lstStyle/>
+          <a:p>
+            <a:pPr>
+              <a:spcAft>
+                <a:spcPts val="500"/>
+              </a:spcAft>
+              <a:defRPr sz="3100" b="1">
+                <a:solidFill>
+                  <a:srgbClr val="202D3C"/>
+                </a:solidFill>
+                <a:latin typeface="Liberation Sans"/>
+              </a:defRPr>
+            </a:pPr>
+            <a:r>
+              <a:t>From Measurements to Reliable Comparisons</a:t>
+            </a:r>
+          </a:p>
+        </p:txBody>
+      </p:sp>
+      <p:sp>
+        <p:nvSpPr>
+          <p:cNvPr id="6" name="TextBox 5"/>
+          <p:cNvSpPr txBox="1"/>
+          <p:nvPr/>
+        </p:nvSpPr>
+        <p:spPr>
+          <a:xfrm>
+            <a:off x="475488" y="1435608"/>
+            <a:ext cx="11201400" cy="429768"/>
+          </a:xfrm>
+          <a:prstGeom prst="rect">
+            <a:avLst/>
+          </a:prstGeom>
+          <a:noFill/>
+        </p:spPr>
+        <p:txBody>
+          <a:bodyPr wrap="square" lIns="0" rIns="0" tIns="0" bIns="0">
+            <a:spAutoFit/>
+          </a:bodyPr>
+          <a:lstStyle/>
+          <a:p>
+            <a:pPr>
+              <a:spcAft>
+                <a:spcPts val="500"/>
+              </a:spcAft>
+              <a:defRPr sz="1700" b="0">
+                <a:solidFill>
+                  <a:srgbClr val="647282"/>
+                </a:solidFill>
+                <a:latin typeface="Liberation Sans"/>
+              </a:defRPr>
+            </a:pPr>
+            <a:r>
+              <a:t>Keep scheduling latency distinct from application readiness.</a:t>
+            </a:r>
+          </a:p>
+        </p:txBody>
+      </p:sp>
+      <p:pic>
+        <p:nvPicPr>
+          <p:cNvPr id="7" name="Picture 6" descr="20-benchmark-measurement.png"/>
+          <p:cNvPicPr>
+            <a:picLocks noChangeAspect="1"/>
+          </p:cNvPicPr>
+          <p:nvPr/>
+        </p:nvPicPr>
+        <p:blipFill>
+          <a:blip r:embed="rId4"/>
+          <a:stretch>
+            <a:fillRect/>
+          </a:stretch>
+        </p:blipFill>
+        <p:spPr>
+          <a:xfrm>
             <a:off x="457200" y="1938528"/>
             <a:ext cx="11277599" cy="4267200"/>
           </a:xfrm>
@@ -8125,7 +10031,577 @@
               </a:defRPr>
             </a:pPr>
             <a:r>
-              <a:t>02 / 17</a:t>
+              <a:t>20 / 22</a:t>
+            </a:r>
+          </a:p>
+        </p:txBody>
+      </p:sp>
+    </p:spTree>
+  </p:cSld>
+  <p:clrMapOvr>
+    <a:masterClrMapping/>
+  </p:clrMapOvr>
+</p:sld>
+</file>
+
+<file path=ppt/slides/slide21.xml><?xml version="1.0" encoding="utf-8"?>
+<p:sld xmlns:a="http://schemas.openxmlformats.org/drawingml/2006/main" xmlns:p="http://schemas.openxmlformats.org/presentationml/2006/main" xmlns:r="http://schemas.openxmlformats.org/officeDocument/2006/relationships">
+  <p:cSld>
+    <p:spTree>
+      <p:nvGrpSpPr>
+        <p:cNvPr id="1" name=""/>
+        <p:cNvGrpSpPr/>
+        <p:nvPr/>
+      </p:nvGrpSpPr>
+      <p:grpSpPr/>
+      <p:pic>
+        <p:nvPicPr>
+          <p:cNvPr id="2" name="Picture 1" descr="background.png"/>
+          <p:cNvPicPr>
+            <a:picLocks noChangeAspect="1"/>
+          </p:cNvPicPr>
+          <p:nvPr/>
+        </p:nvPicPr>
+        <p:blipFill>
+          <a:blip r:embed="rId2"/>
+          <a:stretch>
+            <a:fillRect/>
+          </a:stretch>
+        </p:blipFill>
+        <p:spPr>
+          <a:xfrm>
+            <a:off x="0" y="0"/>
+            <a:ext cx="12191999" cy="6858000"/>
+          </a:xfrm>
+          <a:prstGeom prst="rect">
+            <a:avLst/>
+          </a:prstGeom>
+        </p:spPr>
+      </p:pic>
+      <p:pic>
+        <p:nvPicPr>
+          <p:cNvPr id="3" name="Picture 2" descr="volcano-logo.png"/>
+          <p:cNvPicPr>
+            <a:picLocks noChangeAspect="1"/>
+          </p:cNvPicPr>
+          <p:nvPr/>
+        </p:nvPicPr>
+        <p:blipFill>
+          <a:blip r:embed="rId3"/>
+          <a:stretch>
+            <a:fillRect/>
+          </a:stretch>
+        </p:blipFill>
+        <p:spPr>
+          <a:xfrm>
+            <a:off x="9921240" y="292608"/>
+            <a:ext cx="1737360" cy="289560"/>
+          </a:xfrm>
+          <a:prstGeom prst="rect">
+            <a:avLst/>
+          </a:prstGeom>
+        </p:spPr>
+      </p:pic>
+      <p:sp>
+        <p:nvSpPr>
+          <p:cNvPr id="4" name="TextBox 3"/>
+          <p:cNvSpPr txBox="1"/>
+          <p:nvPr/>
+        </p:nvSpPr>
+        <p:spPr>
+          <a:xfrm>
+            <a:off x="457200" y="292608"/>
+            <a:ext cx="9144000" cy="256032"/>
+          </a:xfrm>
+          <a:prstGeom prst="rect">
+            <a:avLst/>
+          </a:prstGeom>
+          <a:noFill/>
+        </p:spPr>
+        <p:txBody>
+          <a:bodyPr wrap="square" lIns="0" rIns="0" tIns="0" bIns="0">
+            <a:spAutoFit/>
+          </a:bodyPr>
+          <a:lstStyle/>
+          <a:p>
+            <a:pPr>
+              <a:spcAft>
+                <a:spcPts val="500"/>
+              </a:spcAft>
+              <a:defRPr sz="1100" b="1">
+                <a:solidFill>
+                  <a:srgbClr val="356696"/>
+                </a:solidFill>
+                <a:latin typeface="Liberation Sans"/>
+              </a:defRPr>
+            </a:pPr>
+            <a:r>
+              <a:t>BENCHMARK FRAMEWORK &amp; PROGRESS</a:t>
+            </a:r>
+          </a:p>
+        </p:txBody>
+      </p:sp>
+      <p:sp>
+        <p:nvSpPr>
+          <p:cNvPr id="5" name="TextBox 4"/>
+          <p:cNvSpPr txBox="1"/>
+          <p:nvPr/>
+        </p:nvSpPr>
+        <p:spPr>
+          <a:xfrm>
+            <a:off x="457200" y="804672"/>
+            <a:ext cx="11247120" cy="640080"/>
+          </a:xfrm>
+          <a:prstGeom prst="rect">
+            <a:avLst/>
+          </a:prstGeom>
+          <a:noFill/>
+        </p:spPr>
+        <p:txBody>
+          <a:bodyPr wrap="square" lIns="0" rIns="0" tIns="0" bIns="0">
+            <a:spAutoFit/>
+          </a:bodyPr>
+          <a:lstStyle/>
+          <a:p>
+            <a:pPr>
+              <a:spcAft>
+                <a:spcPts val="500"/>
+              </a:spcAft>
+              <a:defRPr sz="3100" b="1">
+                <a:solidFill>
+                  <a:srgbClr val="202D3C"/>
+                </a:solidFill>
+                <a:latin typeface="Liberation Sans"/>
+              </a:defRPr>
+            </a:pPr>
+            <a:r>
+              <a:t>Framework, Workloads, Ecosystem, Evidence</a:t>
+            </a:r>
+          </a:p>
+        </p:txBody>
+      </p:sp>
+      <p:sp>
+        <p:nvSpPr>
+          <p:cNvPr id="6" name="TextBox 5"/>
+          <p:cNvSpPr txBox="1"/>
+          <p:nvPr/>
+        </p:nvSpPr>
+        <p:spPr>
+          <a:xfrm>
+            <a:off x="475488" y="1435608"/>
+            <a:ext cx="11201400" cy="429768"/>
+          </a:xfrm>
+          <a:prstGeom prst="rect">
+            <a:avLst/>
+          </a:prstGeom>
+          <a:noFill/>
+        </p:spPr>
+        <p:txBody>
+          <a:bodyPr wrap="square" lIns="0" rIns="0" tIns="0" bIns="0">
+            <a:spAutoFit/>
+          </a:bodyPr>
+          <a:lstStyle/>
+          <a:p>
+            <a:pPr>
+              <a:spcAft>
+                <a:spcPts val="500"/>
+              </a:spcAft>
+              <a:defRPr sz="1700" b="0">
+                <a:solidFill>
+                  <a:srgbClr val="647282"/>
+                </a:solidFill>
+                <a:latin typeface="Liberation Sans"/>
+              </a:defRPr>
+            </a:pPr>
+            <a:r>
+              <a:t>Four connected pieces of the scheduling story.</a:t>
+            </a:r>
+          </a:p>
+        </p:txBody>
+      </p:sp>
+      <p:pic>
+        <p:nvPicPr>
+          <p:cNvPr id="7" name="Picture 6" descr="21-takeaways.png"/>
+          <p:cNvPicPr>
+            <a:picLocks noChangeAspect="1"/>
+          </p:cNvPicPr>
+          <p:nvPr/>
+        </p:nvPicPr>
+        <p:blipFill>
+          <a:blip r:embed="rId4"/>
+          <a:stretch>
+            <a:fillRect/>
+          </a:stretch>
+        </p:blipFill>
+        <p:spPr>
+          <a:xfrm>
+            <a:off x="457200" y="1938528"/>
+            <a:ext cx="11277599" cy="4267200"/>
+          </a:xfrm>
+          <a:prstGeom prst="rect">
+            <a:avLst/>
+          </a:prstGeom>
+        </p:spPr>
+      </p:pic>
+      <p:sp>
+        <p:nvSpPr>
+          <p:cNvPr id="8" name="TextBox 7"/>
+          <p:cNvSpPr txBox="1"/>
+          <p:nvPr/>
+        </p:nvSpPr>
+        <p:spPr>
+          <a:xfrm>
+            <a:off x="475488" y="6519672"/>
+            <a:ext cx="10515600" cy="201168"/>
+          </a:xfrm>
+          <a:prstGeom prst="rect">
+            <a:avLst/>
+          </a:prstGeom>
+          <a:noFill/>
+        </p:spPr>
+        <p:txBody>
+          <a:bodyPr wrap="square" lIns="0" rIns="0" tIns="0" bIns="0">
+            <a:spAutoFit/>
+          </a:bodyPr>
+          <a:lstStyle/>
+          <a:p>
+            <a:pPr>
+              <a:spcAft>
+                <a:spcPts val="500"/>
+              </a:spcAft>
+              <a:defRPr sz="900" b="0">
+                <a:solidFill>
+                  <a:srgbClr val="647282"/>
+                </a:solidFill>
+                <a:latin typeface="Liberation Sans"/>
+              </a:defRPr>
+            </a:pPr>
+            <a:r>
+              <a:t>Volcano  |  KubeCon + CloudNativeCon North America 2026</a:t>
+            </a:r>
+          </a:p>
+        </p:txBody>
+      </p:sp>
+      <p:sp>
+        <p:nvSpPr>
+          <p:cNvPr id="9" name="TextBox 8"/>
+          <p:cNvSpPr txBox="1"/>
+          <p:nvPr/>
+        </p:nvSpPr>
+        <p:spPr>
+          <a:xfrm>
+            <a:off x="11018520" y="6483096"/>
+            <a:ext cx="685800" cy="256032"/>
+          </a:xfrm>
+          <a:prstGeom prst="rect">
+            <a:avLst/>
+          </a:prstGeom>
+          <a:noFill/>
+        </p:spPr>
+        <p:txBody>
+          <a:bodyPr wrap="square" lIns="0" rIns="0" tIns="0" bIns="0">
+            <a:spAutoFit/>
+          </a:bodyPr>
+          <a:lstStyle/>
+          <a:p>
+            <a:pPr algn="r">
+              <a:spcAft>
+                <a:spcPts val="500"/>
+              </a:spcAft>
+              <a:defRPr sz="1100" b="0">
+                <a:solidFill>
+                  <a:srgbClr val="647282"/>
+                </a:solidFill>
+                <a:latin typeface="Liberation Sans"/>
+              </a:defRPr>
+            </a:pPr>
+            <a:r>
+              <a:t>21 / 22</a:t>
+            </a:r>
+          </a:p>
+        </p:txBody>
+      </p:sp>
+    </p:spTree>
+  </p:cSld>
+  <p:clrMapOvr>
+    <a:masterClrMapping/>
+  </p:clrMapOvr>
+</p:sld>
+</file>
+
+<file path=ppt/slides/slide22.xml><?xml version="1.0" encoding="utf-8"?>
+<p:sld xmlns:a="http://schemas.openxmlformats.org/drawingml/2006/main" xmlns:p="http://schemas.openxmlformats.org/presentationml/2006/main" xmlns:r="http://schemas.openxmlformats.org/officeDocument/2006/relationships">
+  <p:cSld>
+    <p:spTree>
+      <p:nvGrpSpPr>
+        <p:cNvPr id="1" name=""/>
+        <p:cNvGrpSpPr/>
+        <p:nvPr/>
+      </p:nvGrpSpPr>
+      <p:grpSpPr/>
+      <p:pic>
+        <p:nvPicPr>
+          <p:cNvPr id="2" name="Picture 1" descr="background.png"/>
+          <p:cNvPicPr>
+            <a:picLocks noChangeAspect="1"/>
+          </p:cNvPicPr>
+          <p:nvPr/>
+        </p:nvPicPr>
+        <p:blipFill>
+          <a:blip r:embed="rId2"/>
+          <a:stretch>
+            <a:fillRect/>
+          </a:stretch>
+        </p:blipFill>
+        <p:spPr>
+          <a:xfrm>
+            <a:off x="0" y="0"/>
+            <a:ext cx="12191999" cy="6858000"/>
+          </a:xfrm>
+          <a:prstGeom prst="rect">
+            <a:avLst/>
+          </a:prstGeom>
+        </p:spPr>
+      </p:pic>
+      <p:pic>
+        <p:nvPicPr>
+          <p:cNvPr id="3" name="Picture 2" descr="volcano-logo.png"/>
+          <p:cNvPicPr>
+            <a:picLocks noChangeAspect="1"/>
+          </p:cNvPicPr>
+          <p:nvPr/>
+        </p:nvPicPr>
+        <p:blipFill>
+          <a:blip r:embed="rId3"/>
+          <a:stretch>
+            <a:fillRect/>
+          </a:stretch>
+        </p:blipFill>
+        <p:spPr>
+          <a:xfrm>
+            <a:off x="9921240" y="292608"/>
+            <a:ext cx="1737360" cy="289560"/>
+          </a:xfrm>
+          <a:prstGeom prst="rect">
+            <a:avLst/>
+          </a:prstGeom>
+        </p:spPr>
+      </p:pic>
+      <p:sp>
+        <p:nvSpPr>
+          <p:cNvPr id="4" name="TextBox 3"/>
+          <p:cNvSpPr txBox="1"/>
+          <p:nvPr/>
+        </p:nvSpPr>
+        <p:spPr>
+          <a:xfrm>
+            <a:off x="457200" y="292608"/>
+            <a:ext cx="9144000" cy="256032"/>
+          </a:xfrm>
+          <a:prstGeom prst="rect">
+            <a:avLst/>
+          </a:prstGeom>
+          <a:noFill/>
+        </p:spPr>
+        <p:txBody>
+          <a:bodyPr wrap="square" lIns="0" rIns="0" tIns="0" bIns="0">
+            <a:spAutoFit/>
+          </a:bodyPr>
+          <a:lstStyle/>
+          <a:p>
+            <a:pPr>
+              <a:spcAft>
+                <a:spcPts val="500"/>
+              </a:spcAft>
+              <a:defRPr sz="1100" b="1">
+                <a:solidFill>
+                  <a:srgbClr val="356696"/>
+                </a:solidFill>
+                <a:latin typeface="Liberation Sans"/>
+              </a:defRPr>
+            </a:pPr>
+            <a:r>
+              <a:t>MAINTAINER TRACK</a:t>
+            </a:r>
+          </a:p>
+        </p:txBody>
+      </p:sp>
+      <p:sp>
+        <p:nvSpPr>
+          <p:cNvPr id="5" name="TextBox 4"/>
+          <p:cNvSpPr txBox="1"/>
+          <p:nvPr/>
+        </p:nvSpPr>
+        <p:spPr>
+          <a:xfrm>
+            <a:off x="457200" y="804672"/>
+            <a:ext cx="11247120" cy="640080"/>
+          </a:xfrm>
+          <a:prstGeom prst="rect">
+            <a:avLst/>
+          </a:prstGeom>
+          <a:noFill/>
+        </p:spPr>
+        <p:txBody>
+          <a:bodyPr wrap="square" lIns="0" rIns="0" tIns="0" bIns="0">
+            <a:spAutoFit/>
+          </a:bodyPr>
+          <a:lstStyle/>
+          <a:p>
+            <a:pPr>
+              <a:spcAft>
+                <a:spcPts val="500"/>
+              </a:spcAft>
+              <a:defRPr sz="3100" b="1">
+                <a:solidFill>
+                  <a:srgbClr val="202D3C"/>
+                </a:solidFill>
+                <a:latin typeface="Liberation Sans"/>
+              </a:defRPr>
+            </a:pPr>
+            <a:r>
+              <a:t>Questions &amp; Discussion</a:t>
+            </a:r>
+          </a:p>
+        </p:txBody>
+      </p:sp>
+      <p:sp>
+        <p:nvSpPr>
+          <p:cNvPr id="6" name="TextBox 5"/>
+          <p:cNvSpPr txBox="1"/>
+          <p:nvPr/>
+        </p:nvSpPr>
+        <p:spPr>
+          <a:xfrm>
+            <a:off x="475488" y="1435608"/>
+            <a:ext cx="11201400" cy="429768"/>
+          </a:xfrm>
+          <a:prstGeom prst="rect">
+            <a:avLst/>
+          </a:prstGeom>
+          <a:noFill/>
+        </p:spPr>
+        <p:txBody>
+          <a:bodyPr wrap="square" lIns="0" rIns="0" tIns="0" bIns="0">
+            <a:spAutoFit/>
+          </a:bodyPr>
+          <a:lstStyle/>
+          <a:p>
+            <a:pPr>
+              <a:spcAft>
+                <a:spcPts val="500"/>
+              </a:spcAft>
+              <a:defRPr sz="1700" b="0">
+                <a:solidFill>
+                  <a:srgbClr val="647282"/>
+                </a:solidFill>
+                <a:latin typeface="Liberation Sans"/>
+              </a:defRPr>
+            </a:pPr>
+            <a:r>
+              <a:t>Workload shapes, integration feedback, and reproducible observations are welcome.</a:t>
+            </a:r>
+          </a:p>
+        </p:txBody>
+      </p:sp>
+      <p:pic>
+        <p:nvPicPr>
+          <p:cNvPr id="7" name="Picture 6" descr="22-questions.png"/>
+          <p:cNvPicPr>
+            <a:picLocks noChangeAspect="1"/>
+          </p:cNvPicPr>
+          <p:nvPr/>
+        </p:nvPicPr>
+        <p:blipFill>
+          <a:blip r:embed="rId4"/>
+          <a:stretch>
+            <a:fillRect/>
+          </a:stretch>
+        </p:blipFill>
+        <p:spPr>
+          <a:xfrm>
+            <a:off x="457200" y="1938528"/>
+            <a:ext cx="11277599" cy="4267200"/>
+          </a:xfrm>
+          <a:prstGeom prst="rect">
+            <a:avLst/>
+          </a:prstGeom>
+        </p:spPr>
+      </p:pic>
+      <p:sp>
+        <p:nvSpPr>
+          <p:cNvPr id="8" name="TextBox 7"/>
+          <p:cNvSpPr txBox="1"/>
+          <p:nvPr/>
+        </p:nvSpPr>
+        <p:spPr>
+          <a:xfrm>
+            <a:off x="475488" y="6519672"/>
+            <a:ext cx="10515600" cy="201168"/>
+          </a:xfrm>
+          <a:prstGeom prst="rect">
+            <a:avLst/>
+          </a:prstGeom>
+          <a:noFill/>
+        </p:spPr>
+        <p:txBody>
+          <a:bodyPr wrap="square" lIns="0" rIns="0" tIns="0" bIns="0">
+            <a:spAutoFit/>
+          </a:bodyPr>
+          <a:lstStyle/>
+          <a:p>
+            <a:pPr>
+              <a:spcAft>
+                <a:spcPts val="500"/>
+              </a:spcAft>
+              <a:defRPr sz="900" b="0">
+                <a:solidFill>
+                  <a:srgbClr val="647282"/>
+                </a:solidFill>
+                <a:latin typeface="Liberation Sans"/>
+              </a:defRPr>
+            </a:pPr>
+            <a:r>
+              <a:t>Volcano  |  KubeCon + CloudNativeCon North America 2026</a:t>
+            </a:r>
+          </a:p>
+        </p:txBody>
+      </p:sp>
+      <p:sp>
+        <p:nvSpPr>
+          <p:cNvPr id="9" name="TextBox 8"/>
+          <p:cNvSpPr txBox="1"/>
+          <p:nvPr/>
+        </p:nvSpPr>
+        <p:spPr>
+          <a:xfrm>
+            <a:off x="11018520" y="6483096"/>
+            <a:ext cx="685800" cy="256032"/>
+          </a:xfrm>
+          <a:prstGeom prst="rect">
+            <a:avLst/>
+          </a:prstGeom>
+          <a:noFill/>
+        </p:spPr>
+        <p:txBody>
+          <a:bodyPr wrap="square" lIns="0" rIns="0" tIns="0" bIns="0">
+            <a:spAutoFit/>
+          </a:bodyPr>
+          <a:lstStyle/>
+          <a:p>
+            <a:pPr algn="r">
+              <a:spcAft>
+                <a:spcPts val="500"/>
+              </a:spcAft>
+              <a:defRPr sz="1100" b="0">
+                <a:solidFill>
+                  <a:srgbClr val="647282"/>
+                </a:solidFill>
+                <a:latin typeface="Liberation Sans"/>
+              </a:defRPr>
+            </a:pPr>
+            <a:r>
+              <a:t>22 / 22</a:t>
             </a:r>
           </a:p>
         </p:txBody>
@@ -8150,7 +10626,7 @@
       <p:grpSpPr/>
       <p:pic>
         <p:nvPicPr>
-          <p:cNvPr id="2" name="Picture 1" descr="background.png"/>
+          <p:cNvPr id="2" name="Picture 1" descr="cover-background.png"/>
           <p:cNvPicPr>
             <a:picLocks noChangeAspect="1"/>
           </p:cNvPicPr>
@@ -8230,7 +10706,7 @@
               </a:defRPr>
             </a:pPr>
             <a:r>
-              <a:t>01  UNIFIED SCHEDULING</a:t>
+              <a:t>UNIFIED SCHEDULING</a:t>
             </a:r>
           </a:p>
         </p:txBody>
@@ -8243,8 +10719,8 @@
         </p:nvSpPr>
         <p:spPr>
           <a:xfrm>
-            <a:off x="457200" y="804672"/>
-            <a:ext cx="11247120" cy="640080"/>
+            <a:off x="594360" y="1298448"/>
+            <a:ext cx="1828800" cy="640080"/>
           </a:xfrm>
           <a:prstGeom prst="rect">
             <a:avLst/>
@@ -8261,7 +10737,46 @@
               <a:spcAft>
                 <a:spcPts val="500"/>
               </a:spcAft>
-              <a:defRPr sz="3100" b="1">
+              <a:defRPr sz="3800" b="1">
+                <a:solidFill>
+                  <a:srgbClr val="356696"/>
+                </a:solidFill>
+                <a:latin typeface="Liberation Sans"/>
+              </a:defRPr>
+            </a:pPr>
+            <a:r>
+              <a:t>01</a:t>
+            </a:r>
+          </a:p>
+        </p:txBody>
+      </p:sp>
+      <p:sp>
+        <p:nvSpPr>
+          <p:cNvPr id="6" name="TextBox 5"/>
+          <p:cNvSpPr txBox="1"/>
+          <p:nvPr/>
+        </p:nvSpPr>
+        <p:spPr>
+          <a:xfrm>
+            <a:off x="594360" y="2084831"/>
+            <a:ext cx="7863840" cy="1508760"/>
+          </a:xfrm>
+          <a:prstGeom prst="rect">
+            <a:avLst/>
+          </a:prstGeom>
+          <a:noFill/>
+        </p:spPr>
+        <p:txBody>
+          <a:bodyPr wrap="square" lIns="0" rIns="0" tIns="0" bIns="0">
+            <a:spAutoFit/>
+          </a:bodyPr>
+          <a:lstStyle/>
+          <a:p>
+            <a:pPr>
+              <a:spcAft>
+                <a:spcPts val="500"/>
+              </a:spcAft>
+              <a:defRPr sz="4100" b="1">
                 <a:solidFill>
                   <a:srgbClr val="202D3C"/>
                 </a:solidFill>
@@ -8269,21 +10784,21 @@
               </a:defRPr>
             </a:pPr>
             <a:r>
-              <a:t>A Coordinated Scheduling Framework</a:t>
-            </a:r>
-          </a:p>
-        </p:txBody>
-      </p:sp>
-      <p:sp>
-        <p:nvSpPr>
-          <p:cNvPr id="6" name="TextBox 5"/>
-          <p:cNvSpPr txBox="1"/>
-          <p:nvPr/>
-        </p:nvSpPr>
-        <p:spPr>
-          <a:xfrm>
-            <a:off x="475488" y="1435608"/>
-            <a:ext cx="11201400" cy="429768"/>
+              <a:t>Unified scheduling</a:t>
+            </a:r>
+          </a:p>
+        </p:txBody>
+      </p:sp>
+      <p:sp>
+        <p:nvSpPr>
+          <p:cNvPr id="7" name="TextBox 6"/>
+          <p:cNvSpPr txBox="1"/>
+          <p:nvPr/>
+        </p:nvSpPr>
+        <p:spPr>
+          <a:xfrm>
+            <a:off x="621792" y="4041648"/>
+            <a:ext cx="9966960" cy="548640"/>
           </a:xfrm>
           <a:prstGeom prst="rect">
             <a:avLst/>
@@ -8300,7 +10815,46 @@
               <a:spcAft>
                 <a:spcPts val="500"/>
               </a:spcAft>
-              <a:defRPr sz="1700" b="0">
+              <a:defRPr sz="2400" b="0">
+                <a:solidFill>
+                  <a:srgbClr val="356696"/>
+                </a:solidFill>
+                <a:latin typeface="Liberation Sans"/>
+              </a:defRPr>
+            </a:pPr>
+            <a:r>
+              <a:t>Different paths. Shared infrastructure.</a:t>
+            </a:r>
+          </a:p>
+        </p:txBody>
+      </p:sp>
+      <p:sp>
+        <p:nvSpPr>
+          <p:cNvPr id="8" name="TextBox 7"/>
+          <p:cNvSpPr txBox="1"/>
+          <p:nvPr/>
+        </p:nvSpPr>
+        <p:spPr>
+          <a:xfrm>
+            <a:off x="621792" y="4791456"/>
+            <a:ext cx="10607040" cy="594360"/>
+          </a:xfrm>
+          <a:prstGeom prst="rect">
+            <a:avLst/>
+          </a:prstGeom>
+          <a:noFill/>
+        </p:spPr>
+        <p:txBody>
+          <a:bodyPr wrap="square" lIns="0" rIns="0" tIns="0" bIns="0">
+            <a:spAutoFit/>
+          </a:bodyPr>
+          <a:lstStyle/>
+          <a:p>
+            <a:pPr>
+              <a:spcAft>
+                <a:spcPts val="500"/>
+              </a:spcAft>
+              <a:defRPr sz="2100" b="0">
                 <a:solidFill>
                   <a:srgbClr val="647282"/>
                 </a:solidFill>
@@ -8308,38 +10862,170 @@
               </a:defRPr>
             </a:pPr>
             <a:r>
-              <a:t>Separate workload paths, coordinated node access, and local worker conflict handling.</a:t>
-            </a:r>
-          </a:p>
-        </p:txBody>
-      </p:sp>
-      <p:pic>
-        <p:nvPicPr>
-          <p:cNvPr id="7" name="Picture 6" descr="03-unified-framework.png"/>
-          <p:cNvPicPr>
-            <a:picLocks noChangeAspect="1"/>
-          </p:cNvPicPr>
-          <p:nvPr/>
-        </p:nvPicPr>
-        <p:blipFill>
-          <a:blip r:embed="rId4"/>
-          <a:stretch>
-            <a:fillRect/>
-          </a:stretch>
-        </p:blipFill>
-        <p:spPr>
-          <a:xfrm>
-            <a:off x="457200" y="1938528"/>
-            <a:ext cx="11277599" cy="4267200"/>
-          </a:xfrm>
-          <a:prstGeom prst="rect">
-            <a:avLst/>
-          </a:prstGeom>
-        </p:spPr>
-      </p:pic>
-      <p:sp>
-        <p:nvSpPr>
-          <p:cNvPr id="8" name="TextBox 7"/>
+              <a:t>How do schedulers coordinate node access?</a:t>
+            </a:r>
+          </a:p>
+        </p:txBody>
+      </p:sp>
+      <p:sp>
+        <p:nvSpPr>
+          <p:cNvPr id="9" name="TextBox 8"/>
+          <p:cNvSpPr txBox="1"/>
+          <p:nvPr/>
+        </p:nvSpPr>
+        <p:spPr>
+          <a:xfrm>
+            <a:off x="8503920" y="1554480"/>
+            <a:ext cx="3154680" cy="621792"/>
+          </a:xfrm>
+          <a:prstGeom prst="rect">
+            <a:avLst/>
+          </a:prstGeom>
+          <a:noFill/>
+        </p:spPr>
+        <p:txBody>
+          <a:bodyPr wrap="square" lIns="0" rIns="0" tIns="0" bIns="0">
+            <a:spAutoFit/>
+          </a:bodyPr>
+          <a:lstStyle/>
+          <a:p>
+            <a:pPr>
+              <a:spcAft>
+                <a:spcPts val="500"/>
+              </a:spcAft>
+              <a:defRPr sz="1500" b="1">
+                <a:solidFill>
+                  <a:srgbClr val="356696"/>
+                </a:solidFill>
+                <a:latin typeface="Liberation Sans"/>
+              </a:defRPr>
+            </a:pPr>
+            <a:r>
+              <a:t>01  Unified scheduling</a:t>
+            </a:r>
+          </a:p>
+        </p:txBody>
+      </p:sp>
+      <p:sp>
+        <p:nvSpPr>
+          <p:cNvPr id="10" name="TextBox 9"/>
+          <p:cNvSpPr txBox="1"/>
+          <p:nvPr/>
+        </p:nvSpPr>
+        <p:spPr>
+          <a:xfrm>
+            <a:off x="8503920" y="2249424"/>
+            <a:ext cx="3154680" cy="621792"/>
+          </a:xfrm>
+          <a:prstGeom prst="rect">
+            <a:avLst/>
+          </a:prstGeom>
+          <a:noFill/>
+        </p:spPr>
+        <p:txBody>
+          <a:bodyPr wrap="square" lIns="0" rIns="0" tIns="0" bIns="0">
+            <a:spAutoFit/>
+          </a:bodyPr>
+          <a:lstStyle/>
+          <a:p>
+            <a:pPr>
+              <a:spcAft>
+                <a:spcPts val="500"/>
+              </a:spcAft>
+              <a:defRPr sz="1500" b="0">
+                <a:solidFill>
+                  <a:srgbClr val="647282"/>
+                </a:solidFill>
+                <a:latin typeface="Liberation Sans"/>
+              </a:defRPr>
+            </a:pPr>
+            <a:r>
+              <a:t>02  Multi-level gang &amp; network topology</a:t>
+            </a:r>
+          </a:p>
+        </p:txBody>
+      </p:sp>
+      <p:sp>
+        <p:nvSpPr>
+          <p:cNvPr id="11" name="TextBox 10"/>
+          <p:cNvSpPr txBox="1"/>
+          <p:nvPr/>
+        </p:nvSpPr>
+        <p:spPr>
+          <a:xfrm>
+            <a:off x="8503920" y="2944368"/>
+            <a:ext cx="3154680" cy="621792"/>
+          </a:xfrm>
+          <a:prstGeom prst="rect">
+            <a:avLst/>
+          </a:prstGeom>
+          <a:noFill/>
+        </p:spPr>
+        <p:txBody>
+          <a:bodyPr wrap="square" lIns="0" rIns="0" tIns="0" bIns="0">
+            <a:spAutoFit/>
+          </a:bodyPr>
+          <a:lstStyle/>
+          <a:p>
+            <a:pPr>
+              <a:spcAft>
+                <a:spcPts val="500"/>
+              </a:spcAft>
+              <a:defRPr sz="1500" b="0">
+                <a:solidFill>
+                  <a:srgbClr val="647282"/>
+                </a:solidFill>
+                <a:latin typeface="Liberation Sans"/>
+              </a:defRPr>
+            </a:pPr>
+            <a:r>
+              <a:t>03  Ecosystem</a:t>
+            </a:r>
+          </a:p>
+        </p:txBody>
+      </p:sp>
+      <p:sp>
+        <p:nvSpPr>
+          <p:cNvPr id="12" name="TextBox 11"/>
+          <p:cNvSpPr txBox="1"/>
+          <p:nvPr/>
+        </p:nvSpPr>
+        <p:spPr>
+          <a:xfrm>
+            <a:off x="8503920" y="3639312"/>
+            <a:ext cx="3154680" cy="621792"/>
+          </a:xfrm>
+          <a:prstGeom prst="rect">
+            <a:avLst/>
+          </a:prstGeom>
+          <a:noFill/>
+        </p:spPr>
+        <p:txBody>
+          <a:bodyPr wrap="square" lIns="0" rIns="0" tIns="0" bIns="0">
+            <a:spAutoFit/>
+          </a:bodyPr>
+          <a:lstStyle/>
+          <a:p>
+            <a:pPr>
+              <a:spcAft>
+                <a:spcPts val="500"/>
+              </a:spcAft>
+              <a:defRPr sz="1500" b="0">
+                <a:solidFill>
+                  <a:srgbClr val="647282"/>
+                </a:solidFill>
+                <a:latin typeface="Liberation Sans"/>
+              </a:defRPr>
+            </a:pPr>
+            <a:r>
+              <a:t>04  Benchmark framework &amp; progress</a:t>
+            </a:r>
+          </a:p>
+        </p:txBody>
+      </p:sp>
+      <p:sp>
+        <p:nvSpPr>
+          <p:cNvPr id="13" name="TextBox 12"/>
           <p:cNvSpPr txBox="1"/>
           <p:nvPr/>
         </p:nvSpPr>
@@ -8378,7 +11064,7 @@
       </p:sp>
       <p:sp>
         <p:nvSpPr>
-          <p:cNvPr id="9" name="TextBox 8"/>
+          <p:cNvPr id="14" name="TextBox 13"/>
           <p:cNvSpPr txBox="1"/>
           <p:nvPr/>
         </p:nvSpPr>
@@ -8410,7 +11096,7 @@
               </a:defRPr>
             </a:pPr>
             <a:r>
-              <a:t>03 / 17</a:t>
+              <a:t>03 / 22</a:t>
             </a:r>
           </a:p>
         </p:txBody>
@@ -8515,7 +11201,7 @@
               </a:defRPr>
             </a:pPr>
             <a:r>
-              <a:t>01  UNIFIED SCHEDULING</a:t>
+              <a:t>UNIFIED SCHEDULING</a:t>
             </a:r>
           </a:p>
         </p:txBody>
@@ -8554,7 +11240,7 @@
               </a:defRPr>
             </a:pPr>
             <a:r>
-              <a:t>NodeShard: Coordinating Node Access</a:t>
+              <a:t>Different Workloads, Shared Infrastructure</a:t>
             </a:r>
           </a:p>
         </p:txBody>
@@ -8593,14 +11279,14 @@
               </a:defRPr>
             </a:pPr>
             <a:r>
-              <a:t>A shard change affects future placement; running Pods do not move with the shard.</a:t>
+              <a:t>Training, inference, and agent applications put different demands on the same cluster.</a:t>
             </a:r>
           </a:p>
         </p:txBody>
       </p:sp>
       <p:pic>
         <p:nvPicPr>
-          <p:cNvPr id="7" name="Picture 6" descr="04-nodeshard-handoff.png"/>
+          <p:cNvPr id="7" name="Picture 6" descr="04-workload-demands.png"/>
           <p:cNvPicPr>
             <a:picLocks noChangeAspect="1"/>
           </p:cNvPicPr>
@@ -8695,7 +11381,7 @@
               </a:defRPr>
             </a:pPr>
             <a:r>
-              <a:t>04 / 17</a:t>
+              <a:t>04 / 22</a:t>
             </a:r>
           </a:p>
         </p:txBody>
@@ -8800,7 +11486,7 @@
               </a:defRPr>
             </a:pPr>
             <a:r>
-              <a:t>01  UNIFIED SCHEDULING</a:t>
+              <a:t>UNIFIED SCHEDULING</a:t>
             </a:r>
           </a:p>
         </p:txBody>
@@ -8839,7 +11525,7 @@
               </a:defRPr>
             </a:pPr>
             <a:r>
-              <a:t>Available Nodes Are Only the Beginning</a:t>
+              <a:t>A Coordinated Scheduling Framework</a:t>
             </a:r>
           </a:p>
         </p:txBody>
@@ -8878,14 +11564,14 @@
               </a:defRPr>
             </a:pPr>
             <a:r>
-              <a:t>Replica identity and topology matter alongside resource quantity.</a:t>
+              <a:t>Specialized scheduling paths coordinate through NodeShard.</a:t>
             </a:r>
           </a:p>
         </p:txBody>
       </p:sp>
       <p:pic>
         <p:nvPicPr>
-          <p:cNvPr id="7" name="Picture 6" descr="05-complete-groups.png"/>
+          <p:cNvPr id="7" name="Picture 6" descr="05-unified-architecture.png"/>
           <p:cNvPicPr>
             <a:picLocks noChangeAspect="1"/>
           </p:cNvPicPr>
@@ -8980,7 +11666,7 @@
               </a:defRPr>
             </a:pPr>
             <a:r>
-              <a:t>05 / 17</a:t>
+              <a:t>05 / 22</a:t>
             </a:r>
           </a:p>
         </p:txBody>
@@ -9085,7 +11771,7 @@
               </a:defRPr>
             </a:pPr>
             <a:r>
-              <a:t>02  MULTI-LEVEL GANG &amp; NETWORK TOPOLOGY</a:t>
+              <a:t>UNIFIED SCHEDULING</a:t>
             </a:r>
           </a:p>
         </p:txBody>
@@ -9124,7 +11810,7 @@
               </a:defRPr>
             </a:pPr>
             <a:r>
-              <a:t>PodGroup and SubGroup: Complete Replicas</a:t>
+              <a:t>NodeShard: Desired Nodes and Current Use</a:t>
             </a:r>
           </a:p>
         </p:txBody>
@@ -9163,14 +11849,14 @@
               </a:defRPr>
             </a:pPr>
             <a:r>
-              <a:t>Use role and replica identity to describe what must be scheduled together.</a:t>
+              <a:t>Changing a shard coordinates future placement; it does not migrate running Pods.</a:t>
             </a:r>
           </a:p>
         </p:txBody>
       </p:sp>
       <p:pic>
         <p:nvPicPr>
-          <p:cNvPr id="7" name="Picture 6" descr="06-podgroup-subgroup.png"/>
+          <p:cNvPr id="7" name="Picture 6" descr="06-nodeshard.png"/>
           <p:cNvPicPr>
             <a:picLocks noChangeAspect="1"/>
           </p:cNvPicPr>
@@ -9265,7 +11951,7 @@
               </a:defRPr>
             </a:pPr>
             <a:r>
-              <a:t>06 / 17</a:t>
+              <a:t>06 / 22</a:t>
             </a:r>
           </a:p>
         </p:txBody>
@@ -9290,7 +11976,7 @@
       <p:grpSpPr/>
       <p:pic>
         <p:nvPicPr>
-          <p:cNvPr id="2" name="Picture 1" descr="background.png"/>
+          <p:cNvPr id="2" name="Picture 1" descr="cover-background.png"/>
           <p:cNvPicPr>
             <a:picLocks noChangeAspect="1"/>
           </p:cNvPicPr>
@@ -9370,7 +12056,7 @@
               </a:defRPr>
             </a:pPr>
             <a:r>
-              <a:t>02  MULTI-LEVEL GANG &amp; NETWORK TOPOLOGY</a:t>
+              <a:t>MULTI-LEVEL GANG &amp; NETWORK TOPOLOGY</a:t>
             </a:r>
           </a:p>
         </p:txBody>
@@ -9383,8 +12069,8 @@
         </p:nvSpPr>
         <p:spPr>
           <a:xfrm>
-            <a:off x="457200" y="804672"/>
-            <a:ext cx="11247120" cy="640080"/>
+            <a:off x="594360" y="1298448"/>
+            <a:ext cx="1828800" cy="640080"/>
           </a:xfrm>
           <a:prstGeom prst="rect">
             <a:avLst/>
@@ -9401,7 +12087,46 @@
               <a:spcAft>
                 <a:spcPts val="500"/>
               </a:spcAft>
-              <a:defRPr sz="3100" b="1">
+              <a:defRPr sz="3800" b="1">
+                <a:solidFill>
+                  <a:srgbClr val="356696"/>
+                </a:solidFill>
+                <a:latin typeface="Liberation Sans"/>
+              </a:defRPr>
+            </a:pPr>
+            <a:r>
+              <a:t>02</a:t>
+            </a:r>
+          </a:p>
+        </p:txBody>
+      </p:sp>
+      <p:sp>
+        <p:nvSpPr>
+          <p:cNvPr id="6" name="TextBox 5"/>
+          <p:cNvSpPr txBox="1"/>
+          <p:nvPr/>
+        </p:nvSpPr>
+        <p:spPr>
+          <a:xfrm>
+            <a:off x="594360" y="2084831"/>
+            <a:ext cx="7863840" cy="1508760"/>
+          </a:xfrm>
+          <a:prstGeom prst="rect">
+            <a:avLst/>
+          </a:prstGeom>
+          <a:noFill/>
+        </p:spPr>
+        <p:txBody>
+          <a:bodyPr wrap="square" lIns="0" rIns="0" tIns="0" bIns="0">
+            <a:spAutoFit/>
+          </a:bodyPr>
+          <a:lstStyle/>
+          <a:p>
+            <a:pPr>
+              <a:spcAft>
+                <a:spcPts val="500"/>
+              </a:spcAft>
+              <a:defRPr sz="4100" b="1">
                 <a:solidFill>
                   <a:srgbClr val="202D3C"/>
                 </a:solidFill>
@@ -9409,38 +12134,93 @@
               </a:defRPr>
             </a:pPr>
             <a:r>
-              <a:t>HyperNode: Expressing Topology Domains</a:t>
-            </a:r>
-          </a:p>
-        </p:txBody>
-      </p:sp>
-      <p:sp>
-        <p:nvSpPr>
-          <p:cNvPr id="6" name="TextBox 5"/>
-          <p:cNvSpPr txBox="1"/>
-          <p:nvPr/>
-        </p:nvSpPr>
-        <p:spPr>
-          <a:xfrm>
-            <a:off x="475488" y="1435608"/>
-            <a:ext cx="11201400" cy="429768"/>
-          </a:xfrm>
-          <a:prstGeom prst="rect">
-            <a:avLst/>
-          </a:prstGeom>
-          <a:noFill/>
-        </p:spPr>
-        <p:txBody>
-          <a:bodyPr wrap="square" lIns="0" rIns="0" tIns="0" bIns="0">
-            <a:spAutoFit/>
-          </a:bodyPr>
-          <a:lstStyle/>
+              <a:t>Multi-level gang</a:t>
+            </a:r>
+          </a:p>
           <a:p>
             <a:pPr>
               <a:spcAft>
                 <a:spcPts val="500"/>
               </a:spcAft>
-              <a:defRPr sz="1700" b="0">
+              <a:defRPr sz="4100" b="1">
+                <a:solidFill>
+                  <a:srgbClr val="202D3C"/>
+                </a:solidFill>
+                <a:latin typeface="Liberation Sans"/>
+              </a:defRPr>
+            </a:pPr>
+            <a:r>
+              <a:t>&amp; network topology</a:t>
+            </a:r>
+          </a:p>
+        </p:txBody>
+      </p:sp>
+      <p:sp>
+        <p:nvSpPr>
+          <p:cNvPr id="7" name="TextBox 6"/>
+          <p:cNvSpPr txBox="1"/>
+          <p:nvPr/>
+        </p:nvSpPr>
+        <p:spPr>
+          <a:xfrm>
+            <a:off x="621792" y="4041648"/>
+            <a:ext cx="9966960" cy="548640"/>
+          </a:xfrm>
+          <a:prstGeom prst="rect">
+            <a:avLst/>
+          </a:prstGeom>
+          <a:noFill/>
+        </p:spPr>
+        <p:txBody>
+          <a:bodyPr wrap="square" lIns="0" rIns="0" tIns="0" bIns="0">
+            <a:spAutoFit/>
+          </a:bodyPr>
+          <a:lstStyle/>
+          <a:p>
+            <a:pPr>
+              <a:spcAft>
+                <a:spcPts val="500"/>
+              </a:spcAft>
+              <a:defRPr sz="2400" b="0">
+                <a:solidFill>
+                  <a:srgbClr val="356696"/>
+                </a:solidFill>
+                <a:latin typeface="Liberation Sans"/>
+              </a:defRPr>
+            </a:pPr>
+            <a:r>
+              <a:t>From available nodes to runnable workloads.</a:t>
+            </a:r>
+          </a:p>
+        </p:txBody>
+      </p:sp>
+      <p:sp>
+        <p:nvSpPr>
+          <p:cNvPr id="8" name="TextBox 7"/>
+          <p:cNvSpPr txBox="1"/>
+          <p:nvPr/>
+        </p:nvSpPr>
+        <p:spPr>
+          <a:xfrm>
+            <a:off x="621792" y="4791456"/>
+            <a:ext cx="10607040" cy="594360"/>
+          </a:xfrm>
+          <a:prstGeom prst="rect">
+            <a:avLst/>
+          </a:prstGeom>
+          <a:noFill/>
+        </p:spPr>
+        <p:txBody>
+          <a:bodyPr wrap="square" lIns="0" rIns="0" tIns="0" bIns="0">
+            <a:spAutoFit/>
+          </a:bodyPr>
+          <a:lstStyle/>
+          <a:p>
+            <a:pPr>
+              <a:spcAft>
+                <a:spcPts val="500"/>
+              </a:spcAft>
+              <a:defRPr sz="2100" b="0">
                 <a:solidFill>
                   <a:srgbClr val="647282"/>
                 </a:solidFill>
@@ -9448,38 +12228,170 @@
               </a:defRPr>
             </a:pPr>
             <a:r>
-              <a:t>Topology boundaries express where a group can—or should—fit.</a:t>
-            </a:r>
-          </a:p>
-        </p:txBody>
-      </p:sp>
-      <p:pic>
-        <p:nvPicPr>
-          <p:cNvPr id="7" name="Picture 6" descr="07-hypernode-hierarchy.png"/>
-          <p:cNvPicPr>
-            <a:picLocks noChangeAspect="1"/>
-          </p:cNvPicPr>
-          <p:nvPr/>
-        </p:nvPicPr>
-        <p:blipFill>
-          <a:blip r:embed="rId4"/>
-          <a:stretch>
-            <a:fillRect/>
-          </a:stretch>
-        </p:blipFill>
-        <p:spPr>
-          <a:xfrm>
-            <a:off x="457200" y="1938528"/>
-            <a:ext cx="11277599" cy="4267200"/>
-          </a:xfrm>
-          <a:prstGeom prst="rect">
-            <a:avLst/>
-          </a:prstGeom>
-        </p:spPr>
-      </p:pic>
-      <p:sp>
-        <p:nvSpPr>
-          <p:cNvPr id="8" name="TextBox 7"/>
+              <a:t>What must run together, and where should it fit?</a:t>
+            </a:r>
+          </a:p>
+        </p:txBody>
+      </p:sp>
+      <p:sp>
+        <p:nvSpPr>
+          <p:cNvPr id="9" name="TextBox 8"/>
+          <p:cNvSpPr txBox="1"/>
+          <p:nvPr/>
+        </p:nvSpPr>
+        <p:spPr>
+          <a:xfrm>
+            <a:off x="8503920" y="1554480"/>
+            <a:ext cx="3154680" cy="621792"/>
+          </a:xfrm>
+          <a:prstGeom prst="rect">
+            <a:avLst/>
+          </a:prstGeom>
+          <a:noFill/>
+        </p:spPr>
+        <p:txBody>
+          <a:bodyPr wrap="square" lIns="0" rIns="0" tIns="0" bIns="0">
+            <a:spAutoFit/>
+          </a:bodyPr>
+          <a:lstStyle/>
+          <a:p>
+            <a:pPr>
+              <a:spcAft>
+                <a:spcPts val="500"/>
+              </a:spcAft>
+              <a:defRPr sz="1500" b="0">
+                <a:solidFill>
+                  <a:srgbClr val="647282"/>
+                </a:solidFill>
+                <a:latin typeface="Liberation Sans"/>
+              </a:defRPr>
+            </a:pPr>
+            <a:r>
+              <a:t>01  Unified scheduling</a:t>
+            </a:r>
+          </a:p>
+        </p:txBody>
+      </p:sp>
+      <p:sp>
+        <p:nvSpPr>
+          <p:cNvPr id="10" name="TextBox 9"/>
+          <p:cNvSpPr txBox="1"/>
+          <p:nvPr/>
+        </p:nvSpPr>
+        <p:spPr>
+          <a:xfrm>
+            <a:off x="8503920" y="2249424"/>
+            <a:ext cx="3154680" cy="621792"/>
+          </a:xfrm>
+          <a:prstGeom prst="rect">
+            <a:avLst/>
+          </a:prstGeom>
+          <a:noFill/>
+        </p:spPr>
+        <p:txBody>
+          <a:bodyPr wrap="square" lIns="0" rIns="0" tIns="0" bIns="0">
+            <a:spAutoFit/>
+          </a:bodyPr>
+          <a:lstStyle/>
+          <a:p>
+            <a:pPr>
+              <a:spcAft>
+                <a:spcPts val="500"/>
+              </a:spcAft>
+              <a:defRPr sz="1500" b="1">
+                <a:solidFill>
+                  <a:srgbClr val="356696"/>
+                </a:solidFill>
+                <a:latin typeface="Liberation Sans"/>
+              </a:defRPr>
+            </a:pPr>
+            <a:r>
+              <a:t>02  Multi-level gang &amp; network topology</a:t>
+            </a:r>
+          </a:p>
+        </p:txBody>
+      </p:sp>
+      <p:sp>
+        <p:nvSpPr>
+          <p:cNvPr id="11" name="TextBox 10"/>
+          <p:cNvSpPr txBox="1"/>
+          <p:nvPr/>
+        </p:nvSpPr>
+        <p:spPr>
+          <a:xfrm>
+            <a:off x="8503920" y="2944368"/>
+            <a:ext cx="3154680" cy="621792"/>
+          </a:xfrm>
+          <a:prstGeom prst="rect">
+            <a:avLst/>
+          </a:prstGeom>
+          <a:noFill/>
+        </p:spPr>
+        <p:txBody>
+          <a:bodyPr wrap="square" lIns="0" rIns="0" tIns="0" bIns="0">
+            <a:spAutoFit/>
+          </a:bodyPr>
+          <a:lstStyle/>
+          <a:p>
+            <a:pPr>
+              <a:spcAft>
+                <a:spcPts val="500"/>
+              </a:spcAft>
+              <a:defRPr sz="1500" b="0">
+                <a:solidFill>
+                  <a:srgbClr val="647282"/>
+                </a:solidFill>
+                <a:latin typeface="Liberation Sans"/>
+              </a:defRPr>
+            </a:pPr>
+            <a:r>
+              <a:t>03  Ecosystem</a:t>
+            </a:r>
+          </a:p>
+        </p:txBody>
+      </p:sp>
+      <p:sp>
+        <p:nvSpPr>
+          <p:cNvPr id="12" name="TextBox 11"/>
+          <p:cNvSpPr txBox="1"/>
+          <p:nvPr/>
+        </p:nvSpPr>
+        <p:spPr>
+          <a:xfrm>
+            <a:off x="8503920" y="3639312"/>
+            <a:ext cx="3154680" cy="621792"/>
+          </a:xfrm>
+          <a:prstGeom prst="rect">
+            <a:avLst/>
+          </a:prstGeom>
+          <a:noFill/>
+        </p:spPr>
+        <p:txBody>
+          <a:bodyPr wrap="square" lIns="0" rIns="0" tIns="0" bIns="0">
+            <a:spAutoFit/>
+          </a:bodyPr>
+          <a:lstStyle/>
+          <a:p>
+            <a:pPr>
+              <a:spcAft>
+                <a:spcPts val="500"/>
+              </a:spcAft>
+              <a:defRPr sz="1500" b="0">
+                <a:solidFill>
+                  <a:srgbClr val="647282"/>
+                </a:solidFill>
+                <a:latin typeface="Liberation Sans"/>
+              </a:defRPr>
+            </a:pPr>
+            <a:r>
+              <a:t>04  Benchmark framework &amp; progress</a:t>
+            </a:r>
+          </a:p>
+        </p:txBody>
+      </p:sp>
+      <p:sp>
+        <p:nvSpPr>
+          <p:cNvPr id="13" name="TextBox 12"/>
           <p:cNvSpPr txBox="1"/>
           <p:nvPr/>
         </p:nvSpPr>
@@ -9518,7 +12430,7 @@
       </p:sp>
       <p:sp>
         <p:nvSpPr>
-          <p:cNvPr id="9" name="TextBox 8"/>
+          <p:cNvPr id="14" name="TextBox 13"/>
           <p:cNvSpPr txBox="1"/>
           <p:nvPr/>
         </p:nvSpPr>
@@ -9550,7 +12462,7 @@
               </a:defRPr>
             </a:pPr>
             <a:r>
-              <a:t>07 / 17</a:t>
+              <a:t>07 / 22</a:t>
             </a:r>
           </a:p>
         </p:txBody>
@@ -9655,7 +12567,7 @@
               </a:defRPr>
             </a:pPr>
             <a:r>
-              <a:t>02  MULTI-LEVEL GANG &amp; NETWORK TOPOLOGY</a:t>
+              <a:t>MULTI-LEVEL GANG &amp; NETWORK TOPOLOGY</a:t>
             </a:r>
           </a:p>
         </p:txBody>
@@ -9694,7 +12606,7 @@
               </a:defRPr>
             </a:pPr>
             <a:r>
-              <a:t>Place Groups at Different Topology Levels</a:t>
+              <a:t>PodGroup and SubGroup: Preserve Workload Structure</a:t>
             </a:r>
           </a:p>
         </p:txBody>
@@ -9733,14 +12645,14 @@
               </a:defRPr>
             </a:pPr>
             <a:r>
-              <a:t>Keep the service instance local while preserving each complete replica.</a:t>
+              <a:t>Gang requirements apply to the workload and to its complete subgroups.</a:t>
             </a:r>
           </a:p>
         </p:txBody>
       </p:sp>
       <p:pic>
         <p:nvPicPr>
-          <p:cNvPr id="7" name="Picture 6" descr="08-multilevel-topology.png"/>
+          <p:cNvPr id="7" name="Picture 6" descr="08-group-structure.png"/>
           <p:cNvPicPr>
             <a:picLocks noChangeAspect="1"/>
           </p:cNvPicPr>
@@ -9835,7 +12747,7 @@
               </a:defRPr>
             </a:pPr>
             <a:r>
-              <a:t>08 / 17</a:t>
+              <a:t>08 / 22</a:t>
             </a:r>
           </a:p>
         </p:txBody>
@@ -9940,7 +12852,7 @@
               </a:defRPr>
             </a:pPr>
             <a:r>
-              <a:t>02  MULTI-LEVEL GANG &amp; NETWORK TOPOLOGY</a:t>
+              <a:t>MULTI-LEVEL GANG &amp; NETWORK TOPOLOGY</a:t>
             </a:r>
           </a:p>
         </p:txBody>
@@ -9971,7 +12883,7 @@
               <a:spcAft>
                 <a:spcPts val="500"/>
               </a:spcAft>
-              <a:defRPr sz="3100" b="1">
+              <a:defRPr sz="2850" b="1">
                 <a:solidFill>
                   <a:srgbClr val="202D3C"/>
                 </a:solidFill>
@@ -9979,7 +12891,7 @@
               </a:defRPr>
             </a:pPr>
             <a:r>
-              <a:t>Keep Each Instance Together, Place Instances Apart</a:t>
+              <a:t>HyperNode: From Physical Fabric to Scheduling Domains</a:t>
             </a:r>
           </a:p>
         </p:txBody>
@@ -10018,14 +12930,14 @@
               </a:defRPr>
             </a:pPr>
             <a:r>
-              <a:t>Combine group-local topology with PodGroup anti-affinity.</a:t>
+              <a:t>A parent HyperNode groups child HyperNodes; a leaf groups Kubernetes Nodes.</a:t>
             </a:r>
           </a:p>
         </p:txBody>
       </p:sp>
       <p:pic>
         <p:nvPicPr>
-          <p:cNvPr id="7" name="Picture 6" descr="09-podgroup-anti-affinity.png"/>
+          <p:cNvPr id="7" name="Picture 6" descr="09-hypernode-api.png"/>
           <p:cNvPicPr>
             <a:picLocks noChangeAspect="1"/>
           </p:cNvPicPr>
@@ -10120,7 +13032,7 @@
               </a:defRPr>
             </a:pPr>
             <a:r>
-              <a:t>09 / 17</a:t>
+              <a:t>09 / 22</a:t>
             </a:r>
           </a:p>
         </p:txBody>

--- a/docs/ppt/Volcano_KubeCon_NA_2026.pptx
+++ b/docs/ppt/Volcano_KubeCon_NA_2026.pptx
@@ -5558,7 +5558,7 @@
               </a:spcAft>
               <a:defRPr sz="1100" b="1">
                 <a:solidFill>
-                  <a:srgbClr val="356696"/>
+                  <a:srgbClr val="164F89"/>
                 </a:solidFill>
                 <a:latin typeface="Liberation Sans"/>
               </a:defRPr>
@@ -5597,7 +5597,7 @@
               </a:spcAft>
               <a:defRPr sz="4300" b="1">
                 <a:solidFill>
-                  <a:srgbClr val="202D3C"/>
+                  <a:srgbClr val="17283B"/>
                 </a:solidFill>
                 <a:latin typeface="Liberation Sans"/>
               </a:defRPr>
@@ -5613,7 +5613,7 @@
               </a:spcAft>
               <a:defRPr sz="4300" b="1">
                 <a:solidFill>
-                  <a:srgbClr val="202D3C"/>
+                  <a:srgbClr val="17283B"/>
                 </a:solidFill>
                 <a:latin typeface="Liberation Sans"/>
               </a:defRPr>
@@ -5652,7 +5652,7 @@
               </a:spcAft>
               <a:defRPr sz="3100" b="0">
                 <a:solidFill>
-                  <a:srgbClr val="356696"/>
+                  <a:srgbClr val="164F89"/>
                 </a:solidFill>
                 <a:latin typeface="Liberation Sans"/>
               </a:defRPr>
@@ -5668,7 +5668,7 @@
               </a:spcAft>
               <a:defRPr sz="3100" b="0">
                 <a:solidFill>
-                  <a:srgbClr val="356696"/>
+                  <a:srgbClr val="164F89"/>
                 </a:solidFill>
                 <a:latin typeface="Liberation Sans"/>
               </a:defRPr>
@@ -5707,7 +5707,7 @@
               </a:spcAft>
               <a:defRPr sz="2500" b="1">
                 <a:solidFill>
-                  <a:srgbClr val="202D3C"/>
+                  <a:srgbClr val="17283B"/>
                 </a:solidFill>
                 <a:latin typeface="Liberation Sans"/>
               </a:defRPr>
@@ -5746,7 +5746,7 @@
               </a:spcAft>
               <a:defRPr sz="1800" b="0">
                 <a:solidFill>
-                  <a:srgbClr val="647282"/>
+                  <a:srgbClr val="414F60"/>
                 </a:solidFill>
                 <a:latin typeface="Liberation Sans"/>
               </a:defRPr>
@@ -5762,7 +5762,7 @@
               </a:spcAft>
               <a:defRPr sz="1800" b="0">
                 <a:solidFill>
-                  <a:srgbClr val="647282"/>
+                  <a:srgbClr val="414F60"/>
                 </a:solidFill>
                 <a:latin typeface="Liberation Sans"/>
               </a:defRPr>
@@ -5801,7 +5801,7 @@
               </a:spcAft>
               <a:defRPr sz="900" b="0">
                 <a:solidFill>
-                  <a:srgbClr val="647282"/>
+                  <a:srgbClr val="414F60"/>
                 </a:solidFill>
                 <a:latin typeface="Liberation Sans"/>
               </a:defRPr>
@@ -5840,7 +5840,7 @@
               </a:spcAft>
               <a:defRPr sz="1100" b="0">
                 <a:solidFill>
-                  <a:srgbClr val="647282"/>
+                  <a:srgbClr val="414F60"/>
                 </a:solidFill>
                 <a:latin typeface="Liberation Sans"/>
               </a:defRPr>
@@ -5945,7 +5945,7 @@
               </a:spcAft>
               <a:defRPr sz="1100" b="1">
                 <a:solidFill>
-                  <a:srgbClr val="356696"/>
+                  <a:srgbClr val="164F89"/>
                 </a:solidFill>
                 <a:latin typeface="Liberation Sans"/>
               </a:defRPr>
@@ -5984,7 +5984,7 @@
               </a:spcAft>
               <a:defRPr sz="3100" b="1">
                 <a:solidFill>
-                  <a:srgbClr val="202D3C"/>
+                  <a:srgbClr val="17283B"/>
                 </a:solidFill>
                 <a:latin typeface="Liberation Sans"/>
               </a:defRPr>
@@ -6023,7 +6023,7 @@
               </a:spcAft>
               <a:defRPr sz="1700" b="0">
                 <a:solidFill>
-                  <a:srgbClr val="647282"/>
+                  <a:srgbClr val="414F60"/>
                 </a:solidFill>
                 <a:latin typeface="Liberation Sans"/>
               </a:defRPr>
@@ -6086,7 +6086,7 @@
               </a:spcAft>
               <a:defRPr sz="900" b="0">
                 <a:solidFill>
-                  <a:srgbClr val="647282"/>
+                  <a:srgbClr val="414F60"/>
                 </a:solidFill>
                 <a:latin typeface="Liberation Sans"/>
               </a:defRPr>
@@ -6125,7 +6125,7 @@
               </a:spcAft>
               <a:defRPr sz="1100" b="0">
                 <a:solidFill>
-                  <a:srgbClr val="647282"/>
+                  <a:srgbClr val="414F60"/>
                 </a:solidFill>
                 <a:latin typeface="Liberation Sans"/>
               </a:defRPr>
@@ -6230,7 +6230,7 @@
               </a:spcAft>
               <a:defRPr sz="1100" b="1">
                 <a:solidFill>
-                  <a:srgbClr val="356696"/>
+                  <a:srgbClr val="164F89"/>
                 </a:solidFill>
                 <a:latin typeface="Liberation Sans"/>
               </a:defRPr>
@@ -6269,7 +6269,7 @@
               </a:spcAft>
               <a:defRPr sz="3100" b="1">
                 <a:solidFill>
-                  <a:srgbClr val="202D3C"/>
+                  <a:srgbClr val="17283B"/>
                 </a:solidFill>
                 <a:latin typeface="Liberation Sans"/>
               </a:defRPr>
@@ -6308,7 +6308,7 @@
               </a:spcAft>
               <a:defRPr sz="1700" b="0">
                 <a:solidFill>
-                  <a:srgbClr val="647282"/>
+                  <a:srgbClr val="414F60"/>
                 </a:solidFill>
                 <a:latin typeface="Liberation Sans"/>
               </a:defRPr>
@@ -6371,7 +6371,7 @@
               </a:spcAft>
               <a:defRPr sz="900" b="0">
                 <a:solidFill>
-                  <a:srgbClr val="647282"/>
+                  <a:srgbClr val="414F60"/>
                 </a:solidFill>
                 <a:latin typeface="Liberation Sans"/>
               </a:defRPr>
@@ -6410,7 +6410,7 @@
               </a:spcAft>
               <a:defRPr sz="1100" b="0">
                 <a:solidFill>
-                  <a:srgbClr val="647282"/>
+                  <a:srgbClr val="414F60"/>
                 </a:solidFill>
                 <a:latin typeface="Liberation Sans"/>
               </a:defRPr>
@@ -6515,7 +6515,7 @@
               </a:spcAft>
               <a:defRPr sz="1100" b="1">
                 <a:solidFill>
-                  <a:srgbClr val="356696"/>
+                  <a:srgbClr val="164F89"/>
                 </a:solidFill>
                 <a:latin typeface="Liberation Sans"/>
               </a:defRPr>
@@ -6554,7 +6554,7 @@
               </a:spcAft>
               <a:defRPr sz="3800" b="1">
                 <a:solidFill>
-                  <a:srgbClr val="356696"/>
+                  <a:srgbClr val="164F89"/>
                 </a:solidFill>
                 <a:latin typeface="Liberation Sans"/>
               </a:defRPr>
@@ -6593,7 +6593,7 @@
               </a:spcAft>
               <a:defRPr sz="4100" b="1">
                 <a:solidFill>
-                  <a:srgbClr val="202D3C"/>
+                  <a:srgbClr val="17283B"/>
                 </a:solidFill>
                 <a:latin typeface="Liberation Sans"/>
               </a:defRPr>
@@ -6632,7 +6632,7 @@
               </a:spcAft>
               <a:defRPr sz="2400" b="0">
                 <a:solidFill>
-                  <a:srgbClr val="356696"/>
+                  <a:srgbClr val="164F89"/>
                 </a:solidFill>
                 <a:latin typeface="Liberation Sans"/>
               </a:defRPr>
@@ -6671,7 +6671,7 @@
               </a:spcAft>
               <a:defRPr sz="2100" b="0">
                 <a:solidFill>
-                  <a:srgbClr val="647282"/>
+                  <a:srgbClr val="414F60"/>
                 </a:solidFill>
                 <a:latin typeface="Liberation Sans"/>
               </a:defRPr>
@@ -6710,7 +6710,7 @@
               </a:spcAft>
               <a:defRPr sz="1500" b="0">
                 <a:solidFill>
-                  <a:srgbClr val="647282"/>
+                  <a:srgbClr val="414F60"/>
                 </a:solidFill>
                 <a:latin typeface="Liberation Sans"/>
               </a:defRPr>
@@ -6749,7 +6749,7 @@
               </a:spcAft>
               <a:defRPr sz="1500" b="0">
                 <a:solidFill>
-                  <a:srgbClr val="647282"/>
+                  <a:srgbClr val="414F60"/>
                 </a:solidFill>
                 <a:latin typeface="Liberation Sans"/>
               </a:defRPr>
@@ -6788,7 +6788,7 @@
               </a:spcAft>
               <a:defRPr sz="1500" b="1">
                 <a:solidFill>
-                  <a:srgbClr val="356696"/>
+                  <a:srgbClr val="164F89"/>
                 </a:solidFill>
                 <a:latin typeface="Liberation Sans"/>
               </a:defRPr>
@@ -6827,7 +6827,7 @@
               </a:spcAft>
               <a:defRPr sz="1500" b="0">
                 <a:solidFill>
-                  <a:srgbClr val="647282"/>
+                  <a:srgbClr val="414F60"/>
                 </a:solidFill>
                 <a:latin typeface="Liberation Sans"/>
               </a:defRPr>
@@ -6866,7 +6866,7 @@
               </a:spcAft>
               <a:defRPr sz="900" b="0">
                 <a:solidFill>
-                  <a:srgbClr val="647282"/>
+                  <a:srgbClr val="414F60"/>
                 </a:solidFill>
                 <a:latin typeface="Liberation Sans"/>
               </a:defRPr>
@@ -6905,7 +6905,7 @@
               </a:spcAft>
               <a:defRPr sz="1100" b="0">
                 <a:solidFill>
-                  <a:srgbClr val="647282"/>
+                  <a:srgbClr val="414F60"/>
                 </a:solidFill>
                 <a:latin typeface="Liberation Sans"/>
               </a:defRPr>
@@ -7010,7 +7010,7 @@
               </a:spcAft>
               <a:defRPr sz="1100" b="1">
                 <a:solidFill>
-                  <a:srgbClr val="356696"/>
+                  <a:srgbClr val="164F89"/>
                 </a:solidFill>
                 <a:latin typeface="Liberation Sans"/>
               </a:defRPr>
@@ -7049,7 +7049,7 @@
               </a:spcAft>
               <a:defRPr sz="3100" b="1">
                 <a:solidFill>
-                  <a:srgbClr val="202D3C"/>
+                  <a:srgbClr val="17283B"/>
                 </a:solidFill>
                 <a:latin typeface="Liberation Sans"/>
               </a:defRPr>
@@ -7088,7 +7088,7 @@
               </a:spcAft>
               <a:defRPr sz="1700" b="0">
                 <a:solidFill>
-                  <a:srgbClr val="647282"/>
+                  <a:srgbClr val="414F60"/>
                 </a:solidFill>
                 <a:latin typeface="Liberation Sans"/>
               </a:defRPr>
@@ -7151,7 +7151,7 @@
               </a:spcAft>
               <a:defRPr sz="900" b="0">
                 <a:solidFill>
-                  <a:srgbClr val="647282"/>
+                  <a:srgbClr val="414F60"/>
                 </a:solidFill>
                 <a:latin typeface="Liberation Sans"/>
               </a:defRPr>
@@ -7190,7 +7190,7 @@
               </a:spcAft>
               <a:defRPr sz="1100" b="0">
                 <a:solidFill>
-                  <a:srgbClr val="647282"/>
+                  <a:srgbClr val="414F60"/>
                 </a:solidFill>
                 <a:latin typeface="Liberation Sans"/>
               </a:defRPr>
@@ -7295,7 +7295,7 @@
               </a:spcAft>
               <a:defRPr sz="1100" b="1">
                 <a:solidFill>
-                  <a:srgbClr val="356696"/>
+                  <a:srgbClr val="164F89"/>
                 </a:solidFill>
                 <a:latin typeface="Liberation Sans"/>
               </a:defRPr>
@@ -7334,7 +7334,7 @@
               </a:spcAft>
               <a:defRPr sz="3100" b="1">
                 <a:solidFill>
-                  <a:srgbClr val="202D3C"/>
+                  <a:srgbClr val="17283B"/>
                 </a:solidFill>
                 <a:latin typeface="Liberation Sans"/>
               </a:defRPr>
@@ -7373,7 +7373,7 @@
               </a:spcAft>
               <a:defRPr sz="1700" b="0">
                 <a:solidFill>
-                  <a:srgbClr val="647282"/>
+                  <a:srgbClr val="414F60"/>
                 </a:solidFill>
                 <a:latin typeface="Liberation Sans"/>
               </a:defRPr>
@@ -7436,7 +7436,7 @@
               </a:spcAft>
               <a:defRPr sz="900" b="0">
                 <a:solidFill>
-                  <a:srgbClr val="647282"/>
+                  <a:srgbClr val="414F60"/>
                 </a:solidFill>
                 <a:latin typeface="Liberation Sans"/>
               </a:defRPr>
@@ -7475,7 +7475,7 @@
               </a:spcAft>
               <a:defRPr sz="1100" b="0">
                 <a:solidFill>
-                  <a:srgbClr val="647282"/>
+                  <a:srgbClr val="414F60"/>
                 </a:solidFill>
                 <a:latin typeface="Liberation Sans"/>
               </a:defRPr>
@@ -7580,7 +7580,7 @@
               </a:spcAft>
               <a:defRPr sz="1100" b="1">
                 <a:solidFill>
-                  <a:srgbClr val="356696"/>
+                  <a:srgbClr val="164F89"/>
                 </a:solidFill>
                 <a:latin typeface="Liberation Sans"/>
               </a:defRPr>
@@ -7619,7 +7619,7 @@
               </a:spcAft>
               <a:defRPr sz="3100" b="1">
                 <a:solidFill>
-                  <a:srgbClr val="202D3C"/>
+                  <a:srgbClr val="17283B"/>
                 </a:solidFill>
                 <a:latin typeface="Liberation Sans"/>
               </a:defRPr>
@@ -7658,7 +7658,7 @@
               </a:spcAft>
               <a:defRPr sz="1700" b="0">
                 <a:solidFill>
-                  <a:srgbClr val="647282"/>
+                  <a:srgbClr val="414F60"/>
                 </a:solidFill>
                 <a:latin typeface="Liberation Sans"/>
               </a:defRPr>
@@ -7721,7 +7721,7 @@
               </a:spcAft>
               <a:defRPr sz="900" b="0">
                 <a:solidFill>
-                  <a:srgbClr val="647282"/>
+                  <a:srgbClr val="414F60"/>
                 </a:solidFill>
                 <a:latin typeface="Liberation Sans"/>
               </a:defRPr>
@@ -7760,7 +7760,7 @@
               </a:spcAft>
               <a:defRPr sz="1100" b="0">
                 <a:solidFill>
-                  <a:srgbClr val="647282"/>
+                  <a:srgbClr val="414F60"/>
                 </a:solidFill>
                 <a:latin typeface="Liberation Sans"/>
               </a:defRPr>
@@ -7865,7 +7865,7 @@
               </a:spcAft>
               <a:defRPr sz="1100" b="1">
                 <a:solidFill>
-                  <a:srgbClr val="356696"/>
+                  <a:srgbClr val="164F89"/>
                 </a:solidFill>
                 <a:latin typeface="Liberation Sans"/>
               </a:defRPr>
@@ -7904,7 +7904,7 @@
               </a:spcAft>
               <a:defRPr sz="3100" b="1">
                 <a:solidFill>
-                  <a:srgbClr val="202D3C"/>
+                  <a:srgbClr val="17283B"/>
                 </a:solidFill>
                 <a:latin typeface="Liberation Sans"/>
               </a:defRPr>
@@ -7943,7 +7943,7 @@
               </a:spcAft>
               <a:defRPr sz="1700" b="0">
                 <a:solidFill>
-                  <a:srgbClr val="647282"/>
+                  <a:srgbClr val="414F60"/>
                 </a:solidFill>
                 <a:latin typeface="Liberation Sans"/>
               </a:defRPr>
@@ -8006,7 +8006,7 @@
               </a:spcAft>
               <a:defRPr sz="900" b="0">
                 <a:solidFill>
-                  <a:srgbClr val="647282"/>
+                  <a:srgbClr val="414F60"/>
                 </a:solidFill>
                 <a:latin typeface="Liberation Sans"/>
               </a:defRPr>
@@ -8045,7 +8045,7 @@
               </a:spcAft>
               <a:defRPr sz="1100" b="0">
                 <a:solidFill>
-                  <a:srgbClr val="647282"/>
+                  <a:srgbClr val="414F60"/>
                 </a:solidFill>
                 <a:latin typeface="Liberation Sans"/>
               </a:defRPr>
@@ -8150,7 +8150,7 @@
               </a:spcAft>
               <a:defRPr sz="1100" b="1">
                 <a:solidFill>
-                  <a:srgbClr val="356696"/>
+                  <a:srgbClr val="164F89"/>
                 </a:solidFill>
                 <a:latin typeface="Liberation Sans"/>
               </a:defRPr>
@@ -8189,7 +8189,7 @@
               </a:spcAft>
               <a:defRPr sz="3800" b="1">
                 <a:solidFill>
-                  <a:srgbClr val="356696"/>
+                  <a:srgbClr val="164F89"/>
                 </a:solidFill>
                 <a:latin typeface="Liberation Sans"/>
               </a:defRPr>
@@ -8228,7 +8228,7 @@
               </a:spcAft>
               <a:defRPr sz="4100" b="1">
                 <a:solidFill>
-                  <a:srgbClr val="202D3C"/>
+                  <a:srgbClr val="17283B"/>
                 </a:solidFill>
                 <a:latin typeface="Liberation Sans"/>
               </a:defRPr>
@@ -8244,7 +8244,7 @@
               </a:spcAft>
               <a:defRPr sz="4100" b="1">
                 <a:solidFill>
-                  <a:srgbClr val="202D3C"/>
+                  <a:srgbClr val="17283B"/>
                 </a:solidFill>
                 <a:latin typeface="Liberation Sans"/>
               </a:defRPr>
@@ -8283,7 +8283,7 @@
               </a:spcAft>
               <a:defRPr sz="2400" b="0">
                 <a:solidFill>
-                  <a:srgbClr val="356696"/>
+                  <a:srgbClr val="164F89"/>
                 </a:solidFill>
                 <a:latin typeface="Liberation Sans"/>
               </a:defRPr>
@@ -8322,7 +8322,7 @@
               </a:spcAft>
               <a:defRPr sz="2100" b="0">
                 <a:solidFill>
-                  <a:srgbClr val="647282"/>
+                  <a:srgbClr val="414F60"/>
                 </a:solidFill>
                 <a:latin typeface="Liberation Sans"/>
               </a:defRPr>
@@ -8361,7 +8361,7 @@
               </a:spcAft>
               <a:defRPr sz="1500" b="0">
                 <a:solidFill>
-                  <a:srgbClr val="647282"/>
+                  <a:srgbClr val="414F60"/>
                 </a:solidFill>
                 <a:latin typeface="Liberation Sans"/>
               </a:defRPr>
@@ -8400,7 +8400,7 @@
               </a:spcAft>
               <a:defRPr sz="1500" b="0">
                 <a:solidFill>
-                  <a:srgbClr val="647282"/>
+                  <a:srgbClr val="414F60"/>
                 </a:solidFill>
                 <a:latin typeface="Liberation Sans"/>
               </a:defRPr>
@@ -8439,7 +8439,7 @@
               </a:spcAft>
               <a:defRPr sz="1500" b="0">
                 <a:solidFill>
-                  <a:srgbClr val="647282"/>
+                  <a:srgbClr val="414F60"/>
                 </a:solidFill>
                 <a:latin typeface="Liberation Sans"/>
               </a:defRPr>
@@ -8478,7 +8478,7 @@
               </a:spcAft>
               <a:defRPr sz="1500" b="1">
                 <a:solidFill>
-                  <a:srgbClr val="356696"/>
+                  <a:srgbClr val="164F89"/>
                 </a:solidFill>
                 <a:latin typeface="Liberation Sans"/>
               </a:defRPr>
@@ -8517,7 +8517,7 @@
               </a:spcAft>
               <a:defRPr sz="900" b="0">
                 <a:solidFill>
-                  <a:srgbClr val="647282"/>
+                  <a:srgbClr val="414F60"/>
                 </a:solidFill>
                 <a:latin typeface="Liberation Sans"/>
               </a:defRPr>
@@ -8556,7 +8556,7 @@
               </a:spcAft>
               <a:defRPr sz="1100" b="0">
                 <a:solidFill>
-                  <a:srgbClr val="647282"/>
+                  <a:srgbClr val="414F60"/>
                 </a:solidFill>
                 <a:latin typeface="Liberation Sans"/>
               </a:defRPr>
@@ -8661,7 +8661,7 @@
               </a:spcAft>
               <a:defRPr sz="1100" b="1">
                 <a:solidFill>
-                  <a:srgbClr val="356696"/>
+                  <a:srgbClr val="164F89"/>
                 </a:solidFill>
                 <a:latin typeface="Liberation Sans"/>
               </a:defRPr>
@@ -8700,7 +8700,7 @@
               </a:spcAft>
               <a:defRPr sz="3100" b="1">
                 <a:solidFill>
-                  <a:srgbClr val="202D3C"/>
+                  <a:srgbClr val="17283B"/>
                 </a:solidFill>
                 <a:latin typeface="Liberation Sans"/>
               </a:defRPr>
@@ -8739,7 +8739,7 @@
               </a:spcAft>
               <a:defRPr sz="1700" b="0">
                 <a:solidFill>
-                  <a:srgbClr val="647282"/>
+                  <a:srgbClr val="414F60"/>
                 </a:solidFill>
                 <a:latin typeface="Liberation Sans"/>
               </a:defRPr>
@@ -8802,7 +8802,7 @@
               </a:spcAft>
               <a:defRPr sz="900" b="0">
                 <a:solidFill>
-                  <a:srgbClr val="647282"/>
+                  <a:srgbClr val="414F60"/>
                 </a:solidFill>
                 <a:latin typeface="Liberation Sans"/>
               </a:defRPr>
@@ -8841,7 +8841,7 @@
               </a:spcAft>
               <a:defRPr sz="1100" b="0">
                 <a:solidFill>
-                  <a:srgbClr val="647282"/>
+                  <a:srgbClr val="414F60"/>
                 </a:solidFill>
                 <a:latin typeface="Liberation Sans"/>
               </a:defRPr>
@@ -8946,7 +8946,7 @@
               </a:spcAft>
               <a:defRPr sz="1100" b="1">
                 <a:solidFill>
-                  <a:srgbClr val="356696"/>
+                  <a:srgbClr val="164F89"/>
                 </a:solidFill>
                 <a:latin typeface="Liberation Sans"/>
               </a:defRPr>
@@ -8985,7 +8985,7 @@
               </a:spcAft>
               <a:defRPr sz="3100" b="1">
                 <a:solidFill>
-                  <a:srgbClr val="202D3C"/>
+                  <a:srgbClr val="17283B"/>
                 </a:solidFill>
                 <a:latin typeface="Liberation Sans"/>
               </a:defRPr>
@@ -9024,7 +9024,7 @@
               </a:spcAft>
               <a:defRPr sz="1700" b="0">
                 <a:solidFill>
-                  <a:srgbClr val="647282"/>
+                  <a:srgbClr val="414F60"/>
                 </a:solidFill>
                 <a:latin typeface="Liberation Sans"/>
               </a:defRPr>
@@ -9087,7 +9087,7 @@
               </a:spcAft>
               <a:defRPr sz="900" b="0">
                 <a:solidFill>
-                  <a:srgbClr val="647282"/>
+                  <a:srgbClr val="414F60"/>
                 </a:solidFill>
                 <a:latin typeface="Liberation Sans"/>
               </a:defRPr>
@@ -9126,7 +9126,7 @@
               </a:spcAft>
               <a:defRPr sz="1100" b="0">
                 <a:solidFill>
-                  <a:srgbClr val="647282"/>
+                  <a:srgbClr val="414F60"/>
                 </a:solidFill>
                 <a:latin typeface="Liberation Sans"/>
               </a:defRPr>
@@ -9231,7 +9231,7 @@
               </a:spcAft>
               <a:defRPr sz="1100" b="1">
                 <a:solidFill>
-                  <a:srgbClr val="356696"/>
+                  <a:srgbClr val="164F89"/>
                 </a:solidFill>
                 <a:latin typeface="Liberation Sans"/>
               </a:defRPr>
@@ -9270,7 +9270,7 @@
               </a:spcAft>
               <a:defRPr sz="3300" b="1">
                 <a:solidFill>
-                  <a:srgbClr val="202D3C"/>
+                  <a:srgbClr val="17283B"/>
                 </a:solidFill>
                 <a:latin typeface="Liberation Sans"/>
               </a:defRPr>
@@ -9333,7 +9333,7 @@
               </a:spcAft>
               <a:defRPr sz="3000" b="1">
                 <a:solidFill>
-                  <a:srgbClr val="202D3C"/>
+                  <a:srgbClr val="17283B"/>
                 </a:solidFill>
                 <a:latin typeface="Liberation Sans"/>
               </a:defRPr>
@@ -9372,7 +9372,7 @@
               </a:spcAft>
               <a:defRPr sz="2200" b="0">
                 <a:solidFill>
-                  <a:srgbClr val="356696"/>
+                  <a:srgbClr val="164F89"/>
                 </a:solidFill>
                 <a:latin typeface="Liberation Sans"/>
               </a:defRPr>
@@ -9411,7 +9411,7 @@
               </a:spcAft>
               <a:defRPr sz="2000" b="0">
                 <a:solidFill>
-                  <a:srgbClr val="647282"/>
+                  <a:srgbClr val="414F60"/>
                 </a:solidFill>
                 <a:latin typeface="Liberation Sans"/>
               </a:defRPr>
@@ -9427,7 +9427,7 @@
               </a:spcAft>
               <a:defRPr sz="2000" b="0">
                 <a:solidFill>
-                  <a:srgbClr val="647282"/>
+                  <a:srgbClr val="414F60"/>
                 </a:solidFill>
                 <a:latin typeface="Liberation Sans"/>
               </a:defRPr>
@@ -9466,7 +9466,7 @@
               </a:spcAft>
               <a:defRPr sz="1500" b="0">
                 <a:solidFill>
-                  <a:srgbClr val="356696"/>
+                  <a:srgbClr val="164F89"/>
                 </a:solidFill>
                 <a:latin typeface="Liberation Sans"/>
               </a:defRPr>
@@ -9529,7 +9529,7 @@
               </a:spcAft>
               <a:defRPr sz="3000" b="1">
                 <a:solidFill>
-                  <a:srgbClr val="202D3C"/>
+                  <a:srgbClr val="17283B"/>
                 </a:solidFill>
                 <a:latin typeface="Liberation Sans"/>
               </a:defRPr>
@@ -9568,7 +9568,7 @@
               </a:spcAft>
               <a:defRPr sz="2200" b="0">
                 <a:solidFill>
-                  <a:srgbClr val="356696"/>
+                  <a:srgbClr val="164F89"/>
                 </a:solidFill>
                 <a:latin typeface="Liberation Sans"/>
               </a:defRPr>
@@ -9607,7 +9607,7 @@
               </a:spcAft>
               <a:defRPr sz="2000" b="0">
                 <a:solidFill>
-                  <a:srgbClr val="647282"/>
+                  <a:srgbClr val="414F60"/>
                 </a:solidFill>
                 <a:latin typeface="Liberation Sans"/>
               </a:defRPr>
@@ -9623,7 +9623,7 @@
               </a:spcAft>
               <a:defRPr sz="2000" b="0">
                 <a:solidFill>
-                  <a:srgbClr val="647282"/>
+                  <a:srgbClr val="414F60"/>
                 </a:solidFill>
                 <a:latin typeface="Liberation Sans"/>
               </a:defRPr>
@@ -9662,7 +9662,7 @@
               </a:spcAft>
               <a:defRPr sz="1500" b="0">
                 <a:solidFill>
-                  <a:srgbClr val="356696"/>
+                  <a:srgbClr val="164F89"/>
                 </a:solidFill>
                 <a:latin typeface="Liberation Sans"/>
               </a:defRPr>
@@ -9701,7 +9701,7 @@
               </a:spcAft>
               <a:defRPr sz="900" b="0">
                 <a:solidFill>
-                  <a:srgbClr val="647282"/>
+                  <a:srgbClr val="414F60"/>
                 </a:solidFill>
                 <a:latin typeface="Liberation Sans"/>
               </a:defRPr>
@@ -9740,7 +9740,7 @@
               </a:spcAft>
               <a:defRPr sz="1100" b="0">
                 <a:solidFill>
-                  <a:srgbClr val="647282"/>
+                  <a:srgbClr val="414F60"/>
                 </a:solidFill>
                 <a:latin typeface="Liberation Sans"/>
               </a:defRPr>
@@ -9845,7 +9845,7 @@
               </a:spcAft>
               <a:defRPr sz="1100" b="1">
                 <a:solidFill>
-                  <a:srgbClr val="356696"/>
+                  <a:srgbClr val="164F89"/>
                 </a:solidFill>
                 <a:latin typeface="Liberation Sans"/>
               </a:defRPr>
@@ -9884,7 +9884,7 @@
               </a:spcAft>
               <a:defRPr sz="3100" b="1">
                 <a:solidFill>
-                  <a:srgbClr val="202D3C"/>
+                  <a:srgbClr val="17283B"/>
                 </a:solidFill>
                 <a:latin typeface="Liberation Sans"/>
               </a:defRPr>
@@ -9923,7 +9923,7 @@
               </a:spcAft>
               <a:defRPr sz="1700" b="0">
                 <a:solidFill>
-                  <a:srgbClr val="647282"/>
+                  <a:srgbClr val="414F60"/>
                 </a:solidFill>
                 <a:latin typeface="Liberation Sans"/>
               </a:defRPr>
@@ -9986,7 +9986,7 @@
               </a:spcAft>
               <a:defRPr sz="900" b="0">
                 <a:solidFill>
-                  <a:srgbClr val="647282"/>
+                  <a:srgbClr val="414F60"/>
                 </a:solidFill>
                 <a:latin typeface="Liberation Sans"/>
               </a:defRPr>
@@ -10025,7 +10025,7 @@
               </a:spcAft>
               <a:defRPr sz="1100" b="0">
                 <a:solidFill>
-                  <a:srgbClr val="647282"/>
+                  <a:srgbClr val="414F60"/>
                 </a:solidFill>
                 <a:latin typeface="Liberation Sans"/>
               </a:defRPr>
@@ -10130,7 +10130,7 @@
               </a:spcAft>
               <a:defRPr sz="1100" b="1">
                 <a:solidFill>
-                  <a:srgbClr val="356696"/>
+                  <a:srgbClr val="164F89"/>
                 </a:solidFill>
                 <a:latin typeface="Liberation Sans"/>
               </a:defRPr>
@@ -10169,7 +10169,7 @@
               </a:spcAft>
               <a:defRPr sz="3100" b="1">
                 <a:solidFill>
-                  <a:srgbClr val="202D3C"/>
+                  <a:srgbClr val="17283B"/>
                 </a:solidFill>
                 <a:latin typeface="Liberation Sans"/>
               </a:defRPr>
@@ -10208,7 +10208,7 @@
               </a:spcAft>
               <a:defRPr sz="1700" b="0">
                 <a:solidFill>
-                  <a:srgbClr val="647282"/>
+                  <a:srgbClr val="414F60"/>
                 </a:solidFill>
                 <a:latin typeface="Liberation Sans"/>
               </a:defRPr>
@@ -10271,7 +10271,7 @@
               </a:spcAft>
               <a:defRPr sz="900" b="0">
                 <a:solidFill>
-                  <a:srgbClr val="647282"/>
+                  <a:srgbClr val="414F60"/>
                 </a:solidFill>
                 <a:latin typeface="Liberation Sans"/>
               </a:defRPr>
@@ -10310,7 +10310,7 @@
               </a:spcAft>
               <a:defRPr sz="1100" b="0">
                 <a:solidFill>
-                  <a:srgbClr val="647282"/>
+                  <a:srgbClr val="414F60"/>
                 </a:solidFill>
                 <a:latin typeface="Liberation Sans"/>
               </a:defRPr>
@@ -10415,7 +10415,7 @@
               </a:spcAft>
               <a:defRPr sz="1100" b="1">
                 <a:solidFill>
-                  <a:srgbClr val="356696"/>
+                  <a:srgbClr val="164F89"/>
                 </a:solidFill>
                 <a:latin typeface="Liberation Sans"/>
               </a:defRPr>
@@ -10454,7 +10454,7 @@
               </a:spcAft>
               <a:defRPr sz="3100" b="1">
                 <a:solidFill>
-                  <a:srgbClr val="202D3C"/>
+                  <a:srgbClr val="17283B"/>
                 </a:solidFill>
                 <a:latin typeface="Liberation Sans"/>
               </a:defRPr>
@@ -10493,7 +10493,7 @@
               </a:spcAft>
               <a:defRPr sz="1700" b="0">
                 <a:solidFill>
-                  <a:srgbClr val="647282"/>
+                  <a:srgbClr val="414F60"/>
                 </a:solidFill>
                 <a:latin typeface="Liberation Sans"/>
               </a:defRPr>
@@ -10556,7 +10556,7 @@
               </a:spcAft>
               <a:defRPr sz="900" b="0">
                 <a:solidFill>
-                  <a:srgbClr val="647282"/>
+                  <a:srgbClr val="414F60"/>
                 </a:solidFill>
                 <a:latin typeface="Liberation Sans"/>
               </a:defRPr>
@@ -10595,7 +10595,7 @@
               </a:spcAft>
               <a:defRPr sz="1100" b="0">
                 <a:solidFill>
-                  <a:srgbClr val="647282"/>
+                  <a:srgbClr val="414F60"/>
                 </a:solidFill>
                 <a:latin typeface="Liberation Sans"/>
               </a:defRPr>
@@ -10700,7 +10700,7 @@
               </a:spcAft>
               <a:defRPr sz="1100" b="1">
                 <a:solidFill>
-                  <a:srgbClr val="356696"/>
+                  <a:srgbClr val="164F89"/>
                 </a:solidFill>
                 <a:latin typeface="Liberation Sans"/>
               </a:defRPr>
@@ -10739,7 +10739,7 @@
               </a:spcAft>
               <a:defRPr sz="3800" b="1">
                 <a:solidFill>
-                  <a:srgbClr val="356696"/>
+                  <a:srgbClr val="164F89"/>
                 </a:solidFill>
                 <a:latin typeface="Liberation Sans"/>
               </a:defRPr>
@@ -10778,7 +10778,7 @@
               </a:spcAft>
               <a:defRPr sz="4100" b="1">
                 <a:solidFill>
-                  <a:srgbClr val="202D3C"/>
+                  <a:srgbClr val="17283B"/>
                 </a:solidFill>
                 <a:latin typeface="Liberation Sans"/>
               </a:defRPr>
@@ -10817,7 +10817,7 @@
               </a:spcAft>
               <a:defRPr sz="2400" b="0">
                 <a:solidFill>
-                  <a:srgbClr val="356696"/>
+                  <a:srgbClr val="164F89"/>
                 </a:solidFill>
                 <a:latin typeface="Liberation Sans"/>
               </a:defRPr>
@@ -10856,7 +10856,7 @@
               </a:spcAft>
               <a:defRPr sz="2100" b="0">
                 <a:solidFill>
-                  <a:srgbClr val="647282"/>
+                  <a:srgbClr val="414F60"/>
                 </a:solidFill>
                 <a:latin typeface="Liberation Sans"/>
               </a:defRPr>
@@ -10895,7 +10895,7 @@
               </a:spcAft>
               <a:defRPr sz="1500" b="1">
                 <a:solidFill>
-                  <a:srgbClr val="356696"/>
+                  <a:srgbClr val="164F89"/>
                 </a:solidFill>
                 <a:latin typeface="Liberation Sans"/>
               </a:defRPr>
@@ -10934,7 +10934,7 @@
               </a:spcAft>
               <a:defRPr sz="1500" b="0">
                 <a:solidFill>
-                  <a:srgbClr val="647282"/>
+                  <a:srgbClr val="414F60"/>
                 </a:solidFill>
                 <a:latin typeface="Liberation Sans"/>
               </a:defRPr>
@@ -10973,7 +10973,7 @@
               </a:spcAft>
               <a:defRPr sz="1500" b="0">
                 <a:solidFill>
-                  <a:srgbClr val="647282"/>
+                  <a:srgbClr val="414F60"/>
                 </a:solidFill>
                 <a:latin typeface="Liberation Sans"/>
               </a:defRPr>
@@ -11012,7 +11012,7 @@
               </a:spcAft>
               <a:defRPr sz="1500" b="0">
                 <a:solidFill>
-                  <a:srgbClr val="647282"/>
+                  <a:srgbClr val="414F60"/>
                 </a:solidFill>
                 <a:latin typeface="Liberation Sans"/>
               </a:defRPr>
@@ -11051,7 +11051,7 @@
               </a:spcAft>
               <a:defRPr sz="900" b="0">
                 <a:solidFill>
-                  <a:srgbClr val="647282"/>
+                  <a:srgbClr val="414F60"/>
                 </a:solidFill>
                 <a:latin typeface="Liberation Sans"/>
               </a:defRPr>
@@ -11090,7 +11090,7 @@
               </a:spcAft>
               <a:defRPr sz="1100" b="0">
                 <a:solidFill>
-                  <a:srgbClr val="647282"/>
+                  <a:srgbClr val="414F60"/>
                 </a:solidFill>
                 <a:latin typeface="Liberation Sans"/>
               </a:defRPr>
@@ -11195,7 +11195,7 @@
               </a:spcAft>
               <a:defRPr sz="1100" b="1">
                 <a:solidFill>
-                  <a:srgbClr val="356696"/>
+                  <a:srgbClr val="164F89"/>
                 </a:solidFill>
                 <a:latin typeface="Liberation Sans"/>
               </a:defRPr>
@@ -11234,7 +11234,7 @@
               </a:spcAft>
               <a:defRPr sz="3100" b="1">
                 <a:solidFill>
-                  <a:srgbClr val="202D3C"/>
+                  <a:srgbClr val="17283B"/>
                 </a:solidFill>
                 <a:latin typeface="Liberation Sans"/>
               </a:defRPr>
@@ -11273,7 +11273,7 @@
               </a:spcAft>
               <a:defRPr sz="1700" b="0">
                 <a:solidFill>
-                  <a:srgbClr val="647282"/>
+                  <a:srgbClr val="414F60"/>
                 </a:solidFill>
                 <a:latin typeface="Liberation Sans"/>
               </a:defRPr>
@@ -11336,7 +11336,7 @@
               </a:spcAft>
               <a:defRPr sz="900" b="0">
                 <a:solidFill>
-                  <a:srgbClr val="647282"/>
+                  <a:srgbClr val="414F60"/>
                 </a:solidFill>
                 <a:latin typeface="Liberation Sans"/>
               </a:defRPr>
@@ -11375,7 +11375,7 @@
               </a:spcAft>
               <a:defRPr sz="1100" b="0">
                 <a:solidFill>
-                  <a:srgbClr val="647282"/>
+                  <a:srgbClr val="414F60"/>
                 </a:solidFill>
                 <a:latin typeface="Liberation Sans"/>
               </a:defRPr>
@@ -11480,7 +11480,7 @@
               </a:spcAft>
               <a:defRPr sz="1100" b="1">
                 <a:solidFill>
-                  <a:srgbClr val="356696"/>
+                  <a:srgbClr val="164F89"/>
                 </a:solidFill>
                 <a:latin typeface="Liberation Sans"/>
               </a:defRPr>
@@ -11519,7 +11519,7 @@
               </a:spcAft>
               <a:defRPr sz="3100" b="1">
                 <a:solidFill>
-                  <a:srgbClr val="202D3C"/>
+                  <a:srgbClr val="17283B"/>
                 </a:solidFill>
                 <a:latin typeface="Liberation Sans"/>
               </a:defRPr>
@@ -11558,7 +11558,7 @@
               </a:spcAft>
               <a:defRPr sz="1700" b="0">
                 <a:solidFill>
-                  <a:srgbClr val="647282"/>
+                  <a:srgbClr val="414F60"/>
                 </a:solidFill>
                 <a:latin typeface="Liberation Sans"/>
               </a:defRPr>
@@ -11621,7 +11621,7 @@
               </a:spcAft>
               <a:defRPr sz="900" b="0">
                 <a:solidFill>
-                  <a:srgbClr val="647282"/>
+                  <a:srgbClr val="414F60"/>
                 </a:solidFill>
                 <a:latin typeface="Liberation Sans"/>
               </a:defRPr>
@@ -11660,7 +11660,7 @@
               </a:spcAft>
               <a:defRPr sz="1100" b="0">
                 <a:solidFill>
-                  <a:srgbClr val="647282"/>
+                  <a:srgbClr val="414F60"/>
                 </a:solidFill>
                 <a:latin typeface="Liberation Sans"/>
               </a:defRPr>
@@ -11765,7 +11765,7 @@
               </a:spcAft>
               <a:defRPr sz="1100" b="1">
                 <a:solidFill>
-                  <a:srgbClr val="356696"/>
+                  <a:srgbClr val="164F89"/>
                 </a:solidFill>
                 <a:latin typeface="Liberation Sans"/>
               </a:defRPr>
@@ -11804,7 +11804,7 @@
               </a:spcAft>
               <a:defRPr sz="3100" b="1">
                 <a:solidFill>
-                  <a:srgbClr val="202D3C"/>
+                  <a:srgbClr val="17283B"/>
                 </a:solidFill>
                 <a:latin typeface="Liberation Sans"/>
               </a:defRPr>
@@ -11843,7 +11843,7 @@
               </a:spcAft>
               <a:defRPr sz="1700" b="0">
                 <a:solidFill>
-                  <a:srgbClr val="647282"/>
+                  <a:srgbClr val="414F60"/>
                 </a:solidFill>
                 <a:latin typeface="Liberation Sans"/>
               </a:defRPr>
@@ -11906,7 +11906,7 @@
               </a:spcAft>
               <a:defRPr sz="900" b="0">
                 <a:solidFill>
-                  <a:srgbClr val="647282"/>
+                  <a:srgbClr val="414F60"/>
                 </a:solidFill>
                 <a:latin typeface="Liberation Sans"/>
               </a:defRPr>
@@ -11945,7 +11945,7 @@
               </a:spcAft>
               <a:defRPr sz="1100" b="0">
                 <a:solidFill>
-                  <a:srgbClr val="647282"/>
+                  <a:srgbClr val="414F60"/>
                 </a:solidFill>
                 <a:latin typeface="Liberation Sans"/>
               </a:defRPr>
@@ -12050,7 +12050,7 @@
               </a:spcAft>
               <a:defRPr sz="1100" b="1">
                 <a:solidFill>
-                  <a:srgbClr val="356696"/>
+                  <a:srgbClr val="164F89"/>
                 </a:solidFill>
                 <a:latin typeface="Liberation Sans"/>
               </a:defRPr>
@@ -12089,7 +12089,7 @@
               </a:spcAft>
               <a:defRPr sz="3800" b="1">
                 <a:solidFill>
-                  <a:srgbClr val="356696"/>
+                  <a:srgbClr val="164F89"/>
                 </a:solidFill>
                 <a:latin typeface="Liberation Sans"/>
               </a:defRPr>
@@ -12128,7 +12128,7 @@
               </a:spcAft>
               <a:defRPr sz="4100" b="1">
                 <a:solidFill>
-                  <a:srgbClr val="202D3C"/>
+                  <a:srgbClr val="17283B"/>
                 </a:solidFill>
                 <a:latin typeface="Liberation Sans"/>
               </a:defRPr>
@@ -12144,7 +12144,7 @@
               </a:spcAft>
               <a:defRPr sz="4100" b="1">
                 <a:solidFill>
-                  <a:srgbClr val="202D3C"/>
+                  <a:srgbClr val="17283B"/>
                 </a:solidFill>
                 <a:latin typeface="Liberation Sans"/>
               </a:defRPr>
@@ -12183,7 +12183,7 @@
               </a:spcAft>
               <a:defRPr sz="2400" b="0">
                 <a:solidFill>
-                  <a:srgbClr val="356696"/>
+                  <a:srgbClr val="164F89"/>
                 </a:solidFill>
                 <a:latin typeface="Liberation Sans"/>
               </a:defRPr>
@@ -12222,7 +12222,7 @@
               </a:spcAft>
               <a:defRPr sz="2100" b="0">
                 <a:solidFill>
-                  <a:srgbClr val="647282"/>
+                  <a:srgbClr val="414F60"/>
                 </a:solidFill>
                 <a:latin typeface="Liberation Sans"/>
               </a:defRPr>
@@ -12261,7 +12261,7 @@
               </a:spcAft>
               <a:defRPr sz="1500" b="0">
                 <a:solidFill>
-                  <a:srgbClr val="647282"/>
+                  <a:srgbClr val="414F60"/>
                 </a:solidFill>
                 <a:latin typeface="Liberation Sans"/>
               </a:defRPr>
@@ -12300,7 +12300,7 @@
               </a:spcAft>
               <a:defRPr sz="1500" b="1">
                 <a:solidFill>
-                  <a:srgbClr val="356696"/>
+                  <a:srgbClr val="164F89"/>
                 </a:solidFill>
                 <a:latin typeface="Liberation Sans"/>
               </a:defRPr>
@@ -12339,7 +12339,7 @@
               </a:spcAft>
               <a:defRPr sz="1500" b="0">
                 <a:solidFill>
-                  <a:srgbClr val="647282"/>
+                  <a:srgbClr val="414F60"/>
                 </a:solidFill>
                 <a:latin typeface="Liberation Sans"/>
               </a:defRPr>
@@ -12378,7 +12378,7 @@
               </a:spcAft>
               <a:defRPr sz="1500" b="0">
                 <a:solidFill>
-                  <a:srgbClr val="647282"/>
+                  <a:srgbClr val="414F60"/>
                 </a:solidFill>
                 <a:latin typeface="Liberation Sans"/>
               </a:defRPr>
@@ -12417,7 +12417,7 @@
               </a:spcAft>
               <a:defRPr sz="900" b="0">
                 <a:solidFill>
-                  <a:srgbClr val="647282"/>
+                  <a:srgbClr val="414F60"/>
                 </a:solidFill>
                 <a:latin typeface="Liberation Sans"/>
               </a:defRPr>
@@ -12456,7 +12456,7 @@
               </a:spcAft>
               <a:defRPr sz="1100" b="0">
                 <a:solidFill>
-                  <a:srgbClr val="647282"/>
+                  <a:srgbClr val="414F60"/>
                 </a:solidFill>
                 <a:latin typeface="Liberation Sans"/>
               </a:defRPr>
@@ -12561,7 +12561,7 @@
               </a:spcAft>
               <a:defRPr sz="1100" b="1">
                 <a:solidFill>
-                  <a:srgbClr val="356696"/>
+                  <a:srgbClr val="164F89"/>
                 </a:solidFill>
                 <a:latin typeface="Liberation Sans"/>
               </a:defRPr>
@@ -12600,7 +12600,7 @@
               </a:spcAft>
               <a:defRPr sz="3100" b="1">
                 <a:solidFill>
-                  <a:srgbClr val="202D3C"/>
+                  <a:srgbClr val="17283B"/>
                 </a:solidFill>
                 <a:latin typeface="Liberation Sans"/>
               </a:defRPr>
@@ -12639,7 +12639,7 @@
               </a:spcAft>
               <a:defRPr sz="1700" b="0">
                 <a:solidFill>
-                  <a:srgbClr val="647282"/>
+                  <a:srgbClr val="414F60"/>
                 </a:solidFill>
                 <a:latin typeface="Liberation Sans"/>
               </a:defRPr>
@@ -12702,7 +12702,7 @@
               </a:spcAft>
               <a:defRPr sz="900" b="0">
                 <a:solidFill>
-                  <a:srgbClr val="647282"/>
+                  <a:srgbClr val="414F60"/>
                 </a:solidFill>
                 <a:latin typeface="Liberation Sans"/>
               </a:defRPr>
@@ -12741,7 +12741,7 @@
               </a:spcAft>
               <a:defRPr sz="1100" b="0">
                 <a:solidFill>
-                  <a:srgbClr val="647282"/>
+                  <a:srgbClr val="414F60"/>
                 </a:solidFill>
                 <a:latin typeface="Liberation Sans"/>
               </a:defRPr>
@@ -12846,7 +12846,7 @@
               </a:spcAft>
               <a:defRPr sz="1100" b="1">
                 <a:solidFill>
-                  <a:srgbClr val="356696"/>
+                  <a:srgbClr val="164F89"/>
                 </a:solidFill>
                 <a:latin typeface="Liberation Sans"/>
               </a:defRPr>
@@ -12885,7 +12885,7 @@
               </a:spcAft>
               <a:defRPr sz="2850" b="1">
                 <a:solidFill>
-                  <a:srgbClr val="202D3C"/>
+                  <a:srgbClr val="17283B"/>
                 </a:solidFill>
                 <a:latin typeface="Liberation Sans"/>
               </a:defRPr>
@@ -12924,7 +12924,7 @@
               </a:spcAft>
               <a:defRPr sz="1700" b="0">
                 <a:solidFill>
-                  <a:srgbClr val="647282"/>
+                  <a:srgbClr val="414F60"/>
                 </a:solidFill>
                 <a:latin typeface="Liberation Sans"/>
               </a:defRPr>
@@ -12987,7 +12987,7 @@
               </a:spcAft>
               <a:defRPr sz="900" b="0">
                 <a:solidFill>
-                  <a:srgbClr val="647282"/>
+                  <a:srgbClr val="414F60"/>
                 </a:solidFill>
                 <a:latin typeface="Liberation Sans"/>
               </a:defRPr>
@@ -13026,7 +13026,7 @@
               </a:spcAft>
               <a:defRPr sz="1100" b="0">
                 <a:solidFill>
-                  <a:srgbClr val="647282"/>
+                  <a:srgbClr val="414F60"/>
                 </a:solidFill>
                 <a:latin typeface="Liberation Sans"/>
               </a:defRPr>

--- a/docs/ppt/Volcano_KubeCon_NA_2026.pptx
+++ b/docs/ppt/Volcano_KubeCon_NA_2026.pptx
@@ -862,7 +862,7 @@
           <a:lstStyle/>
           <a:p>
             <a:r>
-              <a:t>1:15。依次区分已有接入和仍在扩展的能力。Grove 的 SubGroup backend 已合入，不表示支持所有 topology 约束。Kubeflow/LWS 已有接入，下一步深入分组与拓扑。</a:t>
+              <a:t>1:15。左侧讲 Kthena、KubeRay、Grove 的已交付能力及拓扑差距。右侧讲社区后续工作：RBG 正在推进，Kubeflow 计划深化，LWS 推进 multi-group 调度支持。RBG 已有 gang/SubGroup 映射文档，Kubeflow 与 LWS 已有基础接入，不从零开始。后续方向来自 maintainer 计划，不表示已交付。</a:t>
             </a:r>
           </a:p>
           <a:p/>
@@ -906,10 +906,35 @@
               <a:t>https://github.com/kubernetes-sigs/lws/pull/498</a:t>
             </a:r>
           </a:p>
+          <a:p>
+            <a:r>
+              <a:t>https://github.com/sgl-project/rbg/blob/main/doc/features/gang-scheduling.md</a:t>
+            </a:r>
+          </a:p>
+          <a:p>
+            <a:r>
+              <a:t>https://github.com/kubernetes-sigs/lws/blob/main/README.md</a:t>
+            </a:r>
+          </a:p>
           <a:p/>
           <a:p>
             <a:r>
-              <a:t>本页新版素材与说明：Kthena docs; KubeRay #5249 / #5369; Grove #516; Kubeflow Trainer Volcano plugin; LWS #498.</a:t>
+              <a:t>本页新版素材与说明：Kthena docs; KubeRay #5249 / #5369; Grove #516; RBG gang-scheduling docs; Kubeflow Trainer Volcano plugin; LWS README / DisaggregatedSet. Roadmap intent supplied by maintainers.</a:t>
+            </a:r>
+          </a:p>
+          <a:p>
+            <a:r>
+              <a:t>https://github.com/sgl-project/rbg/blob/main/doc/features/gang-scheduling.md</a:t>
+            </a:r>
+          </a:p>
+          <a:p>
+            <a:r>
+              <a:t>https://github.com/kubernetes-sigs/lws/blob/main/README.md</a:t>
+            </a:r>
+          </a:p>
+          <a:p>
+            <a:r>
+              <a:t>右侧为 maintainer 提供的推进方向；RBG 公开文档已有 RoleInstance→SubGroup 基础。LWS 已有副本组，下一步是跨角色 multi-group 调度集成。</a:t>
             </a:r>
           </a:p>
           <a:p>
@@ -7094,7 +7119,7 @@
               </a:defRPr>
             </a:pPr>
             <a:r>
-              <a:t>Integration depth differs: group support and topology support are separate steps.</a:t>
+              <a:t>Existing integrations and the next steps in role, replica, and topology support.</a:t>
             </a:r>
           </a:p>
         </p:txBody>

--- a/docs/ppt/Volcano_KubeCon_NA_2026.pptx
+++ b/docs/ppt/Volcano_KubeCon_NA_2026.pptx
@@ -1771,7 +1771,7 @@
           <a:lstStyle/>
           <a:p>
             <a:r>
-              <a:t>1:10。回扣四部分：路径协同、分组与拓扑、控制器映射、持续验证。邀请社区贡献具体 workload 与复现方式。</a:t>
+              <a:t>1:10。按后续工作收尾：SubGroup 关系；RBG、Kubeflow 与 LWS multi-group 集成；扩展规模、分组与拓扑约束场景的重复测试。每项都明确需要验证的行为，不承诺未经验证的性能提升。</a:t>
             </a:r>
           </a:p>
           <a:p/>
@@ -9915,7 +9915,7 @@
               </a:defRPr>
             </a:pPr>
             <a:r>
-              <a:t>From Measurements to Reliable Comparisons</a:t>
+              <a:t>Benchmark Metrics: Latency and Throughput</a:t>
             </a:r>
           </a:p>
         </p:txBody>
@@ -9954,7 +9954,7 @@
               </a:defRPr>
             </a:pPr>
             <a:r>
-              <a:t>Keep scheduling latency distinct from application readiness.</a:t>
+              <a:t>Separate scheduling delay, runtime readiness, and successful binding throughput.</a:t>
             </a:r>
           </a:p>
         </p:txBody>
@@ -10200,7 +10200,7 @@
               </a:defRPr>
             </a:pPr>
             <a:r>
-              <a:t>Framework, Workloads, Ecosystem, Evidence</a:t>
+              <a:t>What We Will Work On Next</a:t>
             </a:r>
           </a:p>
         </p:txBody>
@@ -10239,7 +10239,7 @@
               </a:defRPr>
             </a:pPr>
             <a:r>
-              <a:t>Four connected pieces of the scheduling story.</a:t>
+              <a:t>Next steps in group placement, controller integration, and benchmarking.</a:t>
             </a:r>
           </a:p>
         </p:txBody>

--- a/docs/ppt/Volcano_KubeCon_NA_2026.pptx
+++ b/docs/ppt/Volcano_KubeCon_NA_2026.pptx
@@ -27,6 +27,7 @@
     <p:sldId id="275" r:id="rId27"/>
     <p:sldId id="276" r:id="rId28"/>
     <p:sldId id="277" r:id="rId29"/>
+    <p:sldId id="278" r:id="rId30"/>
   </p:sldIdLst>
   <p:sldSz cx="12191999" cy="6858000" type="screen4x3"/>
   <p:notesSz cx="6858000" cy="9144000"/>
@@ -690,7 +691,7 @@
           <a:lstStyle/>
           <a:p>
             <a:r>
-              <a:t>1:40。先让每个实例聚拢，再用 PodGroup anti-affinity 将两个实例分开。required 和 preferred 的差别是没有理想域时是否允许回退。</a:t>
+              <a:t>1:40。复用第 10 页网络层级及交换机符号，两个 Supernode 共用上层 core fabric。两个完整服务实例各在一个域，避免一次域故障同时影响两份实例。P/D 是简化角色标记，不代表唯一模型结构。Kthena ServingGroup→PodGroup 可作为场景，但 topology affinity 接入截至 2026-10-29 仍是开放 proposal #1478 / issue #645，不能说 Kthena 已交付 anti-affinity。HA 的服务恢复还需 routing/health checks，scheduler 不提供应用故障切换。</a:t>
             </a:r>
           </a:p>
           <a:p/>
@@ -713,6 +714,16 @@
           <a:p>
             <a:r>
               <a:t>本页新版素材与说明：docs/user-guide/how_to_use_podgroup_anti_affinity.md; group-topology-affinity plugin, v1.16.</a:t>
+            </a:r>
+          </a:p>
+          <a:p>
+            <a:r>
+              <a:t>https://github.com/volcano-sh/kthena/pull/1478</a:t>
+            </a:r>
+          </a:p>
+          <a:p>
+            <a:r>
+              <a:t>https://github.com/volcano-sh/kthena/issues/645</a:t>
             </a:r>
           </a:p>
           <a:p>
@@ -792,7 +803,44 @@
           <a:lstStyle/>
           <a:p>
             <a:r>
-              <a:t>0:10。转场：这些分组和拓扑语义，最终要由用户真正使用的 controller 传进来。</a:t>
+              <a:t>1:20。放在第二章，以相同 fabric 演进关系语义。同一个 PodGroup 的 Prefill 与两个 Decode SubGroup 都位于 Supernode A，满足上层亲和；两个 Decode 副本分别位于 Leaf 0 与 Leaf 1，满足更细层级的反亲和。每个 SubGroup 都是完整两 Pod 组。Supernode B 和其他空闲 rack 表明这些约束是有选择的放置，而非资源只剩此处。关系 API 为 proposed，不提供伪造的可执行 YAML。</a:t>
+            </a:r>
+          </a:p>
+          <a:p/>
+          <a:p>
+            <a:r>
+              <a:t>技术来源：</a:t>
+            </a:r>
+          </a:p>
+          <a:p>
+            <a:r>
+              <a:t>https://github.com/volcano-sh/volcano/releases/tag/v1.16.0</a:t>
+            </a:r>
+          </a:p>
+          <a:p>
+            <a:r>
+              <a:t>https://github.com/volcano-sh/volcano/issues/6166</a:t>
+            </a:r>
+          </a:p>
+          <a:p>
+            <a:r>
+              <a:t>https://github.com/volcano-sh/volcano/blob/v1.16.0/docs/design/group-topology-affinity.md</a:t>
+            </a:r>
+          </a:p>
+          <a:p/>
+          <a:p>
+            <a:r>
+              <a:t>本页新版素材与说明：docs/design/group-topology-affinity.md (proposed SubGroup relationships); roadmap #6166.</a:t>
+            </a:r>
+          </a:p>
+          <a:p>
+            <a:r>
+              <a:t>本页为未来方向，不能当作已交付 API。示意同一 PodGroup 内将协作组放近、将副本分开；具体 selector 与亲和关系设计仍需社区讨论。</a:t>
+            </a:r>
+          </a:p>
+          <a:p>
+            <a:r>
+              <a:t>Visual: na2026/svg/12-subgroup-next.svg。PNG 固定几何；复用的旧图原本为位图，新增 YAML 和注释为 SVG 文本。</a:t>
             </a:r>
           </a:p>
         </p:txBody>
@@ -862,84 +910,7 @@
           <a:lstStyle/>
           <a:p>
             <a:r>
-              <a:t>1:15。左侧讲 Kthena、KubeRay、Grove 的已交付能力及拓扑差距。右侧讲社区后续工作：RBG 正在推进，Kubeflow 计划深化，LWS 推进 multi-group 调度支持。RBG 已有 gang/SubGroup 映射文档，Kubeflow 与 LWS 已有基础接入，不从零开始。后续方向来自 maintainer 计划，不表示已交付。</a:t>
-            </a:r>
-          </a:p>
-          <a:p/>
-          <a:p>
-            <a:r>
-              <a:t>技术来源：</a:t>
-            </a:r>
-          </a:p>
-          <a:p>
-            <a:r>
-              <a:t>https://github.com/volcano-sh/kthena/blob/main/docs/kthena/versioned_docs/version-v1.0.0/user-guide/gang-scheduling.md</a:t>
-            </a:r>
-          </a:p>
-          <a:p>
-            <a:r>
-              <a:t>https://github.com/volcano-sh/kthena/blob/main/docs/kthena/versioned_docs/version-v1.0.0/user-guide/network-topology.md</a:t>
-            </a:r>
-          </a:p>
-          <a:p>
-            <a:r>
-              <a:t>https://github.com/kuberay-project/kuberay/pull/5249</a:t>
-            </a:r>
-          </a:p>
-          <a:p>
-            <a:r>
-              <a:t>https://github.com/kuberay-project/kuberay/pull/5369</a:t>
-            </a:r>
-          </a:p>
-          <a:p>
-            <a:r>
-              <a:t>https://github.com/ai-dynamo/grove/pull/516</a:t>
-            </a:r>
-          </a:p>
-          <a:p>
-            <a:r>
-              <a:t>https://trainer.kubeflow.org/en/latest/operator-guides/job-scheduling/volcano.html</a:t>
-            </a:r>
-          </a:p>
-          <a:p>
-            <a:r>
-              <a:t>https://github.com/kubernetes-sigs/lws/pull/498</a:t>
-            </a:r>
-          </a:p>
-          <a:p>
-            <a:r>
-              <a:t>https://github.com/sgl-project/rbg/blob/main/doc/features/gang-scheduling.md</a:t>
-            </a:r>
-          </a:p>
-          <a:p>
-            <a:r>
-              <a:t>https://github.com/kubernetes-sigs/lws/blob/main/README.md</a:t>
-            </a:r>
-          </a:p>
-          <a:p/>
-          <a:p>
-            <a:r>
-              <a:t>本页新版素材与说明：Kthena docs; KubeRay #5249 / #5369; Grove #516; RBG gang-scheduling docs; Kubeflow Trainer Volcano plugin; LWS README / DisaggregatedSet. Roadmap intent supplied by maintainers.</a:t>
-            </a:r>
-          </a:p>
-          <a:p>
-            <a:r>
-              <a:t>https://github.com/sgl-project/rbg/blob/main/doc/features/gang-scheduling.md</a:t>
-            </a:r>
-          </a:p>
-          <a:p>
-            <a:r>
-              <a:t>https://github.com/kubernetes-sigs/lws/blob/main/README.md</a:t>
-            </a:r>
-          </a:p>
-          <a:p>
-            <a:r>
-              <a:t>右侧为 maintainer 提供的推进方向；RBG 公开文档已有 RoleInstance→SubGroup 基础。LWS 已有副本组，下一步是跨角色 multi-group 调度集成。</a:t>
-            </a:r>
-          </a:p>
-          <a:p>
-            <a:r>
-              <a:t>Visual: na2026/svg/13-ecosystem.svg。PNG 固定几何；复用的旧图原本为位图，新增 YAML 和注释为 SVG 文本。</a:t>
+              <a:t>0:10。转场：这些分组和拓扑语义，最终要由用户真正使用的 controller 传进来。</a:t>
             </a:r>
           </a:p>
         </p:txBody>
@@ -1203,44 +1174,23 @@
           <a:lstStyle/>
           <a:p>
             <a:r>
-              <a:t>1:10。说明后续在同一个 PodGroup 内表达 SubGroup affinity/anti-affinity 的方向。图是意图示例，不提供假装已可执行的未来 YAML。</a:t>
+              <a:t>0:50。根据 Grove main 的实际 Volcano backend：一个 PodGang 生成一个 Volcano PodGroup；PodGang.spec.podGroups 中每一项生成 SubGroup policy，name 和 PodClique label 选中组，subGroupSize=max(minReplicas,1)，minSubGroups=1。图示两个组分别 2 和 4 Pods，总 minMember=6。当前 main 明确拒绝 PodCliqueSet / PodClique / PodCliqueScalingGroup 上的 topologyConstraint。区分已合入的 adapter 与发布版本支持；不要只依据 #516 初始 PR 描述判断后续 main。</a:t>
+            </a:r>
+          </a:p>
+          <a:p>
+            <a:r>
+              <a:t>https://github.com/NVIDIA/grove/blob/main/operator/internal/scheduler/volcano/backend.go</a:t>
             </a:r>
           </a:p>
           <a:p/>
           <a:p>
             <a:r>
-              <a:t>技术来源：</a:t>
-            </a:r>
-          </a:p>
-          <a:p>
-            <a:r>
-              <a:t>https://github.com/volcano-sh/volcano/releases/tag/v1.16.0</a:t>
-            </a:r>
-          </a:p>
-          <a:p>
-            <a:r>
-              <a:t>https://github.com/volcano-sh/volcano/issues/6166</a:t>
-            </a:r>
-          </a:p>
-          <a:p>
-            <a:r>
-              <a:t>https://github.com/volcano-sh/volcano/blob/v1.16.0/docs/design/group-topology-affinity.md</a:t>
-            </a:r>
-          </a:p>
-          <a:p/>
-          <a:p>
-            <a:r>
-              <a:t>本页新版素材与说明：docs/design/group-topology-affinity.md (proposed SubGroup relationships); roadmap #6166.</a:t>
-            </a:r>
-          </a:p>
-          <a:p>
-            <a:r>
-              <a:t>本页为未来方向，不能当作已交付 API。示意同一 PodGroup 内将协作组放近、将副本分开；具体 selector 与亲和关系设计仍需社区讨论。</a:t>
-            </a:r>
-          </a:p>
-          <a:p>
-            <a:r>
-              <a:t>Visual: na2026/svg/16-subgroup-next.svg。PNG 固定几何；复用的旧图原本为位图，新增 YAML 和注释为 SVG 文本。</a:t>
+              <a:t>本页新版素材与说明：https://github.com/NVIDIA/grove/blob/1d8f83b38a3f54d9827bb579a68c0315ed54ce91/operator/internal/scheduler/volcano/backend.go (reviewed 2026-10-29); #516 merged. topologyConstraint is currently rejected.</a:t>
+            </a:r>
+          </a:p>
+          <a:p>
+            <a:r>
+              <a:t>Visual: na2026/svg/16-grove-mapping.svg。PNG 固定几何；复用的旧图原本为位图，新增 YAML 和注释为 SVG 文本。</a:t>
             </a:r>
           </a:p>
         </p:txBody>
@@ -1310,7 +1260,84 @@
           <a:lstStyle/>
           <a:p>
             <a:r>
-              <a:t>0:10。转场：接入的控制器和约束越多，就越需要可重复的 benchmark。</a:t>
+              <a:t>0:50。具体 Kthena、KubeRay、Grove 案例之后再讲后续社区方向。RBG 推进中，已有 RoleInstance→SubGroup 基础；Kubeflow 计划在现有 Volcano 插件上深化分组及拓扑；LWS 计划 multi-role/multi-group 支持。状态来自 maintainer 的推进计划，不能写作全部已交付。</a:t>
+            </a:r>
+          </a:p>
+          <a:p/>
+          <a:p>
+            <a:r>
+              <a:t>技术来源：</a:t>
+            </a:r>
+          </a:p>
+          <a:p>
+            <a:r>
+              <a:t>https://github.com/volcano-sh/kthena/blob/main/docs/kthena/versioned_docs/version-v1.0.0/user-guide/gang-scheduling.md</a:t>
+            </a:r>
+          </a:p>
+          <a:p>
+            <a:r>
+              <a:t>https://github.com/volcano-sh/kthena/blob/main/docs/kthena/versioned_docs/version-v1.0.0/user-guide/network-topology.md</a:t>
+            </a:r>
+          </a:p>
+          <a:p>
+            <a:r>
+              <a:t>https://github.com/kuberay-project/kuberay/pull/5249</a:t>
+            </a:r>
+          </a:p>
+          <a:p>
+            <a:r>
+              <a:t>https://github.com/kuberay-project/kuberay/pull/5369</a:t>
+            </a:r>
+          </a:p>
+          <a:p>
+            <a:r>
+              <a:t>https://github.com/ai-dynamo/grove/pull/516</a:t>
+            </a:r>
+          </a:p>
+          <a:p>
+            <a:r>
+              <a:t>https://trainer.kubeflow.org/en/latest/operator-guides/job-scheduling/volcano.html</a:t>
+            </a:r>
+          </a:p>
+          <a:p>
+            <a:r>
+              <a:t>https://github.com/kubernetes-sigs/lws/pull/498</a:t>
+            </a:r>
+          </a:p>
+          <a:p>
+            <a:r>
+              <a:t>https://github.com/sgl-project/rbg/blob/main/doc/features/gang-scheduling.md</a:t>
+            </a:r>
+          </a:p>
+          <a:p>
+            <a:r>
+              <a:t>https://github.com/kubernetes-sigs/lws/blob/main/README.md</a:t>
+            </a:r>
+          </a:p>
+          <a:p/>
+          <a:p>
+            <a:r>
+              <a:t>本页新版素材与说明：Kthena docs; KubeRay #5249 / #5369; Grove #516; RBG gang-scheduling docs; Kubeflow Trainer Volcano plugin; LWS README / DisaggregatedSet. Roadmap intent supplied by maintainers.</a:t>
+            </a:r>
+          </a:p>
+          <a:p>
+            <a:r>
+              <a:t>https://github.com/sgl-project/rbg/blob/main/doc/features/gang-scheduling.md</a:t>
+            </a:r>
+          </a:p>
+          <a:p>
+            <a:r>
+              <a:t>https://github.com/kubernetes-sigs/lws/blob/main/README.md</a:t>
+            </a:r>
+          </a:p>
+          <a:p>
+            <a:r>
+              <a:t>右侧为 maintainer 提供的推进方向；RBG 公开文档已有 RoleInstance→SubGroup 基础。LWS 已有副本组，下一步是跨角色 multi-group 调度集成。</a:t>
+            </a:r>
+          </a:p>
+          <a:p>
+            <a:r>
+              <a:t>Visual: na2026/svg/17-ecosystem.svg。PNG 固定几何；复用的旧图原本为位图，新增 YAML 和注释为 SVG 文本。</a:t>
             </a:r>
           </a:p>
         </p:txBody>
@@ -1380,34 +1407,7 @@
           <a:lstStyle/>
           <a:p>
             <a:r>
-              <a:t>1:30。沿数据路径解释 benchmark：场景输入→API/调度器→audit-exporter 与 Prometheus→报告。KWOK 只验证调度行为，不代表真实 GPU 执行吞吐。</a:t>
-            </a:r>
-          </a:p>
-          <a:p/>
-          <a:p>
-            <a:r>
-              <a:t>技术来源：</a:t>
-            </a:r>
-          </a:p>
-          <a:p>
-            <a:r>
-              <a:t>https://github.com/volcano-sh/volcano/blob/a3d50b503/benchmark/README.md</a:t>
-            </a:r>
-          </a:p>
-          <a:p>
-            <a:r>
-              <a:t>https://github.com/volcano-sh/volcano/blob/a3d50b503/benchmark/scripts/README.md</a:t>
-            </a:r>
-          </a:p>
-          <a:p/>
-          <a:p>
-            <a:r>
-              <a:t>本页新版素材与说明：benchmark/README.md; benchmark/scripts; benchmark/config; benchmark/testcases.</a:t>
-            </a:r>
-          </a:p>
-          <a:p>
-            <a:r>
-              <a:t>Visual: na2026/svg/18-benchmark-architecture.svg。PNG 固定几何；复用的旧图原本为位图，新增 YAML 和注释为 SVG 文本。</a:t>
+              <a:t>0:10。转场：接入的控制器和约束越多，就越需要可重复的 benchmark。</a:t>
             </a:r>
           </a:p>
         </p:txBody>
@@ -1477,7 +1477,7 @@
           <a:lstStyle/>
           <a:p>
             <a:r>
-              <a:t>1:20。已有框架、场景和观察能力是本章可以确定展示的进展。继续验证规模、约束和优化，不为了演讲单独制造漂亮结果。命令仅展示框架用法，本次没有运行集群测试。</a:t>
+              <a:t>1:30。沿数据路径解释 benchmark：场景输入→API/调度器→audit-exporter 与 Prometheus→报告。KWOK 只验证调度行为，不代表真实 GPU 执行吞吐。</a:t>
             </a:r>
           </a:p>
           <a:p/>
@@ -1488,28 +1488,23 @@
           </a:p>
           <a:p>
             <a:r>
-              <a:t>https://github.com/volcano-sh/volcano/blob/a3d50b503/benchmark/scripts/collect-report.sh</a:t>
-            </a:r>
-          </a:p>
-          <a:p>
-            <a:r>
-              <a:t>https://github.com/volcano-sh/volcano/blob/a3d50b503/benchmark/manifests/monitoring/grafana-dashboard.json</a:t>
-            </a:r>
-          </a:p>
-          <a:p>
-            <a:r>
-              <a:t>https://github.com/volcano-sh/volcano/issues/6166</a:t>
+              <a:t>https://github.com/volcano-sh/volcano/blob/a3d50b503/benchmark/README.md</a:t>
+            </a:r>
+          </a:p>
+          <a:p>
+            <a:r>
+              <a:t>https://github.com/volcano-sh/volcano/blob/a3d50b503/benchmark/scripts/README.md</a:t>
             </a:r>
           </a:p>
           <a:p/>
           <a:p>
             <a:r>
-              <a:t>本页新版素材与说明：benchmark/README.md; benchmark/Makefile; benchmark/scripts/collect-report.sh.</a:t>
-            </a:r>
-          </a:p>
-          <a:p>
-            <a:r>
-              <a:t>Visual: na2026/svg/19-benchmark-progress.svg。PNG 固定几何；复用的旧图原本为位图，新增 YAML 和注释为 SVG 文本。</a:t>
+              <a:t>本页新版素材与说明：benchmark/README.md; benchmark/scripts; benchmark/config; benchmark/testcases.</a:t>
+            </a:r>
+          </a:p>
+          <a:p>
+            <a:r>
+              <a:t>Visual: na2026/svg/19-benchmark-architecture.svg。PNG 固定几何；复用的旧图原本为位图，新增 YAML 和注释为 SVG 文本。</a:t>
             </a:r>
           </a:p>
         </p:txBody>
@@ -1579,7 +1574,17 @@
           <a:lstStyle/>
           <a:p>
             <a:r>
-              <a:t>0:40。简介暂依据公开资料；Ricardo 当前公司和正式职务不确定，未填公司。收到讲者偏好后更新文字与头像。照片来自 Linux Foundation 公开讲者页。</a:t>
+              <a:t>0:40。Ricardo：NA 2026 官方会议资料列为 Nunchux AI 的 AI Infrastructure Lead；CNCF TOC 页面列为 TOC Alternate (GB)，不是 Governing Board 成员，不写 Founder 或 CEO。2026-10-29 核查。照片来自 Linux Foundation 公开讲者页。</a:t>
+            </a:r>
+          </a:p>
+          <a:p>
+            <a:r>
+              <a:t>https://events.linuxfoundation.org/kubecon-cloudnativecon-north-america/program/schedule/?id=1289640</a:t>
+            </a:r>
+          </a:p>
+          <a:p>
+            <a:r>
+              <a:t>https://www.cncf.io/people/technical-oversight-committee/</a:t>
             </a:r>
           </a:p>
           <a:p>
@@ -1669,7 +1674,7 @@
           <a:lstStyle/>
           <a:p>
             <a:r>
-              <a:t>1:20。讲清 created→scheduled 的统计口径、吞吐窗口和对照条件。仍待选定一项代表性结果，可以后续原位替换本页。</a:t>
+              <a:t>1:20。已有 harness 为重复场景和指标采集打底。后续在同样集群容量、相同 workload arrivals/grouping/resources 下逐个运行不同 scheduler；每次 reset，不能让调度器同时竞争资源。固定每个实现的版本、配置和指标口径；记录各自合理调参后的配置。Kubernetes scheduler 可作为支持场景的 baseline，其他调度器集合待确定。未支持 gang 或 topology 的调度器不强行比较相同语义，须标注差异。比较 tail latency、binding throughput、完整 gang 数及放置正确性，不展示虚构结果。</a:t>
             </a:r>
           </a:p>
           <a:p/>
@@ -1680,28 +1685,28 @@
           </a:p>
           <a:p>
             <a:r>
-              <a:t>https://github.com/volcano-sh/volcano/blob/a3d50b503/benchmark/README.md</a:t>
-            </a:r>
-          </a:p>
-          <a:p>
-            <a:r>
               <a:t>https://github.com/volcano-sh/volcano/blob/a3d50b503/benchmark/scripts/collect-report.sh</a:t>
             </a:r>
           </a:p>
+          <a:p>
+            <a:r>
+              <a:t>https://github.com/volcano-sh/volcano/blob/a3d50b503/benchmark/manifests/monitoring/grafana-dashboard.json</a:t>
+            </a:r>
+          </a:p>
+          <a:p>
+            <a:r>
+              <a:t>https://github.com/volcano-sh/volcano/issues/6166</a:t>
+            </a:r>
+          </a:p>
           <a:p/>
           <a:p>
             <a:r>
-              <a:t>本页新版素材与说明：benchmark/scripts/collect-report.sh and audit-exporter event definitions. No performance results selected.</a:t>
-            </a:r>
-          </a:p>
-          <a:p>
-            <a:r>
-              <a:t>尚未选定代表性 benchmark 结果，本页只讲测量口径，不呈现虚构性能曲线或提升比例。</a:t>
-            </a:r>
-          </a:p>
-          <a:p>
-            <a:r>
-              <a:t>Visual: na2026/svg/20-benchmark-measurement.svg。PNG 固定几何；复用的旧图原本为位图，新增 YAML 和注释为 SVG 文本。</a:t>
+              <a:t>本页新版素材与说明：benchmark/README.md; benchmark/Makefile; benchmark/scripts/collect-report.sh.</a:t>
+            </a:r>
+          </a:p>
+          <a:p>
+            <a:r>
+              <a:t>Visual: na2026/svg/20-benchmark-progress.svg。PNG 固定几何；复用的旧图原本为位图，新增 YAML 和注释为 SVG 文本。</a:t>
             </a:r>
           </a:p>
         </p:txBody>
@@ -1771,7 +1776,7 @@
           <a:lstStyle/>
           <a:p>
             <a:r>
-              <a:t>1:10。按后续工作收尾：SubGroup 关系；RBG、Kubeflow 与 LWS multi-group 集成；扩展规模、分组与拓扑约束场景的重复测试。每项都明确需要验证的行为，不承诺未经验证的性能提升。</a:t>
+              <a:t>1:20。选择代表性场景，寻找每种 scheduler 的适用边界，不只找有利 Volcano 的配置。第一类改变 arrival rate、预留容量，观察突发的尾延迟和积压恢复；只测试 pool 容量请求的调度，不用 KWOK 宣称完整 agent runtime 延迟。第二类改变 SubGroup 大小和可用资源碎片，观察完整 gangs 和 binding throughput。第三类组合 topology tier limits、可用域、gang/anti-affinity，检查 placement correctness 与完成延迟。KWOK 可以验证调度行为；NCCL/KV 带宽及实际模型吞吐需要真实硬件另测。本页是 ongoing/planned test matrix，没有 benchmark 数字。</a:t>
             </a:r>
           </a:p>
           <a:p/>
@@ -1782,23 +1787,28 @@
           </a:p>
           <a:p>
             <a:r>
-              <a:t>https://github.com/volcano-sh/volcano/issues/6166</a:t>
-            </a:r>
-          </a:p>
-          <a:p>
-            <a:r>
               <a:t>https://github.com/volcano-sh/volcano/blob/a3d50b503/benchmark/README.md</a:t>
             </a:r>
           </a:p>
+          <a:p>
+            <a:r>
+              <a:t>https://github.com/volcano-sh/volcano/blob/a3d50b503/benchmark/scripts/collect-report.sh</a:t>
+            </a:r>
+          </a:p>
           <a:p/>
           <a:p>
             <a:r>
-              <a:t>本页新版素材与说明：</a:t>
-            </a:r>
-          </a:p>
-          <a:p>
-            <a:r>
-              <a:t>Visual: na2026/svg/21-takeaways.svg。PNG 固定几何；复用的旧图原本为位图，新增 YAML 和注释为 SVG 文本。</a:t>
+              <a:t>本页新版素材与说明：benchmark/scripts/collect-report.sh and audit-exporter event definitions. No performance results selected.</a:t>
+            </a:r>
+          </a:p>
+          <a:p>
+            <a:r>
+              <a:t>口径：scheduledAt−createdAt；binding throughput 为成功 bindings / 首尾成功 bind 时间差。对照时保留原始事件、重复次数与环境配置。命令与完整指标定义见 benchmark/README.md。</a:t>
+            </a:r>
+          </a:p>
+          <a:p>
+            <a:r>
+              <a:t>Visual: na2026/svg/21-benchmark-measurement.svg。PNG 固定几何；复用的旧图原本为位图，新增 YAML 和注释为 SVG 文本。</a:t>
             </a:r>
           </a:p>
         </p:txBody>
@@ -1868,6 +1878,103 @@
           <a:lstStyle/>
           <a:p>
             <a:r>
+              <a:t>1:00。收尾强调下一步：SubGroup affinity/anti-affinity 的语义与实现；RBG/Kubeflow/LWS multi-group 的社区工作；多调度器横向对照、代表性场景及 topology-aware gang 测试。</a:t>
+            </a:r>
+          </a:p>
+          <a:p/>
+          <a:p>
+            <a:r>
+              <a:t>技术来源：</a:t>
+            </a:r>
+          </a:p>
+          <a:p>
+            <a:r>
+              <a:t>https://github.com/volcano-sh/volcano/issues/6166</a:t>
+            </a:r>
+          </a:p>
+          <a:p>
+            <a:r>
+              <a:t>https://github.com/volcano-sh/volcano/blob/a3d50b503/benchmark/README.md</a:t>
+            </a:r>
+          </a:p>
+          <a:p/>
+          <a:p>
+            <a:r>
+              <a:t>本页新版素材与说明：</a:t>
+            </a:r>
+          </a:p>
+          <a:p>
+            <a:r>
+              <a:t>Visual: na2026/svg/22-takeaways.svg。PNG 固定几何；复用的旧图原本为位图，新增 YAML 和注释为 SVG 文本。</a:t>
+            </a:r>
+          </a:p>
+        </p:txBody>
+      </p:sp>
+      <p:sp>
+        <p:nvSpPr>
+          <p:cNvPr id="4" name="Slide Number Placeholder 3"/>
+          <p:cNvSpPr>
+            <a:spLocks noGrp="1"/>
+          </p:cNvSpPr>
+          <p:nvPr>
+            <p:ph type="sldNum" idx="5" sz="quarter"/>
+          </p:nvPr>
+        </p:nvSpPr>
+        <p:spPr/>
+      </p:sp>
+    </p:spTree>
+  </p:cSld>
+  <p:clrMapOvr>
+    <a:masterClrMapping/>
+  </p:clrMapOvr>
+</p:notes>
+</file>
+
+<file path=ppt/notesSlides/notesSlide23.xml><?xml version="1.0" encoding="utf-8"?>
+<p:notes xmlns:a="http://schemas.openxmlformats.org/drawingml/2006/main" xmlns:p="http://schemas.openxmlformats.org/presentationml/2006/main" xmlns:r="http://schemas.openxmlformats.org/officeDocument/2006/relationships">
+  <p:cSld>
+    <p:spTree>
+      <p:nvGrpSpPr>
+        <p:cNvPr id="1" name=""/>
+        <p:cNvGrpSpPr/>
+        <p:nvPr/>
+      </p:nvGrpSpPr>
+      <p:grpSpPr>
+        <a:xfrm>
+          <a:off x="0" y="0"/>
+          <a:ext cx="0" cy="0"/>
+          <a:chOff x="0" y="0"/>
+          <a:chExt cx="0" cy="0"/>
+        </a:xfrm>
+      </p:grpSpPr>
+      <p:sp>
+        <p:nvSpPr>
+          <p:cNvPr id="2" name="Slide Image Placeholder 1"/>
+          <p:cNvSpPr>
+            <a:spLocks noGrp="1"/>
+          </p:cNvSpPr>
+          <p:nvPr>
+            <p:ph type="sldImg" idx="2"/>
+          </p:nvPr>
+        </p:nvSpPr>
+        <p:spPr/>
+      </p:sp>
+      <p:sp>
+        <p:nvSpPr>
+          <p:cNvPr id="3" name="Notes Placeholder 2"/>
+          <p:cNvSpPr>
+            <a:spLocks noGrp="1"/>
+          </p:cNvSpPr>
+          <p:nvPr>
+            <p:ph type="body" idx="3" sz="quarter"/>
+          </p:nvPr>
+        </p:nvSpPr>
+        <p:spPr/>
+        <p:txBody>
+          <a:bodyPr/>
+          <a:lstStyle/>
+          <a:p>
+            <a:r>
               <a:t>5:00。问答。优先收集工作负载如何分组、需要哪些拓扑关系，以及可重复的测试场景。</a:t>
             </a:r>
           </a:p>
@@ -1900,7 +2007,7 @@
           </a:p>
           <a:p>
             <a:r>
-              <a:t>Visual: na2026/svg/22-questions.svg。PNG 固定几何；复用的旧图原本为位图，新增 YAML 和注释为 SVG 文本。</a:t>
+              <a:t>Visual: na2026/svg/23-questions.svg。PNG 固定几何；复用的旧图原本为位图，新增 YAML 和注释为 SVG 文本。</a:t>
             </a:r>
           </a:p>
         </p:txBody>
@@ -2040,7 +2147,7 @@
           <a:lstStyle/>
           <a:p>
             <a:r>
-              <a:t>1:00。先讲共同的基础设施需求：训练/RL 更强调协同计算，推理有角色与副本结构，agent 业务带来突发和延迟压力。并非每次 agent 调用都要创建一个 Pod。</a:t>
+              <a:t>1:20。训练图展示两个 PP stage，每个 stage 两个 TP ranks，需要完整子组及通信局部性。推理展示 P/D 分离，不同角色及副本的 gang 与 topology 约束。Agent 路径先命中预热池并复用 ready runtime；池子耗尽时由 runtime/pool controller 请求容量，经快速 Pod 调度补池。请求突发图是需求示意，没有测量值。池管理不是 Volcano 自带能力，也不是每次调用创建 Pod。</a:t>
             </a:r>
           </a:p>
           <a:p/>
@@ -5871,7 +5978,7 @@
               </a:defRPr>
             </a:pPr>
             <a:r>
-              <a:t>01 / 22</a:t>
+              <a:t>01 / 23</a:t>
             </a:r>
           </a:p>
         </p:txBody>
@@ -6156,7 +6263,7 @@
               </a:defRPr>
             </a:pPr>
             <a:r>
-              <a:t>10 / 22</a:t>
+              <a:t>10 / 23</a:t>
             </a:r>
           </a:p>
         </p:txBody>
@@ -6339,7 +6446,7 @@
               </a:defRPr>
             </a:pPr>
             <a:r>
-              <a:t>PodGroup anti-affinity separates service instances across HyperNode domains.</a:t>
+              <a:t>ServingGroup → PodGroup: a Kthena scenario. Anti-affinity integration in Kthena is proposed.</a:t>
             </a:r>
           </a:p>
         </p:txBody>
@@ -6441,7 +6548,7 @@
               </a:defRPr>
             </a:pPr>
             <a:r>
-              <a:t>11 / 22</a:t>
+              <a:t>11 / 23</a:t>
             </a:r>
           </a:p>
         </p:txBody>
@@ -6466,7 +6573,7 @@
       <p:grpSpPr/>
       <p:pic>
         <p:nvPicPr>
-          <p:cNvPr id="2" name="Picture 1" descr="cover-background.png"/>
+          <p:cNvPr id="2" name="Picture 1" descr="background.png"/>
           <p:cNvPicPr>
             <a:picLocks noChangeAspect="1"/>
           </p:cNvPicPr>
@@ -6546,7 +6653,7 @@
               </a:defRPr>
             </a:pPr>
             <a:r>
-              <a:t>ECOSYSTEM</a:t>
+              <a:t>MULTI-LEVEL GANG &amp; NETWORK TOPOLOGY</a:t>
             </a:r>
           </a:p>
         </p:txBody>
@@ -6559,8 +6666,8 @@
         </p:nvSpPr>
         <p:spPr>
           <a:xfrm>
-            <a:off x="594360" y="1298448"/>
-            <a:ext cx="1828800" cy="640080"/>
+            <a:off x="457200" y="804672"/>
+            <a:ext cx="11247120" cy="640080"/>
           </a:xfrm>
           <a:prstGeom prst="rect">
             <a:avLst/>
@@ -6577,15 +6684,15 @@
               <a:spcAft>
                 <a:spcPts val="500"/>
               </a:spcAft>
-              <a:defRPr sz="3800" b="1">
-                <a:solidFill>
-                  <a:srgbClr val="164F89"/>
-                </a:solidFill>
-                <a:latin typeface="Liberation Sans"/>
-              </a:defRPr>
-            </a:pPr>
-            <a:r>
-              <a:t>03</a:t>
+              <a:defRPr sz="3100" b="1">
+                <a:solidFill>
+                  <a:srgbClr val="17283B"/>
+                </a:solidFill>
+                <a:latin typeface="Liberation Sans"/>
+              </a:defRPr>
+            </a:pPr>
+            <a:r>
+              <a:t>Next: Relationships Between SubGroups</a:t>
             </a:r>
           </a:p>
         </p:txBody>
@@ -6598,8 +6705,8 @@
         </p:nvSpPr>
         <p:spPr>
           <a:xfrm>
-            <a:off x="594360" y="2084831"/>
-            <a:ext cx="7863840" cy="1508760"/>
+            <a:off x="475488" y="1435608"/>
+            <a:ext cx="11201400" cy="429768"/>
           </a:xfrm>
           <a:prstGeom prst="rect">
             <a:avLst/>
@@ -6616,256 +6723,46 @@
               <a:spcAft>
                 <a:spcPts val="500"/>
               </a:spcAft>
-              <a:defRPr sz="4100" b="1">
-                <a:solidFill>
-                  <a:srgbClr val="17283B"/>
-                </a:solidFill>
-                <a:latin typeface="Liberation Sans"/>
-              </a:defRPr>
-            </a:pPr>
-            <a:r>
-              <a:t>Ecosystem</a:t>
-            </a:r>
-          </a:p>
-        </p:txBody>
-      </p:sp>
-      <p:sp>
-        <p:nvSpPr>
-          <p:cNvPr id="7" name="TextBox 6"/>
-          <p:cNvSpPr txBox="1"/>
-          <p:nvPr/>
-        </p:nvSpPr>
-        <p:spPr>
-          <a:xfrm>
-            <a:off x="621792" y="4041648"/>
-            <a:ext cx="9966960" cy="548640"/>
-          </a:xfrm>
-          <a:prstGeom prst="rect">
-            <a:avLst/>
-          </a:prstGeom>
-          <a:noFill/>
-        </p:spPr>
-        <p:txBody>
-          <a:bodyPr wrap="square" lIns="0" rIns="0" tIns="0" bIns="0">
-            <a:spAutoFit/>
-          </a:bodyPr>
-          <a:lstStyle/>
-          <a:p>
-            <a:pPr>
-              <a:spcAft>
-                <a:spcPts val="500"/>
-              </a:spcAft>
-              <a:defRPr sz="2400" b="0">
-                <a:solidFill>
-                  <a:srgbClr val="164F89"/>
-                </a:solidFill>
-                <a:latin typeface="Liberation Sans"/>
-              </a:defRPr>
-            </a:pPr>
-            <a:r>
-              <a:t>Workload controllers carry scheduling intent.</a:t>
-            </a:r>
-          </a:p>
-        </p:txBody>
-      </p:sp>
+              <a:defRPr sz="1700" b="0">
+                <a:solidFill>
+                  <a:srgbClr val="414F60"/>
+                </a:solidFill>
+                <a:latin typeface="Liberation Sans"/>
+              </a:defRPr>
+            </a:pPr>
+            <a:r>
+              <a:t>Keep cooperating groups local while separating replicas inside the same PodGroup.</a:t>
+            </a:r>
+          </a:p>
+        </p:txBody>
+      </p:sp>
+      <p:pic>
+        <p:nvPicPr>
+          <p:cNvPr id="7" name="Picture 6" descr="12-subgroup-next.png"/>
+          <p:cNvPicPr>
+            <a:picLocks noChangeAspect="1"/>
+          </p:cNvPicPr>
+          <p:nvPr/>
+        </p:nvPicPr>
+        <p:blipFill>
+          <a:blip r:embed="rId4"/>
+          <a:stretch>
+            <a:fillRect/>
+          </a:stretch>
+        </p:blipFill>
+        <p:spPr>
+          <a:xfrm>
+            <a:off x="457200" y="1938528"/>
+            <a:ext cx="11277599" cy="4267200"/>
+          </a:xfrm>
+          <a:prstGeom prst="rect">
+            <a:avLst/>
+          </a:prstGeom>
+        </p:spPr>
+      </p:pic>
       <p:sp>
         <p:nvSpPr>
           <p:cNvPr id="8" name="TextBox 7"/>
-          <p:cNvSpPr txBox="1"/>
-          <p:nvPr/>
-        </p:nvSpPr>
-        <p:spPr>
-          <a:xfrm>
-            <a:off x="621792" y="4791456"/>
-            <a:ext cx="10607040" cy="594360"/>
-          </a:xfrm>
-          <a:prstGeom prst="rect">
-            <a:avLst/>
-          </a:prstGeom>
-          <a:noFill/>
-        </p:spPr>
-        <p:txBody>
-          <a:bodyPr wrap="square" lIns="0" rIns="0" tIns="0" bIns="0">
-            <a:spAutoFit/>
-          </a:bodyPr>
-          <a:lstStyle/>
-          <a:p>
-            <a:pPr>
-              <a:spcAft>
-                <a:spcPts val="500"/>
-              </a:spcAft>
-              <a:defRPr sz="2100" b="0">
-                <a:solidFill>
-                  <a:srgbClr val="414F60"/>
-                </a:solidFill>
-                <a:latin typeface="Liberation Sans"/>
-              </a:defRPr>
-            </a:pPr>
-            <a:r>
-              <a:t>How do roles and replicas reach the scheduler?</a:t>
-            </a:r>
-          </a:p>
-        </p:txBody>
-      </p:sp>
-      <p:sp>
-        <p:nvSpPr>
-          <p:cNvPr id="9" name="TextBox 8"/>
-          <p:cNvSpPr txBox="1"/>
-          <p:nvPr/>
-        </p:nvSpPr>
-        <p:spPr>
-          <a:xfrm>
-            <a:off x="8503920" y="1554480"/>
-            <a:ext cx="3154680" cy="621792"/>
-          </a:xfrm>
-          <a:prstGeom prst="rect">
-            <a:avLst/>
-          </a:prstGeom>
-          <a:noFill/>
-        </p:spPr>
-        <p:txBody>
-          <a:bodyPr wrap="square" lIns="0" rIns="0" tIns="0" bIns="0">
-            <a:spAutoFit/>
-          </a:bodyPr>
-          <a:lstStyle/>
-          <a:p>
-            <a:pPr>
-              <a:spcAft>
-                <a:spcPts val="500"/>
-              </a:spcAft>
-              <a:defRPr sz="1500" b="0">
-                <a:solidFill>
-                  <a:srgbClr val="414F60"/>
-                </a:solidFill>
-                <a:latin typeface="Liberation Sans"/>
-              </a:defRPr>
-            </a:pPr>
-            <a:r>
-              <a:t>01  Unified scheduling</a:t>
-            </a:r>
-          </a:p>
-        </p:txBody>
-      </p:sp>
-      <p:sp>
-        <p:nvSpPr>
-          <p:cNvPr id="10" name="TextBox 9"/>
-          <p:cNvSpPr txBox="1"/>
-          <p:nvPr/>
-        </p:nvSpPr>
-        <p:spPr>
-          <a:xfrm>
-            <a:off x="8503920" y="2249424"/>
-            <a:ext cx="3154680" cy="621792"/>
-          </a:xfrm>
-          <a:prstGeom prst="rect">
-            <a:avLst/>
-          </a:prstGeom>
-          <a:noFill/>
-        </p:spPr>
-        <p:txBody>
-          <a:bodyPr wrap="square" lIns="0" rIns="0" tIns="0" bIns="0">
-            <a:spAutoFit/>
-          </a:bodyPr>
-          <a:lstStyle/>
-          <a:p>
-            <a:pPr>
-              <a:spcAft>
-                <a:spcPts val="500"/>
-              </a:spcAft>
-              <a:defRPr sz="1500" b="0">
-                <a:solidFill>
-                  <a:srgbClr val="414F60"/>
-                </a:solidFill>
-                <a:latin typeface="Liberation Sans"/>
-              </a:defRPr>
-            </a:pPr>
-            <a:r>
-              <a:t>02  Multi-level gang &amp; network topology</a:t>
-            </a:r>
-          </a:p>
-        </p:txBody>
-      </p:sp>
-      <p:sp>
-        <p:nvSpPr>
-          <p:cNvPr id="11" name="TextBox 10"/>
-          <p:cNvSpPr txBox="1"/>
-          <p:nvPr/>
-        </p:nvSpPr>
-        <p:spPr>
-          <a:xfrm>
-            <a:off x="8503920" y="2944368"/>
-            <a:ext cx="3154680" cy="621792"/>
-          </a:xfrm>
-          <a:prstGeom prst="rect">
-            <a:avLst/>
-          </a:prstGeom>
-          <a:noFill/>
-        </p:spPr>
-        <p:txBody>
-          <a:bodyPr wrap="square" lIns="0" rIns="0" tIns="0" bIns="0">
-            <a:spAutoFit/>
-          </a:bodyPr>
-          <a:lstStyle/>
-          <a:p>
-            <a:pPr>
-              <a:spcAft>
-                <a:spcPts val="500"/>
-              </a:spcAft>
-              <a:defRPr sz="1500" b="1">
-                <a:solidFill>
-                  <a:srgbClr val="164F89"/>
-                </a:solidFill>
-                <a:latin typeface="Liberation Sans"/>
-              </a:defRPr>
-            </a:pPr>
-            <a:r>
-              <a:t>03  Ecosystem</a:t>
-            </a:r>
-          </a:p>
-        </p:txBody>
-      </p:sp>
-      <p:sp>
-        <p:nvSpPr>
-          <p:cNvPr id="12" name="TextBox 11"/>
-          <p:cNvSpPr txBox="1"/>
-          <p:nvPr/>
-        </p:nvSpPr>
-        <p:spPr>
-          <a:xfrm>
-            <a:off x="8503920" y="3639312"/>
-            <a:ext cx="3154680" cy="621792"/>
-          </a:xfrm>
-          <a:prstGeom prst="rect">
-            <a:avLst/>
-          </a:prstGeom>
-          <a:noFill/>
-        </p:spPr>
-        <p:txBody>
-          <a:bodyPr wrap="square" lIns="0" rIns="0" tIns="0" bIns="0">
-            <a:spAutoFit/>
-          </a:bodyPr>
-          <a:lstStyle/>
-          <a:p>
-            <a:pPr>
-              <a:spcAft>
-                <a:spcPts val="500"/>
-              </a:spcAft>
-              <a:defRPr sz="1500" b="0">
-                <a:solidFill>
-                  <a:srgbClr val="414F60"/>
-                </a:solidFill>
-                <a:latin typeface="Liberation Sans"/>
-              </a:defRPr>
-            </a:pPr>
-            <a:r>
-              <a:t>04  Benchmark framework &amp; progress</a:t>
-            </a:r>
-          </a:p>
-        </p:txBody>
-      </p:sp>
-      <p:sp>
-        <p:nvSpPr>
-          <p:cNvPr id="13" name="TextBox 12"/>
           <p:cNvSpPr txBox="1"/>
           <p:nvPr/>
         </p:nvSpPr>
@@ -6904,7 +6801,7 @@
       </p:sp>
       <p:sp>
         <p:nvSpPr>
-          <p:cNvPr id="14" name="TextBox 13"/>
+          <p:cNvPr id="9" name="TextBox 8"/>
           <p:cNvSpPr txBox="1"/>
           <p:nvPr/>
         </p:nvSpPr>
@@ -6936,7 +6833,7 @@
               </a:defRPr>
             </a:pPr>
             <a:r>
-              <a:t>12 / 22</a:t>
+              <a:t>12 / 23</a:t>
             </a:r>
           </a:p>
         </p:txBody>
@@ -6961,7 +6858,7 @@
       <p:grpSpPr/>
       <p:pic>
         <p:nvPicPr>
-          <p:cNvPr id="2" name="Picture 1" descr="background.png"/>
+          <p:cNvPr id="2" name="Picture 1" descr="cover-background.png"/>
           <p:cNvPicPr>
             <a:picLocks noChangeAspect="1"/>
           </p:cNvPicPr>
@@ -7054,8 +6951,8 @@
         </p:nvSpPr>
         <p:spPr>
           <a:xfrm>
-            <a:off x="457200" y="804672"/>
-            <a:ext cx="11247120" cy="640080"/>
+            <a:off x="594360" y="1298448"/>
+            <a:ext cx="1828800" cy="640080"/>
           </a:xfrm>
           <a:prstGeom prst="rect">
             <a:avLst/>
@@ -7072,7 +6969,46 @@
               <a:spcAft>
                 <a:spcPts val="500"/>
               </a:spcAft>
-              <a:defRPr sz="3100" b="1">
+              <a:defRPr sz="3800" b="1">
+                <a:solidFill>
+                  <a:srgbClr val="164F89"/>
+                </a:solidFill>
+                <a:latin typeface="Liberation Sans"/>
+              </a:defRPr>
+            </a:pPr>
+            <a:r>
+              <a:t>03</a:t>
+            </a:r>
+          </a:p>
+        </p:txBody>
+      </p:sp>
+      <p:sp>
+        <p:nvSpPr>
+          <p:cNvPr id="6" name="TextBox 5"/>
+          <p:cNvSpPr txBox="1"/>
+          <p:nvPr/>
+        </p:nvSpPr>
+        <p:spPr>
+          <a:xfrm>
+            <a:off x="594360" y="2084831"/>
+            <a:ext cx="7863840" cy="1508760"/>
+          </a:xfrm>
+          <a:prstGeom prst="rect">
+            <a:avLst/>
+          </a:prstGeom>
+          <a:noFill/>
+        </p:spPr>
+        <p:txBody>
+          <a:bodyPr wrap="square" lIns="0" rIns="0" tIns="0" bIns="0">
+            <a:spAutoFit/>
+          </a:bodyPr>
+          <a:lstStyle/>
+          <a:p>
+            <a:pPr>
+              <a:spcAft>
+                <a:spcPts val="500"/>
+              </a:spcAft>
+              <a:defRPr sz="4100" b="1">
                 <a:solidFill>
                   <a:srgbClr val="17283B"/>
                 </a:solidFill>
@@ -7080,21 +7016,21 @@
               </a:defRPr>
             </a:pPr>
             <a:r>
-              <a:t>Controllers Bring Workload Structure to Scheduling</a:t>
-            </a:r>
-          </a:p>
-        </p:txBody>
-      </p:sp>
-      <p:sp>
-        <p:nvSpPr>
-          <p:cNvPr id="6" name="TextBox 5"/>
-          <p:cNvSpPr txBox="1"/>
-          <p:nvPr/>
-        </p:nvSpPr>
-        <p:spPr>
-          <a:xfrm>
-            <a:off x="475488" y="1435608"/>
-            <a:ext cx="11201400" cy="429768"/>
+              <a:t>Ecosystem</a:t>
+            </a:r>
+          </a:p>
+        </p:txBody>
+      </p:sp>
+      <p:sp>
+        <p:nvSpPr>
+          <p:cNvPr id="7" name="TextBox 6"/>
+          <p:cNvSpPr txBox="1"/>
+          <p:nvPr/>
+        </p:nvSpPr>
+        <p:spPr>
+          <a:xfrm>
+            <a:off x="621792" y="4041648"/>
+            <a:ext cx="9966960" cy="548640"/>
           </a:xfrm>
           <a:prstGeom prst="rect">
             <a:avLst/>
@@ -7111,7 +7047,46 @@
               <a:spcAft>
                 <a:spcPts val="500"/>
               </a:spcAft>
-              <a:defRPr sz="1700" b="0">
+              <a:defRPr sz="2400" b="0">
+                <a:solidFill>
+                  <a:srgbClr val="164F89"/>
+                </a:solidFill>
+                <a:latin typeface="Liberation Sans"/>
+              </a:defRPr>
+            </a:pPr>
+            <a:r>
+              <a:t>Workload controllers carry scheduling intent.</a:t>
+            </a:r>
+          </a:p>
+        </p:txBody>
+      </p:sp>
+      <p:sp>
+        <p:nvSpPr>
+          <p:cNvPr id="8" name="TextBox 7"/>
+          <p:cNvSpPr txBox="1"/>
+          <p:nvPr/>
+        </p:nvSpPr>
+        <p:spPr>
+          <a:xfrm>
+            <a:off x="621792" y="4791456"/>
+            <a:ext cx="10607040" cy="594360"/>
+          </a:xfrm>
+          <a:prstGeom prst="rect">
+            <a:avLst/>
+          </a:prstGeom>
+          <a:noFill/>
+        </p:spPr>
+        <p:txBody>
+          <a:bodyPr wrap="square" lIns="0" rIns="0" tIns="0" bIns="0">
+            <a:spAutoFit/>
+          </a:bodyPr>
+          <a:lstStyle/>
+          <a:p>
+            <a:pPr>
+              <a:spcAft>
+                <a:spcPts val="500"/>
+              </a:spcAft>
+              <a:defRPr sz="2100" b="0">
                 <a:solidFill>
                   <a:srgbClr val="414F60"/>
                 </a:solidFill>
@@ -7119,38 +7094,170 @@
               </a:defRPr>
             </a:pPr>
             <a:r>
-              <a:t>Existing integrations and the next steps in role, replica, and topology support.</a:t>
-            </a:r>
-          </a:p>
-        </p:txBody>
-      </p:sp>
-      <p:pic>
-        <p:nvPicPr>
-          <p:cNvPr id="7" name="Picture 6" descr="13-ecosystem.png"/>
-          <p:cNvPicPr>
-            <a:picLocks noChangeAspect="1"/>
-          </p:cNvPicPr>
-          <p:nvPr/>
-        </p:nvPicPr>
-        <p:blipFill>
-          <a:blip r:embed="rId4"/>
-          <a:stretch>
-            <a:fillRect/>
-          </a:stretch>
-        </p:blipFill>
-        <p:spPr>
-          <a:xfrm>
-            <a:off x="457200" y="1938528"/>
-            <a:ext cx="11277599" cy="4267200"/>
-          </a:xfrm>
-          <a:prstGeom prst="rect">
-            <a:avLst/>
-          </a:prstGeom>
-        </p:spPr>
-      </p:pic>
-      <p:sp>
-        <p:nvSpPr>
-          <p:cNvPr id="8" name="TextBox 7"/>
+              <a:t>How do roles and replicas reach the scheduler?</a:t>
+            </a:r>
+          </a:p>
+        </p:txBody>
+      </p:sp>
+      <p:sp>
+        <p:nvSpPr>
+          <p:cNvPr id="9" name="TextBox 8"/>
+          <p:cNvSpPr txBox="1"/>
+          <p:nvPr/>
+        </p:nvSpPr>
+        <p:spPr>
+          <a:xfrm>
+            <a:off x="8503920" y="1554480"/>
+            <a:ext cx="3154680" cy="621792"/>
+          </a:xfrm>
+          <a:prstGeom prst="rect">
+            <a:avLst/>
+          </a:prstGeom>
+          <a:noFill/>
+        </p:spPr>
+        <p:txBody>
+          <a:bodyPr wrap="square" lIns="0" rIns="0" tIns="0" bIns="0">
+            <a:spAutoFit/>
+          </a:bodyPr>
+          <a:lstStyle/>
+          <a:p>
+            <a:pPr>
+              <a:spcAft>
+                <a:spcPts val="500"/>
+              </a:spcAft>
+              <a:defRPr sz="1500" b="0">
+                <a:solidFill>
+                  <a:srgbClr val="414F60"/>
+                </a:solidFill>
+                <a:latin typeface="Liberation Sans"/>
+              </a:defRPr>
+            </a:pPr>
+            <a:r>
+              <a:t>01  Unified scheduling</a:t>
+            </a:r>
+          </a:p>
+        </p:txBody>
+      </p:sp>
+      <p:sp>
+        <p:nvSpPr>
+          <p:cNvPr id="10" name="TextBox 9"/>
+          <p:cNvSpPr txBox="1"/>
+          <p:nvPr/>
+        </p:nvSpPr>
+        <p:spPr>
+          <a:xfrm>
+            <a:off x="8503920" y="2249424"/>
+            <a:ext cx="3154680" cy="621792"/>
+          </a:xfrm>
+          <a:prstGeom prst="rect">
+            <a:avLst/>
+          </a:prstGeom>
+          <a:noFill/>
+        </p:spPr>
+        <p:txBody>
+          <a:bodyPr wrap="square" lIns="0" rIns="0" tIns="0" bIns="0">
+            <a:spAutoFit/>
+          </a:bodyPr>
+          <a:lstStyle/>
+          <a:p>
+            <a:pPr>
+              <a:spcAft>
+                <a:spcPts val="500"/>
+              </a:spcAft>
+              <a:defRPr sz="1500" b="0">
+                <a:solidFill>
+                  <a:srgbClr val="414F60"/>
+                </a:solidFill>
+                <a:latin typeface="Liberation Sans"/>
+              </a:defRPr>
+            </a:pPr>
+            <a:r>
+              <a:t>02  Multi-level gang &amp; network topology</a:t>
+            </a:r>
+          </a:p>
+        </p:txBody>
+      </p:sp>
+      <p:sp>
+        <p:nvSpPr>
+          <p:cNvPr id="11" name="TextBox 10"/>
+          <p:cNvSpPr txBox="1"/>
+          <p:nvPr/>
+        </p:nvSpPr>
+        <p:spPr>
+          <a:xfrm>
+            <a:off x="8503920" y="2944368"/>
+            <a:ext cx="3154680" cy="621792"/>
+          </a:xfrm>
+          <a:prstGeom prst="rect">
+            <a:avLst/>
+          </a:prstGeom>
+          <a:noFill/>
+        </p:spPr>
+        <p:txBody>
+          <a:bodyPr wrap="square" lIns="0" rIns="0" tIns="0" bIns="0">
+            <a:spAutoFit/>
+          </a:bodyPr>
+          <a:lstStyle/>
+          <a:p>
+            <a:pPr>
+              <a:spcAft>
+                <a:spcPts val="500"/>
+              </a:spcAft>
+              <a:defRPr sz="1500" b="1">
+                <a:solidFill>
+                  <a:srgbClr val="164F89"/>
+                </a:solidFill>
+                <a:latin typeface="Liberation Sans"/>
+              </a:defRPr>
+            </a:pPr>
+            <a:r>
+              <a:t>03  Ecosystem</a:t>
+            </a:r>
+          </a:p>
+        </p:txBody>
+      </p:sp>
+      <p:sp>
+        <p:nvSpPr>
+          <p:cNvPr id="12" name="TextBox 11"/>
+          <p:cNvSpPr txBox="1"/>
+          <p:nvPr/>
+        </p:nvSpPr>
+        <p:spPr>
+          <a:xfrm>
+            <a:off x="8503920" y="3639312"/>
+            <a:ext cx="3154680" cy="621792"/>
+          </a:xfrm>
+          <a:prstGeom prst="rect">
+            <a:avLst/>
+          </a:prstGeom>
+          <a:noFill/>
+        </p:spPr>
+        <p:txBody>
+          <a:bodyPr wrap="square" lIns="0" rIns="0" tIns="0" bIns="0">
+            <a:spAutoFit/>
+          </a:bodyPr>
+          <a:lstStyle/>
+          <a:p>
+            <a:pPr>
+              <a:spcAft>
+                <a:spcPts val="500"/>
+              </a:spcAft>
+              <a:defRPr sz="1500" b="0">
+                <a:solidFill>
+                  <a:srgbClr val="414F60"/>
+                </a:solidFill>
+                <a:latin typeface="Liberation Sans"/>
+              </a:defRPr>
+            </a:pPr>
+            <a:r>
+              <a:t>04  Benchmark framework &amp; progress</a:t>
+            </a:r>
+          </a:p>
+        </p:txBody>
+      </p:sp>
+      <p:sp>
+        <p:nvSpPr>
+          <p:cNvPr id="13" name="TextBox 12"/>
           <p:cNvSpPr txBox="1"/>
           <p:nvPr/>
         </p:nvSpPr>
@@ -7189,7 +7296,7 @@
       </p:sp>
       <p:sp>
         <p:nvSpPr>
-          <p:cNvPr id="9" name="TextBox 8"/>
+          <p:cNvPr id="14" name="TextBox 13"/>
           <p:cNvSpPr txBox="1"/>
           <p:nvPr/>
         </p:nvSpPr>
@@ -7221,7 +7328,7 @@
               </a:defRPr>
             </a:pPr>
             <a:r>
-              <a:t>13 / 22</a:t>
+              <a:t>13 / 23</a:t>
             </a:r>
           </a:p>
         </p:txBody>
@@ -7506,7 +7613,7 @@
               </a:defRPr>
             </a:pPr>
             <a:r>
-              <a:t>14 / 22</a:t>
+              <a:t>14 / 23</a:t>
             </a:r>
           </a:p>
         </p:txBody>
@@ -7791,7 +7898,7 @@
               </a:defRPr>
             </a:pPr>
             <a:r>
-              <a:t>15 / 22</a:t>
+              <a:t>15 / 23</a:t>
             </a:r>
           </a:p>
         </p:txBody>
@@ -7935,7 +8042,7 @@
               </a:defRPr>
             </a:pPr>
             <a:r>
-              <a:t>Next: Relationships Between SubGroups</a:t>
+              <a:t>Grove: Carry PodGang Structure into Volcano</a:t>
             </a:r>
           </a:p>
         </p:txBody>
@@ -7974,14 +8081,14 @@
               </a:defRPr>
             </a:pPr>
             <a:r>
-              <a:t>Extend the placement model as controllers expose richer workload structure.</a:t>
+              <a:t>The backend translates Grove PodGroups into Volcano SubGroup policies.</a:t>
             </a:r>
           </a:p>
         </p:txBody>
       </p:sp>
       <p:pic>
         <p:nvPicPr>
-          <p:cNvPr id="7" name="Picture 6" descr="16-subgroup-next.png"/>
+          <p:cNvPr id="7" name="Picture 6" descr="16-grove-mapping.png"/>
           <p:cNvPicPr>
             <a:picLocks noChangeAspect="1"/>
           </p:cNvPicPr>
@@ -8076,7 +8183,7 @@
               </a:defRPr>
             </a:pPr>
             <a:r>
-              <a:t>16 / 22</a:t>
+              <a:t>16 / 23</a:t>
             </a:r>
           </a:p>
         </p:txBody>
@@ -8101,7 +8208,7 @@
       <p:grpSpPr/>
       <p:pic>
         <p:nvPicPr>
-          <p:cNvPr id="2" name="Picture 1" descr="cover-background.png"/>
+          <p:cNvPr id="2" name="Picture 1" descr="background.png"/>
           <p:cNvPicPr>
             <a:picLocks noChangeAspect="1"/>
           </p:cNvPicPr>
@@ -8181,7 +8288,7 @@
               </a:defRPr>
             </a:pPr>
             <a:r>
-              <a:t>BENCHMARK FRAMEWORK &amp; PROGRESS</a:t>
+              <a:t>ECOSYSTEM</a:t>
             </a:r>
           </a:p>
         </p:txBody>
@@ -8194,8 +8301,8 @@
         </p:nvSpPr>
         <p:spPr>
           <a:xfrm>
-            <a:off x="594360" y="1298448"/>
-            <a:ext cx="1828800" cy="640080"/>
+            <a:off x="457200" y="804672"/>
+            <a:ext cx="11247120" cy="640080"/>
           </a:xfrm>
           <a:prstGeom prst="rect">
             <a:avLst/>
@@ -8212,15 +8319,15 @@
               <a:spcAft>
                 <a:spcPts val="500"/>
               </a:spcAft>
-              <a:defRPr sz="3800" b="1">
-                <a:solidFill>
-                  <a:srgbClr val="164F89"/>
-                </a:solidFill>
-                <a:latin typeface="Liberation Sans"/>
-              </a:defRPr>
-            </a:pPr>
-            <a:r>
-              <a:t>04</a:t>
+              <a:defRPr sz="3100" b="1">
+                <a:solidFill>
+                  <a:srgbClr val="17283B"/>
+                </a:solidFill>
+                <a:latin typeface="Liberation Sans"/>
+              </a:defRPr>
+            </a:pPr>
+            <a:r>
+              <a:t>Next: RBG, Kubeflow, and LWS</a:t>
             </a:r>
           </a:p>
         </p:txBody>
@@ -8233,8 +8340,8 @@
         </p:nvSpPr>
         <p:spPr>
           <a:xfrm>
-            <a:off x="594360" y="2084831"/>
-            <a:ext cx="7863840" cy="1508760"/>
+            <a:off x="475488" y="1435608"/>
+            <a:ext cx="11201400" cy="429768"/>
           </a:xfrm>
           <a:prstGeom prst="rect">
             <a:avLst/>
@@ -8251,272 +8358,46 @@
               <a:spcAft>
                 <a:spcPts val="500"/>
               </a:spcAft>
-              <a:defRPr sz="4100" b="1">
-                <a:solidFill>
-                  <a:srgbClr val="17283B"/>
-                </a:solidFill>
-                <a:latin typeface="Liberation Sans"/>
-              </a:defRPr>
-            </a:pPr>
-            <a:r>
-              <a:t>Benchmark</a:t>
-            </a:r>
-          </a:p>
-          <a:p>
-            <a:pPr>
-              <a:spcAft>
-                <a:spcPts val="500"/>
-              </a:spcAft>
-              <a:defRPr sz="4100" b="1">
-                <a:solidFill>
-                  <a:srgbClr val="17283B"/>
-                </a:solidFill>
-                <a:latin typeface="Liberation Sans"/>
-              </a:defRPr>
-            </a:pPr>
-            <a:r>
-              <a:t>framework &amp; progress</a:t>
-            </a:r>
-          </a:p>
-        </p:txBody>
-      </p:sp>
-      <p:sp>
-        <p:nvSpPr>
-          <p:cNvPr id="7" name="TextBox 6"/>
-          <p:cNvSpPr txBox="1"/>
-          <p:nvPr/>
-        </p:nvSpPr>
-        <p:spPr>
-          <a:xfrm>
-            <a:off x="621792" y="4041648"/>
-            <a:ext cx="9966960" cy="548640"/>
-          </a:xfrm>
-          <a:prstGeom prst="rect">
-            <a:avLst/>
-          </a:prstGeom>
-          <a:noFill/>
-        </p:spPr>
-        <p:txBody>
-          <a:bodyPr wrap="square" lIns="0" rIns="0" tIns="0" bIns="0">
-            <a:spAutoFit/>
-          </a:bodyPr>
-          <a:lstStyle/>
-          <a:p>
-            <a:pPr>
-              <a:spcAft>
-                <a:spcPts val="500"/>
-              </a:spcAft>
-              <a:defRPr sz="2400" b="0">
-                <a:solidFill>
-                  <a:srgbClr val="164F89"/>
-                </a:solidFill>
-                <a:latin typeface="Liberation Sans"/>
-              </a:defRPr>
-            </a:pPr>
-            <a:r>
-              <a:t>Measure behavior across workload shapes.</a:t>
-            </a:r>
-          </a:p>
-        </p:txBody>
-      </p:sp>
+              <a:defRPr sz="1700" b="0">
+                <a:solidFill>
+                  <a:srgbClr val="414F60"/>
+                </a:solidFill>
+                <a:latin typeface="Liberation Sans"/>
+              </a:defRPr>
+            </a:pPr>
+            <a:r>
+              <a:t>Build on current integrations; carry finer group structure and placement requirements.</a:t>
+            </a:r>
+          </a:p>
+        </p:txBody>
+      </p:sp>
+      <p:pic>
+        <p:nvPicPr>
+          <p:cNvPr id="7" name="Picture 6" descr="17-ecosystem.png"/>
+          <p:cNvPicPr>
+            <a:picLocks noChangeAspect="1"/>
+          </p:cNvPicPr>
+          <p:nvPr/>
+        </p:nvPicPr>
+        <p:blipFill>
+          <a:blip r:embed="rId4"/>
+          <a:stretch>
+            <a:fillRect/>
+          </a:stretch>
+        </p:blipFill>
+        <p:spPr>
+          <a:xfrm>
+            <a:off x="457200" y="1938528"/>
+            <a:ext cx="11277599" cy="4267200"/>
+          </a:xfrm>
+          <a:prstGeom prst="rect">
+            <a:avLst/>
+          </a:prstGeom>
+        </p:spPr>
+      </p:pic>
       <p:sp>
         <p:nvSpPr>
           <p:cNvPr id="8" name="TextBox 7"/>
-          <p:cNvSpPr txBox="1"/>
-          <p:nvPr/>
-        </p:nvSpPr>
-        <p:spPr>
-          <a:xfrm>
-            <a:off x="621792" y="4791456"/>
-            <a:ext cx="10607040" cy="594360"/>
-          </a:xfrm>
-          <a:prstGeom prst="rect">
-            <a:avLst/>
-          </a:prstGeom>
-          <a:noFill/>
-        </p:spPr>
-        <p:txBody>
-          <a:bodyPr wrap="square" lIns="0" rIns="0" tIns="0" bIns="0">
-            <a:spAutoFit/>
-          </a:bodyPr>
-          <a:lstStyle/>
-          <a:p>
-            <a:pPr>
-              <a:spcAft>
-                <a:spcPts val="500"/>
-              </a:spcAft>
-              <a:defRPr sz="2100" b="0">
-                <a:solidFill>
-                  <a:srgbClr val="414F60"/>
-                </a:solidFill>
-                <a:latin typeface="Liberation Sans"/>
-              </a:defRPr>
-            </a:pPr>
-            <a:r>
-              <a:t>What can we reproduce, compare, and improve?</a:t>
-            </a:r>
-          </a:p>
-        </p:txBody>
-      </p:sp>
-      <p:sp>
-        <p:nvSpPr>
-          <p:cNvPr id="9" name="TextBox 8"/>
-          <p:cNvSpPr txBox="1"/>
-          <p:nvPr/>
-        </p:nvSpPr>
-        <p:spPr>
-          <a:xfrm>
-            <a:off x="8503920" y="1554480"/>
-            <a:ext cx="3154680" cy="621792"/>
-          </a:xfrm>
-          <a:prstGeom prst="rect">
-            <a:avLst/>
-          </a:prstGeom>
-          <a:noFill/>
-        </p:spPr>
-        <p:txBody>
-          <a:bodyPr wrap="square" lIns="0" rIns="0" tIns="0" bIns="0">
-            <a:spAutoFit/>
-          </a:bodyPr>
-          <a:lstStyle/>
-          <a:p>
-            <a:pPr>
-              <a:spcAft>
-                <a:spcPts val="500"/>
-              </a:spcAft>
-              <a:defRPr sz="1500" b="0">
-                <a:solidFill>
-                  <a:srgbClr val="414F60"/>
-                </a:solidFill>
-                <a:latin typeface="Liberation Sans"/>
-              </a:defRPr>
-            </a:pPr>
-            <a:r>
-              <a:t>01  Unified scheduling</a:t>
-            </a:r>
-          </a:p>
-        </p:txBody>
-      </p:sp>
-      <p:sp>
-        <p:nvSpPr>
-          <p:cNvPr id="10" name="TextBox 9"/>
-          <p:cNvSpPr txBox="1"/>
-          <p:nvPr/>
-        </p:nvSpPr>
-        <p:spPr>
-          <a:xfrm>
-            <a:off x="8503920" y="2249424"/>
-            <a:ext cx="3154680" cy="621792"/>
-          </a:xfrm>
-          <a:prstGeom prst="rect">
-            <a:avLst/>
-          </a:prstGeom>
-          <a:noFill/>
-        </p:spPr>
-        <p:txBody>
-          <a:bodyPr wrap="square" lIns="0" rIns="0" tIns="0" bIns="0">
-            <a:spAutoFit/>
-          </a:bodyPr>
-          <a:lstStyle/>
-          <a:p>
-            <a:pPr>
-              <a:spcAft>
-                <a:spcPts val="500"/>
-              </a:spcAft>
-              <a:defRPr sz="1500" b="0">
-                <a:solidFill>
-                  <a:srgbClr val="414F60"/>
-                </a:solidFill>
-                <a:latin typeface="Liberation Sans"/>
-              </a:defRPr>
-            </a:pPr>
-            <a:r>
-              <a:t>02  Multi-level gang &amp; network topology</a:t>
-            </a:r>
-          </a:p>
-        </p:txBody>
-      </p:sp>
-      <p:sp>
-        <p:nvSpPr>
-          <p:cNvPr id="11" name="TextBox 10"/>
-          <p:cNvSpPr txBox="1"/>
-          <p:nvPr/>
-        </p:nvSpPr>
-        <p:spPr>
-          <a:xfrm>
-            <a:off x="8503920" y="2944368"/>
-            <a:ext cx="3154680" cy="621792"/>
-          </a:xfrm>
-          <a:prstGeom prst="rect">
-            <a:avLst/>
-          </a:prstGeom>
-          <a:noFill/>
-        </p:spPr>
-        <p:txBody>
-          <a:bodyPr wrap="square" lIns="0" rIns="0" tIns="0" bIns="0">
-            <a:spAutoFit/>
-          </a:bodyPr>
-          <a:lstStyle/>
-          <a:p>
-            <a:pPr>
-              <a:spcAft>
-                <a:spcPts val="500"/>
-              </a:spcAft>
-              <a:defRPr sz="1500" b="0">
-                <a:solidFill>
-                  <a:srgbClr val="414F60"/>
-                </a:solidFill>
-                <a:latin typeface="Liberation Sans"/>
-              </a:defRPr>
-            </a:pPr>
-            <a:r>
-              <a:t>03  Ecosystem</a:t>
-            </a:r>
-          </a:p>
-        </p:txBody>
-      </p:sp>
-      <p:sp>
-        <p:nvSpPr>
-          <p:cNvPr id="12" name="TextBox 11"/>
-          <p:cNvSpPr txBox="1"/>
-          <p:nvPr/>
-        </p:nvSpPr>
-        <p:spPr>
-          <a:xfrm>
-            <a:off x="8503920" y="3639312"/>
-            <a:ext cx="3154680" cy="621792"/>
-          </a:xfrm>
-          <a:prstGeom prst="rect">
-            <a:avLst/>
-          </a:prstGeom>
-          <a:noFill/>
-        </p:spPr>
-        <p:txBody>
-          <a:bodyPr wrap="square" lIns="0" rIns="0" tIns="0" bIns="0">
-            <a:spAutoFit/>
-          </a:bodyPr>
-          <a:lstStyle/>
-          <a:p>
-            <a:pPr>
-              <a:spcAft>
-                <a:spcPts val="500"/>
-              </a:spcAft>
-              <a:defRPr sz="1500" b="1">
-                <a:solidFill>
-                  <a:srgbClr val="164F89"/>
-                </a:solidFill>
-                <a:latin typeface="Liberation Sans"/>
-              </a:defRPr>
-            </a:pPr>
-            <a:r>
-              <a:t>04  Benchmark framework &amp; progress</a:t>
-            </a:r>
-          </a:p>
-        </p:txBody>
-      </p:sp>
-      <p:sp>
-        <p:nvSpPr>
-          <p:cNvPr id="13" name="TextBox 12"/>
           <p:cNvSpPr txBox="1"/>
           <p:nvPr/>
         </p:nvSpPr>
@@ -8555,7 +8436,7 @@
       </p:sp>
       <p:sp>
         <p:nvSpPr>
-          <p:cNvPr id="14" name="TextBox 13"/>
+          <p:cNvPr id="9" name="TextBox 8"/>
           <p:cNvSpPr txBox="1"/>
           <p:nvPr/>
         </p:nvSpPr>
@@ -8587,7 +8468,7 @@
               </a:defRPr>
             </a:pPr>
             <a:r>
-              <a:t>17 / 22</a:t>
+              <a:t>17 / 23</a:t>
             </a:r>
           </a:p>
         </p:txBody>
@@ -8612,7 +8493,7 @@
       <p:grpSpPr/>
       <p:pic>
         <p:nvPicPr>
-          <p:cNvPr id="2" name="Picture 1" descr="background.png"/>
+          <p:cNvPr id="2" name="Picture 1" descr="cover-background.png"/>
           <p:cNvPicPr>
             <a:picLocks noChangeAspect="1"/>
           </p:cNvPicPr>
@@ -8705,8 +8586,8 @@
         </p:nvSpPr>
         <p:spPr>
           <a:xfrm>
-            <a:off x="457200" y="804672"/>
-            <a:ext cx="11247120" cy="640080"/>
+            <a:off x="594360" y="1298448"/>
+            <a:ext cx="1828800" cy="640080"/>
           </a:xfrm>
           <a:prstGeom prst="rect">
             <a:avLst/>
@@ -8723,7 +8604,46 @@
               <a:spcAft>
                 <a:spcPts val="500"/>
               </a:spcAft>
-              <a:defRPr sz="3100" b="1">
+              <a:defRPr sz="3800" b="1">
+                <a:solidFill>
+                  <a:srgbClr val="164F89"/>
+                </a:solidFill>
+                <a:latin typeface="Liberation Sans"/>
+              </a:defRPr>
+            </a:pPr>
+            <a:r>
+              <a:t>04</a:t>
+            </a:r>
+          </a:p>
+        </p:txBody>
+      </p:sp>
+      <p:sp>
+        <p:nvSpPr>
+          <p:cNvPr id="6" name="TextBox 5"/>
+          <p:cNvSpPr txBox="1"/>
+          <p:nvPr/>
+        </p:nvSpPr>
+        <p:spPr>
+          <a:xfrm>
+            <a:off x="594360" y="2084831"/>
+            <a:ext cx="7863840" cy="1508760"/>
+          </a:xfrm>
+          <a:prstGeom prst="rect">
+            <a:avLst/>
+          </a:prstGeom>
+          <a:noFill/>
+        </p:spPr>
+        <p:txBody>
+          <a:bodyPr wrap="square" lIns="0" rIns="0" tIns="0" bIns="0">
+            <a:spAutoFit/>
+          </a:bodyPr>
+          <a:lstStyle/>
+          <a:p>
+            <a:pPr>
+              <a:spcAft>
+                <a:spcPts val="500"/>
+              </a:spcAft>
+              <a:defRPr sz="4100" b="1">
                 <a:solidFill>
                   <a:srgbClr val="17283B"/>
                 </a:solidFill>
@@ -8731,38 +8651,93 @@
               </a:defRPr>
             </a:pPr>
             <a:r>
-              <a:t>A Repeatable Scheduling Benchmark Framework</a:t>
-            </a:r>
-          </a:p>
-        </p:txBody>
-      </p:sp>
-      <p:sp>
-        <p:nvSpPr>
-          <p:cNvPr id="6" name="TextBox 5"/>
-          <p:cNvSpPr txBox="1"/>
-          <p:nvPr/>
-        </p:nvSpPr>
-        <p:spPr>
-          <a:xfrm>
-            <a:off x="475488" y="1435608"/>
-            <a:ext cx="11201400" cy="429768"/>
-          </a:xfrm>
-          <a:prstGeom prst="rect">
-            <a:avLst/>
-          </a:prstGeom>
-          <a:noFill/>
-        </p:spPr>
-        <p:txBody>
-          <a:bodyPr wrap="square" lIns="0" rIns="0" tIns="0" bIns="0">
-            <a:spAutoFit/>
-          </a:bodyPr>
-          <a:lstStyle/>
+              <a:t>Benchmark</a:t>
+            </a:r>
+          </a:p>
           <a:p>
             <a:pPr>
               <a:spcAft>
                 <a:spcPts val="500"/>
               </a:spcAft>
-              <a:defRPr sz="1700" b="0">
+              <a:defRPr sz="4100" b="1">
+                <a:solidFill>
+                  <a:srgbClr val="17283B"/>
+                </a:solidFill>
+                <a:latin typeface="Liberation Sans"/>
+              </a:defRPr>
+            </a:pPr>
+            <a:r>
+              <a:t>framework &amp; progress</a:t>
+            </a:r>
+          </a:p>
+        </p:txBody>
+      </p:sp>
+      <p:sp>
+        <p:nvSpPr>
+          <p:cNvPr id="7" name="TextBox 6"/>
+          <p:cNvSpPr txBox="1"/>
+          <p:nvPr/>
+        </p:nvSpPr>
+        <p:spPr>
+          <a:xfrm>
+            <a:off x="621792" y="4041648"/>
+            <a:ext cx="9966960" cy="548640"/>
+          </a:xfrm>
+          <a:prstGeom prst="rect">
+            <a:avLst/>
+          </a:prstGeom>
+          <a:noFill/>
+        </p:spPr>
+        <p:txBody>
+          <a:bodyPr wrap="square" lIns="0" rIns="0" tIns="0" bIns="0">
+            <a:spAutoFit/>
+          </a:bodyPr>
+          <a:lstStyle/>
+          <a:p>
+            <a:pPr>
+              <a:spcAft>
+                <a:spcPts val="500"/>
+              </a:spcAft>
+              <a:defRPr sz="2400" b="0">
+                <a:solidFill>
+                  <a:srgbClr val="164F89"/>
+                </a:solidFill>
+                <a:latin typeface="Liberation Sans"/>
+              </a:defRPr>
+            </a:pPr>
+            <a:r>
+              <a:t>Measure behavior across workload shapes.</a:t>
+            </a:r>
+          </a:p>
+        </p:txBody>
+      </p:sp>
+      <p:sp>
+        <p:nvSpPr>
+          <p:cNvPr id="8" name="TextBox 7"/>
+          <p:cNvSpPr txBox="1"/>
+          <p:nvPr/>
+        </p:nvSpPr>
+        <p:spPr>
+          <a:xfrm>
+            <a:off x="621792" y="4791456"/>
+            <a:ext cx="10607040" cy="594360"/>
+          </a:xfrm>
+          <a:prstGeom prst="rect">
+            <a:avLst/>
+          </a:prstGeom>
+          <a:noFill/>
+        </p:spPr>
+        <p:txBody>
+          <a:bodyPr wrap="square" lIns="0" rIns="0" tIns="0" bIns="0">
+            <a:spAutoFit/>
+          </a:bodyPr>
+          <a:lstStyle/>
+          <a:p>
+            <a:pPr>
+              <a:spcAft>
+                <a:spcPts val="500"/>
+              </a:spcAft>
+              <a:defRPr sz="2100" b="0">
                 <a:solidFill>
                   <a:srgbClr val="414F60"/>
                 </a:solidFill>
@@ -8770,38 +8745,170 @@
               </a:defRPr>
             </a:pPr>
             <a:r>
-              <a:t>Generate scenarios, observe API events, and retain comparable measurements.</a:t>
-            </a:r>
-          </a:p>
-        </p:txBody>
-      </p:sp>
-      <p:pic>
-        <p:nvPicPr>
-          <p:cNvPr id="7" name="Picture 6" descr="18-benchmark-architecture.png"/>
-          <p:cNvPicPr>
-            <a:picLocks noChangeAspect="1"/>
-          </p:cNvPicPr>
-          <p:nvPr/>
-        </p:nvPicPr>
-        <p:blipFill>
-          <a:blip r:embed="rId4"/>
-          <a:stretch>
-            <a:fillRect/>
-          </a:stretch>
-        </p:blipFill>
-        <p:spPr>
-          <a:xfrm>
-            <a:off x="457200" y="1938528"/>
-            <a:ext cx="11277599" cy="4267200"/>
-          </a:xfrm>
-          <a:prstGeom prst="rect">
-            <a:avLst/>
-          </a:prstGeom>
-        </p:spPr>
-      </p:pic>
-      <p:sp>
-        <p:nvSpPr>
-          <p:cNvPr id="8" name="TextBox 7"/>
+              <a:t>What can we reproduce, compare, and improve?</a:t>
+            </a:r>
+          </a:p>
+        </p:txBody>
+      </p:sp>
+      <p:sp>
+        <p:nvSpPr>
+          <p:cNvPr id="9" name="TextBox 8"/>
+          <p:cNvSpPr txBox="1"/>
+          <p:nvPr/>
+        </p:nvSpPr>
+        <p:spPr>
+          <a:xfrm>
+            <a:off x="8503920" y="1554480"/>
+            <a:ext cx="3154680" cy="621792"/>
+          </a:xfrm>
+          <a:prstGeom prst="rect">
+            <a:avLst/>
+          </a:prstGeom>
+          <a:noFill/>
+        </p:spPr>
+        <p:txBody>
+          <a:bodyPr wrap="square" lIns="0" rIns="0" tIns="0" bIns="0">
+            <a:spAutoFit/>
+          </a:bodyPr>
+          <a:lstStyle/>
+          <a:p>
+            <a:pPr>
+              <a:spcAft>
+                <a:spcPts val="500"/>
+              </a:spcAft>
+              <a:defRPr sz="1500" b="0">
+                <a:solidFill>
+                  <a:srgbClr val="414F60"/>
+                </a:solidFill>
+                <a:latin typeface="Liberation Sans"/>
+              </a:defRPr>
+            </a:pPr>
+            <a:r>
+              <a:t>01  Unified scheduling</a:t>
+            </a:r>
+          </a:p>
+        </p:txBody>
+      </p:sp>
+      <p:sp>
+        <p:nvSpPr>
+          <p:cNvPr id="10" name="TextBox 9"/>
+          <p:cNvSpPr txBox="1"/>
+          <p:nvPr/>
+        </p:nvSpPr>
+        <p:spPr>
+          <a:xfrm>
+            <a:off x="8503920" y="2249424"/>
+            <a:ext cx="3154680" cy="621792"/>
+          </a:xfrm>
+          <a:prstGeom prst="rect">
+            <a:avLst/>
+          </a:prstGeom>
+          <a:noFill/>
+        </p:spPr>
+        <p:txBody>
+          <a:bodyPr wrap="square" lIns="0" rIns="0" tIns="0" bIns="0">
+            <a:spAutoFit/>
+          </a:bodyPr>
+          <a:lstStyle/>
+          <a:p>
+            <a:pPr>
+              <a:spcAft>
+                <a:spcPts val="500"/>
+              </a:spcAft>
+              <a:defRPr sz="1500" b="0">
+                <a:solidFill>
+                  <a:srgbClr val="414F60"/>
+                </a:solidFill>
+                <a:latin typeface="Liberation Sans"/>
+              </a:defRPr>
+            </a:pPr>
+            <a:r>
+              <a:t>02  Multi-level gang &amp; network topology</a:t>
+            </a:r>
+          </a:p>
+        </p:txBody>
+      </p:sp>
+      <p:sp>
+        <p:nvSpPr>
+          <p:cNvPr id="11" name="TextBox 10"/>
+          <p:cNvSpPr txBox="1"/>
+          <p:nvPr/>
+        </p:nvSpPr>
+        <p:spPr>
+          <a:xfrm>
+            <a:off x="8503920" y="2944368"/>
+            <a:ext cx="3154680" cy="621792"/>
+          </a:xfrm>
+          <a:prstGeom prst="rect">
+            <a:avLst/>
+          </a:prstGeom>
+          <a:noFill/>
+        </p:spPr>
+        <p:txBody>
+          <a:bodyPr wrap="square" lIns="0" rIns="0" tIns="0" bIns="0">
+            <a:spAutoFit/>
+          </a:bodyPr>
+          <a:lstStyle/>
+          <a:p>
+            <a:pPr>
+              <a:spcAft>
+                <a:spcPts val="500"/>
+              </a:spcAft>
+              <a:defRPr sz="1500" b="0">
+                <a:solidFill>
+                  <a:srgbClr val="414F60"/>
+                </a:solidFill>
+                <a:latin typeface="Liberation Sans"/>
+              </a:defRPr>
+            </a:pPr>
+            <a:r>
+              <a:t>03  Ecosystem</a:t>
+            </a:r>
+          </a:p>
+        </p:txBody>
+      </p:sp>
+      <p:sp>
+        <p:nvSpPr>
+          <p:cNvPr id="12" name="TextBox 11"/>
+          <p:cNvSpPr txBox="1"/>
+          <p:nvPr/>
+        </p:nvSpPr>
+        <p:spPr>
+          <a:xfrm>
+            <a:off x="8503920" y="3639312"/>
+            <a:ext cx="3154680" cy="621792"/>
+          </a:xfrm>
+          <a:prstGeom prst="rect">
+            <a:avLst/>
+          </a:prstGeom>
+          <a:noFill/>
+        </p:spPr>
+        <p:txBody>
+          <a:bodyPr wrap="square" lIns="0" rIns="0" tIns="0" bIns="0">
+            <a:spAutoFit/>
+          </a:bodyPr>
+          <a:lstStyle/>
+          <a:p>
+            <a:pPr>
+              <a:spcAft>
+                <a:spcPts val="500"/>
+              </a:spcAft>
+              <a:defRPr sz="1500" b="1">
+                <a:solidFill>
+                  <a:srgbClr val="164F89"/>
+                </a:solidFill>
+                <a:latin typeface="Liberation Sans"/>
+              </a:defRPr>
+            </a:pPr>
+            <a:r>
+              <a:t>04  Benchmark framework &amp; progress</a:t>
+            </a:r>
+          </a:p>
+        </p:txBody>
+      </p:sp>
+      <p:sp>
+        <p:nvSpPr>
+          <p:cNvPr id="13" name="TextBox 12"/>
           <p:cNvSpPr txBox="1"/>
           <p:nvPr/>
         </p:nvSpPr>
@@ -8840,7 +8947,7 @@
       </p:sp>
       <p:sp>
         <p:nvSpPr>
-          <p:cNvPr id="9" name="TextBox 8"/>
+          <p:cNvPr id="14" name="TextBox 13"/>
           <p:cNvSpPr txBox="1"/>
           <p:nvPr/>
         </p:nvSpPr>
@@ -8872,7 +8979,7 @@
               </a:defRPr>
             </a:pPr>
             <a:r>
-              <a:t>18 / 22</a:t>
+              <a:t>18 / 23</a:t>
             </a:r>
           </a:p>
         </p:txBody>
@@ -9016,7 +9123,7 @@
               </a:defRPr>
             </a:pPr>
             <a:r>
-              <a:t>Benchmark Progress and Ongoing Validation</a:t>
+              <a:t>A Repeatable Scheduling Benchmark Framework</a:t>
             </a:r>
           </a:p>
         </p:txBody>
@@ -9055,14 +9162,14 @@
               </a:defRPr>
             </a:pPr>
             <a:r>
-              <a:t>The harness is available; testing and optimization continue across workload scenarios.</a:t>
+              <a:t>Generate scenarios, observe API events, and retain comparable measurements.</a:t>
             </a:r>
           </a:p>
         </p:txBody>
       </p:sp>
       <p:pic>
         <p:nvPicPr>
-          <p:cNvPr id="7" name="Picture 6" descr="19-benchmark-progress.png"/>
+          <p:cNvPr id="7" name="Picture 6" descr="19-benchmark-architecture.png"/>
           <p:cNvPicPr>
             <a:picLocks noChangeAspect="1"/>
           </p:cNvPicPr>
@@ -9157,7 +9264,7 @@
               </a:defRPr>
             </a:pPr>
             <a:r>
-              <a:t>19 / 22</a:t>
+              <a:t>19 / 23</a:t>
             </a:r>
           </a:p>
         </p:txBody>
@@ -9403,7 +9510,7 @@
               </a:defRPr>
             </a:pPr>
             <a:r>
-              <a:t>Cloud Native &amp; AI Infrastructure</a:t>
+              <a:t>AI Infrastructure Lead · Nunchux AI</a:t>
             </a:r>
           </a:p>
         </p:txBody>
@@ -9442,7 +9549,7 @@
               </a:defRPr>
             </a:pPr>
             <a:r>
-              <a:t>Open-source infrastructure</a:t>
+              <a:t>CNCF TOC Alternate (GB)</a:t>
             </a:r>
           </a:p>
           <a:p>
@@ -9458,7 +9565,7 @@
               </a:defRPr>
             </a:pPr>
             <a:r>
-              <a:t>Kubernetes and AI/ML platforms</a:t>
+              <a:t>Cloud native and AI infrastructure</a:t>
             </a:r>
           </a:p>
         </p:txBody>
@@ -9497,7 +9604,7 @@
               </a:defRPr>
             </a:pPr>
             <a:r>
-              <a:t>serverbooter.com</a:t>
+              <a:t>nunchux.ai · CNCF TOC</a:t>
             </a:r>
           </a:p>
         </p:txBody>
@@ -9771,7 +9878,7 @@
               </a:defRPr>
             </a:pPr>
             <a:r>
-              <a:t>02 / 22</a:t>
+              <a:t>02 / 23</a:t>
             </a:r>
           </a:p>
         </p:txBody>
@@ -9915,7 +10022,7 @@
               </a:defRPr>
             </a:pPr>
             <a:r>
-              <a:t>Benchmark Metrics: Latency and Throughput</a:t>
+              <a:t>Compare Schedulers on the Same Workload</a:t>
             </a:r>
           </a:p>
         </p:txBody>
@@ -9954,14 +10061,14 @@
               </a:defRPr>
             </a:pPr>
             <a:r>
-              <a:t>Separate scheduling delay, runtime readiness, and successful binding throughput.</a:t>
+              <a:t>Repeat controlled runs to understand throughput, latency, and placement tradeoffs.</a:t>
             </a:r>
           </a:p>
         </p:txBody>
       </p:sp>
       <p:pic>
         <p:nvPicPr>
-          <p:cNvPr id="7" name="Picture 6" descr="20-benchmark-measurement.png"/>
+          <p:cNvPr id="7" name="Picture 6" descr="20-benchmark-progress.png"/>
           <p:cNvPicPr>
             <a:picLocks noChangeAspect="1"/>
           </p:cNvPicPr>
@@ -10056,7 +10163,7 @@
               </a:defRPr>
             </a:pPr>
             <a:r>
-              <a:t>20 / 22</a:t>
+              <a:t>20 / 23</a:t>
             </a:r>
           </a:p>
         </p:txBody>
@@ -10200,7 +10307,7 @@
               </a:defRPr>
             </a:pPr>
             <a:r>
-              <a:t>What We Will Work On Next</a:t>
+              <a:t>Which Scenarios Fit Which Scheduler?</a:t>
             </a:r>
           </a:p>
         </p:txBody>
@@ -10239,14 +10346,14 @@
               </a:defRPr>
             </a:pPr>
             <a:r>
-              <a:t>Next steps in group placement, controller integration, and benchmarking.</a:t>
+              <a:t>Expand tests across arrival patterns, group structure, and network topology.</a:t>
             </a:r>
           </a:p>
         </p:txBody>
       </p:sp>
       <p:pic>
         <p:nvPicPr>
-          <p:cNvPr id="7" name="Picture 6" descr="21-takeaways.png"/>
+          <p:cNvPr id="7" name="Picture 6" descr="21-benchmark-measurement.png"/>
           <p:cNvPicPr>
             <a:picLocks noChangeAspect="1"/>
           </p:cNvPicPr>
@@ -10341,7 +10448,7 @@
               </a:defRPr>
             </a:pPr>
             <a:r>
-              <a:t>21 / 22</a:t>
+              <a:t>21 / 23</a:t>
             </a:r>
           </a:p>
         </p:txBody>
@@ -10446,7 +10553,7 @@
               </a:defRPr>
             </a:pPr>
             <a:r>
-              <a:t>MAINTAINER TRACK</a:t>
+              <a:t>BENCHMARK FRAMEWORK &amp; PROGRESS</a:t>
             </a:r>
           </a:p>
         </p:txBody>
@@ -10485,7 +10592,7 @@
               </a:defRPr>
             </a:pPr>
             <a:r>
-              <a:t>Questions &amp; Discussion</a:t>
+              <a:t>What We Will Work On Next</a:t>
             </a:r>
           </a:p>
         </p:txBody>
@@ -10524,14 +10631,14 @@
               </a:defRPr>
             </a:pPr>
             <a:r>
-              <a:t>Workload shapes, integration feedback, and reproducible observations are welcome.</a:t>
+              <a:t>Next steps in group placement, controller integration, and benchmarking.</a:t>
             </a:r>
           </a:p>
         </p:txBody>
       </p:sp>
       <p:pic>
         <p:nvPicPr>
-          <p:cNvPr id="7" name="Picture 6" descr="22-questions.png"/>
+          <p:cNvPr id="7" name="Picture 6" descr="22-takeaways.png"/>
           <p:cNvPicPr>
             <a:picLocks noChangeAspect="1"/>
           </p:cNvPicPr>
@@ -10626,7 +10733,292 @@
               </a:defRPr>
             </a:pPr>
             <a:r>
-              <a:t>22 / 22</a:t>
+              <a:t>22 / 23</a:t>
+            </a:r>
+          </a:p>
+        </p:txBody>
+      </p:sp>
+    </p:spTree>
+  </p:cSld>
+  <p:clrMapOvr>
+    <a:masterClrMapping/>
+  </p:clrMapOvr>
+</p:sld>
+</file>
+
+<file path=ppt/slides/slide23.xml><?xml version="1.0" encoding="utf-8"?>
+<p:sld xmlns:a="http://schemas.openxmlformats.org/drawingml/2006/main" xmlns:p="http://schemas.openxmlformats.org/presentationml/2006/main" xmlns:r="http://schemas.openxmlformats.org/officeDocument/2006/relationships">
+  <p:cSld>
+    <p:spTree>
+      <p:nvGrpSpPr>
+        <p:cNvPr id="1" name=""/>
+        <p:cNvGrpSpPr/>
+        <p:nvPr/>
+      </p:nvGrpSpPr>
+      <p:grpSpPr/>
+      <p:pic>
+        <p:nvPicPr>
+          <p:cNvPr id="2" name="Picture 1" descr="background.png"/>
+          <p:cNvPicPr>
+            <a:picLocks noChangeAspect="1"/>
+          </p:cNvPicPr>
+          <p:nvPr/>
+        </p:nvPicPr>
+        <p:blipFill>
+          <a:blip r:embed="rId2"/>
+          <a:stretch>
+            <a:fillRect/>
+          </a:stretch>
+        </p:blipFill>
+        <p:spPr>
+          <a:xfrm>
+            <a:off x="0" y="0"/>
+            <a:ext cx="12191999" cy="6858000"/>
+          </a:xfrm>
+          <a:prstGeom prst="rect">
+            <a:avLst/>
+          </a:prstGeom>
+        </p:spPr>
+      </p:pic>
+      <p:pic>
+        <p:nvPicPr>
+          <p:cNvPr id="3" name="Picture 2" descr="volcano-logo.png"/>
+          <p:cNvPicPr>
+            <a:picLocks noChangeAspect="1"/>
+          </p:cNvPicPr>
+          <p:nvPr/>
+        </p:nvPicPr>
+        <p:blipFill>
+          <a:blip r:embed="rId3"/>
+          <a:stretch>
+            <a:fillRect/>
+          </a:stretch>
+        </p:blipFill>
+        <p:spPr>
+          <a:xfrm>
+            <a:off x="9921240" y="292608"/>
+            <a:ext cx="1737360" cy="289560"/>
+          </a:xfrm>
+          <a:prstGeom prst="rect">
+            <a:avLst/>
+          </a:prstGeom>
+        </p:spPr>
+      </p:pic>
+      <p:sp>
+        <p:nvSpPr>
+          <p:cNvPr id="4" name="TextBox 3"/>
+          <p:cNvSpPr txBox="1"/>
+          <p:nvPr/>
+        </p:nvSpPr>
+        <p:spPr>
+          <a:xfrm>
+            <a:off x="457200" y="292608"/>
+            <a:ext cx="9144000" cy="256032"/>
+          </a:xfrm>
+          <a:prstGeom prst="rect">
+            <a:avLst/>
+          </a:prstGeom>
+          <a:noFill/>
+        </p:spPr>
+        <p:txBody>
+          <a:bodyPr wrap="square" lIns="0" rIns="0" tIns="0" bIns="0">
+            <a:spAutoFit/>
+          </a:bodyPr>
+          <a:lstStyle/>
+          <a:p>
+            <a:pPr>
+              <a:spcAft>
+                <a:spcPts val="500"/>
+              </a:spcAft>
+              <a:defRPr sz="1100" b="1">
+                <a:solidFill>
+                  <a:srgbClr val="164F89"/>
+                </a:solidFill>
+                <a:latin typeface="Liberation Sans"/>
+              </a:defRPr>
+            </a:pPr>
+            <a:r>
+              <a:t>MAINTAINER TRACK</a:t>
+            </a:r>
+          </a:p>
+        </p:txBody>
+      </p:sp>
+      <p:sp>
+        <p:nvSpPr>
+          <p:cNvPr id="5" name="TextBox 4"/>
+          <p:cNvSpPr txBox="1"/>
+          <p:nvPr/>
+        </p:nvSpPr>
+        <p:spPr>
+          <a:xfrm>
+            <a:off x="457200" y="804672"/>
+            <a:ext cx="11247120" cy="640080"/>
+          </a:xfrm>
+          <a:prstGeom prst="rect">
+            <a:avLst/>
+          </a:prstGeom>
+          <a:noFill/>
+        </p:spPr>
+        <p:txBody>
+          <a:bodyPr wrap="square" lIns="0" rIns="0" tIns="0" bIns="0">
+            <a:spAutoFit/>
+          </a:bodyPr>
+          <a:lstStyle/>
+          <a:p>
+            <a:pPr>
+              <a:spcAft>
+                <a:spcPts val="500"/>
+              </a:spcAft>
+              <a:defRPr sz="3100" b="1">
+                <a:solidFill>
+                  <a:srgbClr val="17283B"/>
+                </a:solidFill>
+                <a:latin typeface="Liberation Sans"/>
+              </a:defRPr>
+            </a:pPr>
+            <a:r>
+              <a:t>Questions &amp; Discussion</a:t>
+            </a:r>
+          </a:p>
+        </p:txBody>
+      </p:sp>
+      <p:sp>
+        <p:nvSpPr>
+          <p:cNvPr id="6" name="TextBox 5"/>
+          <p:cNvSpPr txBox="1"/>
+          <p:nvPr/>
+        </p:nvSpPr>
+        <p:spPr>
+          <a:xfrm>
+            <a:off x="475488" y="1435608"/>
+            <a:ext cx="11201400" cy="429768"/>
+          </a:xfrm>
+          <a:prstGeom prst="rect">
+            <a:avLst/>
+          </a:prstGeom>
+          <a:noFill/>
+        </p:spPr>
+        <p:txBody>
+          <a:bodyPr wrap="square" lIns="0" rIns="0" tIns="0" bIns="0">
+            <a:spAutoFit/>
+          </a:bodyPr>
+          <a:lstStyle/>
+          <a:p>
+            <a:pPr>
+              <a:spcAft>
+                <a:spcPts val="500"/>
+              </a:spcAft>
+              <a:defRPr sz="1700" b="0">
+                <a:solidFill>
+                  <a:srgbClr val="414F60"/>
+                </a:solidFill>
+                <a:latin typeface="Liberation Sans"/>
+              </a:defRPr>
+            </a:pPr>
+            <a:r>
+              <a:t>Workload shapes, integration feedback, and reproducible observations are welcome.</a:t>
+            </a:r>
+          </a:p>
+        </p:txBody>
+      </p:sp>
+      <p:pic>
+        <p:nvPicPr>
+          <p:cNvPr id="7" name="Picture 6" descr="23-questions.png"/>
+          <p:cNvPicPr>
+            <a:picLocks noChangeAspect="1"/>
+          </p:cNvPicPr>
+          <p:nvPr/>
+        </p:nvPicPr>
+        <p:blipFill>
+          <a:blip r:embed="rId4"/>
+          <a:stretch>
+            <a:fillRect/>
+          </a:stretch>
+        </p:blipFill>
+        <p:spPr>
+          <a:xfrm>
+            <a:off x="457200" y="1938528"/>
+            <a:ext cx="11277599" cy="4267200"/>
+          </a:xfrm>
+          <a:prstGeom prst="rect">
+            <a:avLst/>
+          </a:prstGeom>
+        </p:spPr>
+      </p:pic>
+      <p:sp>
+        <p:nvSpPr>
+          <p:cNvPr id="8" name="TextBox 7"/>
+          <p:cNvSpPr txBox="1"/>
+          <p:nvPr/>
+        </p:nvSpPr>
+        <p:spPr>
+          <a:xfrm>
+            <a:off x="475488" y="6519672"/>
+            <a:ext cx="10515600" cy="201168"/>
+          </a:xfrm>
+          <a:prstGeom prst="rect">
+            <a:avLst/>
+          </a:prstGeom>
+          <a:noFill/>
+        </p:spPr>
+        <p:txBody>
+          <a:bodyPr wrap="square" lIns="0" rIns="0" tIns="0" bIns="0">
+            <a:spAutoFit/>
+          </a:bodyPr>
+          <a:lstStyle/>
+          <a:p>
+            <a:pPr>
+              <a:spcAft>
+                <a:spcPts val="500"/>
+              </a:spcAft>
+              <a:defRPr sz="900" b="0">
+                <a:solidFill>
+                  <a:srgbClr val="414F60"/>
+                </a:solidFill>
+                <a:latin typeface="Liberation Sans"/>
+              </a:defRPr>
+            </a:pPr>
+            <a:r>
+              <a:t>Volcano  |  KubeCon + CloudNativeCon North America 2026</a:t>
+            </a:r>
+          </a:p>
+        </p:txBody>
+      </p:sp>
+      <p:sp>
+        <p:nvSpPr>
+          <p:cNvPr id="9" name="TextBox 8"/>
+          <p:cNvSpPr txBox="1"/>
+          <p:nvPr/>
+        </p:nvSpPr>
+        <p:spPr>
+          <a:xfrm>
+            <a:off x="11018520" y="6483096"/>
+            <a:ext cx="685800" cy="256032"/>
+          </a:xfrm>
+          <a:prstGeom prst="rect">
+            <a:avLst/>
+          </a:prstGeom>
+          <a:noFill/>
+        </p:spPr>
+        <p:txBody>
+          <a:bodyPr wrap="square" lIns="0" rIns="0" tIns="0" bIns="0">
+            <a:spAutoFit/>
+          </a:bodyPr>
+          <a:lstStyle/>
+          <a:p>
+            <a:pPr algn="r">
+              <a:spcAft>
+                <a:spcPts val="500"/>
+              </a:spcAft>
+              <a:defRPr sz="1100" b="0">
+                <a:solidFill>
+                  <a:srgbClr val="414F60"/>
+                </a:solidFill>
+                <a:latin typeface="Liberation Sans"/>
+              </a:defRPr>
+            </a:pPr>
+            <a:r>
+              <a:t>23 / 23</a:t>
             </a:r>
           </a:p>
         </p:txBody>
@@ -11121,7 +11513,7 @@
               </a:defRPr>
             </a:pPr>
             <a:r>
-              <a:t>03 / 22</a:t>
+              <a:t>03 / 23</a:t>
             </a:r>
           </a:p>
         </p:txBody>
@@ -11406,7 +11798,7 @@
               </a:defRPr>
             </a:pPr>
             <a:r>
-              <a:t>04 / 22</a:t>
+              <a:t>04 / 23</a:t>
             </a:r>
           </a:p>
         </p:txBody>
@@ -11691,7 +12083,7 @@
               </a:defRPr>
             </a:pPr>
             <a:r>
-              <a:t>05 / 22</a:t>
+              <a:t>05 / 23</a:t>
             </a:r>
           </a:p>
         </p:txBody>
@@ -11976,7 +12368,7 @@
               </a:defRPr>
             </a:pPr>
             <a:r>
-              <a:t>06 / 22</a:t>
+              <a:t>06 / 23</a:t>
             </a:r>
           </a:p>
         </p:txBody>
@@ -12487,7 +12879,7 @@
               </a:defRPr>
             </a:pPr>
             <a:r>
-              <a:t>07 / 22</a:t>
+              <a:t>07 / 23</a:t>
             </a:r>
           </a:p>
         </p:txBody>
@@ -12772,7 +13164,7 @@
               </a:defRPr>
             </a:pPr>
             <a:r>
-              <a:t>08 / 22</a:t>
+              <a:t>08 / 23</a:t>
             </a:r>
           </a:p>
         </p:txBody>
@@ -13057,7 +13449,7 @@
               </a:defRPr>
             </a:pPr>
             <a:r>
-              <a:t>09 / 22</a:t>
+              <a:t>09 / 23</a:t>
             </a:r>
           </a:p>
         </p:txBody>

--- a/docs/ppt/Volcano_KubeCon_NA_2026.pptx
+++ b/docs/ppt/Volcano_KubeCon_NA_2026.pptx
@@ -28,6 +28,7 @@
     <p:sldId id="276" r:id="rId28"/>
     <p:sldId id="277" r:id="rId29"/>
     <p:sldId id="278" r:id="rId30"/>
+    <p:sldId id="279" r:id="rId31"/>
   </p:sldIdLst>
   <p:sldSz cx="12191999" cy="6858000" type="screen4x3"/>
   <p:notesSz cx="6858000" cy="9144000"/>
@@ -597,6 +598,26 @@
               <a:t>2:00。PodGroup 是较大的实例边界，prefill 和 decode 的 locality 约束可以不同。两层约束都显式填写，不假设子组继承 PodGroup 的 topology。</a:t>
             </a:r>
           </a:p>
+          <a:p>
+            <a:r>
+              <a:t>讲解提示：An eight-Pod instance spans a larger domain; Prefill and Decode use different locality constraints.</a:t>
+            </a:r>
+          </a:p>
+          <a:p>
+            <a:r>
+              <a:t>移入备注的解释：</a:t>
+            </a:r>
+          </a:p>
+          <a:p>
+            <a:r>
+              <a:t>PodGroup.spec · key fields</a:t>
+            </a:r>
+          </a:p>
+          <a:p>
+            <a:r>
+              <a:t>Named tiers: core (3) · spine (2) · leaf (1)</a:t>
+            </a:r>
+          </a:p>
           <a:p/>
           <a:p>
             <a:r>
@@ -694,6 +715,26 @@
               <a:t>1:40。复用第 10 页网络层级及交换机符号，两个 Supernode 共用上层 core fabric。两个完整服务实例各在一个域，避免一次域故障同时影响两份实例。P/D 是简化角色标记，不代表唯一模型结构。Kthena ServingGroup→PodGroup 可作为场景，但 topology affinity 接入截至 2026-10-29 仍是开放 proposal #1478 / issue #645，不能说 Kthena 已交付 anti-affinity。HA 的服务恢复还需 routing/health checks，scheduler 不提供应用故障切换。</a:t>
             </a:r>
           </a:p>
+          <a:p>
+            <a:r>
+              <a:t>讲解提示：ServingGroup → PodGroup: a Kthena scenario. Anti-affinity integration in Kthena is proposed.</a:t>
+            </a:r>
+          </a:p>
+          <a:p>
+            <a:r>
+              <a:t>移入备注的解释：</a:t>
+            </a:r>
+          </a:p>
+          <a:p>
+            <a:r>
+              <a:t>PodGroup.spec · key fields</a:t>
+            </a:r>
+          </a:p>
+          <a:p>
+            <a:r>
+              <a:t>One domain can fail without taking both complete instances with it.</a:t>
+            </a:r>
+          </a:p>
           <a:p/>
           <a:p>
             <a:r>
@@ -806,6 +847,56 @@
               <a:t>1:20。放在第二章，以相同 fabric 演进关系语义。同一个 PodGroup 的 Prefill 与两个 Decode SubGroup 都位于 Supernode A，满足上层亲和；两个 Decode 副本分别位于 Leaf 0 与 Leaf 1，满足更细层级的反亲和。每个 SubGroup 都是完整两 Pod 组。Supernode B 和其他空闲 rack 表明这些约束是有选择的放置，而非资源只剩此处。关系 API 为 proposed，不提供伪造的可执行 YAML。</a:t>
             </a:r>
           </a:p>
+          <a:p>
+            <a:r>
+              <a:t>讲解提示：Keep cooperating groups local while separating replicas inside the same PodGroup.</a:t>
+            </a:r>
+          </a:p>
+          <a:p>
+            <a:r>
+              <a:t>移入备注的解释：</a:t>
+            </a:r>
+          </a:p>
+          <a:p>
+            <a:r>
+              <a:t>PROPOSED · SUBGROUP RELATIONSHIPS</a:t>
+            </a:r>
+          </a:p>
+          <a:p>
+            <a:r>
+              <a:t>Affinity · supernode</a:t>
+            </a:r>
+          </a:p>
+          <a:p>
+            <a:r>
+              <a:t>Prefill + Decode</a:t>
+            </a:r>
+          </a:p>
+          <a:p>
+            <a:r>
+              <a:t>Keep KV exchange inside the same supernode.</a:t>
+            </a:r>
+          </a:p>
+          <a:p>
+            <a:r>
+              <a:t>Anti-affinity · leaf</a:t>
+            </a:r>
+          </a:p>
+          <a:p>
+            <a:r>
+              <a:t>Decode replica 0 + replica 1</a:t>
+            </a:r>
+          </a:p>
+          <a:p>
+            <a:r>
+              <a:t>Keep complete replicas on separate leaf domains.</a:t>
+            </a:r>
+          </a:p>
+          <a:p>
+            <a:r>
+              <a:t>Cooperate at one topology level; isolate replicas at a finer level.</a:t>
+            </a:r>
+          </a:p>
           <a:p/>
           <a:p>
             <a:r>
@@ -983,6 +1074,26 @@
               <a:t>1:40。沿用 China Kthena 图及关键 YAML，按 ServingGroup→PodGroup、role replica→SubGroup 的顺序讲。一个 Entry 加一个 Worker 组成两 Pod 副本。</a:t>
             </a:r>
           </a:p>
+          <a:p>
+            <a:r>
+              <a:t>讲解提示：One ServingGroup maps to one PodGroup; each role replica forms a SubGroup.</a:t>
+            </a:r>
+          </a:p>
+          <a:p>
+            <a:r>
+              <a:t>移入备注的解释：</a:t>
+            </a:r>
+          </a:p>
+          <a:p>
+            <a:r>
+              <a:t>ModelServing.spec · excerpt</a:t>
+            </a:r>
+          </a:p>
+          <a:p>
+            <a:r>
+              <a:t>Pod templates omitted.</a:t>
+            </a:r>
+          </a:p>
           <a:p/>
           <a:p>
             <a:r>
@@ -1080,6 +1191,46 @@
               <a:t>1:30。两个 replica，每个两个 hosts；用 matchLabelKeys 保持副本身份。head 另有分组。本页不把尚在推进的 KubeRay topology PR 当作已合入能力。</a:t>
             </a:r>
           </a:p>
+          <a:p>
+            <a:r>
+              <a:t>讲解提示：The replica label separates complete groups inside one WorkerGroup.</a:t>
+            </a:r>
+          </a:p>
+          <a:p>
+            <a:r>
+              <a:t>移入备注的解释：</a:t>
+            </a:r>
+          </a:p>
+          <a:p>
+            <a:r>
+              <a:t>RayCluster · worker group</a:t>
+            </a:r>
+          </a:p>
+          <a:p>
+            <a:r>
+              <a:t>worker registration / RPC</a:t>
+            </a:r>
+          </a:p>
+          <a:p>
+            <a:r>
+              <a:t>PodGroup.spec · generated grouping</a:t>
+            </a:r>
+          </a:p>
+          <a:p>
+            <a:r>
+              <a:t>One replica label → one complete SubGroup</a:t>
+            </a:r>
+          </a:p>
+          <a:p>
+            <a:r>
+              <a:t>Two replicas × two hosts = four worker Pods</a:t>
+            </a:r>
+          </a:p>
+          <a:p>
+            <a:r>
+              <a:t>Grouping view, not a topology guarantee. Gang support is merged; replica topology is still in progress.</a:t>
+            </a:r>
+          </a:p>
           <a:p/>
           <a:p>
             <a:r>
@@ -1182,6 +1333,26 @@
               <a:t>https://github.com/NVIDIA/grove/blob/main/operator/internal/scheduler/volcano/backend.go</a:t>
             </a:r>
           </a:p>
+          <a:p>
+            <a:r>
+              <a:t>讲解提示：The backend translates Grove PodGroups into Volcano SubGroup policies.</a:t>
+            </a:r>
+          </a:p>
+          <a:p>
+            <a:r>
+              <a:t>移入备注的解释：</a:t>
+            </a:r>
+          </a:p>
+          <a:p>
+            <a:r>
+              <a:t>PodGang minimum = 2 + 4 = 6 Pods</a:t>
+            </a:r>
+          </a:p>
+          <a:p>
+            <a:r>
+              <a:t>Gang / SubGroup mapping is available; topologyConstraint is not yet supported.</a:t>
+            </a:r>
+          </a:p>
           <a:p/>
           <a:p>
             <a:r>
@@ -1263,6 +1434,61 @@
               <a:t>0:50。具体 Kthena、KubeRay、Grove 案例之后再讲后续社区方向。RBG 推进中，已有 RoleInstance→SubGroup 基础；Kubeflow 计划在现有 Volcano 插件上深化分组及拓扑；LWS 计划 multi-role/multi-group 支持。状态来自 maintainer 的推进计划，不能写作全部已交付。</a:t>
             </a:r>
           </a:p>
+          <a:p>
+            <a:r>
+              <a:t>讲解提示：Build on current integrations; carry finer group structure and placement requirements.</a:t>
+            </a:r>
+          </a:p>
+          <a:p>
+            <a:r>
+              <a:t>移入备注的解释：</a:t>
+            </a:r>
+          </a:p>
+          <a:p>
+            <a:r>
+              <a:t>IN PROGRESS</a:t>
+            </a:r>
+          </a:p>
+          <a:p>
+            <a:r>
+              <a:t>Extend the existing gang integration.</a:t>
+            </a:r>
+          </a:p>
+          <a:p>
+            <a:r>
+              <a:t>PLANNED</a:t>
+            </a:r>
+          </a:p>
+          <a:p>
+            <a:r>
+              <a:t>Training groups + topology</a:t>
+            </a:r>
+          </a:p>
+          <a:p>
+            <a:r>
+              <a:t>Build on the Volcano scheduler plugin.</a:t>
+            </a:r>
+          </a:p>
+          <a:p>
+            <a:r>
+              <a:t>PLANNED</a:t>
+            </a:r>
+          </a:p>
+          <a:p>
+            <a:r>
+              <a:t>Multi-role / multi-group support</a:t>
+            </a:r>
+          </a:p>
+          <a:p>
+            <a:r>
+              <a:t>Connect group relationships to scheduling.</a:t>
+            </a:r>
+          </a:p>
+          <a:p>
+            <a:r>
+              <a:t>Carry roles, replicas, and placement intent from the controller into Volcano.</a:t>
+            </a:r>
+          </a:p>
           <a:p/>
           <a:p>
             <a:r>
@@ -1480,6 +1706,66 @@
               <a:t>1:30。沿数据路径解释 benchmark：场景输入→API/调度器→audit-exporter 与 Prometheus→报告。KWOK 只验证调度行为，不代表真实 GPU 执行吞吐。</a:t>
             </a:r>
           </a:p>
+          <a:p>
+            <a:r>
+              <a:t>讲解提示：Generate scenarios, observe API events, and retain comparable measurements.</a:t>
+            </a:r>
+          </a:p>
+          <a:p>
+            <a:r>
+              <a:t>移入备注的解释：</a:t>
+            </a:r>
+          </a:p>
+          <a:p>
+            <a:r>
+              <a:t>SCENARIO</a:t>
+            </a:r>
+          </a:p>
+          <a:p>
+            <a:r>
+              <a:t>CLUSTER UNDER TEST</a:t>
+            </a:r>
+          </a:p>
+          <a:p>
+            <a:r>
+              <a:t>OBSERVATION</a:t>
+            </a:r>
+          </a:p>
+          <a:p>
+            <a:r>
+              <a:t>JOBS</a:t>
+            </a:r>
+          </a:p>
+          <a:p>
+            <a:r>
+              <a:t>REPLICAS</a:t>
+            </a:r>
+          </a:p>
+          <a:p>
+            <a:r>
+              <a:t>MIN_AVAILABLE</a:t>
+            </a:r>
+          </a:p>
+          <a:p>
+            <a:r>
+              <a:t>Version + resources + topology</a:t>
+            </a:r>
+          </a:p>
+          <a:p>
+            <a:r>
+              <a:t>Pods · PodGroups · HyperNodes</a:t>
+            </a:r>
+          </a:p>
+          <a:p>
+            <a:r>
+              <a:t>Kind + KWOK / existing cluster</a:t>
+            </a:r>
+          </a:p>
+          <a:p>
+            <a:r>
+              <a:t>The harness controls the scenario and records observations; KWOK does not execute GPU work.</a:t>
+            </a:r>
+          </a:p>
           <a:p/>
           <a:p>
             <a:r>
@@ -1677,6 +1963,61 @@
               <a:t>1:20。已有 harness 为重复场景和指标采集打底。后续在同样集群容量、相同 workload arrivals/grouping/resources 下逐个运行不同 scheduler；每次 reset，不能让调度器同时竞争资源。固定每个实现的版本、配置和指标口径；记录各自合理调参后的配置。Kubernetes scheduler 可作为支持场景的 baseline，其他调度器集合待确定。未支持 gang 或 topology 的调度器不强行比较相同语义，须标注差异。比较 tail latency、binding throughput、完整 gang 数及放置正确性，不展示虚构结果。</a:t>
             </a:r>
           </a:p>
+          <a:p>
+            <a:r>
+              <a:t>讲解提示：Repeat controlled runs to understand throughput, latency, and placement tradeoffs.</a:t>
+            </a:r>
+          </a:p>
+          <a:p>
+            <a:r>
+              <a:t>移入备注的解释：</a:t>
+            </a:r>
+          </a:p>
+          <a:p>
+            <a:r>
+              <a:t>ONE WORKLOAD, REPLAYED</a:t>
+            </a:r>
+          </a:p>
+          <a:p>
+            <a:r>
+              <a:t>CROSS-SCHEDULER TESTING</a:t>
+            </a:r>
+          </a:p>
+          <a:p>
+            <a:r>
+              <a:t>Same arrivals · groups · resources</a:t>
+            </a:r>
+          </a:p>
+          <a:p>
+            <a:r>
+              <a:t>Pin versions + config</a:t>
+            </a:r>
+          </a:p>
+          <a:p>
+            <a:r>
+              <a:t>Kubernetes scheduler¹</a:t>
+            </a:r>
+          </a:p>
+          <a:p>
+            <a:r>
+              <a:t>Other schedulers¹</a:t>
+            </a:r>
+          </a:p>
+          <a:p>
+            <a:r>
+              <a:t>Compare latency · binding throughput · completed gangs · placement</a:t>
+            </a:r>
+          </a:p>
+          <a:p>
+            <a:r>
+              <a:t>¹ Planned comparison set; match workload semantics and record unsupported constraints.</a:t>
+            </a:r>
+          </a:p>
+          <a:p>
+            <a:r>
+              <a:t>Harness available. Next: cross-scheduler runs and representative scenarios.</a:t>
+            </a:r>
+          </a:p>
           <a:p/>
           <a:p>
             <a:r>
@@ -1779,6 +2120,81 @@
               <a:t>1:20。选择代表性场景，寻找每种 scheduler 的适用边界，不只找有利 Volcano 的配置。第一类改变 arrival rate、预留容量，观察突发的尾延迟和积压恢复；只测试 pool 容量请求的调度，不用 KWOK 宣称完整 agent runtime 延迟。第二类改变 SubGroup 大小和可用资源碎片，观察完整 gangs 和 binding throughput。第三类组合 topology tier limits、可用域、gang/anti-affinity，检查 placement correctness 与完成延迟。KWOK 可以验证调度行为；NCCL/KV 带宽及实际模型吞吐需要真实硬件另测。本页是 ongoing/planned test matrix，没有 benchmark 数字。</a:t>
             </a:r>
           </a:p>
+          <a:p>
+            <a:r>
+              <a:t>讲解提示：Expand tests across arrival patterns, group structure, and network topology.</a:t>
+            </a:r>
+          </a:p>
+          <a:p>
+            <a:r>
+              <a:t>移入备注的解释：</a:t>
+            </a:r>
+          </a:p>
+          <a:p>
+            <a:r>
+              <a:t>TEST SHAPE</a:t>
+            </a:r>
+          </a:p>
+          <a:p>
+            <a:r>
+              <a:t>WHAT TO VARY</a:t>
+            </a:r>
+          </a:p>
+          <a:p>
+            <a:r>
+              <a:t>WHAT TO OBSERVE</a:t>
+            </a:r>
+          </a:p>
+          <a:p>
+            <a:r>
+              <a:t>Arrival rate / spare capacity</a:t>
+            </a:r>
+          </a:p>
+          <a:p>
+            <a:r>
+              <a:t>Warm-pool capacity requests</a:t>
+            </a:r>
+          </a:p>
+          <a:p>
+            <a:r>
+              <a:t>Backlog recovery</a:t>
+            </a:r>
+          </a:p>
+          <a:p>
+            <a:r>
+              <a:t>SubGroup size / fragmentation</a:t>
+            </a:r>
+          </a:p>
+          <a:p>
+            <a:r>
+              <a:t>Few large vs. many small groups</a:t>
+            </a:r>
+          </a:p>
+          <a:p>
+            <a:r>
+              <a:t>Binding throughput</a:t>
+            </a:r>
+          </a:p>
+          <a:p>
+            <a:r>
+              <a:t>Tier limits / available domains</a:t>
+            </a:r>
+          </a:p>
+          <a:p>
+            <a:r>
+              <a:t>Locality + gang + anti-affinity</a:t>
+            </a:r>
+          </a:p>
+          <a:p>
+            <a:r>
+              <a:t>Gang completion + latency</a:t>
+            </a:r>
+          </a:p>
+          <a:p>
+            <a:r>
+              <a:t>Find the best-fit scenarios and their tradeoffs; validate topology-aware gang placement.</a:t>
+            </a:r>
+          </a:p>
           <a:p/>
           <a:p>
             <a:r>
@@ -1881,6 +2297,21 @@
               <a:t>1:00。收尾强调下一步：SubGroup affinity/anti-affinity 的语义与实现；RBG/Kubeflow/LWS multi-group 的社区工作；多调度器横向对照、代表性场景及 topology-aware gang 测试。</a:t>
             </a:r>
           </a:p>
+          <a:p>
+            <a:r>
+              <a:t>讲解提示：Next steps in group placement, controller integration, and benchmarking.</a:t>
+            </a:r>
+          </a:p>
+          <a:p>
+            <a:r>
+              <a:t>移入备注的解释：</a:t>
+            </a:r>
+          </a:p>
+          <a:p>
+            <a:r>
+              <a:t>Bring a controller mapping, a placement requirement, or a reproducible workload to the community.</a:t>
+            </a:r>
+          </a:p>
           <a:p/>
           <a:p>
             <a:r>
@@ -1975,9 +2406,100 @@
           <a:lstStyle/>
           <a:p>
             <a:r>
+              <a:t>0:20。复用 China 2026 第 25 页的 32 个社区用户 logo，保持来源，不把用户称为商业伙伴，也不沿用未经本轮核实的 60+ 数字。</a:t>
+            </a:r>
+          </a:p>
+          <a:p/>
+          <a:p>
+            <a:r>
+              <a:t>本页新版素材与说明：China 2026 slide 25. Original user logos, rearranged into eight columns; no new adopter count or partnership claims.</a:t>
+            </a:r>
+          </a:p>
+          <a:p>
+            <a:r>
+              <a:t>Visual: na2026/svg/23-community-users.svg。PNG 固定几何；复用的旧图原本为位图，新增 YAML 和注释为 SVG 文本。</a:t>
+            </a:r>
+          </a:p>
+        </p:txBody>
+      </p:sp>
+      <p:sp>
+        <p:nvSpPr>
+          <p:cNvPr id="4" name="Slide Number Placeholder 3"/>
+          <p:cNvSpPr>
+            <a:spLocks noGrp="1"/>
+          </p:cNvSpPr>
+          <p:nvPr>
+            <p:ph type="sldNum" idx="5" sz="quarter"/>
+          </p:nvPr>
+        </p:nvSpPr>
+        <p:spPr/>
+      </p:sp>
+    </p:spTree>
+  </p:cSld>
+  <p:clrMapOvr>
+    <a:masterClrMapping/>
+  </p:clrMapOvr>
+</p:notes>
+</file>
+
+<file path=ppt/notesSlides/notesSlide24.xml><?xml version="1.0" encoding="utf-8"?>
+<p:notes xmlns:a="http://schemas.openxmlformats.org/drawingml/2006/main" xmlns:p="http://schemas.openxmlformats.org/presentationml/2006/main" xmlns:r="http://schemas.openxmlformats.org/officeDocument/2006/relationships">
+  <p:cSld>
+    <p:spTree>
+      <p:nvGrpSpPr>
+        <p:cNvPr id="1" name=""/>
+        <p:cNvGrpSpPr/>
+        <p:nvPr/>
+      </p:nvGrpSpPr>
+      <p:grpSpPr>
+        <a:xfrm>
+          <a:off x="0" y="0"/>
+          <a:ext cx="0" cy="0"/>
+          <a:chOff x="0" y="0"/>
+          <a:chExt cx="0" cy="0"/>
+        </a:xfrm>
+      </p:grpSpPr>
+      <p:sp>
+        <p:nvSpPr>
+          <p:cNvPr id="2" name="Slide Image Placeholder 1"/>
+          <p:cNvSpPr>
+            <a:spLocks noGrp="1"/>
+          </p:cNvSpPr>
+          <p:nvPr>
+            <p:ph type="sldImg" idx="2"/>
+          </p:nvPr>
+        </p:nvSpPr>
+        <p:spPr/>
+      </p:sp>
+      <p:sp>
+        <p:nvSpPr>
+          <p:cNvPr id="3" name="Notes Placeholder 2"/>
+          <p:cNvSpPr>
+            <a:spLocks noGrp="1"/>
+          </p:cNvSpPr>
+          <p:nvPr>
+            <p:ph type="body" idx="3" sz="quarter"/>
+          </p:nvPr>
+        </p:nvSpPr>
+        <p:spPr/>
+        <p:txBody>
+          <a:bodyPr/>
+          <a:lstStyle/>
+          <a:p>
+            <a:r>
               <a:t>5:00。问答。优先收集工作负载如何分组、需要哪些拓扑关系，以及可重复的测试场景。</a:t>
             </a:r>
           </a:p>
+          <a:p>
+            <a:r>
+              <a:t>讲解提示：Workload shapes, integration feedback, and reproducible observations are welcome.</a:t>
+            </a:r>
+          </a:p>
+          <a:p>
+            <a:r>
+              <a:t>复用 China 第 25 页二维码。已解码：Website https://volcano.sh；GitHub https://github.com/volcano-sh/volcano；Slack https://cloud-native.slack.com/archives/C011GJDQS0N。Slack 需要对应工作区账号。</a:t>
+            </a:r>
+          </a:p>
           <a:p/>
           <a:p>
             <a:r>
@@ -2007,7 +2529,7 @@
           </a:p>
           <a:p>
             <a:r>
-              <a:t>Visual: na2026/svg/23-questions.svg。PNG 固定几何；复用的旧图原本为位图，新增 YAML 和注释为 SVG 文本。</a:t>
+              <a:t>Visual: na2026/svg/24-questions.svg。PNG 固定几何；复用的旧图原本为位图，新增 YAML 和注释为 SVG 文本。</a:t>
             </a:r>
           </a:p>
         </p:txBody>
@@ -2150,6 +2672,66 @@
               <a:t>1:20。训练图展示两个 PP stage，每个 stage 两个 TP ranks，需要完整子组及通信局部性。推理展示 P/D 分离，不同角色及副本的 gang 与 topology 约束。Agent 路径先命中预热池并复用 ready runtime；池子耗尽时由 runtime/pool controller 请求容量，经快速 Pod 调度补池。请求突发图是需求示意，没有测量值。池管理不是 Volcano 自带能力，也不是每次调用创建 Pod。</a:t>
             </a:r>
           </a:p>
+          <a:p>
+            <a:r>
+              <a:t>讲解提示：Training, inference, and agent applications put different demands on the same cluster.</a:t>
+            </a:r>
+          </a:p>
+          <a:p>
+            <a:r>
+              <a:t>移入备注的解释：</a:t>
+            </a:r>
+          </a:p>
+          <a:p>
+            <a:r>
+              <a:t>TRAINING</a:t>
+            </a:r>
+          </a:p>
+          <a:p>
+            <a:r>
+              <a:t>INFERENCE</a:t>
+            </a:r>
+          </a:p>
+          <a:p>
+            <a:r>
+              <a:t>PodGroup · pipeline stages</a:t>
+            </a:r>
+          </a:p>
+          <a:p>
+            <a:r>
+              <a:t>PodGroup · disaggregated serving</a:t>
+            </a:r>
+          </a:p>
+          <a:p>
+            <a:r>
+              <a:t>Complete TP / PP gangs + network locality</a:t>
+            </a:r>
+          </a:p>
+          <a:p>
+            <a:r>
+              <a:t>Role groups + topology-aware placement</a:t>
+            </a:r>
+          </a:p>
+          <a:p>
+            <a:r>
+              <a:t>AGENTS</a:t>
+            </a:r>
+          </a:p>
+          <a:p>
+            <a:r>
+              <a:t>reuse ready capacity</a:t>
+            </a:r>
+          </a:p>
+          <a:p>
+            <a:r>
+              <a:t>replenish the pool</a:t>
+            </a:r>
+          </a:p>
+          <a:p>
+            <a:r>
+              <a:t>Schedule complete groups and their locality; keep latency-sensitive capacity ready.</a:t>
+            </a:r>
+          </a:p>
           <a:p/>
           <a:p>
             <a:r>
@@ -2238,6 +2820,61 @@
               <a:t>1:30。复用 China 架构图，从左右两条路径讲到中间 NodeShard。worker/Binder 的冲突检查是局部机制；不宣称并行一定带来性能提升。</a:t>
             </a:r>
           </a:p>
+          <a:p>
+            <a:r>
+              <a:t>讲解提示：Specialized scheduling paths coordinate through NodeShard.</a:t>
+            </a:r>
+          </a:p>
+          <a:p>
+            <a:r>
+              <a:t>移入备注的解释：</a:t>
+            </a:r>
+          </a:p>
+          <a:p>
+            <a:r>
+              <a:t>01</a:t>
+            </a:r>
+          </a:p>
+          <a:p>
+            <a:r>
+              <a:t>Workload paths</a:t>
+            </a:r>
+          </a:p>
+          <a:p>
+            <a:r>
+              <a:t>Batch-oriented scheduling and a Pod-oriented fast path.</a:t>
+            </a:r>
+          </a:p>
+          <a:p>
+            <a:r>
+              <a:t>02</a:t>
+            </a:r>
+          </a:p>
+          <a:p>
+            <a:r>
+              <a:t>Local coordination</a:t>
+            </a:r>
+          </a:p>
+          <a:p>
+            <a:r>
+              <a:t>Parallel workers use Binder conflict checks.</a:t>
+            </a:r>
+          </a:p>
+          <a:p>
+            <a:r>
+              <a:t>03</a:t>
+            </a:r>
+          </a:p>
+          <a:p>
+            <a:r>
+              <a:t>Shared node access</a:t>
+            </a:r>
+          </a:p>
+          <a:p>
+            <a:r>
+              <a:t>NodeShard coordinates candidate-node pools.</a:t>
+            </a:r>
+          </a:p>
           <a:p/>
           <a:p>
             <a:r>
@@ -2330,6 +2967,31 @@
               <a:t>1:40。重点对照 nodesDesired 和 nodesInUse。期望集合变化后需等待协调器交接，不迁移运行中的 Pod。旧图中的资源策略是架构扩展点，不表示所有策略都已完成。</a:t>
             </a:r>
           </a:p>
+          <a:p>
+            <a:r>
+              <a:t>讲解提示：Changing a shard coordinates future placement; it does not migrate running Pods.</a:t>
+            </a:r>
+          </a:p>
+          <a:p>
+            <a:r>
+              <a:t>移入备注的解释：</a:t>
+            </a:r>
+          </a:p>
+          <a:p>
+            <a:r>
+              <a:t>NodeShard · spec / status excerpt</a:t>
+            </a:r>
+          </a:p>
+          <a:p>
+            <a:r>
+              <a:t>Desired membership ≠ immediate use</a:t>
+            </a:r>
+          </a:p>
+          <a:p>
+            <a:r>
+              <a:t>Coordinators reconcile node access.</a:t>
+            </a:r>
+          </a:p>
           <a:p/>
           <a:p>
             <a:r>
@@ -2492,6 +3154,21 @@
               <a:t>2:00。用左边训练和右边 serving 两种结构解释 PodGroup 与 SubGroup，先看完整计算组，再看下面的放置域。一个 policy 可以按 replica label 分出多个实际 SubGroup。</a:t>
             </a:r>
           </a:p>
+          <a:p>
+            <a:r>
+              <a:t>讲解提示：Gang requirements apply to the workload and to its complete subgroups.</a:t>
+            </a:r>
+          </a:p>
+          <a:p>
+            <a:r>
+              <a:t>移入备注的解释：</a:t>
+            </a:r>
+          </a:p>
+          <a:p>
+            <a:r>
+              <a:t>A SubGroup policy selects Pods; replica identity can split them into multiple SubGroups.</a:t>
+            </a:r>
+          </a:p>
           <a:p/>
           <a:p>
             <a:r>
@@ -2582,6 +3259,36 @@
           <a:p>
             <a:r>
               <a:t>1:30。从物理网络映射到 HyperNode：非叶节点的成员是 HyperNode，叶节点的成员是 Node。standalone HyperNode 已交付；其他调度器 adapter 是独立的集成工作。</a:t>
+            </a:r>
+          </a:p>
+          <a:p>
+            <a:r>
+              <a:t>讲解提示：A parent HyperNode groups child HyperNodes; a leaf groups Kubernetes Nodes.</a:t>
+            </a:r>
+          </a:p>
+          <a:p>
+            <a:r>
+              <a:t>移入备注的解释：</a:t>
+            </a:r>
+          </a:p>
+          <a:p>
+            <a:r>
+              <a:t>PHYSICAL FABRIC</a:t>
+            </a:r>
+          </a:p>
+          <a:p>
+            <a:r>
+              <a:t>Parent · HyperNode.spec</a:t>
+            </a:r>
+          </a:p>
+          <a:p>
+            <a:r>
+              <a:t>Leaf · HyperNode.spec</a:t>
+            </a:r>
+          </a:p>
+          <a:p>
+            <a:r>
+              <a:t>The same hierarchy is available through the standalone HyperNode component.</a:t>
             </a:r>
           </a:p>
           <a:p/>
@@ -5670,45 +6377,6 @@
         </p:nvSpPr>
         <p:spPr>
           <a:xfrm>
-            <a:off x="457200" y="292608"/>
-            <a:ext cx="9144000" cy="256032"/>
-          </a:xfrm>
-          <a:prstGeom prst="rect">
-            <a:avLst/>
-          </a:prstGeom>
-          <a:noFill/>
-        </p:spPr>
-        <p:txBody>
-          <a:bodyPr wrap="square" lIns="0" rIns="0" tIns="0" bIns="0">
-            <a:spAutoFit/>
-          </a:bodyPr>
-          <a:lstStyle/>
-          <a:p>
-            <a:pPr>
-              <a:spcAft>
-                <a:spcPts val="500"/>
-              </a:spcAft>
-              <a:defRPr sz="1100" b="1">
-                <a:solidFill>
-                  <a:srgbClr val="164F89"/>
-                </a:solidFill>
-                <a:latin typeface="Liberation Sans"/>
-              </a:defRPr>
-            </a:pPr>
-            <a:r>
-              <a:t>MAINTAINER TRACK</a:t>
-            </a:r>
-          </a:p>
-        </p:txBody>
-      </p:sp>
-      <p:sp>
-        <p:nvSpPr>
-          <p:cNvPr id="5" name="TextBox 4"/>
-          <p:cNvSpPr txBox="1"/>
-          <p:nvPr/>
-        </p:nvSpPr>
-        <p:spPr>
-          <a:xfrm>
             <a:off x="566928" y="1234440"/>
             <a:ext cx="10561320" cy="1389888"/>
           </a:xfrm>
@@ -5729,7 +6397,7 @@
               </a:spcAft>
               <a:defRPr sz="4300" b="1">
                 <a:solidFill>
-                  <a:srgbClr val="17283B"/>
+                  <a:srgbClr val="222222"/>
                 </a:solidFill>
                 <a:latin typeface="Liberation Sans"/>
               </a:defRPr>
@@ -5745,7 +6413,7 @@
               </a:spcAft>
               <a:defRPr sz="4300" b="1">
                 <a:solidFill>
-                  <a:srgbClr val="17283B"/>
+                  <a:srgbClr val="222222"/>
                 </a:solidFill>
                 <a:latin typeface="Liberation Sans"/>
               </a:defRPr>
@@ -5758,7 +6426,7 @@
       </p:sp>
       <p:sp>
         <p:nvSpPr>
-          <p:cNvPr id="6" name="TextBox 5"/>
+          <p:cNvPr id="5" name="TextBox 4"/>
           <p:cNvSpPr txBox="1"/>
           <p:nvPr/>
         </p:nvSpPr>
@@ -5784,7 +6452,7 @@
               </a:spcAft>
               <a:defRPr sz="3100" b="0">
                 <a:solidFill>
-                  <a:srgbClr val="164F89"/>
+                  <a:srgbClr val="222222"/>
                 </a:solidFill>
                 <a:latin typeface="Liberation Sans"/>
               </a:defRPr>
@@ -5800,7 +6468,7 @@
               </a:spcAft>
               <a:defRPr sz="3100" b="0">
                 <a:solidFill>
-                  <a:srgbClr val="164F89"/>
+                  <a:srgbClr val="222222"/>
                 </a:solidFill>
                 <a:latin typeface="Liberation Sans"/>
               </a:defRPr>
@@ -5813,7 +6481,7 @@
       </p:sp>
       <p:sp>
         <p:nvSpPr>
-          <p:cNvPr id="7" name="TextBox 6"/>
+          <p:cNvPr id="6" name="TextBox 5"/>
           <p:cNvSpPr txBox="1"/>
           <p:nvPr/>
         </p:nvSpPr>
@@ -5839,7 +6507,7 @@
               </a:spcAft>
               <a:defRPr sz="2500" b="1">
                 <a:solidFill>
-                  <a:srgbClr val="17283B"/>
+                  <a:srgbClr val="222222"/>
                 </a:solidFill>
                 <a:latin typeface="Liberation Sans"/>
               </a:defRPr>
@@ -5852,7 +6520,7 @@
       </p:sp>
       <p:sp>
         <p:nvSpPr>
-          <p:cNvPr id="8" name="TextBox 7"/>
+          <p:cNvPr id="7" name="TextBox 6"/>
           <p:cNvSpPr txBox="1"/>
           <p:nvPr/>
         </p:nvSpPr>
@@ -5878,7 +6546,7 @@
               </a:spcAft>
               <a:defRPr sz="1800" b="0">
                 <a:solidFill>
-                  <a:srgbClr val="414F60"/>
+                  <a:srgbClr val="555555"/>
                 </a:solidFill>
                 <a:latin typeface="Liberation Sans"/>
               </a:defRPr>
@@ -5894,7 +6562,7 @@
               </a:spcAft>
               <a:defRPr sz="1800" b="0">
                 <a:solidFill>
-                  <a:srgbClr val="414F60"/>
+                  <a:srgbClr val="555555"/>
                 </a:solidFill>
                 <a:latin typeface="Liberation Sans"/>
               </a:defRPr>
@@ -5907,7 +6575,7 @@
       </p:sp>
       <p:sp>
         <p:nvSpPr>
-          <p:cNvPr id="9" name="TextBox 8"/>
+          <p:cNvPr id="8" name="TextBox 7"/>
           <p:cNvSpPr txBox="1"/>
           <p:nvPr/>
         </p:nvSpPr>
@@ -5933,20 +6601,20 @@
               </a:spcAft>
               <a:defRPr sz="900" b="0">
                 <a:solidFill>
-                  <a:srgbClr val="414F60"/>
+                  <a:srgbClr val="555555"/>
                 </a:solidFill>
                 <a:latin typeface="Liberation Sans"/>
               </a:defRPr>
             </a:pPr>
             <a:r>
-              <a:t>Volcano  |  KubeCon + CloudNativeCon North America 2026</a:t>
-            </a:r>
-          </a:p>
-        </p:txBody>
-      </p:sp>
-      <p:sp>
-        <p:nvSpPr>
-          <p:cNvPr id="10" name="TextBox 9"/>
+              <a:t>KubeCon + CloudNativeCon North America 2026</a:t>
+            </a:r>
+          </a:p>
+        </p:txBody>
+      </p:sp>
+      <p:sp>
+        <p:nvSpPr>
+          <p:cNvPr id="9" name="TextBox 8"/>
           <p:cNvSpPr txBox="1"/>
           <p:nvPr/>
         </p:nvSpPr>
@@ -5972,13 +6640,13 @@
               </a:spcAft>
               <a:defRPr sz="1100" b="0">
                 <a:solidFill>
-                  <a:srgbClr val="414F60"/>
+                  <a:srgbClr val="555555"/>
                 </a:solidFill>
                 <a:latin typeface="Liberation Sans"/>
               </a:defRPr>
             </a:pPr>
             <a:r>
-              <a:t>01 / 23</a:t>
+              <a:t>1</a:t>
             </a:r>
           </a:p>
         </p:txBody>
@@ -6057,8 +6725,8 @@
         </p:nvSpPr>
         <p:spPr>
           <a:xfrm>
-            <a:off x="457200" y="292608"/>
-            <a:ext cx="9144000" cy="256032"/>
+            <a:off x="457200" y="749808"/>
+            <a:ext cx="11247120" cy="640080"/>
           </a:xfrm>
           <a:prstGeom prst="rect">
             <a:avLst/>
@@ -6075,100 +6743,22 @@
               <a:spcAft>
                 <a:spcPts val="500"/>
               </a:spcAft>
-              <a:defRPr sz="1100" b="1">
+              <a:defRPr sz="3300" b="1">
                 <a:solidFill>
-                  <a:srgbClr val="164F89"/>
+                  <a:srgbClr val="222222"/>
                 </a:solidFill>
                 <a:latin typeface="Liberation Sans"/>
               </a:defRPr>
             </a:pPr>
             <a:r>
-              <a:t>MULTI-LEVEL GANG &amp; NETWORK TOPOLOGY</a:t>
-            </a:r>
-          </a:p>
-        </p:txBody>
-      </p:sp>
-      <p:sp>
-        <p:nvSpPr>
-          <p:cNvPr id="5" name="TextBox 4"/>
-          <p:cNvSpPr txBox="1"/>
-          <p:nvPr/>
-        </p:nvSpPr>
-        <p:spPr>
-          <a:xfrm>
-            <a:off x="457200" y="804672"/>
-            <a:ext cx="11247120" cy="640080"/>
-          </a:xfrm>
-          <a:prstGeom prst="rect">
-            <a:avLst/>
-          </a:prstGeom>
-          <a:noFill/>
-        </p:spPr>
-        <p:txBody>
-          <a:bodyPr wrap="square" lIns="0" rIns="0" tIns="0" bIns="0">
-            <a:spAutoFit/>
-          </a:bodyPr>
-          <a:lstStyle/>
-          <a:p>
-            <a:pPr>
-              <a:spcAft>
-                <a:spcPts val="500"/>
-              </a:spcAft>
-              <a:defRPr sz="3100" b="1">
-                <a:solidFill>
-                  <a:srgbClr val="17283B"/>
-                </a:solidFill>
-                <a:latin typeface="Liberation Sans"/>
-              </a:defRPr>
-            </a:pPr>
-            <a:r>
-              <a:t>Place Groups at Different Topology Levels</a:t>
-            </a:r>
-          </a:p>
-        </p:txBody>
-      </p:sp>
-      <p:sp>
-        <p:nvSpPr>
-          <p:cNvPr id="6" name="TextBox 5"/>
-          <p:cNvSpPr txBox="1"/>
-          <p:nvPr/>
-        </p:nvSpPr>
-        <p:spPr>
-          <a:xfrm>
-            <a:off x="475488" y="1435608"/>
-            <a:ext cx="11201400" cy="429768"/>
-          </a:xfrm>
-          <a:prstGeom prst="rect">
-            <a:avLst/>
-          </a:prstGeom>
-          <a:noFill/>
-        </p:spPr>
-        <p:txBody>
-          <a:bodyPr wrap="square" lIns="0" rIns="0" tIns="0" bIns="0">
-            <a:spAutoFit/>
-          </a:bodyPr>
-          <a:lstStyle/>
-          <a:p>
-            <a:pPr>
-              <a:spcAft>
-                <a:spcPts val="500"/>
-              </a:spcAft>
-              <a:defRPr sz="1700" b="0">
-                <a:solidFill>
-                  <a:srgbClr val="414F60"/>
-                </a:solidFill>
-                <a:latin typeface="Liberation Sans"/>
-              </a:defRPr>
-            </a:pPr>
-            <a:r>
-              <a:t>An eight-Pod instance spans a larger domain; Prefill and Decode use different locality constraints.</a:t>
+              <a:t>Place groups at different topology levels</a:t>
             </a:r>
           </a:p>
         </p:txBody>
       </p:sp>
       <p:pic>
         <p:nvPicPr>
-          <p:cNvPr id="7" name="Picture 6" descr="10-multilevel-placement.png"/>
+          <p:cNvPr id="5" name="Picture 4" descr="10-multilevel-placement.png"/>
           <p:cNvPicPr>
             <a:picLocks noChangeAspect="1"/>
           </p:cNvPicPr>
@@ -6182,7 +6772,7 @@
         </p:blipFill>
         <p:spPr>
           <a:xfrm>
-            <a:off x="457200" y="1938528"/>
+            <a:off x="457200" y="1691640"/>
             <a:ext cx="11277599" cy="4267200"/>
           </a:xfrm>
           <a:prstGeom prst="rect">
@@ -6192,7 +6782,7 @@
       </p:pic>
       <p:sp>
         <p:nvSpPr>
-          <p:cNvPr id="8" name="TextBox 7"/>
+          <p:cNvPr id="6" name="TextBox 5"/>
           <p:cNvSpPr txBox="1"/>
           <p:nvPr/>
         </p:nvSpPr>
@@ -6218,20 +6808,20 @@
               </a:spcAft>
               <a:defRPr sz="900" b="0">
                 <a:solidFill>
-                  <a:srgbClr val="414F60"/>
+                  <a:srgbClr val="555555"/>
                 </a:solidFill>
                 <a:latin typeface="Liberation Sans"/>
               </a:defRPr>
             </a:pPr>
             <a:r>
-              <a:t>Volcano  |  KubeCon + CloudNativeCon North America 2026</a:t>
-            </a:r>
-          </a:p>
-        </p:txBody>
-      </p:sp>
-      <p:sp>
-        <p:nvSpPr>
-          <p:cNvPr id="9" name="TextBox 8"/>
+              <a:t>KubeCon + CloudNativeCon North America 2026</a:t>
+            </a:r>
+          </a:p>
+        </p:txBody>
+      </p:sp>
+      <p:sp>
+        <p:nvSpPr>
+          <p:cNvPr id="7" name="TextBox 6"/>
           <p:cNvSpPr txBox="1"/>
           <p:nvPr/>
         </p:nvSpPr>
@@ -6257,13 +6847,13 @@
               </a:spcAft>
               <a:defRPr sz="1100" b="0">
                 <a:solidFill>
-                  <a:srgbClr val="414F60"/>
+                  <a:srgbClr val="555555"/>
                 </a:solidFill>
                 <a:latin typeface="Liberation Sans"/>
               </a:defRPr>
             </a:pPr>
             <a:r>
-              <a:t>10 / 23</a:t>
+              <a:t>10</a:t>
             </a:r>
           </a:p>
         </p:txBody>
@@ -6342,8 +6932,8 @@
         </p:nvSpPr>
         <p:spPr>
           <a:xfrm>
-            <a:off x="457200" y="292608"/>
-            <a:ext cx="9144000" cy="256032"/>
+            <a:off x="457200" y="749808"/>
+            <a:ext cx="11247120" cy="640080"/>
           </a:xfrm>
           <a:prstGeom prst="rect">
             <a:avLst/>
@@ -6360,100 +6950,22 @@
               <a:spcAft>
                 <a:spcPts val="500"/>
               </a:spcAft>
-              <a:defRPr sz="1100" b="1">
+              <a:defRPr sz="3300" b="1">
                 <a:solidFill>
-                  <a:srgbClr val="164F89"/>
+                  <a:srgbClr val="222222"/>
                 </a:solidFill>
                 <a:latin typeface="Liberation Sans"/>
               </a:defRPr>
             </a:pPr>
             <a:r>
-              <a:t>MULTI-LEVEL GANG &amp; NETWORK TOPOLOGY</a:t>
-            </a:r>
-          </a:p>
-        </p:txBody>
-      </p:sp>
-      <p:sp>
-        <p:nvSpPr>
-          <p:cNvPr id="5" name="TextBox 4"/>
-          <p:cNvSpPr txBox="1"/>
-          <p:nvPr/>
-        </p:nvSpPr>
-        <p:spPr>
-          <a:xfrm>
-            <a:off x="457200" y="804672"/>
-            <a:ext cx="11247120" cy="640080"/>
-          </a:xfrm>
-          <a:prstGeom prst="rect">
-            <a:avLst/>
-          </a:prstGeom>
-          <a:noFill/>
-        </p:spPr>
-        <p:txBody>
-          <a:bodyPr wrap="square" lIns="0" rIns="0" tIns="0" bIns="0">
-            <a:spAutoFit/>
-          </a:bodyPr>
-          <a:lstStyle/>
-          <a:p>
-            <a:pPr>
-              <a:spcAft>
-                <a:spcPts val="500"/>
-              </a:spcAft>
-              <a:defRPr sz="3100" b="1">
-                <a:solidFill>
-                  <a:srgbClr val="17283B"/>
-                </a:solidFill>
-                <a:latin typeface="Liberation Sans"/>
-              </a:defRPr>
-            </a:pPr>
-            <a:r>
-              <a:t>Keep Each Instance Together, Place Instances Apart</a:t>
-            </a:r>
-          </a:p>
-        </p:txBody>
-      </p:sp>
-      <p:sp>
-        <p:nvSpPr>
-          <p:cNvPr id="6" name="TextBox 5"/>
-          <p:cNvSpPr txBox="1"/>
-          <p:nvPr/>
-        </p:nvSpPr>
-        <p:spPr>
-          <a:xfrm>
-            <a:off x="475488" y="1435608"/>
-            <a:ext cx="11201400" cy="429768"/>
-          </a:xfrm>
-          <a:prstGeom prst="rect">
-            <a:avLst/>
-          </a:prstGeom>
-          <a:noFill/>
-        </p:spPr>
-        <p:txBody>
-          <a:bodyPr wrap="square" lIns="0" rIns="0" tIns="0" bIns="0">
-            <a:spAutoFit/>
-          </a:bodyPr>
-          <a:lstStyle/>
-          <a:p>
-            <a:pPr>
-              <a:spcAft>
-                <a:spcPts val="500"/>
-              </a:spcAft>
-              <a:defRPr sz="1700" b="0">
-                <a:solidFill>
-                  <a:srgbClr val="414F60"/>
-                </a:solidFill>
-                <a:latin typeface="Liberation Sans"/>
-              </a:defRPr>
-            </a:pPr>
-            <a:r>
-              <a:t>ServingGroup → PodGroup: a Kthena scenario. Anti-affinity integration in Kthena is proposed.</a:t>
+              <a:t>PodGroup anti-affinity</a:t>
             </a:r>
           </a:p>
         </p:txBody>
       </p:sp>
       <p:pic>
         <p:nvPicPr>
-          <p:cNvPr id="7" name="Picture 6" descr="11-instance-isolation.png"/>
+          <p:cNvPr id="5" name="Picture 4" descr="11-instance-isolation.png"/>
           <p:cNvPicPr>
             <a:picLocks noChangeAspect="1"/>
           </p:cNvPicPr>
@@ -6467,7 +6979,7 @@
         </p:blipFill>
         <p:spPr>
           <a:xfrm>
-            <a:off x="457200" y="1938528"/>
+            <a:off x="457200" y="1691640"/>
             <a:ext cx="11277599" cy="4267200"/>
           </a:xfrm>
           <a:prstGeom prst="rect">
@@ -6477,7 +6989,7 @@
       </p:pic>
       <p:sp>
         <p:nvSpPr>
-          <p:cNvPr id="8" name="TextBox 7"/>
+          <p:cNvPr id="6" name="TextBox 5"/>
           <p:cNvSpPr txBox="1"/>
           <p:nvPr/>
         </p:nvSpPr>
@@ -6503,20 +7015,20 @@
               </a:spcAft>
               <a:defRPr sz="900" b="0">
                 <a:solidFill>
-                  <a:srgbClr val="414F60"/>
+                  <a:srgbClr val="555555"/>
                 </a:solidFill>
                 <a:latin typeface="Liberation Sans"/>
               </a:defRPr>
             </a:pPr>
             <a:r>
-              <a:t>Volcano  |  KubeCon + CloudNativeCon North America 2026</a:t>
-            </a:r>
-          </a:p>
-        </p:txBody>
-      </p:sp>
-      <p:sp>
-        <p:nvSpPr>
-          <p:cNvPr id="9" name="TextBox 8"/>
+              <a:t>KubeCon + CloudNativeCon North America 2026</a:t>
+            </a:r>
+          </a:p>
+        </p:txBody>
+      </p:sp>
+      <p:sp>
+        <p:nvSpPr>
+          <p:cNvPr id="7" name="TextBox 6"/>
           <p:cNvSpPr txBox="1"/>
           <p:nvPr/>
         </p:nvSpPr>
@@ -6542,13 +7054,13 @@
               </a:spcAft>
               <a:defRPr sz="1100" b="0">
                 <a:solidFill>
-                  <a:srgbClr val="414F60"/>
+                  <a:srgbClr val="555555"/>
                 </a:solidFill>
                 <a:latin typeface="Liberation Sans"/>
               </a:defRPr>
             </a:pPr>
             <a:r>
-              <a:t>11 / 23</a:t>
+              <a:t>11</a:t>
             </a:r>
           </a:p>
         </p:txBody>
@@ -6627,8 +7139,8 @@
         </p:nvSpPr>
         <p:spPr>
           <a:xfrm>
-            <a:off x="457200" y="292608"/>
-            <a:ext cx="9144000" cy="256032"/>
+            <a:off x="457200" y="749808"/>
+            <a:ext cx="11247120" cy="640080"/>
           </a:xfrm>
           <a:prstGeom prst="rect">
             <a:avLst/>
@@ -6645,100 +7157,22 @@
               <a:spcAft>
                 <a:spcPts val="500"/>
               </a:spcAft>
-              <a:defRPr sz="1100" b="1">
+              <a:defRPr sz="3300" b="1">
                 <a:solidFill>
-                  <a:srgbClr val="164F89"/>
+                  <a:srgbClr val="222222"/>
                 </a:solidFill>
                 <a:latin typeface="Liberation Sans"/>
               </a:defRPr>
             </a:pPr>
             <a:r>
-              <a:t>MULTI-LEVEL GANG &amp; NETWORK TOPOLOGY</a:t>
-            </a:r>
-          </a:p>
-        </p:txBody>
-      </p:sp>
-      <p:sp>
-        <p:nvSpPr>
-          <p:cNvPr id="5" name="TextBox 4"/>
-          <p:cNvSpPr txBox="1"/>
-          <p:nvPr/>
-        </p:nvSpPr>
-        <p:spPr>
-          <a:xfrm>
-            <a:off x="457200" y="804672"/>
-            <a:ext cx="11247120" cy="640080"/>
-          </a:xfrm>
-          <a:prstGeom prst="rect">
-            <a:avLst/>
-          </a:prstGeom>
-          <a:noFill/>
-        </p:spPr>
-        <p:txBody>
-          <a:bodyPr wrap="square" lIns="0" rIns="0" tIns="0" bIns="0">
-            <a:spAutoFit/>
-          </a:bodyPr>
-          <a:lstStyle/>
-          <a:p>
-            <a:pPr>
-              <a:spcAft>
-                <a:spcPts val="500"/>
-              </a:spcAft>
-              <a:defRPr sz="3100" b="1">
-                <a:solidFill>
-                  <a:srgbClr val="17283B"/>
-                </a:solidFill>
-                <a:latin typeface="Liberation Sans"/>
-              </a:defRPr>
-            </a:pPr>
-            <a:r>
-              <a:t>Next: Relationships Between SubGroups</a:t>
-            </a:r>
-          </a:p>
-        </p:txBody>
-      </p:sp>
-      <p:sp>
-        <p:nvSpPr>
-          <p:cNvPr id="6" name="TextBox 5"/>
-          <p:cNvSpPr txBox="1"/>
-          <p:nvPr/>
-        </p:nvSpPr>
-        <p:spPr>
-          <a:xfrm>
-            <a:off x="475488" y="1435608"/>
-            <a:ext cx="11201400" cy="429768"/>
-          </a:xfrm>
-          <a:prstGeom prst="rect">
-            <a:avLst/>
-          </a:prstGeom>
-          <a:noFill/>
-        </p:spPr>
-        <p:txBody>
-          <a:bodyPr wrap="square" lIns="0" rIns="0" tIns="0" bIns="0">
-            <a:spAutoFit/>
-          </a:bodyPr>
-          <a:lstStyle/>
-          <a:p>
-            <a:pPr>
-              <a:spcAft>
-                <a:spcPts val="500"/>
-              </a:spcAft>
-              <a:defRPr sz="1700" b="0">
-                <a:solidFill>
-                  <a:srgbClr val="414F60"/>
-                </a:solidFill>
-                <a:latin typeface="Liberation Sans"/>
-              </a:defRPr>
-            </a:pPr>
-            <a:r>
-              <a:t>Keep cooperating groups local while separating replicas inside the same PodGroup.</a:t>
+              <a:t>SubGroup affinity and anti-affinity</a:t>
             </a:r>
           </a:p>
         </p:txBody>
       </p:sp>
       <p:pic>
         <p:nvPicPr>
-          <p:cNvPr id="7" name="Picture 6" descr="12-subgroup-next.png"/>
+          <p:cNvPr id="5" name="Picture 4" descr="12-subgroup-next.png"/>
           <p:cNvPicPr>
             <a:picLocks noChangeAspect="1"/>
           </p:cNvPicPr>
@@ -6752,7 +7186,7 @@
         </p:blipFill>
         <p:spPr>
           <a:xfrm>
-            <a:off x="457200" y="1938528"/>
+            <a:off x="457200" y="1691640"/>
             <a:ext cx="11277599" cy="4267200"/>
           </a:xfrm>
           <a:prstGeom prst="rect">
@@ -6762,7 +7196,7 @@
       </p:pic>
       <p:sp>
         <p:nvSpPr>
-          <p:cNvPr id="8" name="TextBox 7"/>
+          <p:cNvPr id="6" name="TextBox 5"/>
           <p:cNvSpPr txBox="1"/>
           <p:nvPr/>
         </p:nvSpPr>
@@ -6788,20 +7222,20 @@
               </a:spcAft>
               <a:defRPr sz="900" b="0">
                 <a:solidFill>
-                  <a:srgbClr val="414F60"/>
+                  <a:srgbClr val="555555"/>
                 </a:solidFill>
                 <a:latin typeface="Liberation Sans"/>
               </a:defRPr>
             </a:pPr>
             <a:r>
-              <a:t>Volcano  |  KubeCon + CloudNativeCon North America 2026</a:t>
-            </a:r>
-          </a:p>
-        </p:txBody>
-      </p:sp>
-      <p:sp>
-        <p:nvSpPr>
-          <p:cNvPr id="9" name="TextBox 8"/>
+              <a:t>KubeCon + CloudNativeCon North America 2026</a:t>
+            </a:r>
+          </a:p>
+        </p:txBody>
+      </p:sp>
+      <p:sp>
+        <p:nvSpPr>
+          <p:cNvPr id="7" name="TextBox 6"/>
           <p:cNvSpPr txBox="1"/>
           <p:nvPr/>
         </p:nvSpPr>
@@ -6827,13 +7261,13 @@
               </a:spcAft>
               <a:defRPr sz="1100" b="0">
                 <a:solidFill>
-                  <a:srgbClr val="414F60"/>
+                  <a:srgbClr val="555555"/>
                 </a:solidFill>
                 <a:latin typeface="Liberation Sans"/>
               </a:defRPr>
             </a:pPr>
             <a:r>
-              <a:t>12 / 23</a:t>
+              <a:t>12</a:t>
             </a:r>
           </a:p>
         </p:txBody>
@@ -6912,8 +7346,8 @@
         </p:nvSpPr>
         <p:spPr>
           <a:xfrm>
-            <a:off x="457200" y="292608"/>
-            <a:ext cx="9144000" cy="256032"/>
+            <a:off x="594360" y="1417320"/>
+            <a:ext cx="1828800" cy="640080"/>
           </a:xfrm>
           <a:prstGeom prst="rect">
             <a:avLst/>
@@ -6930,15 +7364,15 @@
               <a:spcAft>
                 <a:spcPts val="500"/>
               </a:spcAft>
-              <a:defRPr sz="1100" b="1">
+              <a:defRPr sz="3200" b="0">
                 <a:solidFill>
-                  <a:srgbClr val="164F89"/>
+                  <a:srgbClr val="E64030"/>
                 </a:solidFill>
                 <a:latin typeface="Liberation Sans"/>
               </a:defRPr>
             </a:pPr>
             <a:r>
-              <a:t>ECOSYSTEM</a:t>
+              <a:t>03</a:t>
             </a:r>
           </a:p>
         </p:txBody>
@@ -6951,8 +7385,8 @@
         </p:nvSpPr>
         <p:spPr>
           <a:xfrm>
-            <a:off x="594360" y="1298448"/>
-            <a:ext cx="1828800" cy="640080"/>
+            <a:off x="594360" y="2331720"/>
+            <a:ext cx="10789920" cy="1828800"/>
           </a:xfrm>
           <a:prstGeom prst="rect">
             <a:avLst/>
@@ -6969,15 +7403,15 @@
               <a:spcAft>
                 <a:spcPts val="500"/>
               </a:spcAft>
-              <a:defRPr sz="3800" b="1">
+              <a:defRPr sz="4400" b="1">
                 <a:solidFill>
-                  <a:srgbClr val="164F89"/>
+                  <a:srgbClr val="222222"/>
                 </a:solidFill>
                 <a:latin typeface="Liberation Sans"/>
               </a:defRPr>
             </a:pPr>
             <a:r>
-              <a:t>03</a:t>
+              <a:t>Ecosystem</a:t>
             </a:r>
           </a:p>
         </p:txBody>
@@ -6985,279 +7419,6 @@
       <p:sp>
         <p:nvSpPr>
           <p:cNvPr id="6" name="TextBox 5"/>
-          <p:cNvSpPr txBox="1"/>
-          <p:nvPr/>
-        </p:nvSpPr>
-        <p:spPr>
-          <a:xfrm>
-            <a:off x="594360" y="2084831"/>
-            <a:ext cx="7863840" cy="1508760"/>
-          </a:xfrm>
-          <a:prstGeom prst="rect">
-            <a:avLst/>
-          </a:prstGeom>
-          <a:noFill/>
-        </p:spPr>
-        <p:txBody>
-          <a:bodyPr wrap="square" lIns="0" rIns="0" tIns="0" bIns="0">
-            <a:spAutoFit/>
-          </a:bodyPr>
-          <a:lstStyle/>
-          <a:p>
-            <a:pPr>
-              <a:spcAft>
-                <a:spcPts val="500"/>
-              </a:spcAft>
-              <a:defRPr sz="4100" b="1">
-                <a:solidFill>
-                  <a:srgbClr val="17283B"/>
-                </a:solidFill>
-                <a:latin typeface="Liberation Sans"/>
-              </a:defRPr>
-            </a:pPr>
-            <a:r>
-              <a:t>Ecosystem</a:t>
-            </a:r>
-          </a:p>
-        </p:txBody>
-      </p:sp>
-      <p:sp>
-        <p:nvSpPr>
-          <p:cNvPr id="7" name="TextBox 6"/>
-          <p:cNvSpPr txBox="1"/>
-          <p:nvPr/>
-        </p:nvSpPr>
-        <p:spPr>
-          <a:xfrm>
-            <a:off x="621792" y="4041648"/>
-            <a:ext cx="9966960" cy="548640"/>
-          </a:xfrm>
-          <a:prstGeom prst="rect">
-            <a:avLst/>
-          </a:prstGeom>
-          <a:noFill/>
-        </p:spPr>
-        <p:txBody>
-          <a:bodyPr wrap="square" lIns="0" rIns="0" tIns="0" bIns="0">
-            <a:spAutoFit/>
-          </a:bodyPr>
-          <a:lstStyle/>
-          <a:p>
-            <a:pPr>
-              <a:spcAft>
-                <a:spcPts val="500"/>
-              </a:spcAft>
-              <a:defRPr sz="2400" b="0">
-                <a:solidFill>
-                  <a:srgbClr val="164F89"/>
-                </a:solidFill>
-                <a:latin typeface="Liberation Sans"/>
-              </a:defRPr>
-            </a:pPr>
-            <a:r>
-              <a:t>Workload controllers carry scheduling intent.</a:t>
-            </a:r>
-          </a:p>
-        </p:txBody>
-      </p:sp>
-      <p:sp>
-        <p:nvSpPr>
-          <p:cNvPr id="8" name="TextBox 7"/>
-          <p:cNvSpPr txBox="1"/>
-          <p:nvPr/>
-        </p:nvSpPr>
-        <p:spPr>
-          <a:xfrm>
-            <a:off x="621792" y="4791456"/>
-            <a:ext cx="10607040" cy="594360"/>
-          </a:xfrm>
-          <a:prstGeom prst="rect">
-            <a:avLst/>
-          </a:prstGeom>
-          <a:noFill/>
-        </p:spPr>
-        <p:txBody>
-          <a:bodyPr wrap="square" lIns="0" rIns="0" tIns="0" bIns="0">
-            <a:spAutoFit/>
-          </a:bodyPr>
-          <a:lstStyle/>
-          <a:p>
-            <a:pPr>
-              <a:spcAft>
-                <a:spcPts val="500"/>
-              </a:spcAft>
-              <a:defRPr sz="2100" b="0">
-                <a:solidFill>
-                  <a:srgbClr val="414F60"/>
-                </a:solidFill>
-                <a:latin typeface="Liberation Sans"/>
-              </a:defRPr>
-            </a:pPr>
-            <a:r>
-              <a:t>How do roles and replicas reach the scheduler?</a:t>
-            </a:r>
-          </a:p>
-        </p:txBody>
-      </p:sp>
-      <p:sp>
-        <p:nvSpPr>
-          <p:cNvPr id="9" name="TextBox 8"/>
-          <p:cNvSpPr txBox="1"/>
-          <p:nvPr/>
-        </p:nvSpPr>
-        <p:spPr>
-          <a:xfrm>
-            <a:off x="8503920" y="1554480"/>
-            <a:ext cx="3154680" cy="621792"/>
-          </a:xfrm>
-          <a:prstGeom prst="rect">
-            <a:avLst/>
-          </a:prstGeom>
-          <a:noFill/>
-        </p:spPr>
-        <p:txBody>
-          <a:bodyPr wrap="square" lIns="0" rIns="0" tIns="0" bIns="0">
-            <a:spAutoFit/>
-          </a:bodyPr>
-          <a:lstStyle/>
-          <a:p>
-            <a:pPr>
-              <a:spcAft>
-                <a:spcPts val="500"/>
-              </a:spcAft>
-              <a:defRPr sz="1500" b="0">
-                <a:solidFill>
-                  <a:srgbClr val="414F60"/>
-                </a:solidFill>
-                <a:latin typeface="Liberation Sans"/>
-              </a:defRPr>
-            </a:pPr>
-            <a:r>
-              <a:t>01  Unified scheduling</a:t>
-            </a:r>
-          </a:p>
-        </p:txBody>
-      </p:sp>
-      <p:sp>
-        <p:nvSpPr>
-          <p:cNvPr id="10" name="TextBox 9"/>
-          <p:cNvSpPr txBox="1"/>
-          <p:nvPr/>
-        </p:nvSpPr>
-        <p:spPr>
-          <a:xfrm>
-            <a:off x="8503920" y="2249424"/>
-            <a:ext cx="3154680" cy="621792"/>
-          </a:xfrm>
-          <a:prstGeom prst="rect">
-            <a:avLst/>
-          </a:prstGeom>
-          <a:noFill/>
-        </p:spPr>
-        <p:txBody>
-          <a:bodyPr wrap="square" lIns="0" rIns="0" tIns="0" bIns="0">
-            <a:spAutoFit/>
-          </a:bodyPr>
-          <a:lstStyle/>
-          <a:p>
-            <a:pPr>
-              <a:spcAft>
-                <a:spcPts val="500"/>
-              </a:spcAft>
-              <a:defRPr sz="1500" b="0">
-                <a:solidFill>
-                  <a:srgbClr val="414F60"/>
-                </a:solidFill>
-                <a:latin typeface="Liberation Sans"/>
-              </a:defRPr>
-            </a:pPr>
-            <a:r>
-              <a:t>02  Multi-level gang &amp; network topology</a:t>
-            </a:r>
-          </a:p>
-        </p:txBody>
-      </p:sp>
-      <p:sp>
-        <p:nvSpPr>
-          <p:cNvPr id="11" name="TextBox 10"/>
-          <p:cNvSpPr txBox="1"/>
-          <p:nvPr/>
-        </p:nvSpPr>
-        <p:spPr>
-          <a:xfrm>
-            <a:off x="8503920" y="2944368"/>
-            <a:ext cx="3154680" cy="621792"/>
-          </a:xfrm>
-          <a:prstGeom prst="rect">
-            <a:avLst/>
-          </a:prstGeom>
-          <a:noFill/>
-        </p:spPr>
-        <p:txBody>
-          <a:bodyPr wrap="square" lIns="0" rIns="0" tIns="0" bIns="0">
-            <a:spAutoFit/>
-          </a:bodyPr>
-          <a:lstStyle/>
-          <a:p>
-            <a:pPr>
-              <a:spcAft>
-                <a:spcPts val="500"/>
-              </a:spcAft>
-              <a:defRPr sz="1500" b="1">
-                <a:solidFill>
-                  <a:srgbClr val="164F89"/>
-                </a:solidFill>
-                <a:latin typeface="Liberation Sans"/>
-              </a:defRPr>
-            </a:pPr>
-            <a:r>
-              <a:t>03  Ecosystem</a:t>
-            </a:r>
-          </a:p>
-        </p:txBody>
-      </p:sp>
-      <p:sp>
-        <p:nvSpPr>
-          <p:cNvPr id="12" name="TextBox 11"/>
-          <p:cNvSpPr txBox="1"/>
-          <p:nvPr/>
-        </p:nvSpPr>
-        <p:spPr>
-          <a:xfrm>
-            <a:off x="8503920" y="3639312"/>
-            <a:ext cx="3154680" cy="621792"/>
-          </a:xfrm>
-          <a:prstGeom prst="rect">
-            <a:avLst/>
-          </a:prstGeom>
-          <a:noFill/>
-        </p:spPr>
-        <p:txBody>
-          <a:bodyPr wrap="square" lIns="0" rIns="0" tIns="0" bIns="0">
-            <a:spAutoFit/>
-          </a:bodyPr>
-          <a:lstStyle/>
-          <a:p>
-            <a:pPr>
-              <a:spcAft>
-                <a:spcPts val="500"/>
-              </a:spcAft>
-              <a:defRPr sz="1500" b="0">
-                <a:solidFill>
-                  <a:srgbClr val="414F60"/>
-                </a:solidFill>
-                <a:latin typeface="Liberation Sans"/>
-              </a:defRPr>
-            </a:pPr>
-            <a:r>
-              <a:t>04  Benchmark framework &amp; progress</a:t>
-            </a:r>
-          </a:p>
-        </p:txBody>
-      </p:sp>
-      <p:sp>
-        <p:nvSpPr>
-          <p:cNvPr id="13" name="TextBox 12"/>
           <p:cNvSpPr txBox="1"/>
           <p:nvPr/>
         </p:nvSpPr>
@@ -7283,20 +7444,20 @@
               </a:spcAft>
               <a:defRPr sz="900" b="0">
                 <a:solidFill>
-                  <a:srgbClr val="414F60"/>
+                  <a:srgbClr val="555555"/>
                 </a:solidFill>
                 <a:latin typeface="Liberation Sans"/>
               </a:defRPr>
             </a:pPr>
             <a:r>
-              <a:t>Volcano  |  KubeCon + CloudNativeCon North America 2026</a:t>
-            </a:r>
-          </a:p>
-        </p:txBody>
-      </p:sp>
-      <p:sp>
-        <p:nvSpPr>
-          <p:cNvPr id="14" name="TextBox 13"/>
+              <a:t>KubeCon + CloudNativeCon North America 2026</a:t>
+            </a:r>
+          </a:p>
+        </p:txBody>
+      </p:sp>
+      <p:sp>
+        <p:nvSpPr>
+          <p:cNvPr id="7" name="TextBox 6"/>
           <p:cNvSpPr txBox="1"/>
           <p:nvPr/>
         </p:nvSpPr>
@@ -7322,13 +7483,13 @@
               </a:spcAft>
               <a:defRPr sz="1100" b="0">
                 <a:solidFill>
-                  <a:srgbClr val="414F60"/>
+                  <a:srgbClr val="555555"/>
                 </a:solidFill>
                 <a:latin typeface="Liberation Sans"/>
               </a:defRPr>
             </a:pPr>
             <a:r>
-              <a:t>13 / 23</a:t>
+              <a:t>13</a:t>
             </a:r>
           </a:p>
         </p:txBody>
@@ -7407,8 +7568,8 @@
         </p:nvSpPr>
         <p:spPr>
           <a:xfrm>
-            <a:off x="457200" y="292608"/>
-            <a:ext cx="9144000" cy="256032"/>
+            <a:off x="457200" y="749808"/>
+            <a:ext cx="11247120" cy="640080"/>
           </a:xfrm>
           <a:prstGeom prst="rect">
             <a:avLst/>
@@ -7425,100 +7586,22 @@
               <a:spcAft>
                 <a:spcPts val="500"/>
               </a:spcAft>
-              <a:defRPr sz="1100" b="1">
+              <a:defRPr sz="3300" b="1">
                 <a:solidFill>
-                  <a:srgbClr val="164F89"/>
+                  <a:srgbClr val="222222"/>
                 </a:solidFill>
                 <a:latin typeface="Liberation Sans"/>
               </a:defRPr>
             </a:pPr>
             <a:r>
-              <a:t>ECOSYSTEM</a:t>
-            </a:r>
-          </a:p>
-        </p:txBody>
-      </p:sp>
-      <p:sp>
-        <p:nvSpPr>
-          <p:cNvPr id="5" name="TextBox 4"/>
-          <p:cNvSpPr txBox="1"/>
-          <p:nvPr/>
-        </p:nvSpPr>
-        <p:spPr>
-          <a:xfrm>
-            <a:off x="457200" y="804672"/>
-            <a:ext cx="11247120" cy="640080"/>
-          </a:xfrm>
-          <a:prstGeom prst="rect">
-            <a:avLst/>
-          </a:prstGeom>
-          <a:noFill/>
-        </p:spPr>
-        <p:txBody>
-          <a:bodyPr wrap="square" lIns="0" rIns="0" tIns="0" bIns="0">
-            <a:spAutoFit/>
-          </a:bodyPr>
-          <a:lstStyle/>
-          <a:p>
-            <a:pPr>
-              <a:spcAft>
-                <a:spcPts val="500"/>
-              </a:spcAft>
-              <a:defRPr sz="3100" b="1">
-                <a:solidFill>
-                  <a:srgbClr val="17283B"/>
-                </a:solidFill>
-                <a:latin typeface="Liberation Sans"/>
-              </a:defRPr>
-            </a:pPr>
-            <a:r>
-              <a:t>Kthena: From Serving Roles to Scheduling Groups</a:t>
-            </a:r>
-          </a:p>
-        </p:txBody>
-      </p:sp>
-      <p:sp>
-        <p:nvSpPr>
-          <p:cNvPr id="6" name="TextBox 5"/>
-          <p:cNvSpPr txBox="1"/>
-          <p:nvPr/>
-        </p:nvSpPr>
-        <p:spPr>
-          <a:xfrm>
-            <a:off x="475488" y="1435608"/>
-            <a:ext cx="11201400" cy="429768"/>
-          </a:xfrm>
-          <a:prstGeom prst="rect">
-            <a:avLst/>
-          </a:prstGeom>
-          <a:noFill/>
-        </p:spPr>
-        <p:txBody>
-          <a:bodyPr wrap="square" lIns="0" rIns="0" tIns="0" bIns="0">
-            <a:spAutoFit/>
-          </a:bodyPr>
-          <a:lstStyle/>
-          <a:p>
-            <a:pPr>
-              <a:spcAft>
-                <a:spcPts val="500"/>
-              </a:spcAft>
-              <a:defRPr sz="1700" b="0">
-                <a:solidFill>
-                  <a:srgbClr val="414F60"/>
-                </a:solidFill>
-                <a:latin typeface="Liberation Sans"/>
-              </a:defRPr>
-            </a:pPr>
-            <a:r>
-              <a:t>One ServingGroup maps to one PodGroup; each role replica forms a SubGroup.</a:t>
+              <a:t>Kthena</a:t>
             </a:r>
           </a:p>
         </p:txBody>
       </p:sp>
       <p:pic>
         <p:nvPicPr>
-          <p:cNvPr id="7" name="Picture 6" descr="14-kthena-mapping.png"/>
+          <p:cNvPr id="5" name="Picture 4" descr="14-kthena-mapping.png"/>
           <p:cNvPicPr>
             <a:picLocks noChangeAspect="1"/>
           </p:cNvPicPr>
@@ -7532,7 +7615,7 @@
         </p:blipFill>
         <p:spPr>
           <a:xfrm>
-            <a:off x="457200" y="1938528"/>
+            <a:off x="457200" y="1691640"/>
             <a:ext cx="11277599" cy="4267200"/>
           </a:xfrm>
           <a:prstGeom prst="rect">
@@ -7542,7 +7625,7 @@
       </p:pic>
       <p:sp>
         <p:nvSpPr>
-          <p:cNvPr id="8" name="TextBox 7"/>
+          <p:cNvPr id="6" name="TextBox 5"/>
           <p:cNvSpPr txBox="1"/>
           <p:nvPr/>
         </p:nvSpPr>
@@ -7568,20 +7651,20 @@
               </a:spcAft>
               <a:defRPr sz="900" b="0">
                 <a:solidFill>
-                  <a:srgbClr val="414F60"/>
+                  <a:srgbClr val="555555"/>
                 </a:solidFill>
                 <a:latin typeface="Liberation Sans"/>
               </a:defRPr>
             </a:pPr>
             <a:r>
-              <a:t>Volcano  |  KubeCon + CloudNativeCon North America 2026</a:t>
-            </a:r>
-          </a:p>
-        </p:txBody>
-      </p:sp>
-      <p:sp>
-        <p:nvSpPr>
-          <p:cNvPr id="9" name="TextBox 8"/>
+              <a:t>KubeCon + CloudNativeCon North America 2026</a:t>
+            </a:r>
+          </a:p>
+        </p:txBody>
+      </p:sp>
+      <p:sp>
+        <p:nvSpPr>
+          <p:cNvPr id="7" name="TextBox 6"/>
           <p:cNvSpPr txBox="1"/>
           <p:nvPr/>
         </p:nvSpPr>
@@ -7607,13 +7690,13 @@
               </a:spcAft>
               <a:defRPr sz="1100" b="0">
                 <a:solidFill>
-                  <a:srgbClr val="414F60"/>
+                  <a:srgbClr val="555555"/>
                 </a:solidFill>
                 <a:latin typeface="Liberation Sans"/>
               </a:defRPr>
             </a:pPr>
             <a:r>
-              <a:t>14 / 23</a:t>
+              <a:t>14</a:t>
             </a:r>
           </a:p>
         </p:txBody>
@@ -7692,8 +7775,8 @@
         </p:nvSpPr>
         <p:spPr>
           <a:xfrm>
-            <a:off x="457200" y="292608"/>
-            <a:ext cx="9144000" cy="256032"/>
+            <a:off x="457200" y="749808"/>
+            <a:ext cx="11247120" cy="640080"/>
           </a:xfrm>
           <a:prstGeom prst="rect">
             <a:avLst/>
@@ -7710,100 +7793,22 @@
               <a:spcAft>
                 <a:spcPts val="500"/>
               </a:spcAft>
-              <a:defRPr sz="1100" b="1">
+              <a:defRPr sz="3300" b="1">
                 <a:solidFill>
-                  <a:srgbClr val="164F89"/>
+                  <a:srgbClr val="222222"/>
                 </a:solidFill>
                 <a:latin typeface="Liberation Sans"/>
               </a:defRPr>
             </a:pPr>
             <a:r>
-              <a:t>ECOSYSTEM</a:t>
-            </a:r>
-          </a:p>
-        </p:txBody>
-      </p:sp>
-      <p:sp>
-        <p:nvSpPr>
-          <p:cNvPr id="5" name="TextBox 4"/>
-          <p:cNvSpPr txBox="1"/>
-          <p:nvPr/>
-        </p:nvSpPr>
-        <p:spPr>
-          <a:xfrm>
-            <a:off x="457200" y="804672"/>
-            <a:ext cx="11247120" cy="640080"/>
-          </a:xfrm>
-          <a:prstGeom prst="rect">
-            <a:avLst/>
-          </a:prstGeom>
-          <a:noFill/>
-        </p:spPr>
-        <p:txBody>
-          <a:bodyPr wrap="square" lIns="0" rIns="0" tIns="0" bIns="0">
-            <a:spAutoFit/>
-          </a:bodyPr>
-          <a:lstStyle/>
-          <a:p>
-            <a:pPr>
-              <a:spcAft>
-                <a:spcPts val="500"/>
-              </a:spcAft>
-              <a:defRPr sz="3100" b="1">
-                <a:solidFill>
-                  <a:srgbClr val="17283B"/>
-                </a:solidFill>
-                <a:latin typeface="Liberation Sans"/>
-              </a:defRPr>
-            </a:pPr>
-            <a:r>
-              <a:t>KubeRay: A Replica Can Span Multiple Pods</a:t>
-            </a:r>
-          </a:p>
-        </p:txBody>
-      </p:sp>
-      <p:sp>
-        <p:nvSpPr>
-          <p:cNvPr id="6" name="TextBox 5"/>
-          <p:cNvSpPr txBox="1"/>
-          <p:nvPr/>
-        </p:nvSpPr>
-        <p:spPr>
-          <a:xfrm>
-            <a:off x="475488" y="1435608"/>
-            <a:ext cx="11201400" cy="429768"/>
-          </a:xfrm>
-          <a:prstGeom prst="rect">
-            <a:avLst/>
-          </a:prstGeom>
-          <a:noFill/>
-        </p:spPr>
-        <p:txBody>
-          <a:bodyPr wrap="square" lIns="0" rIns="0" tIns="0" bIns="0">
-            <a:spAutoFit/>
-          </a:bodyPr>
-          <a:lstStyle/>
-          <a:p>
-            <a:pPr>
-              <a:spcAft>
-                <a:spcPts val="500"/>
-              </a:spcAft>
-              <a:defRPr sz="1700" b="0">
-                <a:solidFill>
-                  <a:srgbClr val="414F60"/>
-                </a:solidFill>
-                <a:latin typeface="Liberation Sans"/>
-              </a:defRPr>
-            </a:pPr>
-            <a:r>
-              <a:t>The replica label separates complete groups inside one WorkerGroup.</a:t>
+              <a:t>KubeRay</a:t>
             </a:r>
           </a:p>
         </p:txBody>
       </p:sp>
       <p:pic>
         <p:nvPicPr>
-          <p:cNvPr id="7" name="Picture 6" descr="15-ray-replicas.png"/>
+          <p:cNvPr id="5" name="Picture 4" descr="15-ray-replicas.png"/>
           <p:cNvPicPr>
             <a:picLocks noChangeAspect="1"/>
           </p:cNvPicPr>
@@ -7817,7 +7822,7 @@
         </p:blipFill>
         <p:spPr>
           <a:xfrm>
-            <a:off x="457200" y="1938528"/>
+            <a:off x="457200" y="1691640"/>
             <a:ext cx="11277599" cy="4267200"/>
           </a:xfrm>
           <a:prstGeom prst="rect">
@@ -7827,7 +7832,7 @@
       </p:pic>
       <p:sp>
         <p:nvSpPr>
-          <p:cNvPr id="8" name="TextBox 7"/>
+          <p:cNvPr id="6" name="TextBox 5"/>
           <p:cNvSpPr txBox="1"/>
           <p:nvPr/>
         </p:nvSpPr>
@@ -7853,20 +7858,20 @@
               </a:spcAft>
               <a:defRPr sz="900" b="0">
                 <a:solidFill>
-                  <a:srgbClr val="414F60"/>
+                  <a:srgbClr val="555555"/>
                 </a:solidFill>
                 <a:latin typeface="Liberation Sans"/>
               </a:defRPr>
             </a:pPr>
             <a:r>
-              <a:t>Volcano  |  KubeCon + CloudNativeCon North America 2026</a:t>
-            </a:r>
-          </a:p>
-        </p:txBody>
-      </p:sp>
-      <p:sp>
-        <p:nvSpPr>
-          <p:cNvPr id="9" name="TextBox 8"/>
+              <a:t>KubeCon + CloudNativeCon North America 2026</a:t>
+            </a:r>
+          </a:p>
+        </p:txBody>
+      </p:sp>
+      <p:sp>
+        <p:nvSpPr>
+          <p:cNvPr id="7" name="TextBox 6"/>
           <p:cNvSpPr txBox="1"/>
           <p:nvPr/>
         </p:nvSpPr>
@@ -7892,13 +7897,13 @@
               </a:spcAft>
               <a:defRPr sz="1100" b="0">
                 <a:solidFill>
-                  <a:srgbClr val="414F60"/>
+                  <a:srgbClr val="555555"/>
                 </a:solidFill>
                 <a:latin typeface="Liberation Sans"/>
               </a:defRPr>
             </a:pPr>
             <a:r>
-              <a:t>15 / 23</a:t>
+              <a:t>15</a:t>
             </a:r>
           </a:p>
         </p:txBody>
@@ -7977,8 +7982,8 @@
         </p:nvSpPr>
         <p:spPr>
           <a:xfrm>
-            <a:off x="457200" y="292608"/>
-            <a:ext cx="9144000" cy="256032"/>
+            <a:off x="457200" y="749808"/>
+            <a:ext cx="11247120" cy="640080"/>
           </a:xfrm>
           <a:prstGeom prst="rect">
             <a:avLst/>
@@ -7995,100 +8000,22 @@
               <a:spcAft>
                 <a:spcPts val="500"/>
               </a:spcAft>
-              <a:defRPr sz="1100" b="1">
+              <a:defRPr sz="3300" b="1">
                 <a:solidFill>
-                  <a:srgbClr val="164F89"/>
+                  <a:srgbClr val="222222"/>
                 </a:solidFill>
                 <a:latin typeface="Liberation Sans"/>
               </a:defRPr>
             </a:pPr>
             <a:r>
-              <a:t>ECOSYSTEM</a:t>
-            </a:r>
-          </a:p>
-        </p:txBody>
-      </p:sp>
-      <p:sp>
-        <p:nvSpPr>
-          <p:cNvPr id="5" name="TextBox 4"/>
-          <p:cNvSpPr txBox="1"/>
-          <p:nvPr/>
-        </p:nvSpPr>
-        <p:spPr>
-          <a:xfrm>
-            <a:off x="457200" y="804672"/>
-            <a:ext cx="11247120" cy="640080"/>
-          </a:xfrm>
-          <a:prstGeom prst="rect">
-            <a:avLst/>
-          </a:prstGeom>
-          <a:noFill/>
-        </p:spPr>
-        <p:txBody>
-          <a:bodyPr wrap="square" lIns="0" rIns="0" tIns="0" bIns="0">
-            <a:spAutoFit/>
-          </a:bodyPr>
-          <a:lstStyle/>
-          <a:p>
-            <a:pPr>
-              <a:spcAft>
-                <a:spcPts val="500"/>
-              </a:spcAft>
-              <a:defRPr sz="3100" b="1">
-                <a:solidFill>
-                  <a:srgbClr val="17283B"/>
-                </a:solidFill>
-                <a:latin typeface="Liberation Sans"/>
-              </a:defRPr>
-            </a:pPr>
-            <a:r>
-              <a:t>Grove: Carry PodGang Structure into Volcano</a:t>
-            </a:r>
-          </a:p>
-        </p:txBody>
-      </p:sp>
-      <p:sp>
-        <p:nvSpPr>
-          <p:cNvPr id="6" name="TextBox 5"/>
-          <p:cNvSpPr txBox="1"/>
-          <p:nvPr/>
-        </p:nvSpPr>
-        <p:spPr>
-          <a:xfrm>
-            <a:off x="475488" y="1435608"/>
-            <a:ext cx="11201400" cy="429768"/>
-          </a:xfrm>
-          <a:prstGeom prst="rect">
-            <a:avLst/>
-          </a:prstGeom>
-          <a:noFill/>
-        </p:spPr>
-        <p:txBody>
-          <a:bodyPr wrap="square" lIns="0" rIns="0" tIns="0" bIns="0">
-            <a:spAutoFit/>
-          </a:bodyPr>
-          <a:lstStyle/>
-          <a:p>
-            <a:pPr>
-              <a:spcAft>
-                <a:spcPts val="500"/>
-              </a:spcAft>
-              <a:defRPr sz="1700" b="0">
-                <a:solidFill>
-                  <a:srgbClr val="414F60"/>
-                </a:solidFill>
-                <a:latin typeface="Liberation Sans"/>
-              </a:defRPr>
-            </a:pPr>
-            <a:r>
-              <a:t>The backend translates Grove PodGroups into Volcano SubGroup policies.</a:t>
+              <a:t>Grove</a:t>
             </a:r>
           </a:p>
         </p:txBody>
       </p:sp>
       <p:pic>
         <p:nvPicPr>
-          <p:cNvPr id="7" name="Picture 6" descr="16-grove-mapping.png"/>
+          <p:cNvPr id="5" name="Picture 4" descr="16-grove-mapping.png"/>
           <p:cNvPicPr>
             <a:picLocks noChangeAspect="1"/>
           </p:cNvPicPr>
@@ -8102,7 +8029,7 @@
         </p:blipFill>
         <p:spPr>
           <a:xfrm>
-            <a:off x="457200" y="1938528"/>
+            <a:off x="457200" y="1691640"/>
             <a:ext cx="11277599" cy="4267200"/>
           </a:xfrm>
           <a:prstGeom prst="rect">
@@ -8112,7 +8039,7 @@
       </p:pic>
       <p:sp>
         <p:nvSpPr>
-          <p:cNvPr id="8" name="TextBox 7"/>
+          <p:cNvPr id="6" name="TextBox 5"/>
           <p:cNvSpPr txBox="1"/>
           <p:nvPr/>
         </p:nvSpPr>
@@ -8138,20 +8065,20 @@
               </a:spcAft>
               <a:defRPr sz="900" b="0">
                 <a:solidFill>
-                  <a:srgbClr val="414F60"/>
+                  <a:srgbClr val="555555"/>
                 </a:solidFill>
                 <a:latin typeface="Liberation Sans"/>
               </a:defRPr>
             </a:pPr>
             <a:r>
-              <a:t>Volcano  |  KubeCon + CloudNativeCon North America 2026</a:t>
-            </a:r>
-          </a:p>
-        </p:txBody>
-      </p:sp>
-      <p:sp>
-        <p:nvSpPr>
-          <p:cNvPr id="9" name="TextBox 8"/>
+              <a:t>KubeCon + CloudNativeCon North America 2026</a:t>
+            </a:r>
+          </a:p>
+        </p:txBody>
+      </p:sp>
+      <p:sp>
+        <p:nvSpPr>
+          <p:cNvPr id="7" name="TextBox 6"/>
           <p:cNvSpPr txBox="1"/>
           <p:nvPr/>
         </p:nvSpPr>
@@ -8177,13 +8104,13 @@
               </a:spcAft>
               <a:defRPr sz="1100" b="0">
                 <a:solidFill>
-                  <a:srgbClr val="414F60"/>
+                  <a:srgbClr val="555555"/>
                 </a:solidFill>
                 <a:latin typeface="Liberation Sans"/>
               </a:defRPr>
             </a:pPr>
             <a:r>
-              <a:t>16 / 23</a:t>
+              <a:t>16</a:t>
             </a:r>
           </a:p>
         </p:txBody>
@@ -8262,8 +8189,8 @@
         </p:nvSpPr>
         <p:spPr>
           <a:xfrm>
-            <a:off x="457200" y="292608"/>
-            <a:ext cx="9144000" cy="256032"/>
+            <a:off x="457200" y="749808"/>
+            <a:ext cx="11247120" cy="640080"/>
           </a:xfrm>
           <a:prstGeom prst="rect">
             <a:avLst/>
@@ -8280,100 +8207,22 @@
               <a:spcAft>
                 <a:spcPts val="500"/>
               </a:spcAft>
-              <a:defRPr sz="1100" b="1">
+              <a:defRPr sz="3300" b="1">
                 <a:solidFill>
-                  <a:srgbClr val="164F89"/>
+                  <a:srgbClr val="222222"/>
                 </a:solidFill>
                 <a:latin typeface="Liberation Sans"/>
               </a:defRPr>
             </a:pPr>
             <a:r>
-              <a:t>ECOSYSTEM</a:t>
-            </a:r>
-          </a:p>
-        </p:txBody>
-      </p:sp>
-      <p:sp>
-        <p:nvSpPr>
-          <p:cNvPr id="5" name="TextBox 4"/>
-          <p:cNvSpPr txBox="1"/>
-          <p:nvPr/>
-        </p:nvSpPr>
-        <p:spPr>
-          <a:xfrm>
-            <a:off x="457200" y="804672"/>
-            <a:ext cx="11247120" cy="640080"/>
-          </a:xfrm>
-          <a:prstGeom prst="rect">
-            <a:avLst/>
-          </a:prstGeom>
-          <a:noFill/>
-        </p:spPr>
-        <p:txBody>
-          <a:bodyPr wrap="square" lIns="0" rIns="0" tIns="0" bIns="0">
-            <a:spAutoFit/>
-          </a:bodyPr>
-          <a:lstStyle/>
-          <a:p>
-            <a:pPr>
-              <a:spcAft>
-                <a:spcPts val="500"/>
-              </a:spcAft>
-              <a:defRPr sz="3100" b="1">
-                <a:solidFill>
-                  <a:srgbClr val="17283B"/>
-                </a:solidFill>
-                <a:latin typeface="Liberation Sans"/>
-              </a:defRPr>
-            </a:pPr>
-            <a:r>
-              <a:t>Next: RBG, Kubeflow, and LWS</a:t>
-            </a:r>
-          </a:p>
-        </p:txBody>
-      </p:sp>
-      <p:sp>
-        <p:nvSpPr>
-          <p:cNvPr id="6" name="TextBox 5"/>
-          <p:cNvSpPr txBox="1"/>
-          <p:nvPr/>
-        </p:nvSpPr>
-        <p:spPr>
-          <a:xfrm>
-            <a:off x="475488" y="1435608"/>
-            <a:ext cx="11201400" cy="429768"/>
-          </a:xfrm>
-          <a:prstGeom prst="rect">
-            <a:avLst/>
-          </a:prstGeom>
-          <a:noFill/>
-        </p:spPr>
-        <p:txBody>
-          <a:bodyPr wrap="square" lIns="0" rIns="0" tIns="0" bIns="0">
-            <a:spAutoFit/>
-          </a:bodyPr>
-          <a:lstStyle/>
-          <a:p>
-            <a:pPr>
-              <a:spcAft>
-                <a:spcPts val="500"/>
-              </a:spcAft>
-              <a:defRPr sz="1700" b="0">
-                <a:solidFill>
-                  <a:srgbClr val="414F60"/>
-                </a:solidFill>
-                <a:latin typeface="Liberation Sans"/>
-              </a:defRPr>
-            </a:pPr>
-            <a:r>
-              <a:t>Build on current integrations; carry finer group structure and placement requirements.</a:t>
+              <a:t>Next integrations</a:t>
             </a:r>
           </a:p>
         </p:txBody>
       </p:sp>
       <p:pic>
         <p:nvPicPr>
-          <p:cNvPr id="7" name="Picture 6" descr="17-ecosystem.png"/>
+          <p:cNvPr id="5" name="Picture 4" descr="17-ecosystem.png"/>
           <p:cNvPicPr>
             <a:picLocks noChangeAspect="1"/>
           </p:cNvPicPr>
@@ -8387,7 +8236,7 @@
         </p:blipFill>
         <p:spPr>
           <a:xfrm>
-            <a:off x="457200" y="1938528"/>
+            <a:off x="457200" y="1691640"/>
             <a:ext cx="11277599" cy="4267200"/>
           </a:xfrm>
           <a:prstGeom prst="rect">
@@ -8397,7 +8246,7 @@
       </p:pic>
       <p:sp>
         <p:nvSpPr>
-          <p:cNvPr id="8" name="TextBox 7"/>
+          <p:cNvPr id="6" name="TextBox 5"/>
           <p:cNvSpPr txBox="1"/>
           <p:nvPr/>
         </p:nvSpPr>
@@ -8423,20 +8272,20 @@
               </a:spcAft>
               <a:defRPr sz="900" b="0">
                 <a:solidFill>
-                  <a:srgbClr val="414F60"/>
+                  <a:srgbClr val="555555"/>
                 </a:solidFill>
                 <a:latin typeface="Liberation Sans"/>
               </a:defRPr>
             </a:pPr>
             <a:r>
-              <a:t>Volcano  |  KubeCon + CloudNativeCon North America 2026</a:t>
-            </a:r>
-          </a:p>
-        </p:txBody>
-      </p:sp>
-      <p:sp>
-        <p:nvSpPr>
-          <p:cNvPr id="9" name="TextBox 8"/>
+              <a:t>KubeCon + CloudNativeCon North America 2026</a:t>
+            </a:r>
+          </a:p>
+        </p:txBody>
+      </p:sp>
+      <p:sp>
+        <p:nvSpPr>
+          <p:cNvPr id="7" name="TextBox 6"/>
           <p:cNvSpPr txBox="1"/>
           <p:nvPr/>
         </p:nvSpPr>
@@ -8462,13 +8311,13 @@
               </a:spcAft>
               <a:defRPr sz="1100" b="0">
                 <a:solidFill>
-                  <a:srgbClr val="414F60"/>
+                  <a:srgbClr val="555555"/>
                 </a:solidFill>
                 <a:latin typeface="Liberation Sans"/>
               </a:defRPr>
             </a:pPr>
             <a:r>
-              <a:t>17 / 23</a:t>
+              <a:t>17</a:t>
             </a:r>
           </a:p>
         </p:txBody>
@@ -8547,8 +8396,8 @@
         </p:nvSpPr>
         <p:spPr>
           <a:xfrm>
-            <a:off x="457200" y="292608"/>
-            <a:ext cx="9144000" cy="256032"/>
+            <a:off x="594360" y="1417320"/>
+            <a:ext cx="1828800" cy="640080"/>
           </a:xfrm>
           <a:prstGeom prst="rect">
             <a:avLst/>
@@ -8565,15 +8414,15 @@
               <a:spcAft>
                 <a:spcPts val="500"/>
               </a:spcAft>
-              <a:defRPr sz="1100" b="1">
+              <a:defRPr sz="3200" b="0">
                 <a:solidFill>
-                  <a:srgbClr val="164F89"/>
+                  <a:srgbClr val="E64030"/>
                 </a:solidFill>
                 <a:latin typeface="Liberation Sans"/>
               </a:defRPr>
             </a:pPr>
             <a:r>
-              <a:t>BENCHMARK FRAMEWORK &amp; PROGRESS</a:t>
+              <a:t>04</a:t>
             </a:r>
           </a:p>
         </p:txBody>
@@ -8586,8 +8435,8 @@
         </p:nvSpPr>
         <p:spPr>
           <a:xfrm>
-            <a:off x="594360" y="1298448"/>
-            <a:ext cx="1828800" cy="640080"/>
+            <a:off x="594360" y="2331720"/>
+            <a:ext cx="10789920" cy="1828800"/>
           </a:xfrm>
           <a:prstGeom prst="rect">
             <a:avLst/>
@@ -8604,15 +8453,15 @@
               <a:spcAft>
                 <a:spcPts val="500"/>
               </a:spcAft>
-              <a:defRPr sz="3800" b="1">
+              <a:defRPr sz="4400" b="1">
                 <a:solidFill>
-                  <a:srgbClr val="164F89"/>
+                  <a:srgbClr val="222222"/>
                 </a:solidFill>
                 <a:latin typeface="Liberation Sans"/>
               </a:defRPr>
             </a:pPr>
             <a:r>
-              <a:t>04</a:t>
+              <a:t>Benchmark</a:t>
             </a:r>
           </a:p>
         </p:txBody>
@@ -8620,295 +8469,6 @@
       <p:sp>
         <p:nvSpPr>
           <p:cNvPr id="6" name="TextBox 5"/>
-          <p:cNvSpPr txBox="1"/>
-          <p:nvPr/>
-        </p:nvSpPr>
-        <p:spPr>
-          <a:xfrm>
-            <a:off x="594360" y="2084831"/>
-            <a:ext cx="7863840" cy="1508760"/>
-          </a:xfrm>
-          <a:prstGeom prst="rect">
-            <a:avLst/>
-          </a:prstGeom>
-          <a:noFill/>
-        </p:spPr>
-        <p:txBody>
-          <a:bodyPr wrap="square" lIns="0" rIns="0" tIns="0" bIns="0">
-            <a:spAutoFit/>
-          </a:bodyPr>
-          <a:lstStyle/>
-          <a:p>
-            <a:pPr>
-              <a:spcAft>
-                <a:spcPts val="500"/>
-              </a:spcAft>
-              <a:defRPr sz="4100" b="1">
-                <a:solidFill>
-                  <a:srgbClr val="17283B"/>
-                </a:solidFill>
-                <a:latin typeface="Liberation Sans"/>
-              </a:defRPr>
-            </a:pPr>
-            <a:r>
-              <a:t>Benchmark</a:t>
-            </a:r>
-          </a:p>
-          <a:p>
-            <a:pPr>
-              <a:spcAft>
-                <a:spcPts val="500"/>
-              </a:spcAft>
-              <a:defRPr sz="4100" b="1">
-                <a:solidFill>
-                  <a:srgbClr val="17283B"/>
-                </a:solidFill>
-                <a:latin typeface="Liberation Sans"/>
-              </a:defRPr>
-            </a:pPr>
-            <a:r>
-              <a:t>framework &amp; progress</a:t>
-            </a:r>
-          </a:p>
-        </p:txBody>
-      </p:sp>
-      <p:sp>
-        <p:nvSpPr>
-          <p:cNvPr id="7" name="TextBox 6"/>
-          <p:cNvSpPr txBox="1"/>
-          <p:nvPr/>
-        </p:nvSpPr>
-        <p:spPr>
-          <a:xfrm>
-            <a:off x="621792" y="4041648"/>
-            <a:ext cx="9966960" cy="548640"/>
-          </a:xfrm>
-          <a:prstGeom prst="rect">
-            <a:avLst/>
-          </a:prstGeom>
-          <a:noFill/>
-        </p:spPr>
-        <p:txBody>
-          <a:bodyPr wrap="square" lIns="0" rIns="0" tIns="0" bIns="0">
-            <a:spAutoFit/>
-          </a:bodyPr>
-          <a:lstStyle/>
-          <a:p>
-            <a:pPr>
-              <a:spcAft>
-                <a:spcPts val="500"/>
-              </a:spcAft>
-              <a:defRPr sz="2400" b="0">
-                <a:solidFill>
-                  <a:srgbClr val="164F89"/>
-                </a:solidFill>
-                <a:latin typeface="Liberation Sans"/>
-              </a:defRPr>
-            </a:pPr>
-            <a:r>
-              <a:t>Measure behavior across workload shapes.</a:t>
-            </a:r>
-          </a:p>
-        </p:txBody>
-      </p:sp>
-      <p:sp>
-        <p:nvSpPr>
-          <p:cNvPr id="8" name="TextBox 7"/>
-          <p:cNvSpPr txBox="1"/>
-          <p:nvPr/>
-        </p:nvSpPr>
-        <p:spPr>
-          <a:xfrm>
-            <a:off x="621792" y="4791456"/>
-            <a:ext cx="10607040" cy="594360"/>
-          </a:xfrm>
-          <a:prstGeom prst="rect">
-            <a:avLst/>
-          </a:prstGeom>
-          <a:noFill/>
-        </p:spPr>
-        <p:txBody>
-          <a:bodyPr wrap="square" lIns="0" rIns="0" tIns="0" bIns="0">
-            <a:spAutoFit/>
-          </a:bodyPr>
-          <a:lstStyle/>
-          <a:p>
-            <a:pPr>
-              <a:spcAft>
-                <a:spcPts val="500"/>
-              </a:spcAft>
-              <a:defRPr sz="2100" b="0">
-                <a:solidFill>
-                  <a:srgbClr val="414F60"/>
-                </a:solidFill>
-                <a:latin typeface="Liberation Sans"/>
-              </a:defRPr>
-            </a:pPr>
-            <a:r>
-              <a:t>What can we reproduce, compare, and improve?</a:t>
-            </a:r>
-          </a:p>
-        </p:txBody>
-      </p:sp>
-      <p:sp>
-        <p:nvSpPr>
-          <p:cNvPr id="9" name="TextBox 8"/>
-          <p:cNvSpPr txBox="1"/>
-          <p:nvPr/>
-        </p:nvSpPr>
-        <p:spPr>
-          <a:xfrm>
-            <a:off x="8503920" y="1554480"/>
-            <a:ext cx="3154680" cy="621792"/>
-          </a:xfrm>
-          <a:prstGeom prst="rect">
-            <a:avLst/>
-          </a:prstGeom>
-          <a:noFill/>
-        </p:spPr>
-        <p:txBody>
-          <a:bodyPr wrap="square" lIns="0" rIns="0" tIns="0" bIns="0">
-            <a:spAutoFit/>
-          </a:bodyPr>
-          <a:lstStyle/>
-          <a:p>
-            <a:pPr>
-              <a:spcAft>
-                <a:spcPts val="500"/>
-              </a:spcAft>
-              <a:defRPr sz="1500" b="0">
-                <a:solidFill>
-                  <a:srgbClr val="414F60"/>
-                </a:solidFill>
-                <a:latin typeface="Liberation Sans"/>
-              </a:defRPr>
-            </a:pPr>
-            <a:r>
-              <a:t>01  Unified scheduling</a:t>
-            </a:r>
-          </a:p>
-        </p:txBody>
-      </p:sp>
-      <p:sp>
-        <p:nvSpPr>
-          <p:cNvPr id="10" name="TextBox 9"/>
-          <p:cNvSpPr txBox="1"/>
-          <p:nvPr/>
-        </p:nvSpPr>
-        <p:spPr>
-          <a:xfrm>
-            <a:off x="8503920" y="2249424"/>
-            <a:ext cx="3154680" cy="621792"/>
-          </a:xfrm>
-          <a:prstGeom prst="rect">
-            <a:avLst/>
-          </a:prstGeom>
-          <a:noFill/>
-        </p:spPr>
-        <p:txBody>
-          <a:bodyPr wrap="square" lIns="0" rIns="0" tIns="0" bIns="0">
-            <a:spAutoFit/>
-          </a:bodyPr>
-          <a:lstStyle/>
-          <a:p>
-            <a:pPr>
-              <a:spcAft>
-                <a:spcPts val="500"/>
-              </a:spcAft>
-              <a:defRPr sz="1500" b="0">
-                <a:solidFill>
-                  <a:srgbClr val="414F60"/>
-                </a:solidFill>
-                <a:latin typeface="Liberation Sans"/>
-              </a:defRPr>
-            </a:pPr>
-            <a:r>
-              <a:t>02  Multi-level gang &amp; network topology</a:t>
-            </a:r>
-          </a:p>
-        </p:txBody>
-      </p:sp>
-      <p:sp>
-        <p:nvSpPr>
-          <p:cNvPr id="11" name="TextBox 10"/>
-          <p:cNvSpPr txBox="1"/>
-          <p:nvPr/>
-        </p:nvSpPr>
-        <p:spPr>
-          <a:xfrm>
-            <a:off x="8503920" y="2944368"/>
-            <a:ext cx="3154680" cy="621792"/>
-          </a:xfrm>
-          <a:prstGeom prst="rect">
-            <a:avLst/>
-          </a:prstGeom>
-          <a:noFill/>
-        </p:spPr>
-        <p:txBody>
-          <a:bodyPr wrap="square" lIns="0" rIns="0" tIns="0" bIns="0">
-            <a:spAutoFit/>
-          </a:bodyPr>
-          <a:lstStyle/>
-          <a:p>
-            <a:pPr>
-              <a:spcAft>
-                <a:spcPts val="500"/>
-              </a:spcAft>
-              <a:defRPr sz="1500" b="0">
-                <a:solidFill>
-                  <a:srgbClr val="414F60"/>
-                </a:solidFill>
-                <a:latin typeface="Liberation Sans"/>
-              </a:defRPr>
-            </a:pPr>
-            <a:r>
-              <a:t>03  Ecosystem</a:t>
-            </a:r>
-          </a:p>
-        </p:txBody>
-      </p:sp>
-      <p:sp>
-        <p:nvSpPr>
-          <p:cNvPr id="12" name="TextBox 11"/>
-          <p:cNvSpPr txBox="1"/>
-          <p:nvPr/>
-        </p:nvSpPr>
-        <p:spPr>
-          <a:xfrm>
-            <a:off x="8503920" y="3639312"/>
-            <a:ext cx="3154680" cy="621792"/>
-          </a:xfrm>
-          <a:prstGeom prst="rect">
-            <a:avLst/>
-          </a:prstGeom>
-          <a:noFill/>
-        </p:spPr>
-        <p:txBody>
-          <a:bodyPr wrap="square" lIns="0" rIns="0" tIns="0" bIns="0">
-            <a:spAutoFit/>
-          </a:bodyPr>
-          <a:lstStyle/>
-          <a:p>
-            <a:pPr>
-              <a:spcAft>
-                <a:spcPts val="500"/>
-              </a:spcAft>
-              <a:defRPr sz="1500" b="1">
-                <a:solidFill>
-                  <a:srgbClr val="164F89"/>
-                </a:solidFill>
-                <a:latin typeface="Liberation Sans"/>
-              </a:defRPr>
-            </a:pPr>
-            <a:r>
-              <a:t>04  Benchmark framework &amp; progress</a:t>
-            </a:r>
-          </a:p>
-        </p:txBody>
-      </p:sp>
-      <p:sp>
-        <p:nvSpPr>
-          <p:cNvPr id="13" name="TextBox 12"/>
           <p:cNvSpPr txBox="1"/>
           <p:nvPr/>
         </p:nvSpPr>
@@ -8934,20 +8494,20 @@
               </a:spcAft>
               <a:defRPr sz="900" b="0">
                 <a:solidFill>
-                  <a:srgbClr val="414F60"/>
+                  <a:srgbClr val="555555"/>
                 </a:solidFill>
                 <a:latin typeface="Liberation Sans"/>
               </a:defRPr>
             </a:pPr>
             <a:r>
-              <a:t>Volcano  |  KubeCon + CloudNativeCon North America 2026</a:t>
-            </a:r>
-          </a:p>
-        </p:txBody>
-      </p:sp>
-      <p:sp>
-        <p:nvSpPr>
-          <p:cNvPr id="14" name="TextBox 13"/>
+              <a:t>KubeCon + CloudNativeCon North America 2026</a:t>
+            </a:r>
+          </a:p>
+        </p:txBody>
+      </p:sp>
+      <p:sp>
+        <p:nvSpPr>
+          <p:cNvPr id="7" name="TextBox 6"/>
           <p:cNvSpPr txBox="1"/>
           <p:nvPr/>
         </p:nvSpPr>
@@ -8973,13 +8533,13 @@
               </a:spcAft>
               <a:defRPr sz="1100" b="0">
                 <a:solidFill>
-                  <a:srgbClr val="414F60"/>
+                  <a:srgbClr val="555555"/>
                 </a:solidFill>
                 <a:latin typeface="Liberation Sans"/>
               </a:defRPr>
             </a:pPr>
             <a:r>
-              <a:t>18 / 23</a:t>
+              <a:t>18</a:t>
             </a:r>
           </a:p>
         </p:txBody>
@@ -9058,8 +8618,8 @@
         </p:nvSpPr>
         <p:spPr>
           <a:xfrm>
-            <a:off x="457200" y="292608"/>
-            <a:ext cx="9144000" cy="256032"/>
+            <a:off x="457200" y="749808"/>
+            <a:ext cx="11247120" cy="640080"/>
           </a:xfrm>
           <a:prstGeom prst="rect">
             <a:avLst/>
@@ -9076,100 +8636,22 @@
               <a:spcAft>
                 <a:spcPts val="500"/>
               </a:spcAft>
-              <a:defRPr sz="1100" b="1">
+              <a:defRPr sz="3300" b="1">
                 <a:solidFill>
-                  <a:srgbClr val="164F89"/>
+                  <a:srgbClr val="222222"/>
                 </a:solidFill>
                 <a:latin typeface="Liberation Sans"/>
               </a:defRPr>
             </a:pPr>
             <a:r>
-              <a:t>BENCHMARK FRAMEWORK &amp; PROGRESS</a:t>
-            </a:r>
-          </a:p>
-        </p:txBody>
-      </p:sp>
-      <p:sp>
-        <p:nvSpPr>
-          <p:cNvPr id="5" name="TextBox 4"/>
-          <p:cNvSpPr txBox="1"/>
-          <p:nvPr/>
-        </p:nvSpPr>
-        <p:spPr>
-          <a:xfrm>
-            <a:off x="457200" y="804672"/>
-            <a:ext cx="11247120" cy="640080"/>
-          </a:xfrm>
-          <a:prstGeom prst="rect">
-            <a:avLst/>
-          </a:prstGeom>
-          <a:noFill/>
-        </p:spPr>
-        <p:txBody>
-          <a:bodyPr wrap="square" lIns="0" rIns="0" tIns="0" bIns="0">
-            <a:spAutoFit/>
-          </a:bodyPr>
-          <a:lstStyle/>
-          <a:p>
-            <a:pPr>
-              <a:spcAft>
-                <a:spcPts val="500"/>
-              </a:spcAft>
-              <a:defRPr sz="3100" b="1">
-                <a:solidFill>
-                  <a:srgbClr val="17283B"/>
-                </a:solidFill>
-                <a:latin typeface="Liberation Sans"/>
-              </a:defRPr>
-            </a:pPr>
-            <a:r>
-              <a:t>A Repeatable Scheduling Benchmark Framework</a:t>
-            </a:r>
-          </a:p>
-        </p:txBody>
-      </p:sp>
-      <p:sp>
-        <p:nvSpPr>
-          <p:cNvPr id="6" name="TextBox 5"/>
-          <p:cNvSpPr txBox="1"/>
-          <p:nvPr/>
-        </p:nvSpPr>
-        <p:spPr>
-          <a:xfrm>
-            <a:off x="475488" y="1435608"/>
-            <a:ext cx="11201400" cy="429768"/>
-          </a:xfrm>
-          <a:prstGeom prst="rect">
-            <a:avLst/>
-          </a:prstGeom>
-          <a:noFill/>
-        </p:spPr>
-        <p:txBody>
-          <a:bodyPr wrap="square" lIns="0" rIns="0" tIns="0" bIns="0">
-            <a:spAutoFit/>
-          </a:bodyPr>
-          <a:lstStyle/>
-          <a:p>
-            <a:pPr>
-              <a:spcAft>
-                <a:spcPts val="500"/>
-              </a:spcAft>
-              <a:defRPr sz="1700" b="0">
-                <a:solidFill>
-                  <a:srgbClr val="414F60"/>
-                </a:solidFill>
-                <a:latin typeface="Liberation Sans"/>
-              </a:defRPr>
-            </a:pPr>
-            <a:r>
-              <a:t>Generate scenarios, observe API events, and retain comparable measurements.</a:t>
+              <a:t>Benchmark framework</a:t>
             </a:r>
           </a:p>
         </p:txBody>
       </p:sp>
       <p:pic>
         <p:nvPicPr>
-          <p:cNvPr id="7" name="Picture 6" descr="19-benchmark-architecture.png"/>
+          <p:cNvPr id="5" name="Picture 4" descr="19-benchmark-architecture.png"/>
           <p:cNvPicPr>
             <a:picLocks noChangeAspect="1"/>
           </p:cNvPicPr>
@@ -9183,7 +8665,7 @@
         </p:blipFill>
         <p:spPr>
           <a:xfrm>
-            <a:off x="457200" y="1938528"/>
+            <a:off x="457200" y="1691640"/>
             <a:ext cx="11277599" cy="4267200"/>
           </a:xfrm>
           <a:prstGeom prst="rect">
@@ -9193,7 +8675,7 @@
       </p:pic>
       <p:sp>
         <p:nvSpPr>
-          <p:cNvPr id="8" name="TextBox 7"/>
+          <p:cNvPr id="6" name="TextBox 5"/>
           <p:cNvSpPr txBox="1"/>
           <p:nvPr/>
         </p:nvSpPr>
@@ -9219,20 +8701,20 @@
               </a:spcAft>
               <a:defRPr sz="900" b="0">
                 <a:solidFill>
-                  <a:srgbClr val="414F60"/>
+                  <a:srgbClr val="555555"/>
                 </a:solidFill>
                 <a:latin typeface="Liberation Sans"/>
               </a:defRPr>
             </a:pPr>
             <a:r>
-              <a:t>Volcano  |  KubeCon + CloudNativeCon North America 2026</a:t>
-            </a:r>
-          </a:p>
-        </p:txBody>
-      </p:sp>
-      <p:sp>
-        <p:nvSpPr>
-          <p:cNvPr id="9" name="TextBox 8"/>
+              <a:t>KubeCon + CloudNativeCon North America 2026</a:t>
+            </a:r>
+          </a:p>
+        </p:txBody>
+      </p:sp>
+      <p:sp>
+        <p:nvSpPr>
+          <p:cNvPr id="7" name="TextBox 6"/>
           <p:cNvSpPr txBox="1"/>
           <p:nvPr/>
         </p:nvSpPr>
@@ -9258,13 +8740,13 @@
               </a:spcAft>
               <a:defRPr sz="1100" b="0">
                 <a:solidFill>
-                  <a:srgbClr val="414F60"/>
+                  <a:srgbClr val="555555"/>
                 </a:solidFill>
                 <a:latin typeface="Liberation Sans"/>
               </a:defRPr>
             </a:pPr>
             <a:r>
-              <a:t>19 / 23</a:t>
+              <a:t>19</a:t>
             </a:r>
           </a:p>
         </p:txBody>
@@ -9343,45 +8825,6 @@
         </p:nvSpPr>
         <p:spPr>
           <a:xfrm>
-            <a:off x="457200" y="292608"/>
-            <a:ext cx="9144000" cy="256032"/>
-          </a:xfrm>
-          <a:prstGeom prst="rect">
-            <a:avLst/>
-          </a:prstGeom>
-          <a:noFill/>
-        </p:spPr>
-        <p:txBody>
-          <a:bodyPr wrap="square" lIns="0" rIns="0" tIns="0" bIns="0">
-            <a:spAutoFit/>
-          </a:bodyPr>
-          <a:lstStyle/>
-          <a:p>
-            <a:pPr>
-              <a:spcAft>
-                <a:spcPts val="500"/>
-              </a:spcAft>
-              <a:defRPr sz="1100" b="1">
-                <a:solidFill>
-                  <a:srgbClr val="164F89"/>
-                </a:solidFill>
-                <a:latin typeface="Liberation Sans"/>
-              </a:defRPr>
-            </a:pPr>
-            <a:r>
-              <a:t>MAINTAINER TRACK</a:t>
-            </a:r>
-          </a:p>
-        </p:txBody>
-      </p:sp>
-      <p:sp>
-        <p:nvSpPr>
-          <p:cNvPr id="5" name="TextBox 4"/>
-          <p:cNvSpPr txBox="1"/>
-          <p:nvPr/>
-        </p:nvSpPr>
-        <p:spPr>
-          <a:xfrm>
             <a:off x="457200" y="868680"/>
             <a:ext cx="10972800" cy="594360"/>
           </a:xfrm>
@@ -9402,7 +8845,7 @@
               </a:spcAft>
               <a:defRPr sz="3300" b="1">
                 <a:solidFill>
-                  <a:srgbClr val="17283B"/>
+                  <a:srgbClr val="222222"/>
                 </a:solidFill>
                 <a:latin typeface="Liberation Sans"/>
               </a:defRPr>
@@ -9415,7 +8858,7 @@
       </p:sp>
       <p:pic>
         <p:nvPicPr>
-          <p:cNvPr id="6" name="Picture 5" descr="ricardo.jpeg"/>
+          <p:cNvPr id="5" name="Picture 4" descr="ricardo.jpeg"/>
           <p:cNvPicPr>
             <a:picLocks noChangeAspect="1"/>
           </p:cNvPicPr>
@@ -9439,7 +8882,7 @@
       </p:pic>
       <p:sp>
         <p:nvSpPr>
-          <p:cNvPr id="7" name="TextBox 6"/>
+          <p:cNvPr id="6" name="TextBox 5"/>
           <p:cNvSpPr txBox="1"/>
           <p:nvPr/>
         </p:nvSpPr>
@@ -9465,7 +8908,7 @@
               </a:spcAft>
               <a:defRPr sz="3000" b="1">
                 <a:solidFill>
-                  <a:srgbClr val="17283B"/>
+                  <a:srgbClr val="222222"/>
                 </a:solidFill>
                 <a:latin typeface="Liberation Sans"/>
               </a:defRPr>
@@ -9478,7 +8921,7 @@
       </p:sp>
       <p:sp>
         <p:nvSpPr>
-          <p:cNvPr id="8" name="TextBox 7"/>
+          <p:cNvPr id="7" name="TextBox 6"/>
           <p:cNvSpPr txBox="1"/>
           <p:nvPr/>
         </p:nvSpPr>
@@ -9504,7 +8947,7 @@
               </a:spcAft>
               <a:defRPr sz="2200" b="0">
                 <a:solidFill>
-                  <a:srgbClr val="164F89"/>
+                  <a:srgbClr val="222222"/>
                 </a:solidFill>
                 <a:latin typeface="Liberation Sans"/>
               </a:defRPr>
@@ -9517,7 +8960,7 @@
       </p:sp>
       <p:sp>
         <p:nvSpPr>
-          <p:cNvPr id="9" name="TextBox 8"/>
+          <p:cNvPr id="8" name="TextBox 7"/>
           <p:cNvSpPr txBox="1"/>
           <p:nvPr/>
         </p:nvSpPr>
@@ -9543,7 +8986,7 @@
               </a:spcAft>
               <a:defRPr sz="2000" b="0">
                 <a:solidFill>
-                  <a:srgbClr val="414F60"/>
+                  <a:srgbClr val="555555"/>
                 </a:solidFill>
                 <a:latin typeface="Liberation Sans"/>
               </a:defRPr>
@@ -9552,66 +8995,11 @@
               <a:t>CNCF TOC Alternate (GB)</a:t>
             </a:r>
           </a:p>
-          <a:p>
-            <a:pPr>
-              <a:spcAft>
-                <a:spcPts val="500"/>
-              </a:spcAft>
-              <a:defRPr sz="2000" b="0">
-                <a:solidFill>
-                  <a:srgbClr val="414F60"/>
-                </a:solidFill>
-                <a:latin typeface="Liberation Sans"/>
-              </a:defRPr>
-            </a:pPr>
-            <a:r>
-              <a:t>Cloud native and AI infrastructure</a:t>
-            </a:r>
-          </a:p>
-        </p:txBody>
-      </p:sp>
-      <p:sp>
-        <p:nvSpPr>
-          <p:cNvPr id="10" name="TextBox 9"/>
-          <p:cNvSpPr txBox="1"/>
-          <p:nvPr/>
-        </p:nvSpPr>
-        <p:spPr>
-          <a:xfrm>
-            <a:off x="731520" y="5806440"/>
-            <a:ext cx="4846320" cy="274320"/>
-          </a:xfrm>
-          <a:prstGeom prst="rect">
-            <a:avLst/>
-          </a:prstGeom>
-          <a:noFill/>
-        </p:spPr>
-        <p:txBody>
-          <a:bodyPr wrap="square" lIns="0" rIns="0" tIns="0" bIns="0">
-            <a:spAutoFit/>
-          </a:bodyPr>
-          <a:lstStyle/>
-          <a:p>
-            <a:pPr>
-              <a:spcAft>
-                <a:spcPts val="500"/>
-              </a:spcAft>
-              <a:defRPr sz="1500" b="0">
-                <a:solidFill>
-                  <a:srgbClr val="164F89"/>
-                </a:solidFill>
-                <a:latin typeface="Liberation Sans"/>
-              </a:defRPr>
-            </a:pPr>
-            <a:r>
-              <a:t>nunchux.ai · CNCF TOC</a:t>
-            </a:r>
-          </a:p>
         </p:txBody>
       </p:sp>
       <p:pic>
         <p:nvPicPr>
-          <p:cNvPr id="11" name="Picture 10" descr="rainie.jpeg"/>
+          <p:cNvPr id="9" name="Picture 8" descr="rainie.jpeg"/>
           <p:cNvPicPr>
             <a:picLocks noChangeAspect="1"/>
           </p:cNvPicPr>
@@ -9635,7 +9023,7 @@
       </p:pic>
       <p:sp>
         <p:nvSpPr>
-          <p:cNvPr id="12" name="TextBox 11"/>
+          <p:cNvPr id="10" name="TextBox 9"/>
           <p:cNvSpPr txBox="1"/>
           <p:nvPr/>
         </p:nvSpPr>
@@ -9661,7 +9049,7 @@
               </a:spcAft>
               <a:defRPr sz="3000" b="1">
                 <a:solidFill>
-                  <a:srgbClr val="17283B"/>
+                  <a:srgbClr val="222222"/>
                 </a:solidFill>
                 <a:latin typeface="Liberation Sans"/>
               </a:defRPr>
@@ -9674,7 +9062,7 @@
       </p:sp>
       <p:sp>
         <p:nvSpPr>
-          <p:cNvPr id="13" name="TextBox 12"/>
+          <p:cNvPr id="11" name="TextBox 10"/>
           <p:cNvSpPr txBox="1"/>
           <p:nvPr/>
         </p:nvSpPr>
@@ -9700,7 +9088,7 @@
               </a:spcAft>
               <a:defRPr sz="2200" b="0">
                 <a:solidFill>
-                  <a:srgbClr val="164F89"/>
+                  <a:srgbClr val="222222"/>
                 </a:solidFill>
                 <a:latin typeface="Liberation Sans"/>
               </a:defRPr>
@@ -9713,7 +9101,7 @@
       </p:sp>
       <p:sp>
         <p:nvSpPr>
-          <p:cNvPr id="14" name="TextBox 13"/>
+          <p:cNvPr id="12" name="TextBox 11"/>
           <p:cNvSpPr txBox="1"/>
           <p:nvPr/>
         </p:nvSpPr>
@@ -9739,28 +9127,12 @@
               </a:spcAft>
               <a:defRPr sz="2000" b="0">
                 <a:solidFill>
-                  <a:srgbClr val="414F60"/>
+                  <a:srgbClr val="555555"/>
                 </a:solidFill>
                 <a:latin typeface="Liberation Sans"/>
               </a:defRPr>
             </a:pPr>
             <a:r>
-              <a:t>Data processing infrastructure</a:t>
-            </a:r>
-          </a:p>
-          <a:p>
-            <a:pPr>
-              <a:spcAft>
-                <a:spcPts val="500"/>
-              </a:spcAft>
-              <a:defRPr sz="2000" b="0">
-                <a:solidFill>
-                  <a:srgbClr val="414F60"/>
-                </a:solidFill>
-                <a:latin typeface="Liberation Sans"/>
-              </a:defRPr>
-            </a:pPr>
-            <a:r>
               <a:t>Apache YuniKorn PMC member</a:t>
             </a:r>
           </a:p>
@@ -9768,46 +9140,7 @@
       </p:sp>
       <p:sp>
         <p:nvSpPr>
-          <p:cNvPr id="15" name="TextBox 14"/>
-          <p:cNvSpPr txBox="1"/>
-          <p:nvPr/>
-        </p:nvSpPr>
-        <p:spPr>
-          <a:xfrm>
-            <a:off x="6446520" y="5806440"/>
-            <a:ext cx="4846320" cy="274320"/>
-          </a:xfrm>
-          <a:prstGeom prst="rect">
-            <a:avLst/>
-          </a:prstGeom>
-          <a:noFill/>
-        </p:spPr>
-        <p:txBody>
-          <a:bodyPr wrap="square" lIns="0" rIns="0" tIns="0" bIns="0">
-            <a:spAutoFit/>
-          </a:bodyPr>
-          <a:lstStyle/>
-          <a:p>
-            <a:pPr>
-              <a:spcAft>
-                <a:spcPts val="500"/>
-              </a:spcAft>
-              <a:defRPr sz="1500" b="0">
-                <a:solidFill>
-                  <a:srgbClr val="164F89"/>
-                </a:solidFill>
-                <a:latin typeface="Liberation Sans"/>
-              </a:defRPr>
-            </a:pPr>
-            <a:r>
-              <a:t>Apache YuniKorn · rainieli</a:t>
-            </a:r>
-          </a:p>
-        </p:txBody>
-      </p:sp>
-      <p:sp>
-        <p:nvSpPr>
-          <p:cNvPr id="16" name="TextBox 15"/>
+          <p:cNvPr id="13" name="TextBox 12"/>
           <p:cNvSpPr txBox="1"/>
           <p:nvPr/>
         </p:nvSpPr>
@@ -9833,20 +9166,20 @@
               </a:spcAft>
               <a:defRPr sz="900" b="0">
                 <a:solidFill>
-                  <a:srgbClr val="414F60"/>
+                  <a:srgbClr val="555555"/>
                 </a:solidFill>
                 <a:latin typeface="Liberation Sans"/>
               </a:defRPr>
             </a:pPr>
             <a:r>
-              <a:t>Volcano  |  KubeCon + CloudNativeCon North America 2026</a:t>
-            </a:r>
-          </a:p>
-        </p:txBody>
-      </p:sp>
-      <p:sp>
-        <p:nvSpPr>
-          <p:cNvPr id="17" name="TextBox 16"/>
+              <a:t>KubeCon + CloudNativeCon North America 2026</a:t>
+            </a:r>
+          </a:p>
+        </p:txBody>
+      </p:sp>
+      <p:sp>
+        <p:nvSpPr>
+          <p:cNvPr id="14" name="TextBox 13"/>
           <p:cNvSpPr txBox="1"/>
           <p:nvPr/>
         </p:nvSpPr>
@@ -9872,13 +9205,13 @@
               </a:spcAft>
               <a:defRPr sz="1100" b="0">
                 <a:solidFill>
-                  <a:srgbClr val="414F60"/>
+                  <a:srgbClr val="555555"/>
                 </a:solidFill>
                 <a:latin typeface="Liberation Sans"/>
               </a:defRPr>
             </a:pPr>
             <a:r>
-              <a:t>02 / 23</a:t>
+              <a:t>2</a:t>
             </a:r>
           </a:p>
         </p:txBody>
@@ -9957,8 +9290,8 @@
         </p:nvSpPr>
         <p:spPr>
           <a:xfrm>
-            <a:off x="457200" y="292608"/>
-            <a:ext cx="9144000" cy="256032"/>
+            <a:off x="457200" y="749808"/>
+            <a:ext cx="11247120" cy="640080"/>
           </a:xfrm>
           <a:prstGeom prst="rect">
             <a:avLst/>
@@ -9975,100 +9308,22 @@
               <a:spcAft>
                 <a:spcPts val="500"/>
               </a:spcAft>
-              <a:defRPr sz="1100" b="1">
+              <a:defRPr sz="3300" b="1">
                 <a:solidFill>
-                  <a:srgbClr val="164F89"/>
+                  <a:srgbClr val="222222"/>
                 </a:solidFill>
                 <a:latin typeface="Liberation Sans"/>
               </a:defRPr>
             </a:pPr>
             <a:r>
-              <a:t>BENCHMARK FRAMEWORK &amp; PROGRESS</a:t>
-            </a:r>
-          </a:p>
-        </p:txBody>
-      </p:sp>
-      <p:sp>
-        <p:nvSpPr>
-          <p:cNvPr id="5" name="TextBox 4"/>
-          <p:cNvSpPr txBox="1"/>
-          <p:nvPr/>
-        </p:nvSpPr>
-        <p:spPr>
-          <a:xfrm>
-            <a:off x="457200" y="804672"/>
-            <a:ext cx="11247120" cy="640080"/>
-          </a:xfrm>
-          <a:prstGeom prst="rect">
-            <a:avLst/>
-          </a:prstGeom>
-          <a:noFill/>
-        </p:spPr>
-        <p:txBody>
-          <a:bodyPr wrap="square" lIns="0" rIns="0" tIns="0" bIns="0">
-            <a:spAutoFit/>
-          </a:bodyPr>
-          <a:lstStyle/>
-          <a:p>
-            <a:pPr>
-              <a:spcAft>
-                <a:spcPts val="500"/>
-              </a:spcAft>
-              <a:defRPr sz="3100" b="1">
-                <a:solidFill>
-                  <a:srgbClr val="17283B"/>
-                </a:solidFill>
-                <a:latin typeface="Liberation Sans"/>
-              </a:defRPr>
-            </a:pPr>
-            <a:r>
-              <a:t>Compare Schedulers on the Same Workload</a:t>
-            </a:r>
-          </a:p>
-        </p:txBody>
-      </p:sp>
-      <p:sp>
-        <p:nvSpPr>
-          <p:cNvPr id="6" name="TextBox 5"/>
-          <p:cNvSpPr txBox="1"/>
-          <p:nvPr/>
-        </p:nvSpPr>
-        <p:spPr>
-          <a:xfrm>
-            <a:off x="475488" y="1435608"/>
-            <a:ext cx="11201400" cy="429768"/>
-          </a:xfrm>
-          <a:prstGeom prst="rect">
-            <a:avLst/>
-          </a:prstGeom>
-          <a:noFill/>
-        </p:spPr>
-        <p:txBody>
-          <a:bodyPr wrap="square" lIns="0" rIns="0" tIns="0" bIns="0">
-            <a:spAutoFit/>
-          </a:bodyPr>
-          <a:lstStyle/>
-          <a:p>
-            <a:pPr>
-              <a:spcAft>
-                <a:spcPts val="500"/>
-              </a:spcAft>
-              <a:defRPr sz="1700" b="0">
-                <a:solidFill>
-                  <a:srgbClr val="414F60"/>
-                </a:solidFill>
-                <a:latin typeface="Liberation Sans"/>
-              </a:defRPr>
-            </a:pPr>
-            <a:r>
-              <a:t>Repeat controlled runs to understand throughput, latency, and placement tradeoffs.</a:t>
+              <a:t>Comparing schedulers</a:t>
             </a:r>
           </a:p>
         </p:txBody>
       </p:sp>
       <p:pic>
         <p:nvPicPr>
-          <p:cNvPr id="7" name="Picture 6" descr="20-benchmark-progress.png"/>
+          <p:cNvPr id="5" name="Picture 4" descr="20-benchmark-progress.png"/>
           <p:cNvPicPr>
             <a:picLocks noChangeAspect="1"/>
           </p:cNvPicPr>
@@ -10082,7 +9337,7 @@
         </p:blipFill>
         <p:spPr>
           <a:xfrm>
-            <a:off x="457200" y="1938528"/>
+            <a:off x="457200" y="1691640"/>
             <a:ext cx="11277599" cy="4267200"/>
           </a:xfrm>
           <a:prstGeom prst="rect">
@@ -10092,7 +9347,7 @@
       </p:pic>
       <p:sp>
         <p:nvSpPr>
-          <p:cNvPr id="8" name="TextBox 7"/>
+          <p:cNvPr id="6" name="TextBox 5"/>
           <p:cNvSpPr txBox="1"/>
           <p:nvPr/>
         </p:nvSpPr>
@@ -10118,20 +9373,20 @@
               </a:spcAft>
               <a:defRPr sz="900" b="0">
                 <a:solidFill>
-                  <a:srgbClr val="414F60"/>
+                  <a:srgbClr val="555555"/>
                 </a:solidFill>
                 <a:latin typeface="Liberation Sans"/>
               </a:defRPr>
             </a:pPr>
             <a:r>
-              <a:t>Volcano  |  KubeCon + CloudNativeCon North America 2026</a:t>
-            </a:r>
-          </a:p>
-        </p:txBody>
-      </p:sp>
-      <p:sp>
-        <p:nvSpPr>
-          <p:cNvPr id="9" name="TextBox 8"/>
+              <a:t>KubeCon + CloudNativeCon North America 2026</a:t>
+            </a:r>
+          </a:p>
+        </p:txBody>
+      </p:sp>
+      <p:sp>
+        <p:nvSpPr>
+          <p:cNvPr id="7" name="TextBox 6"/>
           <p:cNvSpPr txBox="1"/>
           <p:nvPr/>
         </p:nvSpPr>
@@ -10157,13 +9412,13 @@
               </a:spcAft>
               <a:defRPr sz="1100" b="0">
                 <a:solidFill>
-                  <a:srgbClr val="414F60"/>
+                  <a:srgbClr val="555555"/>
                 </a:solidFill>
                 <a:latin typeface="Liberation Sans"/>
               </a:defRPr>
             </a:pPr>
             <a:r>
-              <a:t>20 / 23</a:t>
+              <a:t>20</a:t>
             </a:r>
           </a:p>
         </p:txBody>
@@ -10242,8 +9497,8 @@
         </p:nvSpPr>
         <p:spPr>
           <a:xfrm>
-            <a:off x="457200" y="292608"/>
-            <a:ext cx="9144000" cy="256032"/>
+            <a:off x="457200" y="749808"/>
+            <a:ext cx="11247120" cy="640080"/>
           </a:xfrm>
           <a:prstGeom prst="rect">
             <a:avLst/>
@@ -10260,100 +9515,22 @@
               <a:spcAft>
                 <a:spcPts val="500"/>
               </a:spcAft>
-              <a:defRPr sz="1100" b="1">
+              <a:defRPr sz="3300" b="1">
                 <a:solidFill>
-                  <a:srgbClr val="164F89"/>
+                  <a:srgbClr val="222222"/>
                 </a:solidFill>
                 <a:latin typeface="Liberation Sans"/>
               </a:defRPr>
             </a:pPr>
             <a:r>
-              <a:t>BENCHMARK FRAMEWORK &amp; PROGRESS</a:t>
-            </a:r>
-          </a:p>
-        </p:txBody>
-      </p:sp>
-      <p:sp>
-        <p:nvSpPr>
-          <p:cNvPr id="5" name="TextBox 4"/>
-          <p:cNvSpPr txBox="1"/>
-          <p:nvPr/>
-        </p:nvSpPr>
-        <p:spPr>
-          <a:xfrm>
-            <a:off x="457200" y="804672"/>
-            <a:ext cx="11247120" cy="640080"/>
-          </a:xfrm>
-          <a:prstGeom prst="rect">
-            <a:avLst/>
-          </a:prstGeom>
-          <a:noFill/>
-        </p:spPr>
-        <p:txBody>
-          <a:bodyPr wrap="square" lIns="0" rIns="0" tIns="0" bIns="0">
-            <a:spAutoFit/>
-          </a:bodyPr>
-          <a:lstStyle/>
-          <a:p>
-            <a:pPr>
-              <a:spcAft>
-                <a:spcPts val="500"/>
-              </a:spcAft>
-              <a:defRPr sz="3100" b="1">
-                <a:solidFill>
-                  <a:srgbClr val="17283B"/>
-                </a:solidFill>
-                <a:latin typeface="Liberation Sans"/>
-              </a:defRPr>
-            </a:pPr>
-            <a:r>
-              <a:t>Which Scenarios Fit Which Scheduler?</a:t>
-            </a:r>
-          </a:p>
-        </p:txBody>
-      </p:sp>
-      <p:sp>
-        <p:nvSpPr>
-          <p:cNvPr id="6" name="TextBox 5"/>
-          <p:cNvSpPr txBox="1"/>
-          <p:nvPr/>
-        </p:nvSpPr>
-        <p:spPr>
-          <a:xfrm>
-            <a:off x="475488" y="1435608"/>
-            <a:ext cx="11201400" cy="429768"/>
-          </a:xfrm>
-          <a:prstGeom prst="rect">
-            <a:avLst/>
-          </a:prstGeom>
-          <a:noFill/>
-        </p:spPr>
-        <p:txBody>
-          <a:bodyPr wrap="square" lIns="0" rIns="0" tIns="0" bIns="0">
-            <a:spAutoFit/>
-          </a:bodyPr>
-          <a:lstStyle/>
-          <a:p>
-            <a:pPr>
-              <a:spcAft>
-                <a:spcPts val="500"/>
-              </a:spcAft>
-              <a:defRPr sz="1700" b="0">
-                <a:solidFill>
-                  <a:srgbClr val="414F60"/>
-                </a:solidFill>
-                <a:latin typeface="Liberation Sans"/>
-              </a:defRPr>
-            </a:pPr>
-            <a:r>
-              <a:t>Expand tests across arrival patterns, group structure, and network topology.</a:t>
+              <a:t>Benchmark scenarios</a:t>
             </a:r>
           </a:p>
         </p:txBody>
       </p:sp>
       <p:pic>
         <p:nvPicPr>
-          <p:cNvPr id="7" name="Picture 6" descr="21-benchmark-measurement.png"/>
+          <p:cNvPr id="5" name="Picture 4" descr="21-benchmark-measurement.png"/>
           <p:cNvPicPr>
             <a:picLocks noChangeAspect="1"/>
           </p:cNvPicPr>
@@ -10367,7 +9544,7 @@
         </p:blipFill>
         <p:spPr>
           <a:xfrm>
-            <a:off x="457200" y="1938528"/>
+            <a:off x="457200" y="1691640"/>
             <a:ext cx="11277599" cy="4267200"/>
           </a:xfrm>
           <a:prstGeom prst="rect">
@@ -10377,7 +9554,7 @@
       </p:pic>
       <p:sp>
         <p:nvSpPr>
-          <p:cNvPr id="8" name="TextBox 7"/>
+          <p:cNvPr id="6" name="TextBox 5"/>
           <p:cNvSpPr txBox="1"/>
           <p:nvPr/>
         </p:nvSpPr>
@@ -10403,20 +9580,20 @@
               </a:spcAft>
               <a:defRPr sz="900" b="0">
                 <a:solidFill>
-                  <a:srgbClr val="414F60"/>
+                  <a:srgbClr val="555555"/>
                 </a:solidFill>
                 <a:latin typeface="Liberation Sans"/>
               </a:defRPr>
             </a:pPr>
             <a:r>
-              <a:t>Volcano  |  KubeCon + CloudNativeCon North America 2026</a:t>
-            </a:r>
-          </a:p>
-        </p:txBody>
-      </p:sp>
-      <p:sp>
-        <p:nvSpPr>
-          <p:cNvPr id="9" name="TextBox 8"/>
+              <a:t>KubeCon + CloudNativeCon North America 2026</a:t>
+            </a:r>
+          </a:p>
+        </p:txBody>
+      </p:sp>
+      <p:sp>
+        <p:nvSpPr>
+          <p:cNvPr id="7" name="TextBox 6"/>
           <p:cNvSpPr txBox="1"/>
           <p:nvPr/>
         </p:nvSpPr>
@@ -10442,13 +9619,13 @@
               </a:spcAft>
               <a:defRPr sz="1100" b="0">
                 <a:solidFill>
-                  <a:srgbClr val="414F60"/>
+                  <a:srgbClr val="555555"/>
                 </a:solidFill>
                 <a:latin typeface="Liberation Sans"/>
               </a:defRPr>
             </a:pPr>
             <a:r>
-              <a:t>21 / 23</a:t>
+              <a:t>21</a:t>
             </a:r>
           </a:p>
         </p:txBody>
@@ -10527,8 +9704,8 @@
         </p:nvSpPr>
         <p:spPr>
           <a:xfrm>
-            <a:off x="457200" y="292608"/>
-            <a:ext cx="9144000" cy="256032"/>
+            <a:off x="457200" y="749808"/>
+            <a:ext cx="11247120" cy="640080"/>
           </a:xfrm>
           <a:prstGeom prst="rect">
             <a:avLst/>
@@ -10545,100 +9722,22 @@
               <a:spcAft>
                 <a:spcPts val="500"/>
               </a:spcAft>
-              <a:defRPr sz="1100" b="1">
+              <a:defRPr sz="3300" b="1">
                 <a:solidFill>
-                  <a:srgbClr val="164F89"/>
+                  <a:srgbClr val="222222"/>
                 </a:solidFill>
                 <a:latin typeface="Liberation Sans"/>
               </a:defRPr>
             </a:pPr>
             <a:r>
-              <a:t>BENCHMARK FRAMEWORK &amp; PROGRESS</a:t>
-            </a:r>
-          </a:p>
-        </p:txBody>
-      </p:sp>
-      <p:sp>
-        <p:nvSpPr>
-          <p:cNvPr id="5" name="TextBox 4"/>
-          <p:cNvSpPr txBox="1"/>
-          <p:nvPr/>
-        </p:nvSpPr>
-        <p:spPr>
-          <a:xfrm>
-            <a:off x="457200" y="804672"/>
-            <a:ext cx="11247120" cy="640080"/>
-          </a:xfrm>
-          <a:prstGeom prst="rect">
-            <a:avLst/>
-          </a:prstGeom>
-          <a:noFill/>
-        </p:spPr>
-        <p:txBody>
-          <a:bodyPr wrap="square" lIns="0" rIns="0" tIns="0" bIns="0">
-            <a:spAutoFit/>
-          </a:bodyPr>
-          <a:lstStyle/>
-          <a:p>
-            <a:pPr>
-              <a:spcAft>
-                <a:spcPts val="500"/>
-              </a:spcAft>
-              <a:defRPr sz="3100" b="1">
-                <a:solidFill>
-                  <a:srgbClr val="17283B"/>
-                </a:solidFill>
-                <a:latin typeface="Liberation Sans"/>
-              </a:defRPr>
-            </a:pPr>
-            <a:r>
-              <a:t>What We Will Work On Next</a:t>
-            </a:r>
-          </a:p>
-        </p:txBody>
-      </p:sp>
-      <p:sp>
-        <p:nvSpPr>
-          <p:cNvPr id="6" name="TextBox 5"/>
-          <p:cNvSpPr txBox="1"/>
-          <p:nvPr/>
-        </p:nvSpPr>
-        <p:spPr>
-          <a:xfrm>
-            <a:off x="475488" y="1435608"/>
-            <a:ext cx="11201400" cy="429768"/>
-          </a:xfrm>
-          <a:prstGeom prst="rect">
-            <a:avLst/>
-          </a:prstGeom>
-          <a:noFill/>
-        </p:spPr>
-        <p:txBody>
-          <a:bodyPr wrap="square" lIns="0" rIns="0" tIns="0" bIns="0">
-            <a:spAutoFit/>
-          </a:bodyPr>
-          <a:lstStyle/>
-          <a:p>
-            <a:pPr>
-              <a:spcAft>
-                <a:spcPts val="500"/>
-              </a:spcAft>
-              <a:defRPr sz="1700" b="0">
-                <a:solidFill>
-                  <a:srgbClr val="414F60"/>
-                </a:solidFill>
-                <a:latin typeface="Liberation Sans"/>
-              </a:defRPr>
-            </a:pPr>
-            <a:r>
-              <a:t>Next steps in group placement, controller integration, and benchmarking.</a:t>
+              <a:t>What’s next</a:t>
             </a:r>
           </a:p>
         </p:txBody>
       </p:sp>
       <p:pic>
         <p:nvPicPr>
-          <p:cNvPr id="7" name="Picture 6" descr="22-takeaways.png"/>
+          <p:cNvPr id="5" name="Picture 4" descr="22-takeaways.png"/>
           <p:cNvPicPr>
             <a:picLocks noChangeAspect="1"/>
           </p:cNvPicPr>
@@ -10652,7 +9751,7 @@
         </p:blipFill>
         <p:spPr>
           <a:xfrm>
-            <a:off x="457200" y="1938528"/>
+            <a:off x="457200" y="1691640"/>
             <a:ext cx="11277599" cy="4267200"/>
           </a:xfrm>
           <a:prstGeom prst="rect">
@@ -10662,7 +9761,7 @@
       </p:pic>
       <p:sp>
         <p:nvSpPr>
-          <p:cNvPr id="8" name="TextBox 7"/>
+          <p:cNvPr id="6" name="TextBox 5"/>
           <p:cNvSpPr txBox="1"/>
           <p:nvPr/>
         </p:nvSpPr>
@@ -10688,20 +9787,20 @@
               </a:spcAft>
               <a:defRPr sz="900" b="0">
                 <a:solidFill>
-                  <a:srgbClr val="414F60"/>
+                  <a:srgbClr val="555555"/>
                 </a:solidFill>
                 <a:latin typeface="Liberation Sans"/>
               </a:defRPr>
             </a:pPr>
             <a:r>
-              <a:t>Volcano  |  KubeCon + CloudNativeCon North America 2026</a:t>
-            </a:r>
-          </a:p>
-        </p:txBody>
-      </p:sp>
-      <p:sp>
-        <p:nvSpPr>
-          <p:cNvPr id="9" name="TextBox 8"/>
+              <a:t>KubeCon + CloudNativeCon North America 2026</a:t>
+            </a:r>
+          </a:p>
+        </p:txBody>
+      </p:sp>
+      <p:sp>
+        <p:nvSpPr>
+          <p:cNvPr id="7" name="TextBox 6"/>
           <p:cNvSpPr txBox="1"/>
           <p:nvPr/>
         </p:nvSpPr>
@@ -10727,13 +9826,13 @@
               </a:spcAft>
               <a:defRPr sz="1100" b="0">
                 <a:solidFill>
-                  <a:srgbClr val="414F60"/>
+                  <a:srgbClr val="555555"/>
                 </a:solidFill>
                 <a:latin typeface="Liberation Sans"/>
               </a:defRPr>
             </a:pPr>
             <a:r>
-              <a:t>22 / 23</a:t>
+              <a:t>22</a:t>
             </a:r>
           </a:p>
         </p:txBody>
@@ -10812,8 +9911,8 @@
         </p:nvSpPr>
         <p:spPr>
           <a:xfrm>
-            <a:off x="457200" y="292608"/>
-            <a:ext cx="9144000" cy="256032"/>
+            <a:off x="457200" y="749808"/>
+            <a:ext cx="11247120" cy="640080"/>
           </a:xfrm>
           <a:prstGeom prst="rect">
             <a:avLst/>
@@ -10830,100 +9929,22 @@
               <a:spcAft>
                 <a:spcPts val="500"/>
               </a:spcAft>
-              <a:defRPr sz="1100" b="1">
+              <a:defRPr sz="3300" b="1">
                 <a:solidFill>
-                  <a:srgbClr val="164F89"/>
+                  <a:srgbClr val="222222"/>
                 </a:solidFill>
                 <a:latin typeface="Liberation Sans"/>
               </a:defRPr>
             </a:pPr>
             <a:r>
-              <a:t>MAINTAINER TRACK</a:t>
-            </a:r>
-          </a:p>
-        </p:txBody>
-      </p:sp>
-      <p:sp>
-        <p:nvSpPr>
-          <p:cNvPr id="5" name="TextBox 4"/>
-          <p:cNvSpPr txBox="1"/>
-          <p:nvPr/>
-        </p:nvSpPr>
-        <p:spPr>
-          <a:xfrm>
-            <a:off x="457200" y="804672"/>
-            <a:ext cx="11247120" cy="640080"/>
-          </a:xfrm>
-          <a:prstGeom prst="rect">
-            <a:avLst/>
-          </a:prstGeom>
-          <a:noFill/>
-        </p:spPr>
-        <p:txBody>
-          <a:bodyPr wrap="square" lIns="0" rIns="0" tIns="0" bIns="0">
-            <a:spAutoFit/>
-          </a:bodyPr>
-          <a:lstStyle/>
-          <a:p>
-            <a:pPr>
-              <a:spcAft>
-                <a:spcPts val="500"/>
-              </a:spcAft>
-              <a:defRPr sz="3100" b="1">
-                <a:solidFill>
-                  <a:srgbClr val="17283B"/>
-                </a:solidFill>
-                <a:latin typeface="Liberation Sans"/>
-              </a:defRPr>
-            </a:pPr>
-            <a:r>
-              <a:t>Questions &amp; Discussion</a:t>
-            </a:r>
-          </a:p>
-        </p:txBody>
-      </p:sp>
-      <p:sp>
-        <p:nvSpPr>
-          <p:cNvPr id="6" name="TextBox 5"/>
-          <p:cNvSpPr txBox="1"/>
-          <p:nvPr/>
-        </p:nvSpPr>
-        <p:spPr>
-          <a:xfrm>
-            <a:off x="475488" y="1435608"/>
-            <a:ext cx="11201400" cy="429768"/>
-          </a:xfrm>
-          <a:prstGeom prst="rect">
-            <a:avLst/>
-          </a:prstGeom>
-          <a:noFill/>
-        </p:spPr>
-        <p:txBody>
-          <a:bodyPr wrap="square" lIns="0" rIns="0" tIns="0" bIns="0">
-            <a:spAutoFit/>
-          </a:bodyPr>
-          <a:lstStyle/>
-          <a:p>
-            <a:pPr>
-              <a:spcAft>
-                <a:spcPts val="500"/>
-              </a:spcAft>
-              <a:defRPr sz="1700" b="0">
-                <a:solidFill>
-                  <a:srgbClr val="414F60"/>
-                </a:solidFill>
-                <a:latin typeface="Liberation Sans"/>
-              </a:defRPr>
-            </a:pPr>
-            <a:r>
-              <a:t>Workload shapes, integration feedback, and reproducible observations are welcome.</a:t>
+              <a:t>Volcano community</a:t>
             </a:r>
           </a:p>
         </p:txBody>
       </p:sp>
       <p:pic>
         <p:nvPicPr>
-          <p:cNvPr id="7" name="Picture 6" descr="23-questions.png"/>
+          <p:cNvPr id="5" name="Picture 4" descr="23-community-users.png"/>
           <p:cNvPicPr>
             <a:picLocks noChangeAspect="1"/>
           </p:cNvPicPr>
@@ -10937,7 +9958,7 @@
         </p:blipFill>
         <p:spPr>
           <a:xfrm>
-            <a:off x="457200" y="1938528"/>
+            <a:off x="457200" y="1691640"/>
             <a:ext cx="11277599" cy="4267200"/>
           </a:xfrm>
           <a:prstGeom prst="rect">
@@ -10947,7 +9968,7 @@
       </p:pic>
       <p:sp>
         <p:nvSpPr>
-          <p:cNvPr id="8" name="TextBox 7"/>
+          <p:cNvPr id="6" name="TextBox 5"/>
           <p:cNvSpPr txBox="1"/>
           <p:nvPr/>
         </p:nvSpPr>
@@ -10973,20 +9994,20 @@
               </a:spcAft>
               <a:defRPr sz="900" b="0">
                 <a:solidFill>
-                  <a:srgbClr val="414F60"/>
+                  <a:srgbClr val="555555"/>
                 </a:solidFill>
                 <a:latin typeface="Liberation Sans"/>
               </a:defRPr>
             </a:pPr>
             <a:r>
-              <a:t>Volcano  |  KubeCon + CloudNativeCon North America 2026</a:t>
-            </a:r>
-          </a:p>
-        </p:txBody>
-      </p:sp>
-      <p:sp>
-        <p:nvSpPr>
-          <p:cNvPr id="9" name="TextBox 8"/>
+              <a:t>KubeCon + CloudNativeCon North America 2026</a:t>
+            </a:r>
+          </a:p>
+        </p:txBody>
+      </p:sp>
+      <p:sp>
+        <p:nvSpPr>
+          <p:cNvPr id="7" name="TextBox 6"/>
           <p:cNvSpPr txBox="1"/>
           <p:nvPr/>
         </p:nvSpPr>
@@ -11012,13 +10033,220 @@
               </a:spcAft>
               <a:defRPr sz="1100" b="0">
                 <a:solidFill>
-                  <a:srgbClr val="414F60"/>
+                  <a:srgbClr val="555555"/>
                 </a:solidFill>
                 <a:latin typeface="Liberation Sans"/>
               </a:defRPr>
             </a:pPr>
             <a:r>
-              <a:t>23 / 23</a:t>
+              <a:t>23</a:t>
+            </a:r>
+          </a:p>
+        </p:txBody>
+      </p:sp>
+    </p:spTree>
+  </p:cSld>
+  <p:clrMapOvr>
+    <a:masterClrMapping/>
+  </p:clrMapOvr>
+</p:sld>
+</file>
+
+<file path=ppt/slides/slide24.xml><?xml version="1.0" encoding="utf-8"?>
+<p:sld xmlns:a="http://schemas.openxmlformats.org/drawingml/2006/main" xmlns:p="http://schemas.openxmlformats.org/presentationml/2006/main" xmlns:r="http://schemas.openxmlformats.org/officeDocument/2006/relationships">
+  <p:cSld>
+    <p:spTree>
+      <p:nvGrpSpPr>
+        <p:cNvPr id="1" name=""/>
+        <p:cNvGrpSpPr/>
+        <p:nvPr/>
+      </p:nvGrpSpPr>
+      <p:grpSpPr/>
+      <p:pic>
+        <p:nvPicPr>
+          <p:cNvPr id="2" name="Picture 1" descr="background.png"/>
+          <p:cNvPicPr>
+            <a:picLocks noChangeAspect="1"/>
+          </p:cNvPicPr>
+          <p:nvPr/>
+        </p:nvPicPr>
+        <p:blipFill>
+          <a:blip r:embed="rId2"/>
+          <a:stretch>
+            <a:fillRect/>
+          </a:stretch>
+        </p:blipFill>
+        <p:spPr>
+          <a:xfrm>
+            <a:off x="0" y="0"/>
+            <a:ext cx="12191999" cy="6858000"/>
+          </a:xfrm>
+          <a:prstGeom prst="rect">
+            <a:avLst/>
+          </a:prstGeom>
+        </p:spPr>
+      </p:pic>
+      <p:pic>
+        <p:nvPicPr>
+          <p:cNvPr id="3" name="Picture 2" descr="volcano-logo.png"/>
+          <p:cNvPicPr>
+            <a:picLocks noChangeAspect="1"/>
+          </p:cNvPicPr>
+          <p:nvPr/>
+        </p:nvPicPr>
+        <p:blipFill>
+          <a:blip r:embed="rId3"/>
+          <a:stretch>
+            <a:fillRect/>
+          </a:stretch>
+        </p:blipFill>
+        <p:spPr>
+          <a:xfrm>
+            <a:off x="9921240" y="292608"/>
+            <a:ext cx="1737360" cy="289560"/>
+          </a:xfrm>
+          <a:prstGeom prst="rect">
+            <a:avLst/>
+          </a:prstGeom>
+        </p:spPr>
+      </p:pic>
+      <p:sp>
+        <p:nvSpPr>
+          <p:cNvPr id="4" name="TextBox 3"/>
+          <p:cNvSpPr txBox="1"/>
+          <p:nvPr/>
+        </p:nvSpPr>
+        <p:spPr>
+          <a:xfrm>
+            <a:off x="457200" y="749808"/>
+            <a:ext cx="11247120" cy="640080"/>
+          </a:xfrm>
+          <a:prstGeom prst="rect">
+            <a:avLst/>
+          </a:prstGeom>
+          <a:noFill/>
+        </p:spPr>
+        <p:txBody>
+          <a:bodyPr wrap="square" lIns="0" rIns="0" tIns="0" bIns="0">
+            <a:spAutoFit/>
+          </a:bodyPr>
+          <a:lstStyle/>
+          <a:p>
+            <a:pPr>
+              <a:spcAft>
+                <a:spcPts val="500"/>
+              </a:spcAft>
+              <a:defRPr sz="3300" b="1">
+                <a:solidFill>
+                  <a:srgbClr val="222222"/>
+                </a:solidFill>
+                <a:latin typeface="Liberation Sans"/>
+              </a:defRPr>
+            </a:pPr>
+            <a:r>
+              <a:t>Thank you</a:t>
+            </a:r>
+          </a:p>
+        </p:txBody>
+      </p:sp>
+      <p:pic>
+        <p:nvPicPr>
+          <p:cNvPr id="5" name="Picture 4" descr="24-questions.png"/>
+          <p:cNvPicPr>
+            <a:picLocks noChangeAspect="1"/>
+          </p:cNvPicPr>
+          <p:nvPr/>
+        </p:nvPicPr>
+        <p:blipFill>
+          <a:blip r:embed="rId4"/>
+          <a:stretch>
+            <a:fillRect/>
+          </a:stretch>
+        </p:blipFill>
+        <p:spPr>
+          <a:xfrm>
+            <a:off x="457200" y="1691640"/>
+            <a:ext cx="11277599" cy="4267200"/>
+          </a:xfrm>
+          <a:prstGeom prst="rect">
+            <a:avLst/>
+          </a:prstGeom>
+        </p:spPr>
+      </p:pic>
+      <p:sp>
+        <p:nvSpPr>
+          <p:cNvPr id="6" name="TextBox 5"/>
+          <p:cNvSpPr txBox="1"/>
+          <p:nvPr/>
+        </p:nvSpPr>
+        <p:spPr>
+          <a:xfrm>
+            <a:off x="475488" y="6519672"/>
+            <a:ext cx="10515600" cy="201168"/>
+          </a:xfrm>
+          <a:prstGeom prst="rect">
+            <a:avLst/>
+          </a:prstGeom>
+          <a:noFill/>
+        </p:spPr>
+        <p:txBody>
+          <a:bodyPr wrap="square" lIns="0" rIns="0" tIns="0" bIns="0">
+            <a:spAutoFit/>
+          </a:bodyPr>
+          <a:lstStyle/>
+          <a:p>
+            <a:pPr>
+              <a:spcAft>
+                <a:spcPts val="500"/>
+              </a:spcAft>
+              <a:defRPr sz="900" b="0">
+                <a:solidFill>
+                  <a:srgbClr val="555555"/>
+                </a:solidFill>
+                <a:latin typeface="Liberation Sans"/>
+              </a:defRPr>
+            </a:pPr>
+            <a:r>
+              <a:t>KubeCon + CloudNativeCon North America 2026</a:t>
+            </a:r>
+          </a:p>
+        </p:txBody>
+      </p:sp>
+      <p:sp>
+        <p:nvSpPr>
+          <p:cNvPr id="7" name="TextBox 6"/>
+          <p:cNvSpPr txBox="1"/>
+          <p:nvPr/>
+        </p:nvSpPr>
+        <p:spPr>
+          <a:xfrm>
+            <a:off x="11018520" y="6483096"/>
+            <a:ext cx="685800" cy="256032"/>
+          </a:xfrm>
+          <a:prstGeom prst="rect">
+            <a:avLst/>
+          </a:prstGeom>
+          <a:noFill/>
+        </p:spPr>
+        <p:txBody>
+          <a:bodyPr wrap="square" lIns="0" rIns="0" tIns="0" bIns="0">
+            <a:spAutoFit/>
+          </a:bodyPr>
+          <a:lstStyle/>
+          <a:p>
+            <a:pPr algn="r">
+              <a:spcAft>
+                <a:spcPts val="500"/>
+              </a:spcAft>
+              <a:defRPr sz="1100" b="0">
+                <a:solidFill>
+                  <a:srgbClr val="555555"/>
+                </a:solidFill>
+                <a:latin typeface="Liberation Sans"/>
+              </a:defRPr>
+            </a:pPr>
+            <a:r>
+              <a:t>24</a:t>
             </a:r>
           </a:p>
         </p:txBody>
@@ -11097,8 +10325,8 @@
         </p:nvSpPr>
         <p:spPr>
           <a:xfrm>
-            <a:off x="457200" y="292608"/>
-            <a:ext cx="9144000" cy="256032"/>
+            <a:off x="594360" y="1417320"/>
+            <a:ext cx="1828800" cy="640080"/>
           </a:xfrm>
           <a:prstGeom prst="rect">
             <a:avLst/>
@@ -11115,15 +10343,15 @@
               <a:spcAft>
                 <a:spcPts val="500"/>
               </a:spcAft>
-              <a:defRPr sz="1100" b="1">
+              <a:defRPr sz="3200" b="0">
                 <a:solidFill>
-                  <a:srgbClr val="164F89"/>
+                  <a:srgbClr val="E64030"/>
                 </a:solidFill>
                 <a:latin typeface="Liberation Sans"/>
               </a:defRPr>
             </a:pPr>
             <a:r>
-              <a:t>UNIFIED SCHEDULING</a:t>
+              <a:t>01</a:t>
             </a:r>
           </a:p>
         </p:txBody>
@@ -11136,8 +10364,8 @@
         </p:nvSpPr>
         <p:spPr>
           <a:xfrm>
-            <a:off x="594360" y="1298448"/>
-            <a:ext cx="1828800" cy="640080"/>
+            <a:off x="594360" y="2331720"/>
+            <a:ext cx="10789920" cy="1828800"/>
           </a:xfrm>
           <a:prstGeom prst="rect">
             <a:avLst/>
@@ -11154,15 +10382,15 @@
               <a:spcAft>
                 <a:spcPts val="500"/>
               </a:spcAft>
-              <a:defRPr sz="3800" b="1">
+              <a:defRPr sz="4400" b="1">
                 <a:solidFill>
-                  <a:srgbClr val="164F89"/>
+                  <a:srgbClr val="222222"/>
                 </a:solidFill>
                 <a:latin typeface="Liberation Sans"/>
               </a:defRPr>
             </a:pPr>
             <a:r>
-              <a:t>01</a:t>
+              <a:t>Unified scheduling</a:t>
             </a:r>
           </a:p>
         </p:txBody>
@@ -11170,279 +10398,6 @@
       <p:sp>
         <p:nvSpPr>
           <p:cNvPr id="6" name="TextBox 5"/>
-          <p:cNvSpPr txBox="1"/>
-          <p:nvPr/>
-        </p:nvSpPr>
-        <p:spPr>
-          <a:xfrm>
-            <a:off x="594360" y="2084831"/>
-            <a:ext cx="7863840" cy="1508760"/>
-          </a:xfrm>
-          <a:prstGeom prst="rect">
-            <a:avLst/>
-          </a:prstGeom>
-          <a:noFill/>
-        </p:spPr>
-        <p:txBody>
-          <a:bodyPr wrap="square" lIns="0" rIns="0" tIns="0" bIns="0">
-            <a:spAutoFit/>
-          </a:bodyPr>
-          <a:lstStyle/>
-          <a:p>
-            <a:pPr>
-              <a:spcAft>
-                <a:spcPts val="500"/>
-              </a:spcAft>
-              <a:defRPr sz="4100" b="1">
-                <a:solidFill>
-                  <a:srgbClr val="17283B"/>
-                </a:solidFill>
-                <a:latin typeface="Liberation Sans"/>
-              </a:defRPr>
-            </a:pPr>
-            <a:r>
-              <a:t>Unified scheduling</a:t>
-            </a:r>
-          </a:p>
-        </p:txBody>
-      </p:sp>
-      <p:sp>
-        <p:nvSpPr>
-          <p:cNvPr id="7" name="TextBox 6"/>
-          <p:cNvSpPr txBox="1"/>
-          <p:nvPr/>
-        </p:nvSpPr>
-        <p:spPr>
-          <a:xfrm>
-            <a:off x="621792" y="4041648"/>
-            <a:ext cx="9966960" cy="548640"/>
-          </a:xfrm>
-          <a:prstGeom prst="rect">
-            <a:avLst/>
-          </a:prstGeom>
-          <a:noFill/>
-        </p:spPr>
-        <p:txBody>
-          <a:bodyPr wrap="square" lIns="0" rIns="0" tIns="0" bIns="0">
-            <a:spAutoFit/>
-          </a:bodyPr>
-          <a:lstStyle/>
-          <a:p>
-            <a:pPr>
-              <a:spcAft>
-                <a:spcPts val="500"/>
-              </a:spcAft>
-              <a:defRPr sz="2400" b="0">
-                <a:solidFill>
-                  <a:srgbClr val="164F89"/>
-                </a:solidFill>
-                <a:latin typeface="Liberation Sans"/>
-              </a:defRPr>
-            </a:pPr>
-            <a:r>
-              <a:t>Different paths. Shared infrastructure.</a:t>
-            </a:r>
-          </a:p>
-        </p:txBody>
-      </p:sp>
-      <p:sp>
-        <p:nvSpPr>
-          <p:cNvPr id="8" name="TextBox 7"/>
-          <p:cNvSpPr txBox="1"/>
-          <p:nvPr/>
-        </p:nvSpPr>
-        <p:spPr>
-          <a:xfrm>
-            <a:off x="621792" y="4791456"/>
-            <a:ext cx="10607040" cy="594360"/>
-          </a:xfrm>
-          <a:prstGeom prst="rect">
-            <a:avLst/>
-          </a:prstGeom>
-          <a:noFill/>
-        </p:spPr>
-        <p:txBody>
-          <a:bodyPr wrap="square" lIns="0" rIns="0" tIns="0" bIns="0">
-            <a:spAutoFit/>
-          </a:bodyPr>
-          <a:lstStyle/>
-          <a:p>
-            <a:pPr>
-              <a:spcAft>
-                <a:spcPts val="500"/>
-              </a:spcAft>
-              <a:defRPr sz="2100" b="0">
-                <a:solidFill>
-                  <a:srgbClr val="414F60"/>
-                </a:solidFill>
-                <a:latin typeface="Liberation Sans"/>
-              </a:defRPr>
-            </a:pPr>
-            <a:r>
-              <a:t>How do schedulers coordinate node access?</a:t>
-            </a:r>
-          </a:p>
-        </p:txBody>
-      </p:sp>
-      <p:sp>
-        <p:nvSpPr>
-          <p:cNvPr id="9" name="TextBox 8"/>
-          <p:cNvSpPr txBox="1"/>
-          <p:nvPr/>
-        </p:nvSpPr>
-        <p:spPr>
-          <a:xfrm>
-            <a:off x="8503920" y="1554480"/>
-            <a:ext cx="3154680" cy="621792"/>
-          </a:xfrm>
-          <a:prstGeom prst="rect">
-            <a:avLst/>
-          </a:prstGeom>
-          <a:noFill/>
-        </p:spPr>
-        <p:txBody>
-          <a:bodyPr wrap="square" lIns="0" rIns="0" tIns="0" bIns="0">
-            <a:spAutoFit/>
-          </a:bodyPr>
-          <a:lstStyle/>
-          <a:p>
-            <a:pPr>
-              <a:spcAft>
-                <a:spcPts val="500"/>
-              </a:spcAft>
-              <a:defRPr sz="1500" b="1">
-                <a:solidFill>
-                  <a:srgbClr val="164F89"/>
-                </a:solidFill>
-                <a:latin typeface="Liberation Sans"/>
-              </a:defRPr>
-            </a:pPr>
-            <a:r>
-              <a:t>01  Unified scheduling</a:t>
-            </a:r>
-          </a:p>
-        </p:txBody>
-      </p:sp>
-      <p:sp>
-        <p:nvSpPr>
-          <p:cNvPr id="10" name="TextBox 9"/>
-          <p:cNvSpPr txBox="1"/>
-          <p:nvPr/>
-        </p:nvSpPr>
-        <p:spPr>
-          <a:xfrm>
-            <a:off x="8503920" y="2249424"/>
-            <a:ext cx="3154680" cy="621792"/>
-          </a:xfrm>
-          <a:prstGeom prst="rect">
-            <a:avLst/>
-          </a:prstGeom>
-          <a:noFill/>
-        </p:spPr>
-        <p:txBody>
-          <a:bodyPr wrap="square" lIns="0" rIns="0" tIns="0" bIns="0">
-            <a:spAutoFit/>
-          </a:bodyPr>
-          <a:lstStyle/>
-          <a:p>
-            <a:pPr>
-              <a:spcAft>
-                <a:spcPts val="500"/>
-              </a:spcAft>
-              <a:defRPr sz="1500" b="0">
-                <a:solidFill>
-                  <a:srgbClr val="414F60"/>
-                </a:solidFill>
-                <a:latin typeface="Liberation Sans"/>
-              </a:defRPr>
-            </a:pPr>
-            <a:r>
-              <a:t>02  Multi-level gang &amp; network topology</a:t>
-            </a:r>
-          </a:p>
-        </p:txBody>
-      </p:sp>
-      <p:sp>
-        <p:nvSpPr>
-          <p:cNvPr id="11" name="TextBox 10"/>
-          <p:cNvSpPr txBox="1"/>
-          <p:nvPr/>
-        </p:nvSpPr>
-        <p:spPr>
-          <a:xfrm>
-            <a:off x="8503920" y="2944368"/>
-            <a:ext cx="3154680" cy="621792"/>
-          </a:xfrm>
-          <a:prstGeom prst="rect">
-            <a:avLst/>
-          </a:prstGeom>
-          <a:noFill/>
-        </p:spPr>
-        <p:txBody>
-          <a:bodyPr wrap="square" lIns="0" rIns="0" tIns="0" bIns="0">
-            <a:spAutoFit/>
-          </a:bodyPr>
-          <a:lstStyle/>
-          <a:p>
-            <a:pPr>
-              <a:spcAft>
-                <a:spcPts val="500"/>
-              </a:spcAft>
-              <a:defRPr sz="1500" b="0">
-                <a:solidFill>
-                  <a:srgbClr val="414F60"/>
-                </a:solidFill>
-                <a:latin typeface="Liberation Sans"/>
-              </a:defRPr>
-            </a:pPr>
-            <a:r>
-              <a:t>03  Ecosystem</a:t>
-            </a:r>
-          </a:p>
-        </p:txBody>
-      </p:sp>
-      <p:sp>
-        <p:nvSpPr>
-          <p:cNvPr id="12" name="TextBox 11"/>
-          <p:cNvSpPr txBox="1"/>
-          <p:nvPr/>
-        </p:nvSpPr>
-        <p:spPr>
-          <a:xfrm>
-            <a:off x="8503920" y="3639312"/>
-            <a:ext cx="3154680" cy="621792"/>
-          </a:xfrm>
-          <a:prstGeom prst="rect">
-            <a:avLst/>
-          </a:prstGeom>
-          <a:noFill/>
-        </p:spPr>
-        <p:txBody>
-          <a:bodyPr wrap="square" lIns="0" rIns="0" tIns="0" bIns="0">
-            <a:spAutoFit/>
-          </a:bodyPr>
-          <a:lstStyle/>
-          <a:p>
-            <a:pPr>
-              <a:spcAft>
-                <a:spcPts val="500"/>
-              </a:spcAft>
-              <a:defRPr sz="1500" b="0">
-                <a:solidFill>
-                  <a:srgbClr val="414F60"/>
-                </a:solidFill>
-                <a:latin typeface="Liberation Sans"/>
-              </a:defRPr>
-            </a:pPr>
-            <a:r>
-              <a:t>04  Benchmark framework &amp; progress</a:t>
-            </a:r>
-          </a:p>
-        </p:txBody>
-      </p:sp>
-      <p:sp>
-        <p:nvSpPr>
-          <p:cNvPr id="13" name="TextBox 12"/>
           <p:cNvSpPr txBox="1"/>
           <p:nvPr/>
         </p:nvSpPr>
@@ -11468,20 +10423,20 @@
               </a:spcAft>
               <a:defRPr sz="900" b="0">
                 <a:solidFill>
-                  <a:srgbClr val="414F60"/>
+                  <a:srgbClr val="555555"/>
                 </a:solidFill>
                 <a:latin typeface="Liberation Sans"/>
               </a:defRPr>
             </a:pPr>
             <a:r>
-              <a:t>Volcano  |  KubeCon + CloudNativeCon North America 2026</a:t>
-            </a:r>
-          </a:p>
-        </p:txBody>
-      </p:sp>
-      <p:sp>
-        <p:nvSpPr>
-          <p:cNvPr id="14" name="TextBox 13"/>
+              <a:t>KubeCon + CloudNativeCon North America 2026</a:t>
+            </a:r>
+          </a:p>
+        </p:txBody>
+      </p:sp>
+      <p:sp>
+        <p:nvSpPr>
+          <p:cNvPr id="7" name="TextBox 6"/>
           <p:cNvSpPr txBox="1"/>
           <p:nvPr/>
         </p:nvSpPr>
@@ -11507,13 +10462,13 @@
               </a:spcAft>
               <a:defRPr sz="1100" b="0">
                 <a:solidFill>
-                  <a:srgbClr val="414F60"/>
+                  <a:srgbClr val="555555"/>
                 </a:solidFill>
                 <a:latin typeface="Liberation Sans"/>
               </a:defRPr>
             </a:pPr>
             <a:r>
-              <a:t>03 / 23</a:t>
+              <a:t>3</a:t>
             </a:r>
           </a:p>
         </p:txBody>
@@ -11592,8 +10547,8 @@
         </p:nvSpPr>
         <p:spPr>
           <a:xfrm>
-            <a:off x="457200" y="292608"/>
-            <a:ext cx="9144000" cy="256032"/>
+            <a:off x="457200" y="749808"/>
+            <a:ext cx="11247120" cy="640080"/>
           </a:xfrm>
           <a:prstGeom prst="rect">
             <a:avLst/>
@@ -11610,100 +10565,22 @@
               <a:spcAft>
                 <a:spcPts val="500"/>
               </a:spcAft>
-              <a:defRPr sz="1100" b="1">
+              <a:defRPr sz="3300" b="1">
                 <a:solidFill>
-                  <a:srgbClr val="164F89"/>
+                  <a:srgbClr val="222222"/>
                 </a:solidFill>
                 <a:latin typeface="Liberation Sans"/>
               </a:defRPr>
             </a:pPr>
             <a:r>
-              <a:t>UNIFIED SCHEDULING</a:t>
-            </a:r>
-          </a:p>
-        </p:txBody>
-      </p:sp>
-      <p:sp>
-        <p:nvSpPr>
-          <p:cNvPr id="5" name="TextBox 4"/>
-          <p:cNvSpPr txBox="1"/>
-          <p:nvPr/>
-        </p:nvSpPr>
-        <p:spPr>
-          <a:xfrm>
-            <a:off x="457200" y="804672"/>
-            <a:ext cx="11247120" cy="640080"/>
-          </a:xfrm>
-          <a:prstGeom prst="rect">
-            <a:avLst/>
-          </a:prstGeom>
-          <a:noFill/>
-        </p:spPr>
-        <p:txBody>
-          <a:bodyPr wrap="square" lIns="0" rIns="0" tIns="0" bIns="0">
-            <a:spAutoFit/>
-          </a:bodyPr>
-          <a:lstStyle/>
-          <a:p>
-            <a:pPr>
-              <a:spcAft>
-                <a:spcPts val="500"/>
-              </a:spcAft>
-              <a:defRPr sz="3100" b="1">
-                <a:solidFill>
-                  <a:srgbClr val="17283B"/>
-                </a:solidFill>
-                <a:latin typeface="Liberation Sans"/>
-              </a:defRPr>
-            </a:pPr>
-            <a:r>
-              <a:t>Different Workloads, Shared Infrastructure</a:t>
-            </a:r>
-          </a:p>
-        </p:txBody>
-      </p:sp>
-      <p:sp>
-        <p:nvSpPr>
-          <p:cNvPr id="6" name="TextBox 5"/>
-          <p:cNvSpPr txBox="1"/>
-          <p:nvPr/>
-        </p:nvSpPr>
-        <p:spPr>
-          <a:xfrm>
-            <a:off x="475488" y="1435608"/>
-            <a:ext cx="11201400" cy="429768"/>
-          </a:xfrm>
-          <a:prstGeom prst="rect">
-            <a:avLst/>
-          </a:prstGeom>
-          <a:noFill/>
-        </p:spPr>
-        <p:txBody>
-          <a:bodyPr wrap="square" lIns="0" rIns="0" tIns="0" bIns="0">
-            <a:spAutoFit/>
-          </a:bodyPr>
-          <a:lstStyle/>
-          <a:p>
-            <a:pPr>
-              <a:spcAft>
-                <a:spcPts val="500"/>
-              </a:spcAft>
-              <a:defRPr sz="1700" b="0">
-                <a:solidFill>
-                  <a:srgbClr val="414F60"/>
-                </a:solidFill>
-                <a:latin typeface="Liberation Sans"/>
-              </a:defRPr>
-            </a:pPr>
-            <a:r>
-              <a:t>Training, inference, and agent applications put different demands on the same cluster.</a:t>
+              <a:t>Different workloads, shared infrastructure</a:t>
             </a:r>
           </a:p>
         </p:txBody>
       </p:sp>
       <p:pic>
         <p:nvPicPr>
-          <p:cNvPr id="7" name="Picture 6" descr="04-workload-demands.png"/>
+          <p:cNvPr id="5" name="Picture 4" descr="04-workload-demands.png"/>
           <p:cNvPicPr>
             <a:picLocks noChangeAspect="1"/>
           </p:cNvPicPr>
@@ -11717,7 +10594,7 @@
         </p:blipFill>
         <p:spPr>
           <a:xfrm>
-            <a:off x="457200" y="1938528"/>
+            <a:off x="457200" y="1691640"/>
             <a:ext cx="11277599" cy="4267200"/>
           </a:xfrm>
           <a:prstGeom prst="rect">
@@ -11727,7 +10604,7 @@
       </p:pic>
       <p:sp>
         <p:nvSpPr>
-          <p:cNvPr id="8" name="TextBox 7"/>
+          <p:cNvPr id="6" name="TextBox 5"/>
           <p:cNvSpPr txBox="1"/>
           <p:nvPr/>
         </p:nvSpPr>
@@ -11753,20 +10630,20 @@
               </a:spcAft>
               <a:defRPr sz="900" b="0">
                 <a:solidFill>
-                  <a:srgbClr val="414F60"/>
+                  <a:srgbClr val="555555"/>
                 </a:solidFill>
                 <a:latin typeface="Liberation Sans"/>
               </a:defRPr>
             </a:pPr>
             <a:r>
-              <a:t>Volcano  |  KubeCon + CloudNativeCon North America 2026</a:t>
-            </a:r>
-          </a:p>
-        </p:txBody>
-      </p:sp>
-      <p:sp>
-        <p:nvSpPr>
-          <p:cNvPr id="9" name="TextBox 8"/>
+              <a:t>KubeCon + CloudNativeCon North America 2026</a:t>
+            </a:r>
+          </a:p>
+        </p:txBody>
+      </p:sp>
+      <p:sp>
+        <p:nvSpPr>
+          <p:cNvPr id="7" name="TextBox 6"/>
           <p:cNvSpPr txBox="1"/>
           <p:nvPr/>
         </p:nvSpPr>
@@ -11792,13 +10669,13 @@
               </a:spcAft>
               <a:defRPr sz="1100" b="0">
                 <a:solidFill>
-                  <a:srgbClr val="414F60"/>
+                  <a:srgbClr val="555555"/>
                 </a:solidFill>
                 <a:latin typeface="Liberation Sans"/>
               </a:defRPr>
             </a:pPr>
             <a:r>
-              <a:t>04 / 23</a:t>
+              <a:t>4</a:t>
             </a:r>
           </a:p>
         </p:txBody>
@@ -11877,8 +10754,8 @@
         </p:nvSpPr>
         <p:spPr>
           <a:xfrm>
-            <a:off x="457200" y="292608"/>
-            <a:ext cx="9144000" cy="256032"/>
+            <a:off x="457200" y="749808"/>
+            <a:ext cx="11247120" cy="640080"/>
           </a:xfrm>
           <a:prstGeom prst="rect">
             <a:avLst/>
@@ -11895,100 +10772,22 @@
               <a:spcAft>
                 <a:spcPts val="500"/>
               </a:spcAft>
-              <a:defRPr sz="1100" b="1">
+              <a:defRPr sz="3300" b="1">
                 <a:solidFill>
-                  <a:srgbClr val="164F89"/>
+                  <a:srgbClr val="222222"/>
                 </a:solidFill>
                 <a:latin typeface="Liberation Sans"/>
               </a:defRPr>
             </a:pPr>
             <a:r>
-              <a:t>UNIFIED SCHEDULING</a:t>
-            </a:r>
-          </a:p>
-        </p:txBody>
-      </p:sp>
-      <p:sp>
-        <p:nvSpPr>
-          <p:cNvPr id="5" name="TextBox 4"/>
-          <p:cNvSpPr txBox="1"/>
-          <p:nvPr/>
-        </p:nvSpPr>
-        <p:spPr>
-          <a:xfrm>
-            <a:off x="457200" y="804672"/>
-            <a:ext cx="11247120" cy="640080"/>
-          </a:xfrm>
-          <a:prstGeom prst="rect">
-            <a:avLst/>
-          </a:prstGeom>
-          <a:noFill/>
-        </p:spPr>
-        <p:txBody>
-          <a:bodyPr wrap="square" lIns="0" rIns="0" tIns="0" bIns="0">
-            <a:spAutoFit/>
-          </a:bodyPr>
-          <a:lstStyle/>
-          <a:p>
-            <a:pPr>
-              <a:spcAft>
-                <a:spcPts val="500"/>
-              </a:spcAft>
-              <a:defRPr sz="3100" b="1">
-                <a:solidFill>
-                  <a:srgbClr val="17283B"/>
-                </a:solidFill>
-                <a:latin typeface="Liberation Sans"/>
-              </a:defRPr>
-            </a:pPr>
-            <a:r>
-              <a:t>A Coordinated Scheduling Framework</a:t>
-            </a:r>
-          </a:p>
-        </p:txBody>
-      </p:sp>
-      <p:sp>
-        <p:nvSpPr>
-          <p:cNvPr id="6" name="TextBox 5"/>
-          <p:cNvSpPr txBox="1"/>
-          <p:nvPr/>
-        </p:nvSpPr>
-        <p:spPr>
-          <a:xfrm>
-            <a:off x="475488" y="1435608"/>
-            <a:ext cx="11201400" cy="429768"/>
-          </a:xfrm>
-          <a:prstGeom prst="rect">
-            <a:avLst/>
-          </a:prstGeom>
-          <a:noFill/>
-        </p:spPr>
-        <p:txBody>
-          <a:bodyPr wrap="square" lIns="0" rIns="0" tIns="0" bIns="0">
-            <a:spAutoFit/>
-          </a:bodyPr>
-          <a:lstStyle/>
-          <a:p>
-            <a:pPr>
-              <a:spcAft>
-                <a:spcPts val="500"/>
-              </a:spcAft>
-              <a:defRPr sz="1700" b="0">
-                <a:solidFill>
-                  <a:srgbClr val="414F60"/>
-                </a:solidFill>
-                <a:latin typeface="Liberation Sans"/>
-              </a:defRPr>
-            </a:pPr>
-            <a:r>
-              <a:t>Specialized scheduling paths coordinate through NodeShard.</a:t>
+              <a:t>Unified scheduling</a:t>
             </a:r>
           </a:p>
         </p:txBody>
       </p:sp>
       <p:pic>
         <p:nvPicPr>
-          <p:cNvPr id="7" name="Picture 6" descr="05-unified-architecture.png"/>
+          <p:cNvPr id="5" name="Picture 4" descr="05-unified-architecture.png"/>
           <p:cNvPicPr>
             <a:picLocks noChangeAspect="1"/>
           </p:cNvPicPr>
@@ -12002,7 +10801,7 @@
         </p:blipFill>
         <p:spPr>
           <a:xfrm>
-            <a:off x="457200" y="1938528"/>
+            <a:off x="457200" y="1691640"/>
             <a:ext cx="11277599" cy="4267200"/>
           </a:xfrm>
           <a:prstGeom prst="rect">
@@ -12012,7 +10811,7 @@
       </p:pic>
       <p:sp>
         <p:nvSpPr>
-          <p:cNvPr id="8" name="TextBox 7"/>
+          <p:cNvPr id="6" name="TextBox 5"/>
           <p:cNvSpPr txBox="1"/>
           <p:nvPr/>
         </p:nvSpPr>
@@ -12038,20 +10837,20 @@
               </a:spcAft>
               <a:defRPr sz="900" b="0">
                 <a:solidFill>
-                  <a:srgbClr val="414F60"/>
+                  <a:srgbClr val="555555"/>
                 </a:solidFill>
                 <a:latin typeface="Liberation Sans"/>
               </a:defRPr>
             </a:pPr>
             <a:r>
-              <a:t>Volcano  |  KubeCon + CloudNativeCon North America 2026</a:t>
-            </a:r>
-          </a:p>
-        </p:txBody>
-      </p:sp>
-      <p:sp>
-        <p:nvSpPr>
-          <p:cNvPr id="9" name="TextBox 8"/>
+              <a:t>KubeCon + CloudNativeCon North America 2026</a:t>
+            </a:r>
+          </a:p>
+        </p:txBody>
+      </p:sp>
+      <p:sp>
+        <p:nvSpPr>
+          <p:cNvPr id="7" name="TextBox 6"/>
           <p:cNvSpPr txBox="1"/>
           <p:nvPr/>
         </p:nvSpPr>
@@ -12077,13 +10876,13 @@
               </a:spcAft>
               <a:defRPr sz="1100" b="0">
                 <a:solidFill>
-                  <a:srgbClr val="414F60"/>
+                  <a:srgbClr val="555555"/>
                 </a:solidFill>
                 <a:latin typeface="Liberation Sans"/>
               </a:defRPr>
             </a:pPr>
             <a:r>
-              <a:t>05 / 23</a:t>
+              <a:t>5</a:t>
             </a:r>
           </a:p>
         </p:txBody>
@@ -12162,8 +10961,8 @@
         </p:nvSpPr>
         <p:spPr>
           <a:xfrm>
-            <a:off x="457200" y="292608"/>
-            <a:ext cx="9144000" cy="256032"/>
+            <a:off x="457200" y="749808"/>
+            <a:ext cx="11247120" cy="640080"/>
           </a:xfrm>
           <a:prstGeom prst="rect">
             <a:avLst/>
@@ -12180,100 +10979,22 @@
               <a:spcAft>
                 <a:spcPts val="500"/>
               </a:spcAft>
-              <a:defRPr sz="1100" b="1">
+              <a:defRPr sz="3300" b="1">
                 <a:solidFill>
-                  <a:srgbClr val="164F89"/>
+                  <a:srgbClr val="222222"/>
                 </a:solidFill>
                 <a:latin typeface="Liberation Sans"/>
               </a:defRPr>
             </a:pPr>
             <a:r>
-              <a:t>UNIFIED SCHEDULING</a:t>
-            </a:r>
-          </a:p>
-        </p:txBody>
-      </p:sp>
-      <p:sp>
-        <p:nvSpPr>
-          <p:cNvPr id="5" name="TextBox 4"/>
-          <p:cNvSpPr txBox="1"/>
-          <p:nvPr/>
-        </p:nvSpPr>
-        <p:spPr>
-          <a:xfrm>
-            <a:off x="457200" y="804672"/>
-            <a:ext cx="11247120" cy="640080"/>
-          </a:xfrm>
-          <a:prstGeom prst="rect">
-            <a:avLst/>
-          </a:prstGeom>
-          <a:noFill/>
-        </p:spPr>
-        <p:txBody>
-          <a:bodyPr wrap="square" lIns="0" rIns="0" tIns="0" bIns="0">
-            <a:spAutoFit/>
-          </a:bodyPr>
-          <a:lstStyle/>
-          <a:p>
-            <a:pPr>
-              <a:spcAft>
-                <a:spcPts val="500"/>
-              </a:spcAft>
-              <a:defRPr sz="3100" b="1">
-                <a:solidFill>
-                  <a:srgbClr val="17283B"/>
-                </a:solidFill>
-                <a:latin typeface="Liberation Sans"/>
-              </a:defRPr>
-            </a:pPr>
-            <a:r>
-              <a:t>NodeShard: Desired Nodes and Current Use</a:t>
-            </a:r>
-          </a:p>
-        </p:txBody>
-      </p:sp>
-      <p:sp>
-        <p:nvSpPr>
-          <p:cNvPr id="6" name="TextBox 5"/>
-          <p:cNvSpPr txBox="1"/>
-          <p:nvPr/>
-        </p:nvSpPr>
-        <p:spPr>
-          <a:xfrm>
-            <a:off x="475488" y="1435608"/>
-            <a:ext cx="11201400" cy="429768"/>
-          </a:xfrm>
-          <a:prstGeom prst="rect">
-            <a:avLst/>
-          </a:prstGeom>
-          <a:noFill/>
-        </p:spPr>
-        <p:txBody>
-          <a:bodyPr wrap="square" lIns="0" rIns="0" tIns="0" bIns="0">
-            <a:spAutoFit/>
-          </a:bodyPr>
-          <a:lstStyle/>
-          <a:p>
-            <a:pPr>
-              <a:spcAft>
-                <a:spcPts val="500"/>
-              </a:spcAft>
-              <a:defRPr sz="1700" b="0">
-                <a:solidFill>
-                  <a:srgbClr val="414F60"/>
-                </a:solidFill>
-                <a:latin typeface="Liberation Sans"/>
-              </a:defRPr>
-            </a:pPr>
-            <a:r>
-              <a:t>Changing a shard coordinates future placement; it does not migrate running Pods.</a:t>
+              <a:t>NodeShard coordination</a:t>
             </a:r>
           </a:p>
         </p:txBody>
       </p:sp>
       <p:pic>
         <p:nvPicPr>
-          <p:cNvPr id="7" name="Picture 6" descr="06-nodeshard.png"/>
+          <p:cNvPr id="5" name="Picture 4" descr="06-nodeshard.png"/>
           <p:cNvPicPr>
             <a:picLocks noChangeAspect="1"/>
           </p:cNvPicPr>
@@ -12287,7 +11008,7 @@
         </p:blipFill>
         <p:spPr>
           <a:xfrm>
-            <a:off x="457200" y="1938528"/>
+            <a:off x="457200" y="1691640"/>
             <a:ext cx="11277599" cy="4267200"/>
           </a:xfrm>
           <a:prstGeom prst="rect">
@@ -12297,7 +11018,7 @@
       </p:pic>
       <p:sp>
         <p:nvSpPr>
-          <p:cNvPr id="8" name="TextBox 7"/>
+          <p:cNvPr id="6" name="TextBox 5"/>
           <p:cNvSpPr txBox="1"/>
           <p:nvPr/>
         </p:nvSpPr>
@@ -12323,20 +11044,20 @@
               </a:spcAft>
               <a:defRPr sz="900" b="0">
                 <a:solidFill>
-                  <a:srgbClr val="414F60"/>
+                  <a:srgbClr val="555555"/>
                 </a:solidFill>
                 <a:latin typeface="Liberation Sans"/>
               </a:defRPr>
             </a:pPr>
             <a:r>
-              <a:t>Volcano  |  KubeCon + CloudNativeCon North America 2026</a:t>
-            </a:r>
-          </a:p>
-        </p:txBody>
-      </p:sp>
-      <p:sp>
-        <p:nvSpPr>
-          <p:cNvPr id="9" name="TextBox 8"/>
+              <a:t>KubeCon + CloudNativeCon North America 2026</a:t>
+            </a:r>
+          </a:p>
+        </p:txBody>
+      </p:sp>
+      <p:sp>
+        <p:nvSpPr>
+          <p:cNvPr id="7" name="TextBox 6"/>
           <p:cNvSpPr txBox="1"/>
           <p:nvPr/>
         </p:nvSpPr>
@@ -12362,13 +11083,13 @@
               </a:spcAft>
               <a:defRPr sz="1100" b="0">
                 <a:solidFill>
-                  <a:srgbClr val="414F60"/>
+                  <a:srgbClr val="555555"/>
                 </a:solidFill>
                 <a:latin typeface="Liberation Sans"/>
               </a:defRPr>
             </a:pPr>
             <a:r>
-              <a:t>06 / 23</a:t>
+              <a:t>6</a:t>
             </a:r>
           </a:p>
         </p:txBody>
@@ -12447,8 +11168,8 @@
         </p:nvSpPr>
         <p:spPr>
           <a:xfrm>
-            <a:off x="457200" y="292608"/>
-            <a:ext cx="9144000" cy="256032"/>
+            <a:off x="594360" y="1417320"/>
+            <a:ext cx="1828800" cy="640080"/>
           </a:xfrm>
           <a:prstGeom prst="rect">
             <a:avLst/>
@@ -12465,15 +11186,15 @@
               <a:spcAft>
                 <a:spcPts val="500"/>
               </a:spcAft>
-              <a:defRPr sz="1100" b="1">
+              <a:defRPr sz="3200" b="0">
                 <a:solidFill>
-                  <a:srgbClr val="164F89"/>
+                  <a:srgbClr val="E64030"/>
                 </a:solidFill>
                 <a:latin typeface="Liberation Sans"/>
               </a:defRPr>
             </a:pPr>
             <a:r>
-              <a:t>MULTI-LEVEL GANG &amp; NETWORK TOPOLOGY</a:t>
+              <a:t>02</a:t>
             </a:r>
           </a:p>
         </p:txBody>
@@ -12486,8 +11207,8 @@
         </p:nvSpPr>
         <p:spPr>
           <a:xfrm>
-            <a:off x="594360" y="1298448"/>
-            <a:ext cx="1828800" cy="640080"/>
+            <a:off x="594360" y="2331720"/>
+            <a:ext cx="10789920" cy="1828800"/>
           </a:xfrm>
           <a:prstGeom prst="rect">
             <a:avLst/>
@@ -12504,69 +11225,30 @@
               <a:spcAft>
                 <a:spcPts val="500"/>
               </a:spcAft>
-              <a:defRPr sz="3800" b="1">
+              <a:defRPr sz="4400" b="1">
                 <a:solidFill>
-                  <a:srgbClr val="164F89"/>
+                  <a:srgbClr val="222222"/>
                 </a:solidFill>
                 <a:latin typeface="Liberation Sans"/>
               </a:defRPr>
             </a:pPr>
             <a:r>
-              <a:t>02</a:t>
-            </a:r>
-          </a:p>
-        </p:txBody>
-      </p:sp>
-      <p:sp>
-        <p:nvSpPr>
-          <p:cNvPr id="6" name="TextBox 5"/>
-          <p:cNvSpPr txBox="1"/>
-          <p:nvPr/>
-        </p:nvSpPr>
-        <p:spPr>
-          <a:xfrm>
-            <a:off x="594360" y="2084831"/>
-            <a:ext cx="7863840" cy="1508760"/>
-          </a:xfrm>
-          <a:prstGeom prst="rect">
-            <a:avLst/>
-          </a:prstGeom>
-          <a:noFill/>
-        </p:spPr>
-        <p:txBody>
-          <a:bodyPr wrap="square" lIns="0" rIns="0" tIns="0" bIns="0">
-            <a:spAutoFit/>
-          </a:bodyPr>
-          <a:lstStyle/>
+              <a:t>Multi-level gang</a:t>
+            </a:r>
+          </a:p>
           <a:p>
             <a:pPr>
               <a:spcAft>
                 <a:spcPts val="500"/>
               </a:spcAft>
-              <a:defRPr sz="4100" b="1">
+              <a:defRPr sz="4400" b="1">
                 <a:solidFill>
-                  <a:srgbClr val="17283B"/>
+                  <a:srgbClr val="222222"/>
                 </a:solidFill>
                 <a:latin typeface="Liberation Sans"/>
               </a:defRPr>
             </a:pPr>
             <a:r>
-              <a:t>Multi-level gang</a:t>
-            </a:r>
-          </a:p>
-          <a:p>
-            <a:pPr>
-              <a:spcAft>
-                <a:spcPts val="500"/>
-              </a:spcAft>
-              <a:defRPr sz="4100" b="1">
-                <a:solidFill>
-                  <a:srgbClr val="17283B"/>
-                </a:solidFill>
-                <a:latin typeface="Liberation Sans"/>
-              </a:defRPr>
-            </a:pPr>
-            <a:r>
               <a:t>&amp; network topology</a:t>
             </a:r>
           </a:p>
@@ -12574,241 +11256,7 @@
       </p:sp>
       <p:sp>
         <p:nvSpPr>
-          <p:cNvPr id="7" name="TextBox 6"/>
-          <p:cNvSpPr txBox="1"/>
-          <p:nvPr/>
-        </p:nvSpPr>
-        <p:spPr>
-          <a:xfrm>
-            <a:off x="621792" y="4041648"/>
-            <a:ext cx="9966960" cy="548640"/>
-          </a:xfrm>
-          <a:prstGeom prst="rect">
-            <a:avLst/>
-          </a:prstGeom>
-          <a:noFill/>
-        </p:spPr>
-        <p:txBody>
-          <a:bodyPr wrap="square" lIns="0" rIns="0" tIns="0" bIns="0">
-            <a:spAutoFit/>
-          </a:bodyPr>
-          <a:lstStyle/>
-          <a:p>
-            <a:pPr>
-              <a:spcAft>
-                <a:spcPts val="500"/>
-              </a:spcAft>
-              <a:defRPr sz="2400" b="0">
-                <a:solidFill>
-                  <a:srgbClr val="164F89"/>
-                </a:solidFill>
-                <a:latin typeface="Liberation Sans"/>
-              </a:defRPr>
-            </a:pPr>
-            <a:r>
-              <a:t>From available nodes to runnable workloads.</a:t>
-            </a:r>
-          </a:p>
-        </p:txBody>
-      </p:sp>
-      <p:sp>
-        <p:nvSpPr>
-          <p:cNvPr id="8" name="TextBox 7"/>
-          <p:cNvSpPr txBox="1"/>
-          <p:nvPr/>
-        </p:nvSpPr>
-        <p:spPr>
-          <a:xfrm>
-            <a:off x="621792" y="4791456"/>
-            <a:ext cx="10607040" cy="594360"/>
-          </a:xfrm>
-          <a:prstGeom prst="rect">
-            <a:avLst/>
-          </a:prstGeom>
-          <a:noFill/>
-        </p:spPr>
-        <p:txBody>
-          <a:bodyPr wrap="square" lIns="0" rIns="0" tIns="0" bIns="0">
-            <a:spAutoFit/>
-          </a:bodyPr>
-          <a:lstStyle/>
-          <a:p>
-            <a:pPr>
-              <a:spcAft>
-                <a:spcPts val="500"/>
-              </a:spcAft>
-              <a:defRPr sz="2100" b="0">
-                <a:solidFill>
-                  <a:srgbClr val="414F60"/>
-                </a:solidFill>
-                <a:latin typeface="Liberation Sans"/>
-              </a:defRPr>
-            </a:pPr>
-            <a:r>
-              <a:t>What must run together, and where should it fit?</a:t>
-            </a:r>
-          </a:p>
-        </p:txBody>
-      </p:sp>
-      <p:sp>
-        <p:nvSpPr>
-          <p:cNvPr id="9" name="TextBox 8"/>
-          <p:cNvSpPr txBox="1"/>
-          <p:nvPr/>
-        </p:nvSpPr>
-        <p:spPr>
-          <a:xfrm>
-            <a:off x="8503920" y="1554480"/>
-            <a:ext cx="3154680" cy="621792"/>
-          </a:xfrm>
-          <a:prstGeom prst="rect">
-            <a:avLst/>
-          </a:prstGeom>
-          <a:noFill/>
-        </p:spPr>
-        <p:txBody>
-          <a:bodyPr wrap="square" lIns="0" rIns="0" tIns="0" bIns="0">
-            <a:spAutoFit/>
-          </a:bodyPr>
-          <a:lstStyle/>
-          <a:p>
-            <a:pPr>
-              <a:spcAft>
-                <a:spcPts val="500"/>
-              </a:spcAft>
-              <a:defRPr sz="1500" b="0">
-                <a:solidFill>
-                  <a:srgbClr val="414F60"/>
-                </a:solidFill>
-                <a:latin typeface="Liberation Sans"/>
-              </a:defRPr>
-            </a:pPr>
-            <a:r>
-              <a:t>01  Unified scheduling</a:t>
-            </a:r>
-          </a:p>
-        </p:txBody>
-      </p:sp>
-      <p:sp>
-        <p:nvSpPr>
-          <p:cNvPr id="10" name="TextBox 9"/>
-          <p:cNvSpPr txBox="1"/>
-          <p:nvPr/>
-        </p:nvSpPr>
-        <p:spPr>
-          <a:xfrm>
-            <a:off x="8503920" y="2249424"/>
-            <a:ext cx="3154680" cy="621792"/>
-          </a:xfrm>
-          <a:prstGeom prst="rect">
-            <a:avLst/>
-          </a:prstGeom>
-          <a:noFill/>
-        </p:spPr>
-        <p:txBody>
-          <a:bodyPr wrap="square" lIns="0" rIns="0" tIns="0" bIns="0">
-            <a:spAutoFit/>
-          </a:bodyPr>
-          <a:lstStyle/>
-          <a:p>
-            <a:pPr>
-              <a:spcAft>
-                <a:spcPts val="500"/>
-              </a:spcAft>
-              <a:defRPr sz="1500" b="1">
-                <a:solidFill>
-                  <a:srgbClr val="164F89"/>
-                </a:solidFill>
-                <a:latin typeface="Liberation Sans"/>
-              </a:defRPr>
-            </a:pPr>
-            <a:r>
-              <a:t>02  Multi-level gang &amp; network topology</a:t>
-            </a:r>
-          </a:p>
-        </p:txBody>
-      </p:sp>
-      <p:sp>
-        <p:nvSpPr>
-          <p:cNvPr id="11" name="TextBox 10"/>
-          <p:cNvSpPr txBox="1"/>
-          <p:nvPr/>
-        </p:nvSpPr>
-        <p:spPr>
-          <a:xfrm>
-            <a:off x="8503920" y="2944368"/>
-            <a:ext cx="3154680" cy="621792"/>
-          </a:xfrm>
-          <a:prstGeom prst="rect">
-            <a:avLst/>
-          </a:prstGeom>
-          <a:noFill/>
-        </p:spPr>
-        <p:txBody>
-          <a:bodyPr wrap="square" lIns="0" rIns="0" tIns="0" bIns="0">
-            <a:spAutoFit/>
-          </a:bodyPr>
-          <a:lstStyle/>
-          <a:p>
-            <a:pPr>
-              <a:spcAft>
-                <a:spcPts val="500"/>
-              </a:spcAft>
-              <a:defRPr sz="1500" b="0">
-                <a:solidFill>
-                  <a:srgbClr val="414F60"/>
-                </a:solidFill>
-                <a:latin typeface="Liberation Sans"/>
-              </a:defRPr>
-            </a:pPr>
-            <a:r>
-              <a:t>03  Ecosystem</a:t>
-            </a:r>
-          </a:p>
-        </p:txBody>
-      </p:sp>
-      <p:sp>
-        <p:nvSpPr>
-          <p:cNvPr id="12" name="TextBox 11"/>
-          <p:cNvSpPr txBox="1"/>
-          <p:nvPr/>
-        </p:nvSpPr>
-        <p:spPr>
-          <a:xfrm>
-            <a:off x="8503920" y="3639312"/>
-            <a:ext cx="3154680" cy="621792"/>
-          </a:xfrm>
-          <a:prstGeom prst="rect">
-            <a:avLst/>
-          </a:prstGeom>
-          <a:noFill/>
-        </p:spPr>
-        <p:txBody>
-          <a:bodyPr wrap="square" lIns="0" rIns="0" tIns="0" bIns="0">
-            <a:spAutoFit/>
-          </a:bodyPr>
-          <a:lstStyle/>
-          <a:p>
-            <a:pPr>
-              <a:spcAft>
-                <a:spcPts val="500"/>
-              </a:spcAft>
-              <a:defRPr sz="1500" b="0">
-                <a:solidFill>
-                  <a:srgbClr val="414F60"/>
-                </a:solidFill>
-                <a:latin typeface="Liberation Sans"/>
-              </a:defRPr>
-            </a:pPr>
-            <a:r>
-              <a:t>04  Benchmark framework &amp; progress</a:t>
-            </a:r>
-          </a:p>
-        </p:txBody>
-      </p:sp>
-      <p:sp>
-        <p:nvSpPr>
-          <p:cNvPr id="13" name="TextBox 12"/>
+          <p:cNvPr id="6" name="TextBox 5"/>
           <p:cNvSpPr txBox="1"/>
           <p:nvPr/>
         </p:nvSpPr>
@@ -12834,20 +11282,20 @@
               </a:spcAft>
               <a:defRPr sz="900" b="0">
                 <a:solidFill>
-                  <a:srgbClr val="414F60"/>
+                  <a:srgbClr val="555555"/>
                 </a:solidFill>
                 <a:latin typeface="Liberation Sans"/>
               </a:defRPr>
             </a:pPr>
             <a:r>
-              <a:t>Volcano  |  KubeCon + CloudNativeCon North America 2026</a:t>
-            </a:r>
-          </a:p>
-        </p:txBody>
-      </p:sp>
-      <p:sp>
-        <p:nvSpPr>
-          <p:cNvPr id="14" name="TextBox 13"/>
+              <a:t>KubeCon + CloudNativeCon North America 2026</a:t>
+            </a:r>
+          </a:p>
+        </p:txBody>
+      </p:sp>
+      <p:sp>
+        <p:nvSpPr>
+          <p:cNvPr id="7" name="TextBox 6"/>
           <p:cNvSpPr txBox="1"/>
           <p:nvPr/>
         </p:nvSpPr>
@@ -12873,13 +11321,13 @@
               </a:spcAft>
               <a:defRPr sz="1100" b="0">
                 <a:solidFill>
-                  <a:srgbClr val="414F60"/>
+                  <a:srgbClr val="555555"/>
                 </a:solidFill>
                 <a:latin typeface="Liberation Sans"/>
               </a:defRPr>
             </a:pPr>
             <a:r>
-              <a:t>07 / 23</a:t>
+              <a:t>7</a:t>
             </a:r>
           </a:p>
         </p:txBody>
@@ -12958,8 +11406,8 @@
         </p:nvSpPr>
         <p:spPr>
           <a:xfrm>
-            <a:off x="457200" y="292608"/>
-            <a:ext cx="9144000" cy="256032"/>
+            <a:off x="457200" y="749808"/>
+            <a:ext cx="11247120" cy="640080"/>
           </a:xfrm>
           <a:prstGeom prst="rect">
             <a:avLst/>
@@ -12976,100 +11424,22 @@
               <a:spcAft>
                 <a:spcPts val="500"/>
               </a:spcAft>
-              <a:defRPr sz="1100" b="1">
+              <a:defRPr sz="3300" b="1">
                 <a:solidFill>
-                  <a:srgbClr val="164F89"/>
+                  <a:srgbClr val="222222"/>
                 </a:solidFill>
                 <a:latin typeface="Liberation Sans"/>
               </a:defRPr>
             </a:pPr>
             <a:r>
-              <a:t>MULTI-LEVEL GANG &amp; NETWORK TOPOLOGY</a:t>
-            </a:r>
-          </a:p>
-        </p:txBody>
-      </p:sp>
-      <p:sp>
-        <p:nvSpPr>
-          <p:cNvPr id="5" name="TextBox 4"/>
-          <p:cNvSpPr txBox="1"/>
-          <p:nvPr/>
-        </p:nvSpPr>
-        <p:spPr>
-          <a:xfrm>
-            <a:off x="457200" y="804672"/>
-            <a:ext cx="11247120" cy="640080"/>
-          </a:xfrm>
-          <a:prstGeom prst="rect">
-            <a:avLst/>
-          </a:prstGeom>
-          <a:noFill/>
-        </p:spPr>
-        <p:txBody>
-          <a:bodyPr wrap="square" lIns="0" rIns="0" tIns="0" bIns="0">
-            <a:spAutoFit/>
-          </a:bodyPr>
-          <a:lstStyle/>
-          <a:p>
-            <a:pPr>
-              <a:spcAft>
-                <a:spcPts val="500"/>
-              </a:spcAft>
-              <a:defRPr sz="3100" b="1">
-                <a:solidFill>
-                  <a:srgbClr val="17283B"/>
-                </a:solidFill>
-                <a:latin typeface="Liberation Sans"/>
-              </a:defRPr>
-            </a:pPr>
-            <a:r>
-              <a:t>PodGroup and SubGroup: Preserve Workload Structure</a:t>
-            </a:r>
-          </a:p>
-        </p:txBody>
-      </p:sp>
-      <p:sp>
-        <p:nvSpPr>
-          <p:cNvPr id="6" name="TextBox 5"/>
-          <p:cNvSpPr txBox="1"/>
-          <p:nvPr/>
-        </p:nvSpPr>
-        <p:spPr>
-          <a:xfrm>
-            <a:off x="475488" y="1435608"/>
-            <a:ext cx="11201400" cy="429768"/>
-          </a:xfrm>
-          <a:prstGeom prst="rect">
-            <a:avLst/>
-          </a:prstGeom>
-          <a:noFill/>
-        </p:spPr>
-        <p:txBody>
-          <a:bodyPr wrap="square" lIns="0" rIns="0" tIns="0" bIns="0">
-            <a:spAutoFit/>
-          </a:bodyPr>
-          <a:lstStyle/>
-          <a:p>
-            <a:pPr>
-              <a:spcAft>
-                <a:spcPts val="500"/>
-              </a:spcAft>
-              <a:defRPr sz="1700" b="0">
-                <a:solidFill>
-                  <a:srgbClr val="414F60"/>
-                </a:solidFill>
-                <a:latin typeface="Liberation Sans"/>
-              </a:defRPr>
-            </a:pPr>
-            <a:r>
-              <a:t>Gang requirements apply to the workload and to its complete subgroups.</a:t>
+              <a:t>PodGroup and SubGroup</a:t>
             </a:r>
           </a:p>
         </p:txBody>
       </p:sp>
       <p:pic>
         <p:nvPicPr>
-          <p:cNvPr id="7" name="Picture 6" descr="08-group-structure.png"/>
+          <p:cNvPr id="5" name="Picture 4" descr="08-group-structure.png"/>
           <p:cNvPicPr>
             <a:picLocks noChangeAspect="1"/>
           </p:cNvPicPr>
@@ -13083,7 +11453,7 @@
         </p:blipFill>
         <p:spPr>
           <a:xfrm>
-            <a:off x="457200" y="1938528"/>
+            <a:off x="457200" y="1691640"/>
             <a:ext cx="11277599" cy="4267200"/>
           </a:xfrm>
           <a:prstGeom prst="rect">
@@ -13093,7 +11463,7 @@
       </p:pic>
       <p:sp>
         <p:nvSpPr>
-          <p:cNvPr id="8" name="TextBox 7"/>
+          <p:cNvPr id="6" name="TextBox 5"/>
           <p:cNvSpPr txBox="1"/>
           <p:nvPr/>
         </p:nvSpPr>
@@ -13119,20 +11489,20 @@
               </a:spcAft>
               <a:defRPr sz="900" b="0">
                 <a:solidFill>
-                  <a:srgbClr val="414F60"/>
+                  <a:srgbClr val="555555"/>
                 </a:solidFill>
                 <a:latin typeface="Liberation Sans"/>
               </a:defRPr>
             </a:pPr>
             <a:r>
-              <a:t>Volcano  |  KubeCon + CloudNativeCon North America 2026</a:t>
-            </a:r>
-          </a:p>
-        </p:txBody>
-      </p:sp>
-      <p:sp>
-        <p:nvSpPr>
-          <p:cNvPr id="9" name="TextBox 8"/>
+              <a:t>KubeCon + CloudNativeCon North America 2026</a:t>
+            </a:r>
+          </a:p>
+        </p:txBody>
+      </p:sp>
+      <p:sp>
+        <p:nvSpPr>
+          <p:cNvPr id="7" name="TextBox 6"/>
           <p:cNvSpPr txBox="1"/>
           <p:nvPr/>
         </p:nvSpPr>
@@ -13158,13 +11528,13 @@
               </a:spcAft>
               <a:defRPr sz="1100" b="0">
                 <a:solidFill>
-                  <a:srgbClr val="414F60"/>
+                  <a:srgbClr val="555555"/>
                 </a:solidFill>
                 <a:latin typeface="Liberation Sans"/>
               </a:defRPr>
             </a:pPr>
             <a:r>
-              <a:t>08 / 23</a:t>
+              <a:t>8</a:t>
             </a:r>
           </a:p>
         </p:txBody>
@@ -13243,8 +11613,8 @@
         </p:nvSpPr>
         <p:spPr>
           <a:xfrm>
-            <a:off x="457200" y="292608"/>
-            <a:ext cx="9144000" cy="256032"/>
+            <a:off x="457200" y="749808"/>
+            <a:ext cx="11247120" cy="640080"/>
           </a:xfrm>
           <a:prstGeom prst="rect">
             <a:avLst/>
@@ -13261,100 +11631,22 @@
               <a:spcAft>
                 <a:spcPts val="500"/>
               </a:spcAft>
-              <a:defRPr sz="1100" b="1">
+              <a:defRPr sz="3300" b="1">
                 <a:solidFill>
-                  <a:srgbClr val="164F89"/>
+                  <a:srgbClr val="222222"/>
                 </a:solidFill>
                 <a:latin typeface="Liberation Sans"/>
               </a:defRPr>
             </a:pPr>
             <a:r>
-              <a:t>MULTI-LEVEL GANG &amp; NETWORK TOPOLOGY</a:t>
-            </a:r>
-          </a:p>
-        </p:txBody>
-      </p:sp>
-      <p:sp>
-        <p:nvSpPr>
-          <p:cNvPr id="5" name="TextBox 4"/>
-          <p:cNvSpPr txBox="1"/>
-          <p:nvPr/>
-        </p:nvSpPr>
-        <p:spPr>
-          <a:xfrm>
-            <a:off x="457200" y="804672"/>
-            <a:ext cx="11247120" cy="640080"/>
-          </a:xfrm>
-          <a:prstGeom prst="rect">
-            <a:avLst/>
-          </a:prstGeom>
-          <a:noFill/>
-        </p:spPr>
-        <p:txBody>
-          <a:bodyPr wrap="square" lIns="0" rIns="0" tIns="0" bIns="0">
-            <a:spAutoFit/>
-          </a:bodyPr>
-          <a:lstStyle/>
-          <a:p>
-            <a:pPr>
-              <a:spcAft>
-                <a:spcPts val="500"/>
-              </a:spcAft>
-              <a:defRPr sz="2850" b="1">
-                <a:solidFill>
-                  <a:srgbClr val="17283B"/>
-                </a:solidFill>
-                <a:latin typeface="Liberation Sans"/>
-              </a:defRPr>
-            </a:pPr>
-            <a:r>
-              <a:t>HyperNode: From Physical Fabric to Scheduling Domains</a:t>
-            </a:r>
-          </a:p>
-        </p:txBody>
-      </p:sp>
-      <p:sp>
-        <p:nvSpPr>
-          <p:cNvPr id="6" name="TextBox 5"/>
-          <p:cNvSpPr txBox="1"/>
-          <p:nvPr/>
-        </p:nvSpPr>
-        <p:spPr>
-          <a:xfrm>
-            <a:off x="475488" y="1435608"/>
-            <a:ext cx="11201400" cy="429768"/>
-          </a:xfrm>
-          <a:prstGeom prst="rect">
-            <a:avLst/>
-          </a:prstGeom>
-          <a:noFill/>
-        </p:spPr>
-        <p:txBody>
-          <a:bodyPr wrap="square" lIns="0" rIns="0" tIns="0" bIns="0">
-            <a:spAutoFit/>
-          </a:bodyPr>
-          <a:lstStyle/>
-          <a:p>
-            <a:pPr>
-              <a:spcAft>
-                <a:spcPts val="500"/>
-              </a:spcAft>
-              <a:defRPr sz="1700" b="0">
-                <a:solidFill>
-                  <a:srgbClr val="414F60"/>
-                </a:solidFill>
-                <a:latin typeface="Liberation Sans"/>
-              </a:defRPr>
-            </a:pPr>
-            <a:r>
-              <a:t>A parent HyperNode groups child HyperNodes; a leaf groups Kubernetes Nodes.</a:t>
+              <a:t>HyperNode</a:t>
             </a:r>
           </a:p>
         </p:txBody>
       </p:sp>
       <p:pic>
         <p:nvPicPr>
-          <p:cNvPr id="7" name="Picture 6" descr="09-hypernode-api.png"/>
+          <p:cNvPr id="5" name="Picture 4" descr="09-hypernode-api.png"/>
           <p:cNvPicPr>
             <a:picLocks noChangeAspect="1"/>
           </p:cNvPicPr>
@@ -13368,7 +11660,7 @@
         </p:blipFill>
         <p:spPr>
           <a:xfrm>
-            <a:off x="457200" y="1938528"/>
+            <a:off x="457200" y="1691640"/>
             <a:ext cx="11277599" cy="4267200"/>
           </a:xfrm>
           <a:prstGeom prst="rect">
@@ -13378,7 +11670,7 @@
       </p:pic>
       <p:sp>
         <p:nvSpPr>
-          <p:cNvPr id="8" name="TextBox 7"/>
+          <p:cNvPr id="6" name="TextBox 5"/>
           <p:cNvSpPr txBox="1"/>
           <p:nvPr/>
         </p:nvSpPr>
@@ -13404,20 +11696,20 @@
               </a:spcAft>
               <a:defRPr sz="900" b="0">
                 <a:solidFill>
-                  <a:srgbClr val="414F60"/>
+                  <a:srgbClr val="555555"/>
                 </a:solidFill>
                 <a:latin typeface="Liberation Sans"/>
               </a:defRPr>
             </a:pPr>
             <a:r>
-              <a:t>Volcano  |  KubeCon + CloudNativeCon North America 2026</a:t>
-            </a:r>
-          </a:p>
-        </p:txBody>
-      </p:sp>
-      <p:sp>
-        <p:nvSpPr>
-          <p:cNvPr id="9" name="TextBox 8"/>
+              <a:t>KubeCon + CloudNativeCon North America 2026</a:t>
+            </a:r>
+          </a:p>
+        </p:txBody>
+      </p:sp>
+      <p:sp>
+        <p:nvSpPr>
+          <p:cNvPr id="7" name="TextBox 6"/>
           <p:cNvSpPr txBox="1"/>
           <p:nvPr/>
         </p:nvSpPr>
@@ -13443,13 +11735,13 @@
               </a:spcAft>
               <a:defRPr sz="1100" b="0">
                 <a:solidFill>
-                  <a:srgbClr val="414F60"/>
+                  <a:srgbClr val="555555"/>
                 </a:solidFill>
                 <a:latin typeface="Liberation Sans"/>
               </a:defRPr>
             </a:pPr>
             <a:r>
-              <a:t>09 / 23</a:t>
+              <a:t>9</a:t>
             </a:r>
           </a:p>
         </p:txBody>
